--- a/COMP 7940_GroupProject_GroupN_Slide.pptx
+++ b/COMP 7940_GroupProject_GroupN_Slide.pptx
@@ -13,7 +13,7 @@
     <p:sldId id="257" r:id="rId4"/>
     <p:sldId id="258" r:id="rId5"/>
     <p:sldId id="259" r:id="rId6"/>
-    <p:sldId id="260" r:id="rId7"/>
+    <p:sldId id="266" r:id="rId7"/>
     <p:sldId id="261" r:id="rId8"/>
     <p:sldId id="262" r:id="rId9"/>
     <p:sldId id="263" r:id="rId10"/>
@@ -270,6 +270,4965 @@
 </p:presentation>
 </file>
 
+<file path=ppt/revisionInfo.xml><?xml version="1.0" encoding="utf-8"?>
+<p1510:revInfo xmlns:a="http://schemas.openxmlformats.org/drawingml/2006/main" xmlns:r="http://schemas.openxmlformats.org/officeDocument/2006/relationships" xmlns:p1510="http://schemas.microsoft.com/office/powerpoint/2015/10/main">
+  <p1510:revLst>
+    <p1510:client id="{501CA2ED-26AF-4611-A387-7D260963D5B1}" v="70" dt="2026-04-14T14:34:38.737"/>
+    <p1510:client id="{C741D797-6274-4E7A-A402-4F3DFD8C01E1}" v="9" dt="2026-04-14T14:58:54.868"/>
+  </p1510:revLst>
+</p1510:revInfo>
+</file>
+
+<file path=ppt/changesInfos/changesInfo1.xml><?xml version="1.0" encoding="utf-8"?>
+<pc:chgInfo xmlns:a="http://schemas.openxmlformats.org/drawingml/2006/main" xmlns:r="http://schemas.openxmlformats.org/officeDocument/2006/relationships" xmlns:ac="http://schemas.microsoft.com/office/drawing/2013/main/command" xmlns:pc="http://schemas.microsoft.com/office/powerpoint/2013/main/command">
+  <pc:docChgLst>
+    <pc:chgData name="Haoran HE" userId="ef3267f2-6c7c-4084-acdf-afd62f0a482b" providerId="ADAL" clId="{312F89E9-CC2A-4929-A0F8-5655737E1F38}"/>
+    <pc:docChg chg="undo custSel modSld">
+      <pc:chgData name="Haoran HE" userId="ef3267f2-6c7c-4084-acdf-afd62f0a482b" providerId="ADAL" clId="{312F89E9-CC2A-4929-A0F8-5655737E1F38}" dt="2026-04-14T15:01:12.614" v="160" actId="14100"/>
+      <pc:docMkLst>
+        <pc:docMk/>
+      </pc:docMkLst>
+      <pc:sldChg chg="addSp delSp modSp mod">
+        <pc:chgData name="Haoran HE" userId="ef3267f2-6c7c-4084-acdf-afd62f0a482b" providerId="ADAL" clId="{312F89E9-CC2A-4929-A0F8-5655737E1F38}" dt="2026-04-14T14:59:04.307" v="149" actId="6549"/>
+        <pc:sldMkLst>
+          <pc:docMk/>
+          <pc:sldMk cId="0" sldId="259"/>
+        </pc:sldMkLst>
+        <pc:spChg chg="add del">
+          <ac:chgData name="Haoran HE" userId="ef3267f2-6c7c-4084-acdf-afd62f0a482b" providerId="ADAL" clId="{312F89E9-CC2A-4929-A0F8-5655737E1F38}" dt="2026-04-14T14:57:26.923" v="99" actId="478"/>
+          <ac:spMkLst>
+            <pc:docMk/>
+            <pc:sldMk cId="0" sldId="259"/>
+            <ac:spMk id="3" creationId="{00000000-0000-0000-0000-000000000000}"/>
+          </ac:spMkLst>
+        </pc:spChg>
+        <pc:spChg chg="mod">
+          <ac:chgData name="Haoran HE" userId="ef3267f2-6c7c-4084-acdf-afd62f0a482b" providerId="ADAL" clId="{312F89E9-CC2A-4929-A0F8-5655737E1F38}" dt="2026-04-14T14:51:04.224" v="15" actId="20577"/>
+          <ac:spMkLst>
+            <pc:docMk/>
+            <pc:sldMk cId="0" sldId="259"/>
+            <ac:spMk id="9" creationId="{00000000-0000-0000-0000-000000000000}"/>
+          </ac:spMkLst>
+        </pc:spChg>
+        <pc:spChg chg="mod">
+          <ac:chgData name="Haoran HE" userId="ef3267f2-6c7c-4084-acdf-afd62f0a482b" providerId="ADAL" clId="{312F89E9-CC2A-4929-A0F8-5655737E1F38}" dt="2026-04-14T14:58:13.219" v="127" actId="20577"/>
+          <ac:spMkLst>
+            <pc:docMk/>
+            <pc:sldMk cId="0" sldId="259"/>
+            <ac:spMk id="12" creationId="{00000000-0000-0000-0000-000000000000}"/>
+          </ac:spMkLst>
+        </pc:spChg>
+        <pc:spChg chg="mod">
+          <ac:chgData name="Haoran HE" userId="ef3267f2-6c7c-4084-acdf-afd62f0a482b" providerId="ADAL" clId="{312F89E9-CC2A-4929-A0F8-5655737E1F38}" dt="2026-04-14T14:57:53.818" v="114" actId="14100"/>
+          <ac:spMkLst>
+            <pc:docMk/>
+            <pc:sldMk cId="0" sldId="259"/>
+            <ac:spMk id="13" creationId="{00000000-0000-0000-0000-000000000000}"/>
+          </ac:spMkLst>
+        </pc:spChg>
+        <pc:spChg chg="mod">
+          <ac:chgData name="Haoran HE" userId="ef3267f2-6c7c-4084-acdf-afd62f0a482b" providerId="ADAL" clId="{312F89E9-CC2A-4929-A0F8-5655737E1F38}" dt="2026-04-14T14:59:04.307" v="149" actId="6549"/>
+          <ac:spMkLst>
+            <pc:docMk/>
+            <pc:sldMk cId="0" sldId="259"/>
+            <ac:spMk id="15" creationId="{00000000-0000-0000-0000-000000000000}"/>
+          </ac:spMkLst>
+        </pc:spChg>
+        <pc:spChg chg="del">
+          <ac:chgData name="Haoran HE" userId="ef3267f2-6c7c-4084-acdf-afd62f0a482b" providerId="ADAL" clId="{312F89E9-CC2A-4929-A0F8-5655737E1F38}" dt="2026-04-14T14:57:24.954" v="97" actId="478"/>
+          <ac:spMkLst>
+            <pc:docMk/>
+            <pc:sldMk cId="0" sldId="259"/>
+            <ac:spMk id="16" creationId="{00000000-0000-0000-0000-000000000000}"/>
+          </ac:spMkLst>
+        </pc:spChg>
+        <pc:spChg chg="del mod">
+          <ac:chgData name="Haoran HE" userId="ef3267f2-6c7c-4084-acdf-afd62f0a482b" providerId="ADAL" clId="{312F89E9-CC2A-4929-A0F8-5655737E1F38}" dt="2026-04-14T14:57:32.603" v="101" actId="478"/>
+          <ac:spMkLst>
+            <pc:docMk/>
+            <pc:sldMk cId="0" sldId="259"/>
+            <ac:spMk id="18" creationId="{00000000-0000-0000-0000-000000000000}"/>
+          </ac:spMkLst>
+        </pc:spChg>
+        <pc:spChg chg="del">
+          <ac:chgData name="Haoran HE" userId="ef3267f2-6c7c-4084-acdf-afd62f0a482b" providerId="ADAL" clId="{312F89E9-CC2A-4929-A0F8-5655737E1F38}" dt="2026-04-14T14:57:50.362" v="113" actId="478"/>
+          <ac:spMkLst>
+            <pc:docMk/>
+            <pc:sldMk cId="0" sldId="259"/>
+            <ac:spMk id="19" creationId="{00000000-0000-0000-0000-000000000000}"/>
+          </ac:spMkLst>
+        </pc:spChg>
+        <pc:spChg chg="del mod">
+          <ac:chgData name="Haoran HE" userId="ef3267f2-6c7c-4084-acdf-afd62f0a482b" providerId="ADAL" clId="{312F89E9-CC2A-4929-A0F8-5655737E1F38}" dt="2026-04-14T14:57:49.418" v="111" actId="478"/>
+          <ac:spMkLst>
+            <pc:docMk/>
+            <pc:sldMk cId="0" sldId="259"/>
+            <ac:spMk id="21" creationId="{00000000-0000-0000-0000-000000000000}"/>
+          </ac:spMkLst>
+        </pc:spChg>
+        <pc:picChg chg="del">
+          <ac:chgData name="Haoran HE" userId="ef3267f2-6c7c-4084-acdf-afd62f0a482b" providerId="ADAL" clId="{312F89E9-CC2A-4929-A0F8-5655737E1F38}" dt="2026-04-14T14:57:28.771" v="100" actId="478"/>
+          <ac:picMkLst>
+            <pc:docMk/>
+            <pc:sldMk cId="0" sldId="259"/>
+            <ac:picMk id="17" creationId="{00000000-0000-0000-0000-000000000000}"/>
+          </ac:picMkLst>
+        </pc:picChg>
+        <pc:picChg chg="del">
+          <ac:chgData name="Haoran HE" userId="ef3267f2-6c7c-4084-acdf-afd62f0a482b" providerId="ADAL" clId="{312F89E9-CC2A-4929-A0F8-5655737E1F38}" dt="2026-04-14T14:57:49.963" v="112" actId="478"/>
+          <ac:picMkLst>
+            <pc:docMk/>
+            <pc:sldMk cId="0" sldId="259"/>
+            <ac:picMk id="20" creationId="{00000000-0000-0000-0000-000000000000}"/>
+          </ac:picMkLst>
+        </pc:picChg>
+      </pc:sldChg>
+      <pc:sldChg chg="modSp mod">
+        <pc:chgData name="Haoran HE" userId="ef3267f2-6c7c-4084-acdf-afd62f0a482b" providerId="ADAL" clId="{312F89E9-CC2A-4929-A0F8-5655737E1F38}" dt="2026-04-14T15:01:12.614" v="160" actId="14100"/>
+        <pc:sldMkLst>
+          <pc:docMk/>
+          <pc:sldMk cId="0" sldId="261"/>
+        </pc:sldMkLst>
+        <pc:spChg chg="mod">
+          <ac:chgData name="Haoran HE" userId="ef3267f2-6c7c-4084-acdf-afd62f0a482b" providerId="ADAL" clId="{312F89E9-CC2A-4929-A0F8-5655737E1F38}" dt="2026-04-14T15:01:10.629" v="159" actId="1076"/>
+          <ac:spMkLst>
+            <pc:docMk/>
+            <pc:sldMk cId="0" sldId="261"/>
+            <ac:spMk id="3" creationId="{00000000-0000-0000-0000-000000000000}"/>
+          </ac:spMkLst>
+        </pc:spChg>
+        <pc:spChg chg="mod">
+          <ac:chgData name="Haoran HE" userId="ef3267f2-6c7c-4084-acdf-afd62f0a482b" providerId="ADAL" clId="{312F89E9-CC2A-4929-A0F8-5655737E1F38}" dt="2026-04-14T15:01:05.059" v="156" actId="20577"/>
+          <ac:spMkLst>
+            <pc:docMk/>
+            <pc:sldMk cId="0" sldId="261"/>
+            <ac:spMk id="18" creationId="{00000000-0000-0000-0000-000000000000}"/>
+          </ac:spMkLst>
+        </pc:spChg>
+        <pc:grpChg chg="mod">
+          <ac:chgData name="Haoran HE" userId="ef3267f2-6c7c-4084-acdf-afd62f0a482b" providerId="ADAL" clId="{312F89E9-CC2A-4929-A0F8-5655737E1F38}" dt="2026-04-14T15:01:12.614" v="160" actId="14100"/>
+          <ac:grpSpMkLst>
+            <pc:docMk/>
+            <pc:sldMk cId="0" sldId="261"/>
+            <ac:grpSpMk id="32" creationId="{2D7E4768-65AD-08CA-AE27-7A07FF734FC3}"/>
+          </ac:grpSpMkLst>
+        </pc:grpChg>
+      </pc:sldChg>
+      <pc:sldChg chg="modSp mod">
+        <pc:chgData name="Haoran HE" userId="ef3267f2-6c7c-4084-acdf-afd62f0a482b" providerId="ADAL" clId="{312F89E9-CC2A-4929-A0F8-5655737E1F38}" dt="2026-04-14T14:53:28.946" v="95" actId="20577"/>
+        <pc:sldMkLst>
+          <pc:docMk/>
+          <pc:sldMk cId="352606672" sldId="266"/>
+        </pc:sldMkLst>
+        <pc:spChg chg="mod">
+          <ac:chgData name="Haoran HE" userId="ef3267f2-6c7c-4084-acdf-afd62f0a482b" providerId="ADAL" clId="{312F89E9-CC2A-4929-A0F8-5655737E1F38}" dt="2026-04-14T14:53:28.946" v="95" actId="20577"/>
+          <ac:spMkLst>
+            <pc:docMk/>
+            <pc:sldMk cId="352606672" sldId="266"/>
+            <ac:spMk id="17" creationId="{5E5C46B1-FD41-8DE1-E88B-D4C9D84AA9B7}"/>
+          </ac:spMkLst>
+        </pc:spChg>
+        <pc:spChg chg="mod">
+          <ac:chgData name="Haoran HE" userId="ef3267f2-6c7c-4084-acdf-afd62f0a482b" providerId="ADAL" clId="{312F89E9-CC2A-4929-A0F8-5655737E1F38}" dt="2026-04-14T14:53:25.491" v="94" actId="20577"/>
+          <ac:spMkLst>
+            <pc:docMk/>
+            <pc:sldMk cId="352606672" sldId="266"/>
+            <ac:spMk id="27" creationId="{EE4DB24A-51FB-11B8-31EC-3C0E7FE28882}"/>
+          </ac:spMkLst>
+        </pc:spChg>
+      </pc:sldChg>
+    </pc:docChg>
+  </pc:docChgLst>
+  <pc:docChgLst>
+    <pc:chgData name="Haoran HE" userId="ef3267f2-6c7c-4084-acdf-afd62f0a482b" providerId="ADAL" clId="{610621C1-65AC-48AE-971E-6D141E1E9EFB}"/>
+    <pc:docChg chg="undo custSel addSld delSld modSld">
+      <pc:chgData name="Haoran HE" userId="ef3267f2-6c7c-4084-acdf-afd62f0a482b" providerId="ADAL" clId="{610621C1-65AC-48AE-971E-6D141E1E9EFB}" dt="2026-04-14T14:42:04.078" v="2586" actId="20577"/>
+      <pc:docMkLst>
+        <pc:docMk/>
+      </pc:docMkLst>
+      <pc:sldChg chg="addSp delSp modSp mod">
+        <pc:chgData name="Haoran HE" userId="ef3267f2-6c7c-4084-acdf-afd62f0a482b" providerId="ADAL" clId="{610621C1-65AC-48AE-971E-6D141E1E9EFB}" dt="2026-04-14T14:40:34.157" v="2516" actId="20577"/>
+        <pc:sldMkLst>
+          <pc:docMk/>
+          <pc:sldMk cId="0" sldId="259"/>
+        </pc:sldMkLst>
+        <pc:spChg chg="mod">
+          <ac:chgData name="Haoran HE" userId="ef3267f2-6c7c-4084-acdf-afd62f0a482b" providerId="ADAL" clId="{610621C1-65AC-48AE-971E-6D141E1E9EFB}" dt="2026-04-14T13:59:27.883" v="140" actId="1076"/>
+          <ac:spMkLst>
+            <pc:docMk/>
+            <pc:sldMk cId="0" sldId="259"/>
+            <ac:spMk id="3" creationId="{00000000-0000-0000-0000-000000000000}"/>
+          </ac:spMkLst>
+        </pc:spChg>
+        <pc:spChg chg="mod">
+          <ac:chgData name="Haoran HE" userId="ef3267f2-6c7c-4084-acdf-afd62f0a482b" providerId="ADAL" clId="{610621C1-65AC-48AE-971E-6D141E1E9EFB}" dt="2026-04-14T14:17:46.434" v="1282" actId="20577"/>
+          <ac:spMkLst>
+            <pc:docMk/>
+            <pc:sldMk cId="0" sldId="259"/>
+            <ac:spMk id="6" creationId="{00000000-0000-0000-0000-000000000000}"/>
+          </ac:spMkLst>
+        </pc:spChg>
+        <pc:spChg chg="mod">
+          <ac:chgData name="Haoran HE" userId="ef3267f2-6c7c-4084-acdf-afd62f0a482b" providerId="ADAL" clId="{610621C1-65AC-48AE-971E-6D141E1E9EFB}" dt="2026-04-14T14:00:42.909" v="215" actId="20577"/>
+          <ac:spMkLst>
+            <pc:docMk/>
+            <pc:sldMk cId="0" sldId="259"/>
+            <ac:spMk id="9" creationId="{00000000-0000-0000-0000-000000000000}"/>
+          </ac:spMkLst>
+        </pc:spChg>
+        <pc:spChg chg="mod">
+          <ac:chgData name="Haoran HE" userId="ef3267f2-6c7c-4084-acdf-afd62f0a482b" providerId="ADAL" clId="{610621C1-65AC-48AE-971E-6D141E1E9EFB}" dt="2026-04-14T14:00:48.493" v="219" actId="20577"/>
+          <ac:spMkLst>
+            <pc:docMk/>
+            <pc:sldMk cId="0" sldId="259"/>
+            <ac:spMk id="12" creationId="{00000000-0000-0000-0000-000000000000}"/>
+          </ac:spMkLst>
+        </pc:spChg>
+        <pc:spChg chg="mod">
+          <ac:chgData name="Haoran HE" userId="ef3267f2-6c7c-4084-acdf-afd62f0a482b" providerId="ADAL" clId="{610621C1-65AC-48AE-971E-6D141E1E9EFB}" dt="2026-04-14T14:40:34.157" v="2516" actId="20577"/>
+          <ac:spMkLst>
+            <pc:docMk/>
+            <pc:sldMk cId="0" sldId="259"/>
+            <ac:spMk id="15" creationId="{00000000-0000-0000-0000-000000000000}"/>
+          </ac:spMkLst>
+        </pc:spChg>
+        <pc:spChg chg="add del mod">
+          <ac:chgData name="Haoran HE" userId="ef3267f2-6c7c-4084-acdf-afd62f0a482b" providerId="ADAL" clId="{610621C1-65AC-48AE-971E-6D141E1E9EFB}" dt="2026-04-14T13:59:37.958" v="147" actId="478"/>
+          <ac:spMkLst>
+            <pc:docMk/>
+            <pc:sldMk cId="0" sldId="259"/>
+            <ac:spMk id="25" creationId="{C5200171-0796-214C-55ED-D24D2E1F84FC}"/>
+          </ac:spMkLst>
+        </pc:spChg>
+        <pc:graphicFrameChg chg="add mod modGraphic">
+          <ac:chgData name="Haoran HE" userId="ef3267f2-6c7c-4084-acdf-afd62f0a482b" providerId="ADAL" clId="{610621C1-65AC-48AE-971E-6D141E1E9EFB}" dt="2026-04-14T14:00:01.111" v="159"/>
+          <ac:graphicFrameMkLst>
+            <pc:docMk/>
+            <pc:sldMk cId="0" sldId="259"/>
+            <ac:graphicFrameMk id="5" creationId="{913A95B1-752E-3279-7804-B1EAC163205F}"/>
+          </ac:graphicFrameMkLst>
+        </pc:graphicFrameChg>
+        <pc:picChg chg="del">
+          <ac:chgData name="Haoran HE" userId="ef3267f2-6c7c-4084-acdf-afd62f0a482b" providerId="ADAL" clId="{610621C1-65AC-48AE-971E-6D141E1E9EFB}" dt="2026-04-14T13:57:07.396" v="0" actId="478"/>
+          <ac:picMkLst>
+            <pc:docMk/>
+            <pc:sldMk cId="0" sldId="259"/>
+            <ac:picMk id="24" creationId="{E933267F-6D3D-8257-9D72-556215CBB7D6}"/>
+          </ac:picMkLst>
+        </pc:picChg>
+      </pc:sldChg>
+      <pc:sldChg chg="addSp delSp modSp del mod">
+        <pc:chgData name="Haoran HE" userId="ef3267f2-6c7c-4084-acdf-afd62f0a482b" providerId="ADAL" clId="{610621C1-65AC-48AE-971E-6D141E1E9EFB}" dt="2026-04-14T14:18:01.227" v="1283" actId="47"/>
+        <pc:sldMkLst>
+          <pc:docMk/>
+          <pc:sldMk cId="0" sldId="260"/>
+        </pc:sldMkLst>
+        <pc:spChg chg="mod">
+          <ac:chgData name="Haoran HE" userId="ef3267f2-6c7c-4084-acdf-afd62f0a482b" providerId="ADAL" clId="{610621C1-65AC-48AE-971E-6D141E1E9EFB}" dt="2026-04-14T14:03:42.172" v="267" actId="1076"/>
+          <ac:spMkLst>
+            <pc:docMk/>
+            <pc:sldMk cId="0" sldId="260"/>
+            <ac:spMk id="3" creationId="{00000000-0000-0000-0000-000000000000}"/>
+          </ac:spMkLst>
+        </pc:spChg>
+        <pc:spChg chg="add mod">
+          <ac:chgData name="Haoran HE" userId="ef3267f2-6c7c-4084-acdf-afd62f0a482b" providerId="ADAL" clId="{610621C1-65AC-48AE-971E-6D141E1E9EFB}" dt="2026-04-14T14:03:46.485" v="269" actId="571"/>
+          <ac:spMkLst>
+            <pc:docMk/>
+            <pc:sldMk cId="0" sldId="260"/>
+            <ac:spMk id="6" creationId="{9ABBF82C-A21D-6214-4C8E-95F52C489375}"/>
+          </ac:spMkLst>
+        </pc:spChg>
+        <pc:spChg chg="mod">
+          <ac:chgData name="Haoran HE" userId="ef3267f2-6c7c-4084-acdf-afd62f0a482b" providerId="ADAL" clId="{610621C1-65AC-48AE-971E-6D141E1E9EFB}" dt="2026-04-14T14:03:37.149" v="265" actId="14100"/>
+          <ac:spMkLst>
+            <pc:docMk/>
+            <pc:sldMk cId="0" sldId="260"/>
+            <ac:spMk id="8" creationId="{00000000-0000-0000-0000-000000000000}"/>
+          </ac:spMkLst>
+        </pc:spChg>
+        <pc:spChg chg="add del">
+          <ac:chgData name="Haoran HE" userId="ef3267f2-6c7c-4084-acdf-afd62f0a482b" providerId="ADAL" clId="{610621C1-65AC-48AE-971E-6D141E1E9EFB}" dt="2026-04-14T14:03:25.933" v="261" actId="478"/>
+          <ac:spMkLst>
+            <pc:docMk/>
+            <pc:sldMk cId="0" sldId="260"/>
+            <ac:spMk id="18" creationId="{00000000-0000-0000-0000-000000000000}"/>
+          </ac:spMkLst>
+        </pc:spChg>
+        <pc:spChg chg="mod">
+          <ac:chgData name="Haoran HE" userId="ef3267f2-6c7c-4084-acdf-afd62f0a482b" providerId="ADAL" clId="{610621C1-65AC-48AE-971E-6D141E1E9EFB}" dt="2026-04-14T14:03:33.045" v="263" actId="20577"/>
+          <ac:spMkLst>
+            <pc:docMk/>
+            <pc:sldMk cId="0" sldId="260"/>
+            <ac:spMk id="22" creationId="{00000000-0000-0000-0000-000000000000}"/>
+          </ac:spMkLst>
+        </pc:spChg>
+      </pc:sldChg>
+      <pc:sldChg chg="addSp delSp modSp mod">
+        <pc:chgData name="Haoran HE" userId="ef3267f2-6c7c-4084-acdf-afd62f0a482b" providerId="ADAL" clId="{610621C1-65AC-48AE-971E-6D141E1E9EFB}" dt="2026-04-14T14:39:59.592" v="2503" actId="20577"/>
+        <pc:sldMkLst>
+          <pc:docMk/>
+          <pc:sldMk cId="0" sldId="261"/>
+        </pc:sldMkLst>
+        <pc:spChg chg="mod">
+          <ac:chgData name="Haoran HE" userId="ef3267f2-6c7c-4084-acdf-afd62f0a482b" providerId="ADAL" clId="{610621C1-65AC-48AE-971E-6D141E1E9EFB}" dt="2026-04-14T14:39:25.752" v="2477" actId="1076"/>
+          <ac:spMkLst>
+            <pc:docMk/>
+            <pc:sldMk cId="0" sldId="261"/>
+            <ac:spMk id="3" creationId="{00000000-0000-0000-0000-000000000000}"/>
+          </ac:spMkLst>
+        </pc:spChg>
+        <pc:spChg chg="mod">
+          <ac:chgData name="Haoran HE" userId="ef3267f2-6c7c-4084-acdf-afd62f0a482b" providerId="ADAL" clId="{610621C1-65AC-48AE-971E-6D141E1E9EFB}" dt="2026-04-14T14:30:57.513" v="1846" actId="164"/>
+          <ac:spMkLst>
+            <pc:docMk/>
+            <pc:sldMk cId="0" sldId="261"/>
+            <ac:spMk id="7" creationId="{00000000-0000-0000-0000-000000000000}"/>
+          </ac:spMkLst>
+        </pc:spChg>
+        <pc:spChg chg="add del mod">
+          <ac:chgData name="Haoran HE" userId="ef3267f2-6c7c-4084-acdf-afd62f0a482b" providerId="ADAL" clId="{610621C1-65AC-48AE-971E-6D141E1E9EFB}" dt="2026-04-14T14:30:23.140" v="1836" actId="478"/>
+          <ac:spMkLst>
+            <pc:docMk/>
+            <pc:sldMk cId="0" sldId="261"/>
+            <ac:spMk id="9" creationId="{00000000-0000-0000-0000-000000000000}"/>
+          </ac:spMkLst>
+        </pc:spChg>
+        <pc:spChg chg="del mod">
+          <ac:chgData name="Haoran HE" userId="ef3267f2-6c7c-4084-acdf-afd62f0a482b" providerId="ADAL" clId="{610621C1-65AC-48AE-971E-6D141E1E9EFB}" dt="2026-04-14T14:27:01.502" v="1453" actId="478"/>
+          <ac:spMkLst>
+            <pc:docMk/>
+            <pc:sldMk cId="0" sldId="261"/>
+            <ac:spMk id="10" creationId="{00000000-0000-0000-0000-000000000000}"/>
+          </ac:spMkLst>
+        </pc:spChg>
+        <pc:spChg chg="del mod">
+          <ac:chgData name="Haoran HE" userId="ef3267f2-6c7c-4084-acdf-afd62f0a482b" providerId="ADAL" clId="{610621C1-65AC-48AE-971E-6D141E1E9EFB}" dt="2026-04-14T14:28:32.157" v="1614" actId="478"/>
+          <ac:spMkLst>
+            <pc:docMk/>
+            <pc:sldMk cId="0" sldId="261"/>
+            <ac:spMk id="12" creationId="{00000000-0000-0000-0000-000000000000}"/>
+          </ac:spMkLst>
+        </pc:spChg>
+        <pc:spChg chg="del mod">
+          <ac:chgData name="Haoran HE" userId="ef3267f2-6c7c-4084-acdf-afd62f0a482b" providerId="ADAL" clId="{610621C1-65AC-48AE-971E-6D141E1E9EFB}" dt="2026-04-14T14:30:12.596" v="1833" actId="478"/>
+          <ac:spMkLst>
+            <pc:docMk/>
+            <pc:sldMk cId="0" sldId="261"/>
+            <ac:spMk id="13" creationId="{00000000-0000-0000-0000-000000000000}"/>
+          </ac:spMkLst>
+        </pc:spChg>
+        <pc:spChg chg="mod">
+          <ac:chgData name="Haoran HE" userId="ef3267f2-6c7c-4084-acdf-afd62f0a482b" providerId="ADAL" clId="{610621C1-65AC-48AE-971E-6D141E1E9EFB}" dt="2026-04-14T14:30:57.513" v="1846" actId="164"/>
+          <ac:spMkLst>
+            <pc:docMk/>
+            <pc:sldMk cId="0" sldId="261"/>
+            <ac:spMk id="15" creationId="{00000000-0000-0000-0000-000000000000}"/>
+          </ac:spMkLst>
+        </pc:spChg>
+        <pc:spChg chg="mod">
+          <ac:chgData name="Haoran HE" userId="ef3267f2-6c7c-4084-acdf-afd62f0a482b" providerId="ADAL" clId="{610621C1-65AC-48AE-971E-6D141E1E9EFB}" dt="2026-04-14T14:39:20.545" v="2473" actId="1076"/>
+          <ac:spMkLst>
+            <pc:docMk/>
+            <pc:sldMk cId="0" sldId="261"/>
+            <ac:spMk id="16" creationId="{00000000-0000-0000-0000-000000000000}"/>
+          </ac:spMkLst>
+        </pc:spChg>
+        <pc:spChg chg="mod">
+          <ac:chgData name="Haoran HE" userId="ef3267f2-6c7c-4084-acdf-afd62f0a482b" providerId="ADAL" clId="{610621C1-65AC-48AE-971E-6D141E1E9EFB}" dt="2026-04-14T14:39:59.592" v="2503" actId="20577"/>
+          <ac:spMkLst>
+            <pc:docMk/>
+            <pc:sldMk cId="0" sldId="261"/>
+            <ac:spMk id="18" creationId="{00000000-0000-0000-0000-000000000000}"/>
+          </ac:spMkLst>
+        </pc:spChg>
+        <pc:spChg chg="del mod">
+          <ac:chgData name="Haoran HE" userId="ef3267f2-6c7c-4084-acdf-afd62f0a482b" providerId="ADAL" clId="{610621C1-65AC-48AE-971E-6D141E1E9EFB}" dt="2026-04-14T14:31:17.091" v="1851" actId="478"/>
+          <ac:spMkLst>
+            <pc:docMk/>
+            <pc:sldMk cId="0" sldId="261"/>
+            <ac:spMk id="19" creationId="{00000000-0000-0000-0000-000000000000}"/>
+          </ac:spMkLst>
+        </pc:spChg>
+        <pc:spChg chg="del mod">
+          <ac:chgData name="Haoran HE" userId="ef3267f2-6c7c-4084-acdf-afd62f0a482b" providerId="ADAL" clId="{610621C1-65AC-48AE-971E-6D141E1E9EFB}" dt="2026-04-14T14:31:15.875" v="1850" actId="478"/>
+          <ac:spMkLst>
+            <pc:docMk/>
+            <pc:sldMk cId="0" sldId="261"/>
+            <ac:spMk id="21" creationId="{00000000-0000-0000-0000-000000000000}"/>
+          </ac:spMkLst>
+        </pc:spChg>
+        <pc:spChg chg="add mod">
+          <ac:chgData name="Haoran HE" userId="ef3267f2-6c7c-4084-acdf-afd62f0a482b" providerId="ADAL" clId="{610621C1-65AC-48AE-971E-6D141E1E9EFB}" dt="2026-04-14T14:39:37.546" v="2499" actId="207"/>
+          <ac:spMkLst>
+            <pc:docMk/>
+            <pc:sldMk cId="0" sldId="261"/>
+            <ac:spMk id="23" creationId="{4EDB2C14-3E9D-BF68-9ADE-F894383A5A38}"/>
+          </ac:spMkLst>
+        </pc:spChg>
+        <pc:spChg chg="mod">
+          <ac:chgData name="Haoran HE" userId="ef3267f2-6c7c-4084-acdf-afd62f0a482b" providerId="ADAL" clId="{610621C1-65AC-48AE-971E-6D141E1E9EFB}" dt="2026-04-14T14:31:09.954" v="1847"/>
+          <ac:spMkLst>
+            <pc:docMk/>
+            <pc:sldMk cId="0" sldId="261"/>
+            <ac:spMk id="27" creationId="{2EB8DF4C-CFCA-65A7-2B1A-6A8F32F453B7}"/>
+          </ac:spMkLst>
+        </pc:spChg>
+        <pc:spChg chg="mod">
+          <ac:chgData name="Haoran HE" userId="ef3267f2-6c7c-4084-acdf-afd62f0a482b" providerId="ADAL" clId="{610621C1-65AC-48AE-971E-6D141E1E9EFB}" dt="2026-04-14T14:31:09.954" v="1847"/>
+          <ac:spMkLst>
+            <pc:docMk/>
+            <pc:sldMk cId="0" sldId="261"/>
+            <ac:spMk id="29" creationId="{F0A59353-834D-4453-2A99-57218504E7ED}"/>
+          </ac:spMkLst>
+        </pc:spChg>
+        <pc:grpChg chg="add mod">
+          <ac:chgData name="Haoran HE" userId="ef3267f2-6c7c-4084-acdf-afd62f0a482b" providerId="ADAL" clId="{610621C1-65AC-48AE-971E-6D141E1E9EFB}" dt="2026-04-14T14:33:16.171" v="2068" actId="1076"/>
+          <ac:grpSpMkLst>
+            <pc:docMk/>
+            <pc:sldMk cId="0" sldId="261"/>
+            <ac:grpSpMk id="24" creationId="{56D57621-9224-9A2B-60D2-D05201620C4B}"/>
+          </ac:grpSpMkLst>
+        </pc:grpChg>
+        <pc:grpChg chg="add mod">
+          <ac:chgData name="Haoran HE" userId="ef3267f2-6c7c-4084-acdf-afd62f0a482b" providerId="ADAL" clId="{610621C1-65AC-48AE-971E-6D141E1E9EFB}" dt="2026-04-14T14:31:12.701" v="1849" actId="1076"/>
+          <ac:grpSpMkLst>
+            <pc:docMk/>
+            <pc:sldMk cId="0" sldId="261"/>
+            <ac:grpSpMk id="25" creationId="{E51C5B59-CD6F-58B5-F49B-8B893417EC07}"/>
+          </ac:grpSpMkLst>
+        </pc:grpChg>
+        <pc:grpChg chg="add mod">
+          <ac:chgData name="Haoran HE" userId="ef3267f2-6c7c-4084-acdf-afd62f0a482b" providerId="ADAL" clId="{610621C1-65AC-48AE-971E-6D141E1E9EFB}" dt="2026-04-14T14:39:28.663" v="2498" actId="1036"/>
+          <ac:grpSpMkLst>
+            <pc:docMk/>
+            <pc:sldMk cId="0" sldId="261"/>
+            <ac:grpSpMk id="32" creationId="{2D7E4768-65AD-08CA-AE27-7A07FF734FC3}"/>
+          </ac:grpSpMkLst>
+        </pc:grpChg>
+        <pc:picChg chg="add mod">
+          <ac:chgData name="Haoran HE" userId="ef3267f2-6c7c-4084-acdf-afd62f0a482b" providerId="ADAL" clId="{610621C1-65AC-48AE-971E-6D141E1E9EFB}" dt="2026-04-14T14:33:19.020" v="2069" actId="1076"/>
+          <ac:picMkLst>
+            <pc:docMk/>
+            <pc:sldMk cId="0" sldId="261"/>
+            <ac:picMk id="5" creationId="{D91B3EB8-84E0-38C6-6F45-A8BE5D182C9A}"/>
+          </ac:picMkLst>
+        </pc:picChg>
+        <pc:picChg chg="add del mod">
+          <ac:chgData name="Haoran HE" userId="ef3267f2-6c7c-4084-acdf-afd62f0a482b" providerId="ADAL" clId="{610621C1-65AC-48AE-971E-6D141E1E9EFB}" dt="2026-04-14T14:32:38.066" v="2053" actId="478"/>
+          <ac:picMkLst>
+            <pc:docMk/>
+            <pc:sldMk cId="0" sldId="261"/>
+            <ac:picMk id="6" creationId="{423C523B-C18A-2452-7228-8C4518171795}"/>
+          </ac:picMkLst>
+        </pc:picChg>
+        <pc:picChg chg="mod">
+          <ac:chgData name="Haoran HE" userId="ef3267f2-6c7c-4084-acdf-afd62f0a482b" providerId="ADAL" clId="{610621C1-65AC-48AE-971E-6D141E1E9EFB}" dt="2026-04-14T14:30:57.513" v="1846" actId="164"/>
+          <ac:picMkLst>
+            <pc:docMk/>
+            <pc:sldMk cId="0" sldId="261"/>
+            <ac:picMk id="8" creationId="{00000000-0000-0000-0000-000000000000}"/>
+          </ac:picMkLst>
+        </pc:picChg>
+        <pc:picChg chg="del">
+          <ac:chgData name="Haoran HE" userId="ef3267f2-6c7c-4084-acdf-afd62f0a482b" providerId="ADAL" clId="{610621C1-65AC-48AE-971E-6D141E1E9EFB}" dt="2026-04-14T14:27:01.958" v="1454" actId="478"/>
+          <ac:picMkLst>
+            <pc:docMk/>
+            <pc:sldMk cId="0" sldId="261"/>
+            <ac:picMk id="11" creationId="{00000000-0000-0000-0000-000000000000}"/>
+          </ac:picMkLst>
+        </pc:picChg>
+        <pc:picChg chg="del">
+          <ac:chgData name="Haoran HE" userId="ef3267f2-6c7c-4084-acdf-afd62f0a482b" providerId="ADAL" clId="{610621C1-65AC-48AE-971E-6D141E1E9EFB}" dt="2026-04-14T14:30:13.284" v="1834" actId="478"/>
+          <ac:picMkLst>
+            <pc:docMk/>
+            <pc:sldMk cId="0" sldId="261"/>
+            <ac:picMk id="14" creationId="{00000000-0000-0000-0000-000000000000}"/>
+          </ac:picMkLst>
+        </pc:picChg>
+        <pc:picChg chg="mod">
+          <ac:chgData name="Haoran HE" userId="ef3267f2-6c7c-4084-acdf-afd62f0a482b" providerId="ADAL" clId="{610621C1-65AC-48AE-971E-6D141E1E9EFB}" dt="2026-04-14T14:34:38.736" v="2084" actId="164"/>
+          <ac:picMkLst>
+            <pc:docMk/>
+            <pc:sldMk cId="0" sldId="261"/>
+            <ac:picMk id="17" creationId="{00000000-0000-0000-0000-000000000000}"/>
+          </ac:picMkLst>
+        </pc:picChg>
+        <pc:picChg chg="del">
+          <ac:chgData name="Haoran HE" userId="ef3267f2-6c7c-4084-acdf-afd62f0a482b" providerId="ADAL" clId="{610621C1-65AC-48AE-971E-6D141E1E9EFB}" dt="2026-04-14T14:31:17.860" v="1852" actId="478"/>
+          <ac:picMkLst>
+            <pc:docMk/>
+            <pc:sldMk cId="0" sldId="261"/>
+            <ac:picMk id="20" creationId="{00000000-0000-0000-0000-000000000000}"/>
+          </ac:picMkLst>
+        </pc:picChg>
+        <pc:picChg chg="mod modCrop">
+          <ac:chgData name="Haoran HE" userId="ef3267f2-6c7c-4084-acdf-afd62f0a482b" providerId="ADAL" clId="{610621C1-65AC-48AE-971E-6D141E1E9EFB}" dt="2026-04-14T14:33:33.566" v="2076" actId="14100"/>
+          <ac:picMkLst>
+            <pc:docMk/>
+            <pc:sldMk cId="0" sldId="261"/>
+            <ac:picMk id="26" creationId="{90A29204-A0AF-DFB3-EF3E-33CAE7FDA9BF}"/>
+          </ac:picMkLst>
+        </pc:picChg>
+        <pc:picChg chg="mod">
+          <ac:chgData name="Haoran HE" userId="ef3267f2-6c7c-4084-acdf-afd62f0a482b" providerId="ADAL" clId="{610621C1-65AC-48AE-971E-6D141E1E9EFB}" dt="2026-04-14T14:31:09.954" v="1847"/>
+          <ac:picMkLst>
+            <pc:docMk/>
+            <pc:sldMk cId="0" sldId="261"/>
+            <ac:picMk id="28" creationId="{71BE0E9B-9A58-34D8-3B57-74A8CF88DAD3}"/>
+          </ac:picMkLst>
+        </pc:picChg>
+        <pc:picChg chg="add mod">
+          <ac:chgData name="Haoran HE" userId="ef3267f2-6c7c-4084-acdf-afd62f0a482b" providerId="ADAL" clId="{610621C1-65AC-48AE-971E-6D141E1E9EFB}" dt="2026-04-14T14:34:46.758" v="2086" actId="1076"/>
+          <ac:picMkLst>
+            <pc:docMk/>
+            <pc:sldMk cId="0" sldId="261"/>
+            <ac:picMk id="31" creationId="{63611241-4FF7-9D90-7300-11D40A97C825}"/>
+          </ac:picMkLst>
+        </pc:picChg>
+      </pc:sldChg>
+      <pc:sldChg chg="addSp delSp modSp add mod setBg delAnim">
+        <pc:chgData name="Haoran HE" userId="ef3267f2-6c7c-4084-acdf-afd62f0a482b" providerId="ADAL" clId="{610621C1-65AC-48AE-971E-6D141E1E9EFB}" dt="2026-04-14T14:42:04.078" v="2586" actId="20577"/>
+        <pc:sldMkLst>
+          <pc:docMk/>
+          <pc:sldMk cId="352606672" sldId="266"/>
+        </pc:sldMkLst>
+        <pc:spChg chg="add del mod">
+          <ac:chgData name="Haoran HE" userId="ef3267f2-6c7c-4084-acdf-afd62f0a482b" providerId="ADAL" clId="{610621C1-65AC-48AE-971E-6D141E1E9EFB}" dt="2026-04-14T14:11:33.368" v="840" actId="1076"/>
+          <ac:spMkLst>
+            <pc:docMk/>
+            <pc:sldMk cId="352606672" sldId="266"/>
+            <ac:spMk id="3" creationId="{B9731E97-2588-F97D-818A-4C4516E04504}"/>
+          </ac:spMkLst>
+        </pc:spChg>
+        <pc:spChg chg="del">
+          <ac:chgData name="Haoran HE" userId="ef3267f2-6c7c-4084-acdf-afd62f0a482b" providerId="ADAL" clId="{610621C1-65AC-48AE-971E-6D141E1E9EFB}" dt="2026-04-14T14:14:33.226" v="1149" actId="478"/>
+          <ac:spMkLst>
+            <pc:docMk/>
+            <pc:sldMk cId="352606672" sldId="266"/>
+            <ac:spMk id="5" creationId="{60D78DA2-4F32-3468-7519-AB18B236E1EB}"/>
+          </ac:spMkLst>
+        </pc:spChg>
+        <pc:spChg chg="del">
+          <ac:chgData name="Haoran HE" userId="ef3267f2-6c7c-4084-acdf-afd62f0a482b" providerId="ADAL" clId="{610621C1-65AC-48AE-971E-6D141E1E9EFB}" dt="2026-04-14T14:14:33.226" v="1149" actId="478"/>
+          <ac:spMkLst>
+            <pc:docMk/>
+            <pc:sldMk cId="352606672" sldId="266"/>
+            <ac:spMk id="7" creationId="{9E1FC34E-C90E-D375-1A04-18D89BDE0EAE}"/>
+          </ac:spMkLst>
+        </pc:spChg>
+        <pc:spChg chg="del">
+          <ac:chgData name="Haoran HE" userId="ef3267f2-6c7c-4084-acdf-afd62f0a482b" providerId="ADAL" clId="{610621C1-65AC-48AE-971E-6D141E1E9EFB}" dt="2026-04-14T14:04:12.683" v="277" actId="478"/>
+          <ac:spMkLst>
+            <pc:docMk/>
+            <pc:sldMk cId="352606672" sldId="266"/>
+            <ac:spMk id="8" creationId="{DD99A4F9-ADEC-2A46-D750-315ABBE62898}"/>
+          </ac:spMkLst>
+        </pc:spChg>
+        <pc:spChg chg="del">
+          <ac:chgData name="Haoran HE" userId="ef3267f2-6c7c-4084-acdf-afd62f0a482b" providerId="ADAL" clId="{610621C1-65AC-48AE-971E-6D141E1E9EFB}" dt="2026-04-14T14:04:16.299" v="282" actId="478"/>
+          <ac:spMkLst>
+            <pc:docMk/>
+            <pc:sldMk cId="352606672" sldId="266"/>
+            <ac:spMk id="9" creationId="{13F1DD09-4CF3-918B-77FB-7663737E64B5}"/>
+          </ac:spMkLst>
+        </pc:spChg>
+        <pc:spChg chg="del">
+          <ac:chgData name="Haoran HE" userId="ef3267f2-6c7c-4084-acdf-afd62f0a482b" providerId="ADAL" clId="{610621C1-65AC-48AE-971E-6D141E1E9EFB}" dt="2026-04-14T14:04:15.619" v="281" actId="478"/>
+          <ac:spMkLst>
+            <pc:docMk/>
+            <pc:sldMk cId="352606672" sldId="266"/>
+            <ac:spMk id="10" creationId="{1981C6C0-D712-C237-1D8A-BEA28305189F}"/>
+          </ac:spMkLst>
+        </pc:spChg>
+        <pc:spChg chg="del mod">
+          <ac:chgData name="Haoran HE" userId="ef3267f2-6c7c-4084-acdf-afd62f0a482b" providerId="ADAL" clId="{610621C1-65AC-48AE-971E-6D141E1E9EFB}" dt="2026-04-14T14:04:12.010" v="276" actId="478"/>
+          <ac:spMkLst>
+            <pc:docMk/>
+            <pc:sldMk cId="352606672" sldId="266"/>
+            <ac:spMk id="12" creationId="{B508274F-E40F-B6D4-4DAB-527D00420DDC}"/>
+          </ac:spMkLst>
+        </pc:spChg>
+        <pc:spChg chg="mod">
+          <ac:chgData name="Haoran HE" userId="ef3267f2-6c7c-4084-acdf-afd62f0a482b" providerId="ADAL" clId="{610621C1-65AC-48AE-971E-6D141E1E9EFB}" dt="2026-04-14T14:11:22.639" v="836" actId="164"/>
+          <ac:spMkLst>
+            <pc:docMk/>
+            <pc:sldMk cId="352606672" sldId="266"/>
+            <ac:spMk id="13" creationId="{51808EDB-7BD5-CB18-D5DE-2907007181C1}"/>
+          </ac:spMkLst>
+        </pc:spChg>
+        <pc:spChg chg="mod">
+          <ac:chgData name="Haoran HE" userId="ef3267f2-6c7c-4084-acdf-afd62f0a482b" providerId="ADAL" clId="{610621C1-65AC-48AE-971E-6D141E1E9EFB}" dt="2026-04-14T14:11:50.196" v="847" actId="14100"/>
+          <ac:spMkLst>
+            <pc:docMk/>
+            <pc:sldMk cId="352606672" sldId="266"/>
+            <ac:spMk id="14" creationId="{2DE1C159-5C88-B4BE-968B-47F801D667B2}"/>
+          </ac:spMkLst>
+        </pc:spChg>
+        <pc:spChg chg="mod">
+          <ac:chgData name="Haoran HE" userId="ef3267f2-6c7c-4084-acdf-afd62f0a482b" providerId="ADAL" clId="{610621C1-65AC-48AE-971E-6D141E1E9EFB}" dt="2026-04-14T14:11:22.639" v="836" actId="164"/>
+          <ac:spMkLst>
+            <pc:docMk/>
+            <pc:sldMk cId="352606672" sldId="266"/>
+            <ac:spMk id="15" creationId="{8D50CDAC-A645-0B37-B6F7-79E07AC12569}"/>
+          </ac:spMkLst>
+        </pc:spChg>
+        <pc:spChg chg="mod">
+          <ac:chgData name="Haoran HE" userId="ef3267f2-6c7c-4084-acdf-afd62f0a482b" providerId="ADAL" clId="{610621C1-65AC-48AE-971E-6D141E1E9EFB}" dt="2026-04-14T14:42:04.078" v="2586" actId="20577"/>
+          <ac:spMkLst>
+            <pc:docMk/>
+            <pc:sldMk cId="352606672" sldId="266"/>
+            <ac:spMk id="17" creationId="{5E5C46B1-FD41-8DE1-E88B-D4C9D84AA9B7}"/>
+          </ac:spMkLst>
+        </pc:spChg>
+        <pc:spChg chg="del">
+          <ac:chgData name="Haoran HE" userId="ef3267f2-6c7c-4084-acdf-afd62f0a482b" providerId="ADAL" clId="{610621C1-65AC-48AE-971E-6D141E1E9EFB}" dt="2026-04-14T14:07:40.113" v="572" actId="478"/>
+          <ac:spMkLst>
+            <pc:docMk/>
+            <pc:sldMk cId="352606672" sldId="266"/>
+            <ac:spMk id="18" creationId="{43632D41-E48D-F8C5-EABC-CF44EA24D532}"/>
+          </ac:spMkLst>
+        </pc:spChg>
+        <pc:spChg chg="del">
+          <ac:chgData name="Haoran HE" userId="ef3267f2-6c7c-4084-acdf-afd62f0a482b" providerId="ADAL" clId="{610621C1-65AC-48AE-971E-6D141E1E9EFB}" dt="2026-04-14T14:08:38.999" v="588" actId="478"/>
+          <ac:spMkLst>
+            <pc:docMk/>
+            <pc:sldMk cId="352606672" sldId="266"/>
+            <ac:spMk id="19" creationId="{220A6A94-42FA-3FBA-40AE-955AF7B5AED6}"/>
+          </ac:spMkLst>
+        </pc:spChg>
+        <pc:spChg chg="del">
+          <ac:chgData name="Haoran HE" userId="ef3267f2-6c7c-4084-acdf-afd62f0a482b" providerId="ADAL" clId="{610621C1-65AC-48AE-971E-6D141E1E9EFB}" dt="2026-04-14T14:07:49.496" v="577" actId="478"/>
+          <ac:spMkLst>
+            <pc:docMk/>
+            <pc:sldMk cId="352606672" sldId="266"/>
+            <ac:spMk id="20" creationId="{7CEACCA1-80F1-11DB-87B3-07435629A517}"/>
+          </ac:spMkLst>
+        </pc:spChg>
+        <pc:spChg chg="del mod">
+          <ac:chgData name="Haoran HE" userId="ef3267f2-6c7c-4084-acdf-afd62f0a482b" providerId="ADAL" clId="{610621C1-65AC-48AE-971E-6D141E1E9EFB}" dt="2026-04-14T14:07:48.120" v="575" actId="478"/>
+          <ac:spMkLst>
+            <pc:docMk/>
+            <pc:sldMk cId="352606672" sldId="266"/>
+            <ac:spMk id="22" creationId="{CA81A0B5-B5D9-59CA-40A3-613CC908D3F0}"/>
+          </ac:spMkLst>
+        </pc:spChg>
+        <pc:spChg chg="mod">
+          <ac:chgData name="Haoran HE" userId="ef3267f2-6c7c-4084-acdf-afd62f0a482b" providerId="ADAL" clId="{610621C1-65AC-48AE-971E-6D141E1E9EFB}" dt="2026-04-14T14:11:35.321" v="842" actId="571"/>
+          <ac:spMkLst>
+            <pc:docMk/>
+            <pc:sldMk cId="352606672" sldId="266"/>
+            <ac:spMk id="23" creationId="{06375BA4-E5D7-BA95-DF04-2B78D66F6B8F}"/>
+          </ac:spMkLst>
+        </pc:spChg>
+        <pc:spChg chg="mod">
+          <ac:chgData name="Haoran HE" userId="ef3267f2-6c7c-4084-acdf-afd62f0a482b" providerId="ADAL" clId="{610621C1-65AC-48AE-971E-6D141E1E9EFB}" dt="2026-04-14T14:11:35.321" v="842" actId="571"/>
+          <ac:spMkLst>
+            <pc:docMk/>
+            <pc:sldMk cId="352606672" sldId="266"/>
+            <ac:spMk id="24" creationId="{7C2FCE60-1ECF-0FD3-7ECB-1D15B87EC4CF}"/>
+          </ac:spMkLst>
+        </pc:spChg>
+        <pc:spChg chg="mod">
+          <ac:chgData name="Haoran HE" userId="ef3267f2-6c7c-4084-acdf-afd62f0a482b" providerId="ADAL" clId="{610621C1-65AC-48AE-971E-6D141E1E9EFB}" dt="2026-04-14T14:11:35.321" v="842" actId="571"/>
+          <ac:spMkLst>
+            <pc:docMk/>
+            <pc:sldMk cId="352606672" sldId="266"/>
+            <ac:spMk id="25" creationId="{D1ECFA3F-5EC4-FF22-7DC0-CAB9525F7D31}"/>
+          </ac:spMkLst>
+        </pc:spChg>
+        <pc:spChg chg="mod">
+          <ac:chgData name="Haoran HE" userId="ef3267f2-6c7c-4084-acdf-afd62f0a482b" providerId="ADAL" clId="{610621C1-65AC-48AE-971E-6D141E1E9EFB}" dt="2026-04-14T14:41:13.093" v="2556" actId="20577"/>
+          <ac:spMkLst>
+            <pc:docMk/>
+            <pc:sldMk cId="352606672" sldId="266"/>
+            <ac:spMk id="27" creationId="{EE4DB24A-51FB-11B8-31EC-3C0E7FE28882}"/>
+          </ac:spMkLst>
+        </pc:spChg>
+        <pc:spChg chg="del">
+          <ac:chgData name="Haoran HE" userId="ef3267f2-6c7c-4084-acdf-afd62f0a482b" providerId="ADAL" clId="{610621C1-65AC-48AE-971E-6D141E1E9EFB}" dt="2026-04-14T14:08:58.055" v="594" actId="478"/>
+          <ac:spMkLst>
+            <pc:docMk/>
+            <pc:sldMk cId="352606672" sldId="266"/>
+            <ac:spMk id="28" creationId="{A57B0530-1C49-69FA-326F-CAF70EDF0E77}"/>
+          </ac:spMkLst>
+        </pc:spChg>
+        <pc:spChg chg="del">
+          <ac:chgData name="Haoran HE" userId="ef3267f2-6c7c-4084-acdf-afd62f0a482b" providerId="ADAL" clId="{610621C1-65AC-48AE-971E-6D141E1E9EFB}" dt="2026-04-14T14:09:00.633" v="597" actId="478"/>
+          <ac:spMkLst>
+            <pc:docMk/>
+            <pc:sldMk cId="352606672" sldId="266"/>
+            <ac:spMk id="29" creationId="{4C2F9118-D3DC-2C01-9100-3EE95C58CBD9}"/>
+          </ac:spMkLst>
+        </pc:spChg>
+        <pc:spChg chg="del">
+          <ac:chgData name="Haoran HE" userId="ef3267f2-6c7c-4084-acdf-afd62f0a482b" providerId="ADAL" clId="{610621C1-65AC-48AE-971E-6D141E1E9EFB}" dt="2026-04-14T14:08:59.431" v="596" actId="478"/>
+          <ac:spMkLst>
+            <pc:docMk/>
+            <pc:sldMk cId="352606672" sldId="266"/>
+            <ac:spMk id="30" creationId="{97ADE801-D23F-649D-FC31-E320B0D6C5EC}"/>
+          </ac:spMkLst>
+        </pc:spChg>
+        <pc:spChg chg="del">
+          <ac:chgData name="Haoran HE" userId="ef3267f2-6c7c-4084-acdf-afd62f0a482b" providerId="ADAL" clId="{610621C1-65AC-48AE-971E-6D141E1E9EFB}" dt="2026-04-14T14:08:57.504" v="593" actId="478"/>
+          <ac:spMkLst>
+            <pc:docMk/>
+            <pc:sldMk cId="352606672" sldId="266"/>
+            <ac:spMk id="32" creationId="{02EB386D-CAFF-CB4D-D0A3-0BC713F78FB2}"/>
+          </ac:spMkLst>
+        </pc:spChg>
+        <pc:spChg chg="add mod">
+          <ac:chgData name="Haoran HE" userId="ef3267f2-6c7c-4084-acdf-afd62f0a482b" providerId="ADAL" clId="{610621C1-65AC-48AE-971E-6D141E1E9EFB}" dt="2026-04-14T14:11:22.639" v="836" actId="164"/>
+          <ac:spMkLst>
+            <pc:docMk/>
+            <pc:sldMk cId="352606672" sldId="266"/>
+            <ac:spMk id="36" creationId="{B11BC4E9-97AA-A71B-CDBD-EB472FBDF7B0}"/>
+          </ac:spMkLst>
+        </pc:spChg>
+        <pc:spChg chg="add mod">
+          <ac:chgData name="Haoran HE" userId="ef3267f2-6c7c-4084-acdf-afd62f0a482b" providerId="ADAL" clId="{610621C1-65AC-48AE-971E-6D141E1E9EFB}" dt="2026-04-14T14:11:35.321" v="842" actId="571"/>
+          <ac:spMkLst>
+            <pc:docMk/>
+            <pc:sldMk cId="352606672" sldId="266"/>
+            <ac:spMk id="37" creationId="{D5DEEA2B-3E3C-820E-64BB-BB2B5EE14EF7}"/>
+          </ac:spMkLst>
+        </pc:spChg>
+        <pc:spChg chg="add mod">
+          <ac:chgData name="Haoran HE" userId="ef3267f2-6c7c-4084-acdf-afd62f0a482b" providerId="ADAL" clId="{610621C1-65AC-48AE-971E-6D141E1E9EFB}" dt="2026-04-14T14:11:35.321" v="842" actId="571"/>
+          <ac:spMkLst>
+            <pc:docMk/>
+            <pc:sldMk cId="352606672" sldId="266"/>
+            <ac:spMk id="40" creationId="{E8D2DA68-793E-E3DD-B5E5-3162AB80D0B4}"/>
+          </ac:spMkLst>
+        </pc:spChg>
+        <pc:spChg chg="add del mod">
+          <ac:chgData name="Haoran HE" userId="ef3267f2-6c7c-4084-acdf-afd62f0a482b" providerId="ADAL" clId="{610621C1-65AC-48AE-971E-6D141E1E9EFB}" dt="2026-04-14T14:16:22.876" v="1198" actId="478"/>
+          <ac:spMkLst>
+            <pc:docMk/>
+            <pc:sldMk cId="352606672" sldId="266"/>
+            <ac:spMk id="43" creationId="{1DFF8727-EFDD-979D-7C3F-DE4FE1670154}"/>
+          </ac:spMkLst>
+        </pc:spChg>
+        <pc:grpChg chg="add mod">
+          <ac:chgData name="Haoran HE" userId="ef3267f2-6c7c-4084-acdf-afd62f0a482b" providerId="ADAL" clId="{610621C1-65AC-48AE-971E-6D141E1E9EFB}" dt="2026-04-14T14:11:47.251" v="846" actId="1076"/>
+          <ac:grpSpMkLst>
+            <pc:docMk/>
+            <pc:sldMk cId="352606672" sldId="266"/>
+            <ac:grpSpMk id="38" creationId="{F779ADA4-B0C5-98EF-1A4B-449A3605B7A4}"/>
+          </ac:grpSpMkLst>
+        </pc:grpChg>
+        <pc:grpChg chg="add mod">
+          <ac:chgData name="Haoran HE" userId="ef3267f2-6c7c-4084-acdf-afd62f0a482b" providerId="ADAL" clId="{610621C1-65AC-48AE-971E-6D141E1E9EFB}" dt="2026-04-14T14:11:44.138" v="845" actId="1076"/>
+          <ac:grpSpMkLst>
+            <pc:docMk/>
+            <pc:sldMk cId="352606672" sldId="266"/>
+            <ac:grpSpMk id="39" creationId="{E1EF1CBD-6023-173F-4294-0D67AE43C7E3}"/>
+          </ac:grpSpMkLst>
+        </pc:grpChg>
+        <pc:picChg chg="del">
+          <ac:chgData name="Haoran HE" userId="ef3267f2-6c7c-4084-acdf-afd62f0a482b" providerId="ADAL" clId="{610621C1-65AC-48AE-971E-6D141E1E9EFB}" dt="2026-04-14T14:04:15.155" v="280" actId="478"/>
+          <ac:picMkLst>
+            <pc:docMk/>
+            <pc:sldMk cId="352606672" sldId="266"/>
+            <ac:picMk id="11" creationId="{D9D45391-09D8-6C71-7510-98859A13904F}"/>
+          </ac:picMkLst>
+        </pc:picChg>
+        <pc:picChg chg="mod">
+          <ac:chgData name="Haoran HE" userId="ef3267f2-6c7c-4084-acdf-afd62f0a482b" providerId="ADAL" clId="{610621C1-65AC-48AE-971E-6D141E1E9EFB}" dt="2026-04-14T14:11:22.639" v="836" actId="164"/>
+          <ac:picMkLst>
+            <pc:docMk/>
+            <pc:sldMk cId="352606672" sldId="266"/>
+            <ac:picMk id="16" creationId="{BCDF790E-AA83-C18B-5DB9-BC528B2F0697}"/>
+          </ac:picMkLst>
+        </pc:picChg>
+        <pc:picChg chg="del">
+          <ac:chgData name="Haoran HE" userId="ef3267f2-6c7c-4084-acdf-afd62f0a482b" providerId="ADAL" clId="{610621C1-65AC-48AE-971E-6D141E1E9EFB}" dt="2026-04-14T14:07:49.056" v="576" actId="478"/>
+          <ac:picMkLst>
+            <pc:docMk/>
+            <pc:sldMk cId="352606672" sldId="266"/>
+            <ac:picMk id="21" creationId="{B4D5DB70-D07B-ED22-CF26-5E1B45A11EE5}"/>
+          </ac:picMkLst>
+        </pc:picChg>
+        <pc:picChg chg="mod">
+          <ac:chgData name="Haoran HE" userId="ef3267f2-6c7c-4084-acdf-afd62f0a482b" providerId="ADAL" clId="{610621C1-65AC-48AE-971E-6D141E1E9EFB}" dt="2026-04-14T14:11:35.321" v="842" actId="571"/>
+          <ac:picMkLst>
+            <pc:docMk/>
+            <pc:sldMk cId="352606672" sldId="266"/>
+            <ac:picMk id="26" creationId="{180A518F-7077-DFFC-71C7-CB3C091CCACE}"/>
+          </ac:picMkLst>
+        </pc:picChg>
+        <pc:picChg chg="del">
+          <ac:chgData name="Haoran HE" userId="ef3267f2-6c7c-4084-acdf-afd62f0a482b" providerId="ADAL" clId="{610621C1-65AC-48AE-971E-6D141E1E9EFB}" dt="2026-04-14T14:08:58.968" v="595" actId="478"/>
+          <ac:picMkLst>
+            <pc:docMk/>
+            <pc:sldMk cId="352606672" sldId="266"/>
+            <ac:picMk id="31" creationId="{84505F46-70E5-7D03-E4F2-38CFE4775467}"/>
+          </ac:picMkLst>
+        </pc:picChg>
+        <pc:picChg chg="del mod">
+          <ac:chgData name="Haoran HE" userId="ef3267f2-6c7c-4084-acdf-afd62f0a482b" providerId="ADAL" clId="{610621C1-65AC-48AE-971E-6D141E1E9EFB}" dt="2026-04-14T14:14:33.226" v="1149" actId="478"/>
+          <ac:picMkLst>
+            <pc:docMk/>
+            <pc:sldMk cId="352606672" sldId="266"/>
+            <ac:picMk id="33" creationId="{174D0673-5F3C-7FAA-E4CA-BC1DF9F27E9F}"/>
+          </ac:picMkLst>
+        </pc:picChg>
+        <pc:picChg chg="del">
+          <ac:chgData name="Haoran HE" userId="ef3267f2-6c7c-4084-acdf-afd62f0a482b" providerId="ADAL" clId="{610621C1-65AC-48AE-971E-6D141E1E9EFB}" dt="2026-04-14T14:14:33.226" v="1149" actId="478"/>
+          <ac:picMkLst>
+            <pc:docMk/>
+            <pc:sldMk cId="352606672" sldId="266"/>
+            <ac:picMk id="34" creationId="{905682E2-3882-AF2E-E27B-52B8FE9638ED}"/>
+          </ac:picMkLst>
+        </pc:picChg>
+        <pc:picChg chg="del mod">
+          <ac:chgData name="Haoran HE" userId="ef3267f2-6c7c-4084-acdf-afd62f0a482b" providerId="ADAL" clId="{610621C1-65AC-48AE-971E-6D141E1E9EFB}" dt="2026-04-14T14:14:33.226" v="1149" actId="478"/>
+          <ac:picMkLst>
+            <pc:docMk/>
+            <pc:sldMk cId="352606672" sldId="266"/>
+            <ac:picMk id="35" creationId="{17AAE655-DE90-2E6C-15F8-E00B73854A4E}"/>
+          </ac:picMkLst>
+        </pc:picChg>
+        <pc:picChg chg="add del mod">
+          <ac:chgData name="Haoran HE" userId="ef3267f2-6c7c-4084-acdf-afd62f0a482b" providerId="ADAL" clId="{610621C1-65AC-48AE-971E-6D141E1E9EFB}" dt="2026-04-14T14:16:23.155" v="1199" actId="478"/>
+          <ac:picMkLst>
+            <pc:docMk/>
+            <pc:sldMk cId="352606672" sldId="266"/>
+            <ac:picMk id="42" creationId="{44F02D7D-7CF1-56FF-7343-E8D36BBEE3A2}"/>
+          </ac:picMkLst>
+        </pc:picChg>
+        <pc:picChg chg="add del mod">
+          <ac:chgData name="Haoran HE" userId="ef3267f2-6c7c-4084-acdf-afd62f0a482b" providerId="ADAL" clId="{610621C1-65AC-48AE-971E-6D141E1E9EFB}" dt="2026-04-14T14:22:00.760" v="1299" actId="478"/>
+          <ac:picMkLst>
+            <pc:docMk/>
+            <pc:sldMk cId="352606672" sldId="266"/>
+            <ac:picMk id="45" creationId="{0F23674E-407B-3509-3E66-1F839D6DF3C2}"/>
+          </ac:picMkLst>
+        </pc:picChg>
+        <pc:picChg chg="add del mod">
+          <ac:chgData name="Haoran HE" userId="ef3267f2-6c7c-4084-acdf-afd62f0a482b" providerId="ADAL" clId="{610621C1-65AC-48AE-971E-6D141E1E9EFB}" dt="2026-04-14T14:23:41.695" v="1304" actId="478"/>
+          <ac:picMkLst>
+            <pc:docMk/>
+            <pc:sldMk cId="352606672" sldId="266"/>
+            <ac:picMk id="47" creationId="{34915783-E13F-8254-A97C-F7BE45DC5933}"/>
+          </ac:picMkLst>
+        </pc:picChg>
+        <pc:picChg chg="add mod">
+          <ac:chgData name="Haoran HE" userId="ef3267f2-6c7c-4084-acdf-afd62f0a482b" providerId="ADAL" clId="{610621C1-65AC-48AE-971E-6D141E1E9EFB}" dt="2026-04-14T14:23:47.232" v="1308" actId="1076"/>
+          <ac:picMkLst>
+            <pc:docMk/>
+            <pc:sldMk cId="352606672" sldId="266"/>
+            <ac:picMk id="49" creationId="{E1753505-E33A-86AF-CD38-49FB0A0F62F3}"/>
+          </ac:picMkLst>
+        </pc:picChg>
+      </pc:sldChg>
+    </pc:docChg>
+  </pc:docChgLst>
+</pc:chgInfo>
+</file>
+
+<file path=ppt/diagrams/colors1.xml><?xml version="1.0" encoding="utf-8"?>
+<dgm:colorsDef xmlns:dgm="http://schemas.openxmlformats.org/drawingml/2006/diagram" xmlns:a="http://schemas.openxmlformats.org/drawingml/2006/main" uniqueId="urn:microsoft.com/office/officeart/2005/8/colors/colorful5">
+  <dgm:title val=""/>
+  <dgm:desc val=""/>
+  <dgm:catLst>
+    <dgm:cat type="colorful" pri="10500"/>
+  </dgm:catLst>
+  <dgm:styleLbl name="node0">
+    <dgm:fillClrLst meth="repeat">
+      <a:schemeClr val="accent4"/>
+    </dgm:fillClrLst>
+    <dgm:linClrLst meth="repeat">
+      <a:schemeClr val="lt1"/>
+    </dgm:linClrLst>
+    <dgm:effectClrLst/>
+    <dgm:txLinClrLst/>
+    <dgm:txFillClrLst/>
+    <dgm:txEffectClrLst/>
+  </dgm:styleLbl>
+  <dgm:styleLbl name="node1">
+    <dgm:fillClrLst>
+      <a:schemeClr val="accent5"/>
+      <a:schemeClr val="accent6"/>
+    </dgm:fillClrLst>
+    <dgm:linClrLst meth="repeat">
+      <a:schemeClr val="lt1"/>
+    </dgm:linClrLst>
+    <dgm:effectClrLst/>
+    <dgm:txLinClrLst/>
+    <dgm:txFillClrLst/>
+    <dgm:txEffectClrLst/>
+  </dgm:styleLbl>
+  <dgm:styleLbl name="alignNode1">
+    <dgm:fillClrLst>
+      <a:schemeClr val="accent5"/>
+      <a:schemeClr val="accent6"/>
+    </dgm:fillClrLst>
+    <dgm:linClrLst>
+      <a:schemeClr val="accent5"/>
+      <a:schemeClr val="accent6"/>
+    </dgm:linClrLst>
+    <dgm:effectClrLst/>
+    <dgm:txLinClrLst/>
+    <dgm:txFillClrLst/>
+    <dgm:txEffectClrLst/>
+  </dgm:styleLbl>
+  <dgm:styleLbl name="lnNode1">
+    <dgm:fillClrLst>
+      <a:schemeClr val="accent5"/>
+      <a:schemeClr val="accent6"/>
+    </dgm:fillClrLst>
+    <dgm:linClrLst meth="repeat">
+      <a:schemeClr val="lt1"/>
+    </dgm:linClrLst>
+    <dgm:effectClrLst/>
+    <dgm:txLinClrLst/>
+    <dgm:txFillClrLst/>
+    <dgm:txEffectClrLst/>
+  </dgm:styleLbl>
+  <dgm:styleLbl name="vennNode1">
+    <dgm:fillClrLst>
+      <a:schemeClr val="accent5">
+        <a:alpha val="50000"/>
+      </a:schemeClr>
+      <a:schemeClr val="accent6">
+        <a:alpha val="50000"/>
+      </a:schemeClr>
+    </dgm:fillClrLst>
+    <dgm:linClrLst meth="repeat">
+      <a:schemeClr val="lt1"/>
+    </dgm:linClrLst>
+    <dgm:effectClrLst/>
+    <dgm:txLinClrLst/>
+    <dgm:txFillClrLst/>
+    <dgm:txEffectClrLst/>
+  </dgm:styleLbl>
+  <dgm:styleLbl name="node2">
+    <dgm:fillClrLst>
+      <a:schemeClr val="accent6"/>
+    </dgm:fillClrLst>
+    <dgm:linClrLst meth="repeat">
+      <a:schemeClr val="lt1"/>
+    </dgm:linClrLst>
+    <dgm:effectClrLst/>
+    <dgm:txLinClrLst/>
+    <dgm:txFillClrLst/>
+    <dgm:txEffectClrLst/>
+  </dgm:styleLbl>
+  <dgm:styleLbl name="node3">
+    <dgm:fillClrLst>
+      <a:schemeClr val="accent1"/>
+    </dgm:fillClrLst>
+    <dgm:linClrLst meth="repeat">
+      <a:schemeClr val="lt1"/>
+    </dgm:linClrLst>
+    <dgm:effectClrLst/>
+    <dgm:txLinClrLst/>
+    <dgm:txFillClrLst/>
+    <dgm:txEffectClrLst/>
+  </dgm:styleLbl>
+  <dgm:styleLbl name="node4">
+    <dgm:fillClrLst>
+      <a:schemeClr val="accent2"/>
+    </dgm:fillClrLst>
+    <dgm:linClrLst meth="repeat">
+      <a:schemeClr val="lt1"/>
+    </dgm:linClrLst>
+    <dgm:effectClrLst/>
+    <dgm:txLinClrLst/>
+    <dgm:txFillClrLst/>
+    <dgm:txEffectClrLst/>
+  </dgm:styleLbl>
+  <dgm:styleLbl name="fgImgPlace1">
+    <dgm:fillClrLst>
+      <a:schemeClr val="accent5">
+        <a:tint val="50000"/>
+      </a:schemeClr>
+      <a:schemeClr val="accent6">
+        <a:tint val="50000"/>
+      </a:schemeClr>
+    </dgm:fillClrLst>
+    <dgm:linClrLst meth="repeat">
+      <a:schemeClr val="lt1"/>
+    </dgm:linClrLst>
+    <dgm:effectClrLst/>
+    <dgm:txLinClrLst/>
+    <dgm:txFillClrLst meth="repeat">
+      <a:schemeClr val="lt1"/>
+    </dgm:txFillClrLst>
+    <dgm:txEffectClrLst/>
+  </dgm:styleLbl>
+  <dgm:styleLbl name="alignImgPlace1">
+    <dgm:fillClrLst>
+      <a:schemeClr val="accent5">
+        <a:tint val="50000"/>
+      </a:schemeClr>
+      <a:schemeClr val="accent6">
+        <a:tint val="20000"/>
+      </a:schemeClr>
+    </dgm:fillClrLst>
+    <dgm:linClrLst meth="repeat">
+      <a:schemeClr val="lt1"/>
+    </dgm:linClrLst>
+    <dgm:effectClrLst/>
+    <dgm:txLinClrLst/>
+    <dgm:txFillClrLst meth="repeat">
+      <a:schemeClr val="lt1"/>
+    </dgm:txFillClrLst>
+    <dgm:txEffectClrLst/>
+  </dgm:styleLbl>
+  <dgm:styleLbl name="bgImgPlace1">
+    <dgm:fillClrLst>
+      <a:schemeClr val="accent5">
+        <a:tint val="50000"/>
+      </a:schemeClr>
+      <a:schemeClr val="accent6">
+        <a:tint val="20000"/>
+      </a:schemeClr>
+    </dgm:fillClrLst>
+    <dgm:linClrLst meth="repeat">
+      <a:schemeClr val="lt1"/>
+    </dgm:linClrLst>
+    <dgm:effectClrLst/>
+    <dgm:txLinClrLst/>
+    <dgm:txFillClrLst meth="repeat">
+      <a:schemeClr val="lt1"/>
+    </dgm:txFillClrLst>
+    <dgm:txEffectClrLst/>
+  </dgm:styleLbl>
+  <dgm:styleLbl name="sibTrans2D1">
+    <dgm:fillClrLst>
+      <a:schemeClr val="accent5"/>
+      <a:schemeClr val="accent6"/>
+    </dgm:fillClrLst>
+    <dgm:linClrLst meth="repeat">
+      <a:schemeClr val="lt1"/>
+    </dgm:linClrLst>
+    <dgm:effectClrLst/>
+    <dgm:txLinClrLst/>
+    <dgm:txFillClrLst/>
+    <dgm:txEffectClrLst/>
+  </dgm:styleLbl>
+  <dgm:styleLbl name="fgSibTrans2D1">
+    <dgm:fillClrLst>
+      <a:schemeClr val="accent5"/>
+      <a:schemeClr val="accent6"/>
+    </dgm:fillClrLst>
+    <dgm:linClrLst meth="repeat">
+      <a:schemeClr val="lt1"/>
+    </dgm:linClrLst>
+    <dgm:effectClrLst/>
+    <dgm:txLinClrLst/>
+    <dgm:txFillClrLst meth="repeat">
+      <a:schemeClr val="lt1"/>
+    </dgm:txFillClrLst>
+    <dgm:txEffectClrLst/>
+  </dgm:styleLbl>
+  <dgm:styleLbl name="bgSibTrans2D1">
+    <dgm:fillClrLst>
+      <a:schemeClr val="accent5"/>
+      <a:schemeClr val="accent6"/>
+    </dgm:fillClrLst>
+    <dgm:linClrLst meth="repeat">
+      <a:schemeClr val="lt1"/>
+    </dgm:linClrLst>
+    <dgm:effectClrLst/>
+    <dgm:txLinClrLst/>
+    <dgm:txFillClrLst meth="repeat">
+      <a:schemeClr val="lt1"/>
+    </dgm:txFillClrLst>
+    <dgm:txEffectClrLst/>
+  </dgm:styleLbl>
+  <dgm:styleLbl name="sibTrans1D1">
+    <dgm:fillClrLst/>
+    <dgm:linClrLst>
+      <a:schemeClr val="accent5"/>
+      <a:schemeClr val="accent6"/>
+    </dgm:linClrLst>
+    <dgm:effectClrLst/>
+    <dgm:txLinClrLst/>
+    <dgm:txFillClrLst meth="repeat">
+      <a:schemeClr val="tx1"/>
+    </dgm:txFillClrLst>
+    <dgm:txEffectClrLst/>
+  </dgm:styleLbl>
+  <dgm:styleLbl name="callout">
+    <dgm:fillClrLst meth="repeat">
+      <a:schemeClr val="accent5"/>
+    </dgm:fillClrLst>
+    <dgm:linClrLst meth="repeat">
+      <a:schemeClr val="accent5">
+        <a:tint val="50000"/>
+      </a:schemeClr>
+    </dgm:linClrLst>
+    <dgm:effectClrLst/>
+    <dgm:txLinClrLst/>
+    <dgm:txFillClrLst meth="repeat">
+      <a:schemeClr val="tx1"/>
+    </dgm:txFillClrLst>
+    <dgm:txEffectClrLst/>
+  </dgm:styleLbl>
+  <dgm:styleLbl name="asst0">
+    <dgm:fillClrLst meth="repeat">
+      <a:schemeClr val="accent5"/>
+    </dgm:fillClrLst>
+    <dgm:linClrLst meth="repeat">
+      <a:schemeClr val="lt1">
+        <a:shade val="80000"/>
+      </a:schemeClr>
+    </dgm:linClrLst>
+    <dgm:effectClrLst/>
+    <dgm:txLinClrLst/>
+    <dgm:txFillClrLst/>
+    <dgm:txEffectClrLst/>
+  </dgm:styleLbl>
+  <dgm:styleLbl name="asst1">
+    <dgm:fillClrLst meth="repeat">
+      <a:schemeClr val="accent6"/>
+    </dgm:fillClrLst>
+    <dgm:linClrLst meth="repeat">
+      <a:schemeClr val="lt1">
+        <a:shade val="80000"/>
+      </a:schemeClr>
+    </dgm:linClrLst>
+    <dgm:effectClrLst/>
+    <dgm:txLinClrLst/>
+    <dgm:txFillClrLst/>
+    <dgm:txEffectClrLst/>
+  </dgm:styleLbl>
+  <dgm:styleLbl name="asst2">
+    <dgm:fillClrLst>
+      <a:schemeClr val="accent1"/>
+    </dgm:fillClrLst>
+    <dgm:linClrLst meth="repeat">
+      <a:schemeClr val="lt1"/>
+    </dgm:linClrLst>
+    <dgm:effectClrLst/>
+    <dgm:txLinClrLst/>
+    <dgm:txFillClrLst/>
+    <dgm:txEffectClrLst/>
+  </dgm:styleLbl>
+  <dgm:styleLbl name="asst3">
+    <dgm:fillClrLst>
+      <a:schemeClr val="accent2"/>
+    </dgm:fillClrLst>
+    <dgm:linClrLst meth="repeat">
+      <a:schemeClr val="lt1"/>
+    </dgm:linClrLst>
+    <dgm:effectClrLst/>
+    <dgm:txLinClrLst/>
+    <dgm:txFillClrLst/>
+    <dgm:txEffectClrLst/>
+  </dgm:styleLbl>
+  <dgm:styleLbl name="asst4">
+    <dgm:fillClrLst>
+      <a:schemeClr val="accent3"/>
+    </dgm:fillClrLst>
+    <dgm:linClrLst meth="repeat">
+      <a:schemeClr val="lt1"/>
+    </dgm:linClrLst>
+    <dgm:effectClrLst/>
+    <dgm:txLinClrLst/>
+    <dgm:txFillClrLst/>
+    <dgm:txEffectClrLst/>
+  </dgm:styleLbl>
+  <dgm:styleLbl name="parChTrans2D1">
+    <dgm:fillClrLst meth="repeat">
+      <a:schemeClr val="accent5"/>
+    </dgm:fillClrLst>
+    <dgm:linClrLst meth="repeat">
+      <a:schemeClr val="lt1"/>
+    </dgm:linClrLst>
+    <dgm:effectClrLst/>
+    <dgm:txLinClrLst/>
+    <dgm:txFillClrLst meth="repeat">
+      <a:schemeClr val="lt1"/>
+    </dgm:txFillClrLst>
+    <dgm:txEffectClrLst/>
+  </dgm:styleLbl>
+  <dgm:styleLbl name="parChTrans2D2">
+    <dgm:fillClrLst meth="repeat">
+      <a:schemeClr val="accent6"/>
+    </dgm:fillClrLst>
+    <dgm:linClrLst meth="repeat">
+      <a:schemeClr val="lt1"/>
+    </dgm:linClrLst>
+    <dgm:effectClrLst/>
+    <dgm:txLinClrLst/>
+    <dgm:txFillClrLst/>
+    <dgm:txEffectClrLst/>
+  </dgm:styleLbl>
+  <dgm:styleLbl name="parChTrans2D3">
+    <dgm:fillClrLst meth="repeat">
+      <a:schemeClr val="accent6"/>
+    </dgm:fillClrLst>
+    <dgm:linClrLst meth="repeat">
+      <a:schemeClr val="lt1"/>
+    </dgm:linClrLst>
+    <dgm:effectClrLst/>
+    <dgm:txLinClrLst/>
+    <dgm:txFillClrLst/>
+    <dgm:txEffectClrLst/>
+  </dgm:styleLbl>
+  <dgm:styleLbl name="parChTrans2D4">
+    <dgm:fillClrLst meth="repeat">
+      <a:schemeClr val="accent1"/>
+    </dgm:fillClrLst>
+    <dgm:linClrLst meth="repeat">
+      <a:schemeClr val="lt1"/>
+    </dgm:linClrLst>
+    <dgm:effectClrLst/>
+    <dgm:txLinClrLst/>
+    <dgm:txFillClrLst meth="repeat">
+      <a:schemeClr val="lt1"/>
+    </dgm:txFillClrLst>
+    <dgm:txEffectClrLst/>
+  </dgm:styleLbl>
+  <dgm:styleLbl name="parChTrans1D1">
+    <dgm:fillClrLst meth="repeat">
+      <a:schemeClr val="accent5"/>
+    </dgm:fillClrLst>
+    <dgm:linClrLst meth="repeat">
+      <a:schemeClr val="accent5"/>
+    </dgm:linClrLst>
+    <dgm:effectClrLst/>
+    <dgm:txLinClrLst/>
+    <dgm:txFillClrLst meth="repeat">
+      <a:schemeClr val="tx1"/>
+    </dgm:txFillClrLst>
+    <dgm:txEffectClrLst/>
+  </dgm:styleLbl>
+  <dgm:styleLbl name="parChTrans1D2">
+    <dgm:fillClrLst meth="repeat">
+      <a:schemeClr val="accent6">
+        <a:tint val="90000"/>
+      </a:schemeClr>
+    </dgm:fillClrLst>
+    <dgm:linClrLst meth="repeat">
+      <a:schemeClr val="accent6"/>
+    </dgm:linClrLst>
+    <dgm:effectClrLst/>
+    <dgm:txLinClrLst/>
+    <dgm:txFillClrLst meth="repeat">
+      <a:schemeClr val="tx1"/>
+    </dgm:txFillClrLst>
+    <dgm:txEffectClrLst/>
+  </dgm:styleLbl>
+  <dgm:styleLbl name="parChTrans1D3">
+    <dgm:fillClrLst meth="repeat">
+      <a:schemeClr val="accent6">
+        <a:tint val="70000"/>
+      </a:schemeClr>
+    </dgm:fillClrLst>
+    <dgm:linClrLst meth="repeat">
+      <a:schemeClr val="accent1"/>
+    </dgm:linClrLst>
+    <dgm:effectClrLst/>
+    <dgm:txLinClrLst/>
+    <dgm:txFillClrLst meth="repeat">
+      <a:schemeClr val="tx1"/>
+    </dgm:txFillClrLst>
+    <dgm:txEffectClrLst/>
+  </dgm:styleLbl>
+  <dgm:styleLbl name="parChTrans1D4">
+    <dgm:fillClrLst meth="repeat">
+      <a:schemeClr val="accent6">
+        <a:tint val="50000"/>
+      </a:schemeClr>
+    </dgm:fillClrLst>
+    <dgm:linClrLst meth="repeat">
+      <a:schemeClr val="accent2"/>
+    </dgm:linClrLst>
+    <dgm:effectClrLst/>
+    <dgm:txLinClrLst/>
+    <dgm:txFillClrLst meth="repeat">
+      <a:schemeClr val="tx1"/>
+    </dgm:txFillClrLst>
+    <dgm:txEffectClrLst/>
+  </dgm:styleLbl>
+  <dgm:styleLbl name="fgAcc1">
+    <dgm:fillClrLst meth="repeat">
+      <a:schemeClr val="lt1">
+        <a:alpha val="90000"/>
+      </a:schemeClr>
+    </dgm:fillClrLst>
+    <dgm:linClrLst>
+      <a:schemeClr val="accent5"/>
+      <a:schemeClr val="accent6"/>
+    </dgm:linClrLst>
+    <dgm:effectClrLst/>
+    <dgm:txLinClrLst/>
+    <dgm:txFillClrLst meth="repeat">
+      <a:schemeClr val="dk1"/>
+    </dgm:txFillClrLst>
+    <dgm:txEffectClrLst/>
+  </dgm:styleLbl>
+  <dgm:styleLbl name="conFgAcc1">
+    <dgm:fillClrLst meth="repeat">
+      <a:schemeClr val="lt1">
+        <a:alpha val="90000"/>
+      </a:schemeClr>
+    </dgm:fillClrLst>
+    <dgm:linClrLst>
+      <a:schemeClr val="accent5"/>
+      <a:schemeClr val="accent6"/>
+    </dgm:linClrLst>
+    <dgm:effectClrLst/>
+    <dgm:txLinClrLst/>
+    <dgm:txFillClrLst meth="repeat">
+      <a:schemeClr val="dk1"/>
+    </dgm:txFillClrLst>
+    <dgm:txEffectClrLst/>
+  </dgm:styleLbl>
+  <dgm:styleLbl name="alignAcc1">
+    <dgm:fillClrLst meth="repeat">
+      <a:schemeClr val="lt1">
+        <a:alpha val="90000"/>
+      </a:schemeClr>
+    </dgm:fillClrLst>
+    <dgm:linClrLst>
+      <a:schemeClr val="accent5"/>
+      <a:schemeClr val="accent6"/>
+    </dgm:linClrLst>
+    <dgm:effectClrLst/>
+    <dgm:txLinClrLst/>
+    <dgm:txFillClrLst meth="repeat">
+      <a:schemeClr val="dk1"/>
+    </dgm:txFillClrLst>
+    <dgm:txEffectClrLst/>
+  </dgm:styleLbl>
+  <dgm:styleLbl name="trAlignAcc1">
+    <dgm:fillClrLst meth="repeat">
+      <a:schemeClr val="lt1">
+        <a:alpha val="40000"/>
+      </a:schemeClr>
+    </dgm:fillClrLst>
+    <dgm:linClrLst meth="repeat">
+      <a:schemeClr val="accent5"/>
+    </dgm:linClrLst>
+    <dgm:effectClrLst/>
+    <dgm:txLinClrLst/>
+    <dgm:txFillClrLst meth="repeat">
+      <a:schemeClr val="dk1"/>
+    </dgm:txFillClrLst>
+    <dgm:txEffectClrLst/>
+  </dgm:styleLbl>
+  <dgm:styleLbl name="bgAcc1">
+    <dgm:fillClrLst meth="repeat">
+      <a:schemeClr val="lt1">
+        <a:alpha val="90000"/>
+      </a:schemeClr>
+    </dgm:fillClrLst>
+    <dgm:linClrLst>
+      <a:schemeClr val="accent5"/>
+      <a:schemeClr val="accent6"/>
+    </dgm:linClrLst>
+    <dgm:effectClrLst/>
+    <dgm:txLinClrLst/>
+    <dgm:txFillClrLst meth="repeat">
+      <a:schemeClr val="dk1"/>
+    </dgm:txFillClrLst>
+    <dgm:txEffectClrLst/>
+  </dgm:styleLbl>
+  <dgm:styleLbl name="solidFgAcc1">
+    <dgm:fillClrLst meth="repeat">
+      <a:schemeClr val="lt1"/>
+    </dgm:fillClrLst>
+    <dgm:linClrLst>
+      <a:schemeClr val="accent5"/>
+      <a:schemeClr val="accent6"/>
+    </dgm:linClrLst>
+    <dgm:effectClrLst/>
+    <dgm:txLinClrLst/>
+    <dgm:txFillClrLst meth="repeat">
+      <a:schemeClr val="dk1"/>
+    </dgm:txFillClrLst>
+    <dgm:txEffectClrLst/>
+  </dgm:styleLbl>
+  <dgm:styleLbl name="solidAlignAcc1">
+    <dgm:fillClrLst meth="repeat">
+      <a:schemeClr val="lt1"/>
+    </dgm:fillClrLst>
+    <dgm:linClrLst>
+      <a:schemeClr val="accent5"/>
+      <a:schemeClr val="accent6"/>
+    </dgm:linClrLst>
+    <dgm:effectClrLst/>
+    <dgm:txLinClrLst/>
+    <dgm:txFillClrLst meth="repeat">
+      <a:schemeClr val="dk1"/>
+    </dgm:txFillClrLst>
+    <dgm:txEffectClrLst/>
+  </dgm:styleLbl>
+  <dgm:styleLbl name="solidBgAcc1">
+    <dgm:fillClrLst meth="repeat">
+      <a:schemeClr val="lt1"/>
+    </dgm:fillClrLst>
+    <dgm:linClrLst>
+      <a:schemeClr val="accent5"/>
+      <a:schemeClr val="accent6"/>
+    </dgm:linClrLst>
+    <dgm:effectClrLst/>
+    <dgm:txLinClrLst/>
+    <dgm:txFillClrLst meth="repeat">
+      <a:schemeClr val="dk1"/>
+    </dgm:txFillClrLst>
+    <dgm:txEffectClrLst/>
+  </dgm:styleLbl>
+  <dgm:styleLbl name="fgAccFollowNode1">
+    <dgm:fillClrLst>
+      <a:schemeClr val="accent5">
+        <a:tint val="40000"/>
+        <a:alpha val="90000"/>
+      </a:schemeClr>
+      <a:schemeClr val="accent6">
+        <a:tint val="40000"/>
+        <a:alpha val="90000"/>
+      </a:schemeClr>
+    </dgm:fillClrLst>
+    <dgm:linClrLst>
+      <a:schemeClr val="accent5">
+        <a:tint val="40000"/>
+        <a:alpha val="90000"/>
+      </a:schemeClr>
+      <a:schemeClr val="accent5">
+        <a:tint val="40000"/>
+        <a:alpha val="90000"/>
+      </a:schemeClr>
+    </dgm:linClrLst>
+    <dgm:effectClrLst/>
+    <dgm:txLinClrLst/>
+    <dgm:txFillClrLst meth="repeat">
+      <a:schemeClr val="dk1"/>
+    </dgm:txFillClrLst>
+    <dgm:txEffectClrLst/>
+  </dgm:styleLbl>
+  <dgm:styleLbl name="alignAccFollowNode1">
+    <dgm:fillClrLst>
+      <a:schemeClr val="accent5">
+        <a:tint val="40000"/>
+        <a:alpha val="90000"/>
+      </a:schemeClr>
+      <a:schemeClr val="accent6">
+        <a:tint val="40000"/>
+        <a:alpha val="90000"/>
+      </a:schemeClr>
+    </dgm:fillClrLst>
+    <dgm:linClrLst>
+      <a:schemeClr val="accent5">
+        <a:tint val="40000"/>
+        <a:alpha val="90000"/>
+      </a:schemeClr>
+      <a:schemeClr val="accent6">
+        <a:tint val="40000"/>
+        <a:alpha val="90000"/>
+      </a:schemeClr>
+    </dgm:linClrLst>
+    <dgm:effectClrLst/>
+    <dgm:txLinClrLst/>
+    <dgm:txFillClrLst meth="repeat">
+      <a:schemeClr val="dk1"/>
+    </dgm:txFillClrLst>
+    <dgm:txEffectClrLst/>
+  </dgm:styleLbl>
+  <dgm:styleLbl name="bgAccFollowNode1">
+    <dgm:fillClrLst>
+      <a:schemeClr val="accent5">
+        <a:tint val="40000"/>
+        <a:alpha val="90000"/>
+      </a:schemeClr>
+      <a:schemeClr val="accent6">
+        <a:tint val="40000"/>
+        <a:alpha val="90000"/>
+      </a:schemeClr>
+    </dgm:fillClrLst>
+    <dgm:linClrLst>
+      <a:schemeClr val="accent5">
+        <a:tint val="40000"/>
+        <a:alpha val="90000"/>
+      </a:schemeClr>
+      <a:schemeClr val="accent6">
+        <a:tint val="40000"/>
+        <a:alpha val="90000"/>
+      </a:schemeClr>
+    </dgm:linClrLst>
+    <dgm:effectClrLst/>
+    <dgm:txLinClrLst/>
+    <dgm:txFillClrLst meth="repeat">
+      <a:schemeClr val="dk1"/>
+    </dgm:txFillClrLst>
+    <dgm:txEffectClrLst/>
+  </dgm:styleLbl>
+  <dgm:styleLbl name="fgAcc0">
+    <dgm:fillClrLst meth="repeat">
+      <a:schemeClr val="lt1">
+        <a:alpha val="90000"/>
+      </a:schemeClr>
+    </dgm:fillClrLst>
+    <dgm:linClrLst>
+      <a:schemeClr val="accent4"/>
+    </dgm:linClrLst>
+    <dgm:effectClrLst/>
+    <dgm:txLinClrLst/>
+    <dgm:txFillClrLst meth="repeat">
+      <a:schemeClr val="dk1"/>
+    </dgm:txFillClrLst>
+    <dgm:txEffectClrLst/>
+  </dgm:styleLbl>
+  <dgm:styleLbl name="fgAcc2">
+    <dgm:fillClrLst meth="repeat">
+      <a:schemeClr val="lt1">
+        <a:alpha val="90000"/>
+      </a:schemeClr>
+    </dgm:fillClrLst>
+    <dgm:linClrLst>
+      <a:schemeClr val="accent6"/>
+    </dgm:linClrLst>
+    <dgm:effectClrLst/>
+    <dgm:txLinClrLst/>
+    <dgm:txFillClrLst meth="repeat">
+      <a:schemeClr val="dk1"/>
+    </dgm:txFillClrLst>
+    <dgm:txEffectClrLst/>
+  </dgm:styleLbl>
+  <dgm:styleLbl name="fgAcc3">
+    <dgm:fillClrLst meth="repeat">
+      <a:schemeClr val="lt1">
+        <a:alpha val="90000"/>
+      </a:schemeClr>
+    </dgm:fillClrLst>
+    <dgm:linClrLst>
+      <a:schemeClr val="accent1"/>
+    </dgm:linClrLst>
+    <dgm:effectClrLst/>
+    <dgm:txLinClrLst/>
+    <dgm:txFillClrLst meth="repeat">
+      <a:schemeClr val="dk1"/>
+    </dgm:txFillClrLst>
+    <dgm:txEffectClrLst/>
+  </dgm:styleLbl>
+  <dgm:styleLbl name="fgAcc4">
+    <dgm:fillClrLst meth="repeat">
+      <a:schemeClr val="lt1">
+        <a:alpha val="90000"/>
+      </a:schemeClr>
+    </dgm:fillClrLst>
+    <dgm:linClrLst>
+      <a:schemeClr val="accent2"/>
+    </dgm:linClrLst>
+    <dgm:effectClrLst/>
+    <dgm:txLinClrLst/>
+    <dgm:txFillClrLst meth="repeat">
+      <a:schemeClr val="dk1"/>
+    </dgm:txFillClrLst>
+    <dgm:txEffectClrLst/>
+  </dgm:styleLbl>
+  <dgm:styleLbl name="bgShp">
+    <dgm:fillClrLst meth="repeat">
+      <a:schemeClr val="accent5">
+        <a:tint val="40000"/>
+      </a:schemeClr>
+    </dgm:fillClrLst>
+    <dgm:linClrLst meth="repeat">
+      <a:schemeClr val="dk1"/>
+    </dgm:linClrLst>
+    <dgm:effectClrLst/>
+    <dgm:txLinClrLst/>
+    <dgm:txFillClrLst meth="repeat">
+      <a:schemeClr val="dk1"/>
+    </dgm:txFillClrLst>
+    <dgm:txEffectClrLst/>
+  </dgm:styleLbl>
+  <dgm:styleLbl name="dkBgShp">
+    <dgm:fillClrLst meth="repeat">
+      <a:schemeClr val="accent5">
+        <a:shade val="90000"/>
+      </a:schemeClr>
+    </dgm:fillClrLst>
+    <dgm:linClrLst meth="repeat">
+      <a:schemeClr val="dk1"/>
+    </dgm:linClrLst>
+    <dgm:effectClrLst/>
+    <dgm:txLinClrLst/>
+    <dgm:txFillClrLst meth="repeat">
+      <a:schemeClr val="lt1"/>
+    </dgm:txFillClrLst>
+    <dgm:txEffectClrLst/>
+  </dgm:styleLbl>
+  <dgm:styleLbl name="trBgShp">
+    <dgm:fillClrLst meth="repeat">
+      <a:schemeClr val="accent5">
+        <a:tint val="50000"/>
+        <a:alpha val="40000"/>
+      </a:schemeClr>
+    </dgm:fillClrLst>
+    <dgm:linClrLst meth="repeat">
+      <a:schemeClr val="accent5"/>
+    </dgm:linClrLst>
+    <dgm:effectClrLst/>
+    <dgm:txLinClrLst/>
+    <dgm:txFillClrLst meth="repeat">
+      <a:schemeClr val="lt1"/>
+    </dgm:txFillClrLst>
+    <dgm:txEffectClrLst/>
+  </dgm:styleLbl>
+  <dgm:styleLbl name="fgShp">
+    <dgm:fillClrLst meth="repeat">
+      <a:schemeClr val="accent5">
+        <a:tint val="40000"/>
+      </a:schemeClr>
+    </dgm:fillClrLst>
+    <dgm:linClrLst meth="repeat">
+      <a:schemeClr val="lt1"/>
+    </dgm:linClrLst>
+    <dgm:effectClrLst/>
+    <dgm:txLinClrLst/>
+    <dgm:txFillClrLst meth="repeat">
+      <a:schemeClr val="dk1"/>
+    </dgm:txFillClrLst>
+    <dgm:txEffectClrLst/>
+  </dgm:styleLbl>
+  <dgm:styleLbl name="revTx">
+    <dgm:fillClrLst meth="repeat">
+      <a:schemeClr val="lt1">
+        <a:alpha val="0"/>
+      </a:schemeClr>
+    </dgm:fillClrLst>
+    <dgm:linClrLst meth="repeat">
+      <a:schemeClr val="dk1">
+        <a:alpha val="0"/>
+      </a:schemeClr>
+    </dgm:linClrLst>
+    <dgm:effectClrLst/>
+    <dgm:txLinClrLst/>
+    <dgm:txFillClrLst meth="repeat">
+      <a:schemeClr val="tx1"/>
+    </dgm:txFillClrLst>
+    <dgm:txEffectClrLst/>
+  </dgm:styleLbl>
+</dgm:colorsDef>
+</file>
+
+<file path=ppt/diagrams/data1.xml><?xml version="1.0" encoding="utf-8"?>
+<dgm:dataModel xmlns:dgm="http://schemas.openxmlformats.org/drawingml/2006/diagram" xmlns:a="http://schemas.openxmlformats.org/drawingml/2006/main">
+  <dgm:ptLst>
+    <dgm:pt modelId="{A05FCE4D-90FD-41FD-88EB-A6FD254A9997}" type="doc">
+      <dgm:prSet loTypeId="urn:microsoft.com/office/officeart/2005/8/layout/orgChart1" loCatId="hierarchy" qsTypeId="urn:microsoft.com/office/officeart/2005/8/quickstyle/simple1" qsCatId="simple" csTypeId="urn:microsoft.com/office/officeart/2005/8/colors/colorful5" csCatId="colorful" phldr="1"/>
+      <dgm:spPr/>
+      <dgm:t>
+        <a:bodyPr/>
+        <a:lstStyle/>
+        <a:p>
+          <a:endParaRPr lang="zh-CN" altLang="en-US"/>
+        </a:p>
+      </dgm:t>
+    </dgm:pt>
+    <dgm:pt modelId="{874DA85B-E367-4D3A-86C5-1A5E1C6465D1}">
+      <dgm:prSet phldrT="[文本]" phldr="0"/>
+      <dgm:spPr/>
+      <dgm:t>
+        <a:bodyPr/>
+        <a:lstStyle/>
+        <a:p>
+          <a:r>
+            <a:rPr lang="en-US" altLang="zh-CN" dirty="0"/>
+            <a:t>Frontend Container</a:t>
+          </a:r>
+          <a:endParaRPr lang="zh-CN" altLang="en-US" dirty="0"/>
+        </a:p>
+      </dgm:t>
+    </dgm:pt>
+    <dgm:pt modelId="{F5F61BAA-205A-4CA8-A26C-29FD5EF4AA86}" type="parTrans" cxnId="{A4DD242A-9C99-48CF-A547-474C45967532}">
+      <dgm:prSet/>
+      <dgm:spPr/>
+      <dgm:t>
+        <a:bodyPr/>
+        <a:lstStyle/>
+        <a:p>
+          <a:endParaRPr lang="zh-CN" altLang="en-US"/>
+        </a:p>
+      </dgm:t>
+    </dgm:pt>
+    <dgm:pt modelId="{DE718838-6415-442E-9FD5-37E0EC81266C}" type="sibTrans" cxnId="{A4DD242A-9C99-48CF-A547-474C45967532}">
+      <dgm:prSet/>
+      <dgm:spPr/>
+      <dgm:t>
+        <a:bodyPr/>
+        <a:lstStyle/>
+        <a:p>
+          <a:endParaRPr lang="zh-CN" altLang="en-US"/>
+        </a:p>
+      </dgm:t>
+    </dgm:pt>
+    <dgm:pt modelId="{9B07D928-68FF-4D05-9675-239D95B47FCA}" type="asst">
+      <dgm:prSet phldrT="[文本]" phldr="0"/>
+      <dgm:spPr/>
+      <dgm:t>
+        <a:bodyPr/>
+        <a:lstStyle/>
+        <a:p>
+          <a:r>
+            <a:rPr lang="en-US" altLang="zh-CN" dirty="0"/>
+            <a:t>Include:</a:t>
+          </a:r>
+        </a:p>
+        <a:p>
+          <a:r>
+            <a:rPr lang="en-US" altLang="zh-CN" dirty="0"/>
+            <a:t>MongoDB</a:t>
+          </a:r>
+        </a:p>
+        <a:p>
+          <a:r>
+            <a:rPr lang="en-US" altLang="zh-CN" dirty="0"/>
+            <a:t>Chatbot</a:t>
+          </a:r>
+          <a:endParaRPr lang="zh-CN" altLang="en-US" dirty="0"/>
+        </a:p>
+      </dgm:t>
+    </dgm:pt>
+    <dgm:pt modelId="{DD2F5800-2731-4447-9EE7-4A949D38EA17}" type="parTrans" cxnId="{47FAC134-B06C-4526-8E05-AEFA44B93F20}">
+      <dgm:prSet/>
+      <dgm:spPr/>
+      <dgm:t>
+        <a:bodyPr/>
+        <a:lstStyle/>
+        <a:p>
+          <a:endParaRPr lang="zh-CN" altLang="en-US"/>
+        </a:p>
+      </dgm:t>
+    </dgm:pt>
+    <dgm:pt modelId="{1F842897-1411-4CE3-8C67-0D3B71948D08}" type="sibTrans" cxnId="{47FAC134-B06C-4526-8E05-AEFA44B93F20}">
+      <dgm:prSet/>
+      <dgm:spPr/>
+      <dgm:t>
+        <a:bodyPr/>
+        <a:lstStyle/>
+        <a:p>
+          <a:endParaRPr lang="zh-CN" altLang="en-US"/>
+        </a:p>
+      </dgm:t>
+    </dgm:pt>
+    <dgm:pt modelId="{5D7B0104-6236-4A40-B98F-324F4FDD065B}">
+      <dgm:prSet phldrT="[文本]" phldr="0"/>
+      <dgm:spPr/>
+      <dgm:t>
+        <a:bodyPr/>
+        <a:lstStyle/>
+        <a:p>
+          <a:r>
+            <a:rPr lang="en-US" altLang="zh-CN" dirty="0"/>
+            <a:t>Backend 1</a:t>
+          </a:r>
+          <a:endParaRPr lang="zh-CN" altLang="en-US" dirty="0"/>
+        </a:p>
+      </dgm:t>
+    </dgm:pt>
+    <dgm:pt modelId="{3DF04021-657A-4826-8450-57C37B3183F7}" type="parTrans" cxnId="{AA7CF708-CC68-4FE6-8378-7FF879B8547D}">
+      <dgm:prSet/>
+      <dgm:spPr/>
+      <dgm:t>
+        <a:bodyPr/>
+        <a:lstStyle/>
+        <a:p>
+          <a:endParaRPr lang="zh-CN" altLang="en-US"/>
+        </a:p>
+      </dgm:t>
+    </dgm:pt>
+    <dgm:pt modelId="{243A0C9B-BB44-467B-BF3F-16B537069DA7}" type="sibTrans" cxnId="{AA7CF708-CC68-4FE6-8378-7FF879B8547D}">
+      <dgm:prSet/>
+      <dgm:spPr/>
+      <dgm:t>
+        <a:bodyPr/>
+        <a:lstStyle/>
+        <a:p>
+          <a:endParaRPr lang="zh-CN" altLang="en-US"/>
+        </a:p>
+      </dgm:t>
+    </dgm:pt>
+    <dgm:pt modelId="{23B7E807-966C-4274-B79C-9C1C83818DA2}">
+      <dgm:prSet phldrT="[文本]"/>
+      <dgm:spPr/>
+      <dgm:t>
+        <a:bodyPr/>
+        <a:lstStyle/>
+        <a:p>
+          <a:r>
+            <a:rPr lang="en-US" altLang="zh-CN" dirty="0"/>
+            <a:t>Backend 2</a:t>
+          </a:r>
+          <a:endParaRPr lang="zh-CN" altLang="en-US" dirty="0"/>
+        </a:p>
+      </dgm:t>
+    </dgm:pt>
+    <dgm:pt modelId="{395AB341-D678-4A3E-B49F-06D0146E51B9}" type="parTrans" cxnId="{77C75A6E-CA73-438F-B718-791A7D3CCE3D}">
+      <dgm:prSet/>
+      <dgm:spPr/>
+      <dgm:t>
+        <a:bodyPr/>
+        <a:lstStyle/>
+        <a:p>
+          <a:endParaRPr lang="zh-CN" altLang="en-US"/>
+        </a:p>
+      </dgm:t>
+    </dgm:pt>
+    <dgm:pt modelId="{70851556-0C29-4024-8165-A2FE5991E0B6}" type="sibTrans" cxnId="{77C75A6E-CA73-438F-B718-791A7D3CCE3D}">
+      <dgm:prSet/>
+      <dgm:spPr/>
+      <dgm:t>
+        <a:bodyPr/>
+        <a:lstStyle/>
+        <a:p>
+          <a:endParaRPr lang="zh-CN" altLang="en-US"/>
+        </a:p>
+      </dgm:t>
+    </dgm:pt>
+    <dgm:pt modelId="{778C5749-1B37-4C68-A444-6D8021F6EA4C}">
+      <dgm:prSet phldrT="[文本]"/>
+      <dgm:spPr/>
+      <dgm:t>
+        <a:bodyPr/>
+        <a:lstStyle/>
+        <a:p>
+          <a:r>
+            <a:rPr lang="en-US" altLang="zh-CN" dirty="0"/>
+            <a:t>Backend x+1…</a:t>
+          </a:r>
+          <a:endParaRPr lang="zh-CN" altLang="en-US" dirty="0"/>
+        </a:p>
+      </dgm:t>
+    </dgm:pt>
+    <dgm:pt modelId="{E378F93C-DEB2-4F11-9B44-019775B37971}" type="parTrans" cxnId="{CA059019-11AD-4537-B9C6-B37375EC88C2}">
+      <dgm:prSet/>
+      <dgm:spPr/>
+      <dgm:t>
+        <a:bodyPr/>
+        <a:lstStyle/>
+        <a:p>
+          <a:endParaRPr lang="zh-CN" altLang="en-US"/>
+        </a:p>
+      </dgm:t>
+    </dgm:pt>
+    <dgm:pt modelId="{E3299372-3CA5-42A3-B3AF-3A22535FDCA1}" type="sibTrans" cxnId="{CA059019-11AD-4537-B9C6-B37375EC88C2}">
+      <dgm:prSet/>
+      <dgm:spPr/>
+      <dgm:t>
+        <a:bodyPr/>
+        <a:lstStyle/>
+        <a:p>
+          <a:endParaRPr lang="zh-CN" altLang="en-US"/>
+        </a:p>
+      </dgm:t>
+    </dgm:pt>
+    <dgm:pt modelId="{2CC65EF9-49C7-4ED8-B1CB-FB9DEC56AE9C}" type="pres">
+      <dgm:prSet presAssocID="{A05FCE4D-90FD-41FD-88EB-A6FD254A9997}" presName="hierChild1" presStyleCnt="0">
+        <dgm:presLayoutVars>
+          <dgm:orgChart val="1"/>
+          <dgm:chPref val="1"/>
+          <dgm:dir/>
+          <dgm:animOne val="branch"/>
+          <dgm:animLvl val="lvl"/>
+          <dgm:resizeHandles/>
+        </dgm:presLayoutVars>
+      </dgm:prSet>
+      <dgm:spPr/>
+    </dgm:pt>
+    <dgm:pt modelId="{AD596F73-44C7-44A9-943F-45F284383D68}" type="pres">
+      <dgm:prSet presAssocID="{874DA85B-E367-4D3A-86C5-1A5E1C6465D1}" presName="hierRoot1" presStyleCnt="0">
+        <dgm:presLayoutVars>
+          <dgm:hierBranch val="init"/>
+        </dgm:presLayoutVars>
+      </dgm:prSet>
+      <dgm:spPr/>
+    </dgm:pt>
+    <dgm:pt modelId="{8892971E-27E1-4E03-8B83-1234BF1D390B}" type="pres">
+      <dgm:prSet presAssocID="{874DA85B-E367-4D3A-86C5-1A5E1C6465D1}" presName="rootComposite1" presStyleCnt="0"/>
+      <dgm:spPr/>
+    </dgm:pt>
+    <dgm:pt modelId="{FAAE79A0-D520-4CE3-A8BD-6A3EF25F236F}" type="pres">
+      <dgm:prSet presAssocID="{874DA85B-E367-4D3A-86C5-1A5E1C6465D1}" presName="rootText1" presStyleLbl="node0" presStyleIdx="0" presStyleCnt="1" custScaleX="196326">
+        <dgm:presLayoutVars>
+          <dgm:chPref val="3"/>
+        </dgm:presLayoutVars>
+      </dgm:prSet>
+      <dgm:spPr/>
+    </dgm:pt>
+    <dgm:pt modelId="{33C3F2DD-4632-4B5F-860A-6284347C1342}" type="pres">
+      <dgm:prSet presAssocID="{874DA85B-E367-4D3A-86C5-1A5E1C6465D1}" presName="rootConnector1" presStyleLbl="node1" presStyleIdx="0" presStyleCnt="0"/>
+      <dgm:spPr/>
+    </dgm:pt>
+    <dgm:pt modelId="{387CDB7E-5680-4F98-892D-34D2D2572BF2}" type="pres">
+      <dgm:prSet presAssocID="{874DA85B-E367-4D3A-86C5-1A5E1C6465D1}" presName="hierChild2" presStyleCnt="0"/>
+      <dgm:spPr/>
+    </dgm:pt>
+    <dgm:pt modelId="{327639FE-F540-4C30-8FFA-9034DBEF4BCB}" type="pres">
+      <dgm:prSet presAssocID="{3DF04021-657A-4826-8450-57C37B3183F7}" presName="Name37" presStyleLbl="parChTrans1D2" presStyleIdx="0" presStyleCnt="4"/>
+      <dgm:spPr/>
+    </dgm:pt>
+    <dgm:pt modelId="{E0A77DB3-73F9-479B-BE90-0467F6AB28C7}" type="pres">
+      <dgm:prSet presAssocID="{5D7B0104-6236-4A40-B98F-324F4FDD065B}" presName="hierRoot2" presStyleCnt="0">
+        <dgm:presLayoutVars>
+          <dgm:hierBranch val="init"/>
+        </dgm:presLayoutVars>
+      </dgm:prSet>
+      <dgm:spPr/>
+    </dgm:pt>
+    <dgm:pt modelId="{8F0495A5-A63A-40EB-BD0D-ECB340F61B37}" type="pres">
+      <dgm:prSet presAssocID="{5D7B0104-6236-4A40-B98F-324F4FDD065B}" presName="rootComposite" presStyleCnt="0"/>
+      <dgm:spPr/>
+    </dgm:pt>
+    <dgm:pt modelId="{43CFBBA5-A213-48E6-9DF7-72CDDD1813BF}" type="pres">
+      <dgm:prSet presAssocID="{5D7B0104-6236-4A40-B98F-324F4FDD065B}" presName="rootText" presStyleLbl="node2" presStyleIdx="0" presStyleCnt="3" custLinFactNeighborX="-7513" custLinFactNeighborY="-45008">
+        <dgm:presLayoutVars>
+          <dgm:chPref val="3"/>
+        </dgm:presLayoutVars>
+      </dgm:prSet>
+      <dgm:spPr/>
+    </dgm:pt>
+    <dgm:pt modelId="{51C0B8C1-0A55-48B0-A938-27CA90AD11ED}" type="pres">
+      <dgm:prSet presAssocID="{5D7B0104-6236-4A40-B98F-324F4FDD065B}" presName="rootConnector" presStyleLbl="node2" presStyleIdx="0" presStyleCnt="3"/>
+      <dgm:spPr/>
+    </dgm:pt>
+    <dgm:pt modelId="{62DF7FFA-7F2F-414D-96F6-4B3E626CC1E7}" type="pres">
+      <dgm:prSet presAssocID="{5D7B0104-6236-4A40-B98F-324F4FDD065B}" presName="hierChild4" presStyleCnt="0"/>
+      <dgm:spPr/>
+    </dgm:pt>
+    <dgm:pt modelId="{0B202549-C142-4927-B135-B7583DCA2649}" type="pres">
+      <dgm:prSet presAssocID="{5D7B0104-6236-4A40-B98F-324F4FDD065B}" presName="hierChild5" presStyleCnt="0"/>
+      <dgm:spPr/>
+    </dgm:pt>
+    <dgm:pt modelId="{D6366EE1-10FE-402A-89FC-1050616593C8}" type="pres">
+      <dgm:prSet presAssocID="{395AB341-D678-4A3E-B49F-06D0146E51B9}" presName="Name37" presStyleLbl="parChTrans1D2" presStyleIdx="1" presStyleCnt="4"/>
+      <dgm:spPr/>
+    </dgm:pt>
+    <dgm:pt modelId="{2543B06E-7552-41E4-8A3B-B313DC7A7599}" type="pres">
+      <dgm:prSet presAssocID="{23B7E807-966C-4274-B79C-9C1C83818DA2}" presName="hierRoot2" presStyleCnt="0">
+        <dgm:presLayoutVars>
+          <dgm:hierBranch val="init"/>
+        </dgm:presLayoutVars>
+      </dgm:prSet>
+      <dgm:spPr/>
+    </dgm:pt>
+    <dgm:pt modelId="{E8B8FBBB-2478-4B7B-ACE2-DAEB2B4D0F27}" type="pres">
+      <dgm:prSet presAssocID="{23B7E807-966C-4274-B79C-9C1C83818DA2}" presName="rootComposite" presStyleCnt="0"/>
+      <dgm:spPr/>
+    </dgm:pt>
+    <dgm:pt modelId="{842D7D13-66FB-401B-9C77-CCE138DD428C}" type="pres">
+      <dgm:prSet presAssocID="{23B7E807-966C-4274-B79C-9C1C83818DA2}" presName="rootText" presStyleLbl="node2" presStyleIdx="1" presStyleCnt="3" custLinFactNeighborX="-12103" custLinFactNeighborY="-45008">
+        <dgm:presLayoutVars>
+          <dgm:chPref val="3"/>
+        </dgm:presLayoutVars>
+      </dgm:prSet>
+      <dgm:spPr/>
+    </dgm:pt>
+    <dgm:pt modelId="{503A2908-F6EE-49F1-9044-AB7C584223BB}" type="pres">
+      <dgm:prSet presAssocID="{23B7E807-966C-4274-B79C-9C1C83818DA2}" presName="rootConnector" presStyleLbl="node2" presStyleIdx="1" presStyleCnt="3"/>
+      <dgm:spPr/>
+    </dgm:pt>
+    <dgm:pt modelId="{C80185B8-ADEB-4568-87DF-029F476ED431}" type="pres">
+      <dgm:prSet presAssocID="{23B7E807-966C-4274-B79C-9C1C83818DA2}" presName="hierChild4" presStyleCnt="0"/>
+      <dgm:spPr/>
+    </dgm:pt>
+    <dgm:pt modelId="{C3B78188-D3E9-40DD-9AFB-F4D988240E47}" type="pres">
+      <dgm:prSet presAssocID="{23B7E807-966C-4274-B79C-9C1C83818DA2}" presName="hierChild5" presStyleCnt="0"/>
+      <dgm:spPr/>
+    </dgm:pt>
+    <dgm:pt modelId="{19541E03-EF1F-4991-BB42-A1D92855A169}" type="pres">
+      <dgm:prSet presAssocID="{E378F93C-DEB2-4F11-9B44-019775B37971}" presName="Name37" presStyleLbl="parChTrans1D2" presStyleIdx="2" presStyleCnt="4"/>
+      <dgm:spPr/>
+    </dgm:pt>
+    <dgm:pt modelId="{4F96509C-0B6B-4931-8300-08DEFCF67D0C}" type="pres">
+      <dgm:prSet presAssocID="{778C5749-1B37-4C68-A444-6D8021F6EA4C}" presName="hierRoot2" presStyleCnt="0">
+        <dgm:presLayoutVars>
+          <dgm:hierBranch val="init"/>
+        </dgm:presLayoutVars>
+      </dgm:prSet>
+      <dgm:spPr/>
+    </dgm:pt>
+    <dgm:pt modelId="{D15844D3-ED90-4700-97C6-D48AE9A3DA23}" type="pres">
+      <dgm:prSet presAssocID="{778C5749-1B37-4C68-A444-6D8021F6EA4C}" presName="rootComposite" presStyleCnt="0"/>
+      <dgm:spPr/>
+    </dgm:pt>
+    <dgm:pt modelId="{639832EB-502F-47A5-9988-40AA46CE6705}" type="pres">
+      <dgm:prSet presAssocID="{778C5749-1B37-4C68-A444-6D8021F6EA4C}" presName="rootText" presStyleLbl="node2" presStyleIdx="2" presStyleCnt="3" custLinFactNeighborX="-25994" custLinFactNeighborY="-44961">
+        <dgm:presLayoutVars>
+          <dgm:chPref val="3"/>
+        </dgm:presLayoutVars>
+      </dgm:prSet>
+      <dgm:spPr/>
+    </dgm:pt>
+    <dgm:pt modelId="{993F8F10-4275-4EBC-A673-318661D6A52C}" type="pres">
+      <dgm:prSet presAssocID="{778C5749-1B37-4C68-A444-6D8021F6EA4C}" presName="rootConnector" presStyleLbl="node2" presStyleIdx="2" presStyleCnt="3"/>
+      <dgm:spPr/>
+    </dgm:pt>
+    <dgm:pt modelId="{5AD79911-A7E4-4E02-875E-30511169FF1E}" type="pres">
+      <dgm:prSet presAssocID="{778C5749-1B37-4C68-A444-6D8021F6EA4C}" presName="hierChild4" presStyleCnt="0"/>
+      <dgm:spPr/>
+    </dgm:pt>
+    <dgm:pt modelId="{B622F61F-A9AE-46AE-BD5D-231963125A48}" type="pres">
+      <dgm:prSet presAssocID="{778C5749-1B37-4C68-A444-6D8021F6EA4C}" presName="hierChild5" presStyleCnt="0"/>
+      <dgm:spPr/>
+    </dgm:pt>
+    <dgm:pt modelId="{6532266B-0F74-4387-9EF7-3B8381ABFB94}" type="pres">
+      <dgm:prSet presAssocID="{874DA85B-E367-4D3A-86C5-1A5E1C6465D1}" presName="hierChild3" presStyleCnt="0"/>
+      <dgm:spPr/>
+    </dgm:pt>
+    <dgm:pt modelId="{646D7FDC-1039-46C1-AE6D-73E5F827B4F1}" type="pres">
+      <dgm:prSet presAssocID="{DD2F5800-2731-4447-9EE7-4A949D38EA17}" presName="Name111" presStyleLbl="parChTrans1D2" presStyleIdx="3" presStyleCnt="4"/>
+      <dgm:spPr/>
+    </dgm:pt>
+    <dgm:pt modelId="{F20144DB-DF64-49AB-913E-D29A1D6134BE}" type="pres">
+      <dgm:prSet presAssocID="{9B07D928-68FF-4D05-9675-239D95B47FCA}" presName="hierRoot3" presStyleCnt="0">
+        <dgm:presLayoutVars>
+          <dgm:hierBranch val="init"/>
+        </dgm:presLayoutVars>
+      </dgm:prSet>
+      <dgm:spPr/>
+    </dgm:pt>
+    <dgm:pt modelId="{1ACDC5AB-EB5F-455D-925B-58BB15BAD499}" type="pres">
+      <dgm:prSet presAssocID="{9B07D928-68FF-4D05-9675-239D95B47FCA}" presName="rootComposite3" presStyleCnt="0"/>
+      <dgm:spPr/>
+    </dgm:pt>
+    <dgm:pt modelId="{0D714421-A442-4376-A653-D7B450AE76DE}" type="pres">
+      <dgm:prSet presAssocID="{9B07D928-68FF-4D05-9675-239D95B47FCA}" presName="rootText3" presStyleLbl="asst1" presStyleIdx="0" presStyleCnt="1" custScaleX="87326" custScaleY="90782" custLinFactX="84382" custLinFactY="-100000" custLinFactNeighborX="100000" custLinFactNeighborY="-153304">
+        <dgm:presLayoutVars>
+          <dgm:chPref val="3"/>
+        </dgm:presLayoutVars>
+      </dgm:prSet>
+      <dgm:spPr/>
+    </dgm:pt>
+    <dgm:pt modelId="{25A80182-CE6C-4D74-986F-DB2DEFFD97B2}" type="pres">
+      <dgm:prSet presAssocID="{9B07D928-68FF-4D05-9675-239D95B47FCA}" presName="rootConnector3" presStyleLbl="asst1" presStyleIdx="0" presStyleCnt="1"/>
+      <dgm:spPr/>
+    </dgm:pt>
+    <dgm:pt modelId="{E5637617-62DB-4712-9BB5-6263E38A8E8C}" type="pres">
+      <dgm:prSet presAssocID="{9B07D928-68FF-4D05-9675-239D95B47FCA}" presName="hierChild6" presStyleCnt="0"/>
+      <dgm:spPr/>
+    </dgm:pt>
+    <dgm:pt modelId="{37049DB7-18EB-4778-B126-BD2A11A91FD8}" type="pres">
+      <dgm:prSet presAssocID="{9B07D928-68FF-4D05-9675-239D95B47FCA}" presName="hierChild7" presStyleCnt="0"/>
+      <dgm:spPr/>
+    </dgm:pt>
+  </dgm:ptLst>
+  <dgm:cxnLst>
+    <dgm:cxn modelId="{1BD57F02-C0A4-42BB-AF10-ADB51168AF1E}" type="presOf" srcId="{23B7E807-966C-4274-B79C-9C1C83818DA2}" destId="{503A2908-F6EE-49F1-9044-AB7C584223BB}" srcOrd="1" destOrd="0" presId="urn:microsoft.com/office/officeart/2005/8/layout/orgChart1"/>
+    <dgm:cxn modelId="{AA7CF708-CC68-4FE6-8378-7FF879B8547D}" srcId="{874DA85B-E367-4D3A-86C5-1A5E1C6465D1}" destId="{5D7B0104-6236-4A40-B98F-324F4FDD065B}" srcOrd="1" destOrd="0" parTransId="{3DF04021-657A-4826-8450-57C37B3183F7}" sibTransId="{243A0C9B-BB44-467B-BF3F-16B537069DA7}"/>
+    <dgm:cxn modelId="{8AEC4A0D-BDB3-4C2B-A509-26442110BDA4}" type="presOf" srcId="{5D7B0104-6236-4A40-B98F-324F4FDD065B}" destId="{51C0B8C1-0A55-48B0-A938-27CA90AD11ED}" srcOrd="1" destOrd="0" presId="urn:microsoft.com/office/officeart/2005/8/layout/orgChart1"/>
+    <dgm:cxn modelId="{CA059019-11AD-4537-B9C6-B37375EC88C2}" srcId="{874DA85B-E367-4D3A-86C5-1A5E1C6465D1}" destId="{778C5749-1B37-4C68-A444-6D8021F6EA4C}" srcOrd="3" destOrd="0" parTransId="{E378F93C-DEB2-4F11-9B44-019775B37971}" sibTransId="{E3299372-3CA5-42A3-B3AF-3A22535FDCA1}"/>
+    <dgm:cxn modelId="{09D99428-F7CB-4644-8677-B0EF0D266CBB}" type="presOf" srcId="{9B07D928-68FF-4D05-9675-239D95B47FCA}" destId="{0D714421-A442-4376-A653-D7B450AE76DE}" srcOrd="0" destOrd="0" presId="urn:microsoft.com/office/officeart/2005/8/layout/orgChart1"/>
+    <dgm:cxn modelId="{A4DD242A-9C99-48CF-A547-474C45967532}" srcId="{A05FCE4D-90FD-41FD-88EB-A6FD254A9997}" destId="{874DA85B-E367-4D3A-86C5-1A5E1C6465D1}" srcOrd="0" destOrd="0" parTransId="{F5F61BAA-205A-4CA8-A26C-29FD5EF4AA86}" sibTransId="{DE718838-6415-442E-9FD5-37E0EC81266C}"/>
+    <dgm:cxn modelId="{52F42F2B-80A9-4E84-ABCC-41E82B614836}" type="presOf" srcId="{5D7B0104-6236-4A40-B98F-324F4FDD065B}" destId="{43CFBBA5-A213-48E6-9DF7-72CDDD1813BF}" srcOrd="0" destOrd="0" presId="urn:microsoft.com/office/officeart/2005/8/layout/orgChart1"/>
+    <dgm:cxn modelId="{47FAC134-B06C-4526-8E05-AEFA44B93F20}" srcId="{874DA85B-E367-4D3A-86C5-1A5E1C6465D1}" destId="{9B07D928-68FF-4D05-9675-239D95B47FCA}" srcOrd="0" destOrd="0" parTransId="{DD2F5800-2731-4447-9EE7-4A949D38EA17}" sibTransId="{1F842897-1411-4CE3-8C67-0D3B71948D08}"/>
+    <dgm:cxn modelId="{AEB3A85C-ABCB-4B34-93E7-D70E7A383DB3}" type="presOf" srcId="{874DA85B-E367-4D3A-86C5-1A5E1C6465D1}" destId="{33C3F2DD-4632-4B5F-860A-6284347C1342}" srcOrd="1" destOrd="0" presId="urn:microsoft.com/office/officeart/2005/8/layout/orgChart1"/>
+    <dgm:cxn modelId="{77C75A6E-CA73-438F-B718-791A7D3CCE3D}" srcId="{874DA85B-E367-4D3A-86C5-1A5E1C6465D1}" destId="{23B7E807-966C-4274-B79C-9C1C83818DA2}" srcOrd="2" destOrd="0" parTransId="{395AB341-D678-4A3E-B49F-06D0146E51B9}" sibTransId="{70851556-0C29-4024-8165-A2FE5991E0B6}"/>
+    <dgm:cxn modelId="{00F33170-7B55-4935-999C-AE95B06D32EC}" type="presOf" srcId="{DD2F5800-2731-4447-9EE7-4A949D38EA17}" destId="{646D7FDC-1039-46C1-AE6D-73E5F827B4F1}" srcOrd="0" destOrd="0" presId="urn:microsoft.com/office/officeart/2005/8/layout/orgChart1"/>
+    <dgm:cxn modelId="{1555F651-F440-4069-A458-1FFC0443B445}" type="presOf" srcId="{3DF04021-657A-4826-8450-57C37B3183F7}" destId="{327639FE-F540-4C30-8FFA-9034DBEF4BCB}" srcOrd="0" destOrd="0" presId="urn:microsoft.com/office/officeart/2005/8/layout/orgChart1"/>
+    <dgm:cxn modelId="{94F9667B-6559-4D7F-93C2-38467347738E}" type="presOf" srcId="{778C5749-1B37-4C68-A444-6D8021F6EA4C}" destId="{639832EB-502F-47A5-9988-40AA46CE6705}" srcOrd="0" destOrd="0" presId="urn:microsoft.com/office/officeart/2005/8/layout/orgChart1"/>
+    <dgm:cxn modelId="{E34DBC8D-5421-46B5-A547-76B0638A0BE2}" type="presOf" srcId="{395AB341-D678-4A3E-B49F-06D0146E51B9}" destId="{D6366EE1-10FE-402A-89FC-1050616593C8}" srcOrd="0" destOrd="0" presId="urn:microsoft.com/office/officeart/2005/8/layout/orgChart1"/>
+    <dgm:cxn modelId="{937BDB92-0091-4635-86C4-B1897F66326C}" type="presOf" srcId="{874DA85B-E367-4D3A-86C5-1A5E1C6465D1}" destId="{FAAE79A0-D520-4CE3-A8BD-6A3EF25F236F}" srcOrd="0" destOrd="0" presId="urn:microsoft.com/office/officeart/2005/8/layout/orgChart1"/>
+    <dgm:cxn modelId="{853E9BAF-8B8C-439D-A4ED-7449B371CDFE}" type="presOf" srcId="{9B07D928-68FF-4D05-9675-239D95B47FCA}" destId="{25A80182-CE6C-4D74-986F-DB2DEFFD97B2}" srcOrd="1" destOrd="0" presId="urn:microsoft.com/office/officeart/2005/8/layout/orgChart1"/>
+    <dgm:cxn modelId="{8026E2B5-44D0-4C6C-A575-C238AEED56BF}" type="presOf" srcId="{A05FCE4D-90FD-41FD-88EB-A6FD254A9997}" destId="{2CC65EF9-49C7-4ED8-B1CB-FB9DEC56AE9C}" srcOrd="0" destOrd="0" presId="urn:microsoft.com/office/officeart/2005/8/layout/orgChart1"/>
+    <dgm:cxn modelId="{B85CD6C8-6A19-45FD-A57A-62FD8588D69D}" type="presOf" srcId="{E378F93C-DEB2-4F11-9B44-019775B37971}" destId="{19541E03-EF1F-4991-BB42-A1D92855A169}" srcOrd="0" destOrd="0" presId="urn:microsoft.com/office/officeart/2005/8/layout/orgChart1"/>
+    <dgm:cxn modelId="{433183D1-7423-45CF-AE41-BDD30DBF6B05}" type="presOf" srcId="{23B7E807-966C-4274-B79C-9C1C83818DA2}" destId="{842D7D13-66FB-401B-9C77-CCE138DD428C}" srcOrd="0" destOrd="0" presId="urn:microsoft.com/office/officeart/2005/8/layout/orgChart1"/>
+    <dgm:cxn modelId="{30C161E2-19C9-4C16-A201-0824DD879917}" type="presOf" srcId="{778C5749-1B37-4C68-A444-6D8021F6EA4C}" destId="{993F8F10-4275-4EBC-A673-318661D6A52C}" srcOrd="1" destOrd="0" presId="urn:microsoft.com/office/officeart/2005/8/layout/orgChart1"/>
+    <dgm:cxn modelId="{14059340-D79C-471B-9ED6-F88B31FFA94E}" type="presParOf" srcId="{2CC65EF9-49C7-4ED8-B1CB-FB9DEC56AE9C}" destId="{AD596F73-44C7-44A9-943F-45F284383D68}" srcOrd="0" destOrd="0" presId="urn:microsoft.com/office/officeart/2005/8/layout/orgChart1"/>
+    <dgm:cxn modelId="{182FB1BA-333D-4570-9B03-1531DB60C386}" type="presParOf" srcId="{AD596F73-44C7-44A9-943F-45F284383D68}" destId="{8892971E-27E1-4E03-8B83-1234BF1D390B}" srcOrd="0" destOrd="0" presId="urn:microsoft.com/office/officeart/2005/8/layout/orgChart1"/>
+    <dgm:cxn modelId="{C38BCB16-63CA-4BB8-B7F9-45A69318EE76}" type="presParOf" srcId="{8892971E-27E1-4E03-8B83-1234BF1D390B}" destId="{FAAE79A0-D520-4CE3-A8BD-6A3EF25F236F}" srcOrd="0" destOrd="0" presId="urn:microsoft.com/office/officeart/2005/8/layout/orgChart1"/>
+    <dgm:cxn modelId="{EEE320FC-DC3F-499C-846D-376326DDD7D5}" type="presParOf" srcId="{8892971E-27E1-4E03-8B83-1234BF1D390B}" destId="{33C3F2DD-4632-4B5F-860A-6284347C1342}" srcOrd="1" destOrd="0" presId="urn:microsoft.com/office/officeart/2005/8/layout/orgChart1"/>
+    <dgm:cxn modelId="{6F85DB4F-BC3B-460C-9570-BE8250DE9EEF}" type="presParOf" srcId="{AD596F73-44C7-44A9-943F-45F284383D68}" destId="{387CDB7E-5680-4F98-892D-34D2D2572BF2}" srcOrd="1" destOrd="0" presId="urn:microsoft.com/office/officeart/2005/8/layout/orgChart1"/>
+    <dgm:cxn modelId="{57DDCD14-0FC3-472F-91B6-B4036B67B390}" type="presParOf" srcId="{387CDB7E-5680-4F98-892D-34D2D2572BF2}" destId="{327639FE-F540-4C30-8FFA-9034DBEF4BCB}" srcOrd="0" destOrd="0" presId="urn:microsoft.com/office/officeart/2005/8/layout/orgChart1"/>
+    <dgm:cxn modelId="{D246ABEF-0ACA-46E9-928F-B6FC5CA6CA6E}" type="presParOf" srcId="{387CDB7E-5680-4F98-892D-34D2D2572BF2}" destId="{E0A77DB3-73F9-479B-BE90-0467F6AB28C7}" srcOrd="1" destOrd="0" presId="urn:microsoft.com/office/officeart/2005/8/layout/orgChart1"/>
+    <dgm:cxn modelId="{5AE725D2-57E2-42C9-A2A3-5D4834DBE2C3}" type="presParOf" srcId="{E0A77DB3-73F9-479B-BE90-0467F6AB28C7}" destId="{8F0495A5-A63A-40EB-BD0D-ECB340F61B37}" srcOrd="0" destOrd="0" presId="urn:microsoft.com/office/officeart/2005/8/layout/orgChart1"/>
+    <dgm:cxn modelId="{7085B9F4-22EF-4257-A7DD-9E4DA0B55EB2}" type="presParOf" srcId="{8F0495A5-A63A-40EB-BD0D-ECB340F61B37}" destId="{43CFBBA5-A213-48E6-9DF7-72CDDD1813BF}" srcOrd="0" destOrd="0" presId="urn:microsoft.com/office/officeart/2005/8/layout/orgChart1"/>
+    <dgm:cxn modelId="{F35103BD-4054-4A83-A98D-8A6B3D8D8DF1}" type="presParOf" srcId="{8F0495A5-A63A-40EB-BD0D-ECB340F61B37}" destId="{51C0B8C1-0A55-48B0-A938-27CA90AD11ED}" srcOrd="1" destOrd="0" presId="urn:microsoft.com/office/officeart/2005/8/layout/orgChart1"/>
+    <dgm:cxn modelId="{504BCC6F-A2C7-4236-BA0E-FD6C0C668E16}" type="presParOf" srcId="{E0A77DB3-73F9-479B-BE90-0467F6AB28C7}" destId="{62DF7FFA-7F2F-414D-96F6-4B3E626CC1E7}" srcOrd="1" destOrd="0" presId="urn:microsoft.com/office/officeart/2005/8/layout/orgChart1"/>
+    <dgm:cxn modelId="{5FB0B718-E999-47D5-9EAD-DBF6B774A252}" type="presParOf" srcId="{E0A77DB3-73F9-479B-BE90-0467F6AB28C7}" destId="{0B202549-C142-4927-B135-B7583DCA2649}" srcOrd="2" destOrd="0" presId="urn:microsoft.com/office/officeart/2005/8/layout/orgChart1"/>
+    <dgm:cxn modelId="{0788CBAE-3800-4F8B-9485-B5C50F23983E}" type="presParOf" srcId="{387CDB7E-5680-4F98-892D-34D2D2572BF2}" destId="{D6366EE1-10FE-402A-89FC-1050616593C8}" srcOrd="2" destOrd="0" presId="urn:microsoft.com/office/officeart/2005/8/layout/orgChart1"/>
+    <dgm:cxn modelId="{690598F2-5B66-4D68-A113-12395D5D0A15}" type="presParOf" srcId="{387CDB7E-5680-4F98-892D-34D2D2572BF2}" destId="{2543B06E-7552-41E4-8A3B-B313DC7A7599}" srcOrd="3" destOrd="0" presId="urn:microsoft.com/office/officeart/2005/8/layout/orgChart1"/>
+    <dgm:cxn modelId="{0B8D3D65-096B-441F-B0FA-1B19063E06C9}" type="presParOf" srcId="{2543B06E-7552-41E4-8A3B-B313DC7A7599}" destId="{E8B8FBBB-2478-4B7B-ACE2-DAEB2B4D0F27}" srcOrd="0" destOrd="0" presId="urn:microsoft.com/office/officeart/2005/8/layout/orgChart1"/>
+    <dgm:cxn modelId="{71AC3FCB-B670-4F94-B26D-4A136D2ED4EE}" type="presParOf" srcId="{E8B8FBBB-2478-4B7B-ACE2-DAEB2B4D0F27}" destId="{842D7D13-66FB-401B-9C77-CCE138DD428C}" srcOrd="0" destOrd="0" presId="urn:microsoft.com/office/officeart/2005/8/layout/orgChart1"/>
+    <dgm:cxn modelId="{195957FD-ED0E-46E7-8DC5-2FC8B1A24420}" type="presParOf" srcId="{E8B8FBBB-2478-4B7B-ACE2-DAEB2B4D0F27}" destId="{503A2908-F6EE-49F1-9044-AB7C584223BB}" srcOrd="1" destOrd="0" presId="urn:microsoft.com/office/officeart/2005/8/layout/orgChart1"/>
+    <dgm:cxn modelId="{99BC3ADB-05D4-4348-885C-21ECD6268DD1}" type="presParOf" srcId="{2543B06E-7552-41E4-8A3B-B313DC7A7599}" destId="{C80185B8-ADEB-4568-87DF-029F476ED431}" srcOrd="1" destOrd="0" presId="urn:microsoft.com/office/officeart/2005/8/layout/orgChart1"/>
+    <dgm:cxn modelId="{2F1849CC-0D7F-475E-B498-33D523A35D7C}" type="presParOf" srcId="{2543B06E-7552-41E4-8A3B-B313DC7A7599}" destId="{C3B78188-D3E9-40DD-9AFB-F4D988240E47}" srcOrd="2" destOrd="0" presId="urn:microsoft.com/office/officeart/2005/8/layout/orgChart1"/>
+    <dgm:cxn modelId="{36E39D83-AE39-40AB-8A8F-D010F26273EA}" type="presParOf" srcId="{387CDB7E-5680-4F98-892D-34D2D2572BF2}" destId="{19541E03-EF1F-4991-BB42-A1D92855A169}" srcOrd="4" destOrd="0" presId="urn:microsoft.com/office/officeart/2005/8/layout/orgChart1"/>
+    <dgm:cxn modelId="{215CEABF-E268-4128-81C9-F13DB5739CDC}" type="presParOf" srcId="{387CDB7E-5680-4F98-892D-34D2D2572BF2}" destId="{4F96509C-0B6B-4931-8300-08DEFCF67D0C}" srcOrd="5" destOrd="0" presId="urn:microsoft.com/office/officeart/2005/8/layout/orgChart1"/>
+    <dgm:cxn modelId="{EFD47A6C-7D87-4D45-AA1E-A6579AE7F6C2}" type="presParOf" srcId="{4F96509C-0B6B-4931-8300-08DEFCF67D0C}" destId="{D15844D3-ED90-4700-97C6-D48AE9A3DA23}" srcOrd="0" destOrd="0" presId="urn:microsoft.com/office/officeart/2005/8/layout/orgChart1"/>
+    <dgm:cxn modelId="{F15FBE0E-C614-4C21-A57F-A3D01D28E914}" type="presParOf" srcId="{D15844D3-ED90-4700-97C6-D48AE9A3DA23}" destId="{639832EB-502F-47A5-9988-40AA46CE6705}" srcOrd="0" destOrd="0" presId="urn:microsoft.com/office/officeart/2005/8/layout/orgChart1"/>
+    <dgm:cxn modelId="{21C419DC-6CEA-4E72-AD90-2664194A6F53}" type="presParOf" srcId="{D15844D3-ED90-4700-97C6-D48AE9A3DA23}" destId="{993F8F10-4275-4EBC-A673-318661D6A52C}" srcOrd="1" destOrd="0" presId="urn:microsoft.com/office/officeart/2005/8/layout/orgChart1"/>
+    <dgm:cxn modelId="{EEF50407-AB8A-4382-8E57-15D7CE64530A}" type="presParOf" srcId="{4F96509C-0B6B-4931-8300-08DEFCF67D0C}" destId="{5AD79911-A7E4-4E02-875E-30511169FF1E}" srcOrd="1" destOrd="0" presId="urn:microsoft.com/office/officeart/2005/8/layout/orgChart1"/>
+    <dgm:cxn modelId="{5EB8F6BE-9A58-45AA-9550-92C53343FBB1}" type="presParOf" srcId="{4F96509C-0B6B-4931-8300-08DEFCF67D0C}" destId="{B622F61F-A9AE-46AE-BD5D-231963125A48}" srcOrd="2" destOrd="0" presId="urn:microsoft.com/office/officeart/2005/8/layout/orgChart1"/>
+    <dgm:cxn modelId="{DFB3B014-207E-4984-A81B-8C2DEA5A8AAD}" type="presParOf" srcId="{AD596F73-44C7-44A9-943F-45F284383D68}" destId="{6532266B-0F74-4387-9EF7-3B8381ABFB94}" srcOrd="2" destOrd="0" presId="urn:microsoft.com/office/officeart/2005/8/layout/orgChart1"/>
+    <dgm:cxn modelId="{18FCB955-66D8-4C92-AFB4-5B1D101C1458}" type="presParOf" srcId="{6532266B-0F74-4387-9EF7-3B8381ABFB94}" destId="{646D7FDC-1039-46C1-AE6D-73E5F827B4F1}" srcOrd="0" destOrd="0" presId="urn:microsoft.com/office/officeart/2005/8/layout/orgChart1"/>
+    <dgm:cxn modelId="{9868FA14-D771-4F32-9245-1FA28305E8C9}" type="presParOf" srcId="{6532266B-0F74-4387-9EF7-3B8381ABFB94}" destId="{F20144DB-DF64-49AB-913E-D29A1D6134BE}" srcOrd="1" destOrd="0" presId="urn:microsoft.com/office/officeart/2005/8/layout/orgChart1"/>
+    <dgm:cxn modelId="{1D041C66-3249-440C-BD09-96E32FFE1023}" type="presParOf" srcId="{F20144DB-DF64-49AB-913E-D29A1D6134BE}" destId="{1ACDC5AB-EB5F-455D-925B-58BB15BAD499}" srcOrd="0" destOrd="0" presId="urn:microsoft.com/office/officeart/2005/8/layout/orgChart1"/>
+    <dgm:cxn modelId="{359190BE-95EF-4627-8F0F-77704F2C8AB9}" type="presParOf" srcId="{1ACDC5AB-EB5F-455D-925B-58BB15BAD499}" destId="{0D714421-A442-4376-A653-D7B450AE76DE}" srcOrd="0" destOrd="0" presId="urn:microsoft.com/office/officeart/2005/8/layout/orgChart1"/>
+    <dgm:cxn modelId="{3D2EDBC1-EB1F-4CF3-92E0-F5C1037748C4}" type="presParOf" srcId="{1ACDC5AB-EB5F-455D-925B-58BB15BAD499}" destId="{25A80182-CE6C-4D74-986F-DB2DEFFD97B2}" srcOrd="1" destOrd="0" presId="urn:microsoft.com/office/officeart/2005/8/layout/orgChart1"/>
+    <dgm:cxn modelId="{D68AE8E5-F0CC-4B1A-A222-72EEE24D7326}" type="presParOf" srcId="{F20144DB-DF64-49AB-913E-D29A1D6134BE}" destId="{E5637617-62DB-4712-9BB5-6263E38A8E8C}" srcOrd="1" destOrd="0" presId="urn:microsoft.com/office/officeart/2005/8/layout/orgChart1"/>
+    <dgm:cxn modelId="{CA5866B5-A602-4162-A949-E745C96868C1}" type="presParOf" srcId="{F20144DB-DF64-49AB-913E-D29A1D6134BE}" destId="{37049DB7-18EB-4778-B126-BD2A11A91FD8}" srcOrd="2" destOrd="0" presId="urn:microsoft.com/office/officeart/2005/8/layout/orgChart1"/>
+  </dgm:cxnLst>
+  <dgm:bg/>
+  <dgm:whole/>
+  <dgm:extLst>
+    <a:ext uri="http://schemas.microsoft.com/office/drawing/2008/diagram">
+      <dsp:dataModelExt xmlns:dsp="http://schemas.microsoft.com/office/drawing/2008/diagram" relId="rId11" minVer="http://schemas.openxmlformats.org/drawingml/2006/diagram"/>
+    </a:ext>
+  </dgm:extLst>
+</dgm:dataModel>
+</file>
+
+<file path=ppt/diagrams/drawing1.xml><?xml version="1.0" encoding="utf-8"?>
+<dsp:drawing xmlns:dgm="http://schemas.openxmlformats.org/drawingml/2006/diagram" xmlns:dsp="http://schemas.microsoft.com/office/drawing/2008/diagram" xmlns:a="http://schemas.openxmlformats.org/drawingml/2006/main">
+  <dsp:spTree>
+    <dsp:nvGrpSpPr>
+      <dsp:cNvPr id="0" name=""/>
+      <dsp:cNvGrpSpPr/>
+    </dsp:nvGrpSpPr>
+    <dsp:grpSpPr/>
+    <dsp:sp modelId="{646D7FDC-1039-46C1-AE6D-73E5F827B4F1}">
+      <dsp:nvSpPr>
+        <dsp:cNvPr id="0" name=""/>
+        <dsp:cNvSpPr/>
+      </dsp:nvSpPr>
+      <dsp:spPr>
+        <a:xfrm>
+          <a:off x="2834766" y="376186"/>
+          <a:ext cx="1387307" cy="1215843"/>
+        </a:xfrm>
+        <a:custGeom>
+          <a:avLst/>
+          <a:gdLst/>
+          <a:ahLst/>
+          <a:cxnLst/>
+          <a:rect l="0" t="0" r="0" b="0"/>
+          <a:pathLst>
+            <a:path>
+              <a:moveTo>
+                <a:pt x="0" y="1215843"/>
+              </a:moveTo>
+              <a:lnTo>
+                <a:pt x="1387307" y="0"/>
+              </a:lnTo>
+            </a:path>
+          </a:pathLst>
+        </a:custGeom>
+        <a:noFill/>
+        <a:ln w="25400" cap="flat" cmpd="sng" algn="ctr">
+          <a:solidFill>
+            <a:schemeClr val="accent6">
+              <a:hueOff val="0"/>
+              <a:satOff val="0"/>
+              <a:lumOff val="0"/>
+              <a:alphaOff val="0"/>
+            </a:schemeClr>
+          </a:solidFill>
+          <a:prstDash val="solid"/>
+        </a:ln>
+        <a:effectLst/>
+      </dsp:spPr>
+      <dsp:style>
+        <a:lnRef idx="2">
+          <a:scrgbClr r="0" g="0" b="0"/>
+        </a:lnRef>
+        <a:fillRef idx="0">
+          <a:scrgbClr r="0" g="0" b="0"/>
+        </a:fillRef>
+        <a:effectRef idx="0">
+          <a:scrgbClr r="0" g="0" b="0"/>
+        </a:effectRef>
+        <a:fontRef idx="minor"/>
+      </dsp:style>
+    </dsp:sp>
+    <dsp:sp modelId="{19541E03-EF1F-4991-BB42-A1D92855A169}">
+      <dsp:nvSpPr>
+        <dsp:cNvPr id="0" name=""/>
+        <dsp:cNvSpPr/>
+      </dsp:nvSpPr>
+      <dsp:spPr>
+        <a:xfrm>
+          <a:off x="2834766" y="1592029"/>
+          <a:ext cx="1574758" cy="1152310"/>
+        </a:xfrm>
+        <a:custGeom>
+          <a:avLst/>
+          <a:gdLst/>
+          <a:ahLst/>
+          <a:cxnLst/>
+          <a:rect l="0" t="0" r="0" b="0"/>
+          <a:pathLst>
+            <a:path>
+              <a:moveTo>
+                <a:pt x="0" y="0"/>
+              </a:moveTo>
+              <a:lnTo>
+                <a:pt x="0" y="978269"/>
+              </a:lnTo>
+              <a:lnTo>
+                <a:pt x="1574758" y="978269"/>
+              </a:lnTo>
+              <a:lnTo>
+                <a:pt x="1574758" y="1152310"/>
+              </a:lnTo>
+            </a:path>
+          </a:pathLst>
+        </a:custGeom>
+        <a:noFill/>
+        <a:ln w="25400" cap="flat" cmpd="sng" algn="ctr">
+          <a:solidFill>
+            <a:schemeClr val="accent6">
+              <a:hueOff val="0"/>
+              <a:satOff val="0"/>
+              <a:lumOff val="0"/>
+              <a:alphaOff val="0"/>
+            </a:schemeClr>
+          </a:solidFill>
+          <a:prstDash val="solid"/>
+        </a:ln>
+        <a:effectLst/>
+      </dsp:spPr>
+      <dsp:style>
+        <a:lnRef idx="2">
+          <a:scrgbClr r="0" g="0" b="0"/>
+        </a:lnRef>
+        <a:fillRef idx="0">
+          <a:scrgbClr r="0" g="0" b="0"/>
+        </a:fillRef>
+        <a:effectRef idx="0">
+          <a:scrgbClr r="0" g="0" b="0"/>
+        </a:effectRef>
+        <a:fontRef idx="minor"/>
+      </dsp:style>
+    </dsp:sp>
+    <dsp:sp modelId="{D6366EE1-10FE-402A-89FC-1050616593C8}">
+      <dsp:nvSpPr>
+        <dsp:cNvPr id="0" name=""/>
+        <dsp:cNvSpPr/>
+      </dsp:nvSpPr>
+      <dsp:spPr>
+        <a:xfrm>
+          <a:off x="2634155" y="1592029"/>
+          <a:ext cx="200611" cy="1151921"/>
+        </a:xfrm>
+        <a:custGeom>
+          <a:avLst/>
+          <a:gdLst/>
+          <a:ahLst/>
+          <a:cxnLst/>
+          <a:rect l="0" t="0" r="0" b="0"/>
+          <a:pathLst>
+            <a:path>
+              <a:moveTo>
+                <a:pt x="200611" y="0"/>
+              </a:moveTo>
+              <a:lnTo>
+                <a:pt x="200611" y="977879"/>
+              </a:lnTo>
+              <a:lnTo>
+                <a:pt x="0" y="977879"/>
+              </a:lnTo>
+              <a:lnTo>
+                <a:pt x="0" y="1151921"/>
+              </a:lnTo>
+            </a:path>
+          </a:pathLst>
+        </a:custGeom>
+        <a:noFill/>
+        <a:ln w="25400" cap="flat" cmpd="sng" algn="ctr">
+          <a:solidFill>
+            <a:schemeClr val="accent6">
+              <a:hueOff val="0"/>
+              <a:satOff val="0"/>
+              <a:lumOff val="0"/>
+              <a:alphaOff val="0"/>
+            </a:schemeClr>
+          </a:solidFill>
+          <a:prstDash val="solid"/>
+        </a:ln>
+        <a:effectLst/>
+      </dsp:spPr>
+      <dsp:style>
+        <a:lnRef idx="2">
+          <a:scrgbClr r="0" g="0" b="0"/>
+        </a:lnRef>
+        <a:fillRef idx="0">
+          <a:scrgbClr r="0" g="0" b="0"/>
+        </a:fillRef>
+        <a:effectRef idx="0">
+          <a:scrgbClr r="0" g="0" b="0"/>
+        </a:effectRef>
+        <a:fontRef idx="minor"/>
+      </dsp:style>
+    </dsp:sp>
+    <dsp:sp modelId="{327639FE-F540-4C30-8FFA-9034DBEF4BCB}">
+      <dsp:nvSpPr>
+        <dsp:cNvPr id="0" name=""/>
+        <dsp:cNvSpPr/>
+      </dsp:nvSpPr>
+      <dsp:spPr>
+        <a:xfrm>
+          <a:off x="828767" y="1592029"/>
+          <a:ext cx="2005999" cy="1151921"/>
+        </a:xfrm>
+        <a:custGeom>
+          <a:avLst/>
+          <a:gdLst/>
+          <a:ahLst/>
+          <a:cxnLst/>
+          <a:rect l="0" t="0" r="0" b="0"/>
+          <a:pathLst>
+            <a:path>
+              <a:moveTo>
+                <a:pt x="2005999" y="0"/>
+              </a:moveTo>
+              <a:lnTo>
+                <a:pt x="2005999" y="977879"/>
+              </a:lnTo>
+              <a:lnTo>
+                <a:pt x="0" y="977879"/>
+              </a:lnTo>
+              <a:lnTo>
+                <a:pt x="0" y="1151921"/>
+              </a:lnTo>
+            </a:path>
+          </a:pathLst>
+        </a:custGeom>
+        <a:noFill/>
+        <a:ln w="25400" cap="flat" cmpd="sng" algn="ctr">
+          <a:solidFill>
+            <a:schemeClr val="accent6">
+              <a:hueOff val="0"/>
+              <a:satOff val="0"/>
+              <a:lumOff val="0"/>
+              <a:alphaOff val="0"/>
+            </a:schemeClr>
+          </a:solidFill>
+          <a:prstDash val="solid"/>
+        </a:ln>
+        <a:effectLst/>
+      </dsp:spPr>
+      <dsp:style>
+        <a:lnRef idx="2">
+          <a:scrgbClr r="0" g="0" b="0"/>
+        </a:lnRef>
+        <a:fillRef idx="0">
+          <a:scrgbClr r="0" g="0" b="0"/>
+        </a:fillRef>
+        <a:effectRef idx="0">
+          <a:scrgbClr r="0" g="0" b="0"/>
+        </a:effectRef>
+        <a:fontRef idx="minor"/>
+      </dsp:style>
+    </dsp:sp>
+    <dsp:sp modelId="{FAAE79A0-D520-4CE3-A8BD-6A3EF25F236F}">
+      <dsp:nvSpPr>
+        <dsp:cNvPr id="0" name=""/>
+        <dsp:cNvSpPr/>
+      </dsp:nvSpPr>
+      <dsp:spPr>
+        <a:xfrm>
+          <a:off x="1207680" y="763261"/>
+          <a:ext cx="3254173" cy="828767"/>
+        </a:xfrm>
+        <a:prstGeom prst="rect">
+          <a:avLst/>
+        </a:prstGeom>
+        <a:solidFill>
+          <a:schemeClr val="accent4">
+            <a:hueOff val="0"/>
+            <a:satOff val="0"/>
+            <a:lumOff val="0"/>
+            <a:alphaOff val="0"/>
+          </a:schemeClr>
+        </a:solidFill>
+        <a:ln w="25400" cap="flat" cmpd="sng" algn="ctr">
+          <a:solidFill>
+            <a:schemeClr val="lt1">
+              <a:hueOff val="0"/>
+              <a:satOff val="0"/>
+              <a:lumOff val="0"/>
+              <a:alphaOff val="0"/>
+            </a:schemeClr>
+          </a:solidFill>
+          <a:prstDash val="solid"/>
+        </a:ln>
+        <a:effectLst/>
+      </dsp:spPr>
+      <dsp:style>
+        <a:lnRef idx="2">
+          <a:scrgbClr r="0" g="0" b="0"/>
+        </a:lnRef>
+        <a:fillRef idx="1">
+          <a:scrgbClr r="0" g="0" b="0"/>
+        </a:fillRef>
+        <a:effectRef idx="0">
+          <a:scrgbClr r="0" g="0" b="0"/>
+        </a:effectRef>
+        <a:fontRef idx="minor">
+          <a:schemeClr val="lt1"/>
+        </a:fontRef>
+      </dsp:style>
+      <dsp:txBody>
+        <a:bodyPr spcFirstLastPara="0" vert="horz" wrap="square" lIns="8890" tIns="8890" rIns="8890" bIns="8890" numCol="1" spcCol="1270" anchor="ctr" anchorCtr="0">
+          <a:noAutofit/>
+        </a:bodyPr>
+        <a:lstStyle/>
+        <a:p>
+          <a:pPr marL="0" lvl="0" indent="0" algn="ctr" defTabSz="622300">
+            <a:lnSpc>
+              <a:spcPct val="90000"/>
+            </a:lnSpc>
+            <a:spcBef>
+              <a:spcPct val="0"/>
+            </a:spcBef>
+            <a:spcAft>
+              <a:spcPct val="35000"/>
+            </a:spcAft>
+            <a:buNone/>
+          </a:pPr>
+          <a:r>
+            <a:rPr lang="en-US" altLang="zh-CN" sz="1400" kern="1200" dirty="0"/>
+            <a:t>Frontend Container</a:t>
+          </a:r>
+          <a:endParaRPr lang="zh-CN" altLang="en-US" sz="1400" kern="1200" dirty="0"/>
+        </a:p>
+      </dsp:txBody>
+      <dsp:txXfrm>
+        <a:off x="1207680" y="763261"/>
+        <a:ext cx="3254173" cy="828767"/>
+      </dsp:txXfrm>
+    </dsp:sp>
+    <dsp:sp modelId="{43CFBBA5-A213-48E6-9DF7-72CDDD1813BF}">
+      <dsp:nvSpPr>
+        <dsp:cNvPr id="0" name=""/>
+        <dsp:cNvSpPr/>
+      </dsp:nvSpPr>
+      <dsp:spPr>
+        <a:xfrm>
+          <a:off x="0" y="2743950"/>
+          <a:ext cx="1657535" cy="828767"/>
+        </a:xfrm>
+        <a:prstGeom prst="rect">
+          <a:avLst/>
+        </a:prstGeom>
+        <a:solidFill>
+          <a:schemeClr val="accent6">
+            <a:hueOff val="0"/>
+            <a:satOff val="0"/>
+            <a:lumOff val="0"/>
+            <a:alphaOff val="0"/>
+          </a:schemeClr>
+        </a:solidFill>
+        <a:ln w="25400" cap="flat" cmpd="sng" algn="ctr">
+          <a:solidFill>
+            <a:schemeClr val="lt1">
+              <a:hueOff val="0"/>
+              <a:satOff val="0"/>
+              <a:lumOff val="0"/>
+              <a:alphaOff val="0"/>
+            </a:schemeClr>
+          </a:solidFill>
+          <a:prstDash val="solid"/>
+        </a:ln>
+        <a:effectLst/>
+      </dsp:spPr>
+      <dsp:style>
+        <a:lnRef idx="2">
+          <a:scrgbClr r="0" g="0" b="0"/>
+        </a:lnRef>
+        <a:fillRef idx="1">
+          <a:scrgbClr r="0" g="0" b="0"/>
+        </a:fillRef>
+        <a:effectRef idx="0">
+          <a:scrgbClr r="0" g="0" b="0"/>
+        </a:effectRef>
+        <a:fontRef idx="minor">
+          <a:schemeClr val="lt1"/>
+        </a:fontRef>
+      </dsp:style>
+      <dsp:txBody>
+        <a:bodyPr spcFirstLastPara="0" vert="horz" wrap="square" lIns="8890" tIns="8890" rIns="8890" bIns="8890" numCol="1" spcCol="1270" anchor="ctr" anchorCtr="0">
+          <a:noAutofit/>
+        </a:bodyPr>
+        <a:lstStyle/>
+        <a:p>
+          <a:pPr marL="0" lvl="0" indent="0" algn="ctr" defTabSz="622300">
+            <a:lnSpc>
+              <a:spcPct val="90000"/>
+            </a:lnSpc>
+            <a:spcBef>
+              <a:spcPct val="0"/>
+            </a:spcBef>
+            <a:spcAft>
+              <a:spcPct val="35000"/>
+            </a:spcAft>
+            <a:buNone/>
+          </a:pPr>
+          <a:r>
+            <a:rPr lang="en-US" altLang="zh-CN" sz="1400" kern="1200" dirty="0"/>
+            <a:t>Backend 1</a:t>
+          </a:r>
+          <a:endParaRPr lang="zh-CN" altLang="en-US" sz="1400" kern="1200" dirty="0"/>
+        </a:p>
+      </dsp:txBody>
+      <dsp:txXfrm>
+        <a:off x="0" y="2743950"/>
+        <a:ext cx="1657535" cy="828767"/>
+      </dsp:txXfrm>
+    </dsp:sp>
+    <dsp:sp modelId="{842D7D13-66FB-401B-9C77-CCE138DD428C}">
+      <dsp:nvSpPr>
+        <dsp:cNvPr id="0" name=""/>
+        <dsp:cNvSpPr/>
+      </dsp:nvSpPr>
+      <dsp:spPr>
+        <a:xfrm>
+          <a:off x="1805387" y="2743950"/>
+          <a:ext cx="1657535" cy="828767"/>
+        </a:xfrm>
+        <a:prstGeom prst="rect">
+          <a:avLst/>
+        </a:prstGeom>
+        <a:solidFill>
+          <a:schemeClr val="accent6">
+            <a:hueOff val="0"/>
+            <a:satOff val="0"/>
+            <a:lumOff val="0"/>
+            <a:alphaOff val="0"/>
+          </a:schemeClr>
+        </a:solidFill>
+        <a:ln w="25400" cap="flat" cmpd="sng" algn="ctr">
+          <a:solidFill>
+            <a:schemeClr val="lt1">
+              <a:hueOff val="0"/>
+              <a:satOff val="0"/>
+              <a:lumOff val="0"/>
+              <a:alphaOff val="0"/>
+            </a:schemeClr>
+          </a:solidFill>
+          <a:prstDash val="solid"/>
+        </a:ln>
+        <a:effectLst/>
+      </dsp:spPr>
+      <dsp:style>
+        <a:lnRef idx="2">
+          <a:scrgbClr r="0" g="0" b="0"/>
+        </a:lnRef>
+        <a:fillRef idx="1">
+          <a:scrgbClr r="0" g="0" b="0"/>
+        </a:fillRef>
+        <a:effectRef idx="0">
+          <a:scrgbClr r="0" g="0" b="0"/>
+        </a:effectRef>
+        <a:fontRef idx="minor">
+          <a:schemeClr val="lt1"/>
+        </a:fontRef>
+      </dsp:style>
+      <dsp:txBody>
+        <a:bodyPr spcFirstLastPara="0" vert="horz" wrap="square" lIns="8890" tIns="8890" rIns="8890" bIns="8890" numCol="1" spcCol="1270" anchor="ctr" anchorCtr="0">
+          <a:noAutofit/>
+        </a:bodyPr>
+        <a:lstStyle/>
+        <a:p>
+          <a:pPr marL="0" lvl="0" indent="0" algn="ctr" defTabSz="622300">
+            <a:lnSpc>
+              <a:spcPct val="90000"/>
+            </a:lnSpc>
+            <a:spcBef>
+              <a:spcPct val="0"/>
+            </a:spcBef>
+            <a:spcAft>
+              <a:spcPct val="35000"/>
+            </a:spcAft>
+            <a:buNone/>
+          </a:pPr>
+          <a:r>
+            <a:rPr lang="en-US" altLang="zh-CN" sz="1400" kern="1200" dirty="0"/>
+            <a:t>Backend 2</a:t>
+          </a:r>
+          <a:endParaRPr lang="zh-CN" altLang="en-US" sz="1400" kern="1200" dirty="0"/>
+        </a:p>
+      </dsp:txBody>
+      <dsp:txXfrm>
+        <a:off x="1805387" y="2743950"/>
+        <a:ext cx="1657535" cy="828767"/>
+      </dsp:txXfrm>
+    </dsp:sp>
+    <dsp:sp modelId="{639832EB-502F-47A5-9988-40AA46CE6705}">
+      <dsp:nvSpPr>
+        <dsp:cNvPr id="0" name=""/>
+        <dsp:cNvSpPr/>
+      </dsp:nvSpPr>
+      <dsp:spPr>
+        <a:xfrm>
+          <a:off x="3580757" y="2744340"/>
+          <a:ext cx="1657535" cy="828767"/>
+        </a:xfrm>
+        <a:prstGeom prst="rect">
+          <a:avLst/>
+        </a:prstGeom>
+        <a:solidFill>
+          <a:schemeClr val="accent6">
+            <a:hueOff val="0"/>
+            <a:satOff val="0"/>
+            <a:lumOff val="0"/>
+            <a:alphaOff val="0"/>
+          </a:schemeClr>
+        </a:solidFill>
+        <a:ln w="25400" cap="flat" cmpd="sng" algn="ctr">
+          <a:solidFill>
+            <a:schemeClr val="lt1">
+              <a:hueOff val="0"/>
+              <a:satOff val="0"/>
+              <a:lumOff val="0"/>
+              <a:alphaOff val="0"/>
+            </a:schemeClr>
+          </a:solidFill>
+          <a:prstDash val="solid"/>
+        </a:ln>
+        <a:effectLst/>
+      </dsp:spPr>
+      <dsp:style>
+        <a:lnRef idx="2">
+          <a:scrgbClr r="0" g="0" b="0"/>
+        </a:lnRef>
+        <a:fillRef idx="1">
+          <a:scrgbClr r="0" g="0" b="0"/>
+        </a:fillRef>
+        <a:effectRef idx="0">
+          <a:scrgbClr r="0" g="0" b="0"/>
+        </a:effectRef>
+        <a:fontRef idx="minor">
+          <a:schemeClr val="lt1"/>
+        </a:fontRef>
+      </dsp:style>
+      <dsp:txBody>
+        <a:bodyPr spcFirstLastPara="0" vert="horz" wrap="square" lIns="8890" tIns="8890" rIns="8890" bIns="8890" numCol="1" spcCol="1270" anchor="ctr" anchorCtr="0">
+          <a:noAutofit/>
+        </a:bodyPr>
+        <a:lstStyle/>
+        <a:p>
+          <a:pPr marL="0" lvl="0" indent="0" algn="ctr" defTabSz="622300">
+            <a:lnSpc>
+              <a:spcPct val="90000"/>
+            </a:lnSpc>
+            <a:spcBef>
+              <a:spcPct val="0"/>
+            </a:spcBef>
+            <a:spcAft>
+              <a:spcPct val="35000"/>
+            </a:spcAft>
+            <a:buNone/>
+          </a:pPr>
+          <a:r>
+            <a:rPr lang="en-US" altLang="zh-CN" sz="1400" kern="1200" dirty="0"/>
+            <a:t>Backend x+1…</a:t>
+          </a:r>
+          <a:endParaRPr lang="zh-CN" altLang="en-US" sz="1400" kern="1200" dirty="0"/>
+        </a:p>
+      </dsp:txBody>
+      <dsp:txXfrm>
+        <a:off x="3580757" y="2744340"/>
+        <a:ext cx="1657535" cy="828767"/>
+      </dsp:txXfrm>
+    </dsp:sp>
+    <dsp:sp modelId="{0D714421-A442-4376-A653-D7B450AE76DE}">
+      <dsp:nvSpPr>
+        <dsp:cNvPr id="0" name=""/>
+        <dsp:cNvSpPr/>
+      </dsp:nvSpPr>
+      <dsp:spPr>
+        <a:xfrm>
+          <a:off x="4222074" y="0"/>
+          <a:ext cx="1447459" cy="752372"/>
+        </a:xfrm>
+        <a:prstGeom prst="rect">
+          <a:avLst/>
+        </a:prstGeom>
+        <a:solidFill>
+          <a:schemeClr val="accent6">
+            <a:hueOff val="0"/>
+            <a:satOff val="0"/>
+            <a:lumOff val="0"/>
+            <a:alphaOff val="0"/>
+          </a:schemeClr>
+        </a:solidFill>
+        <a:ln w="25400" cap="flat" cmpd="sng" algn="ctr">
+          <a:solidFill>
+            <a:schemeClr val="lt1">
+              <a:shade val="80000"/>
+              <a:hueOff val="0"/>
+              <a:satOff val="0"/>
+              <a:lumOff val="0"/>
+              <a:alphaOff val="0"/>
+            </a:schemeClr>
+          </a:solidFill>
+          <a:prstDash val="solid"/>
+        </a:ln>
+        <a:effectLst/>
+      </dsp:spPr>
+      <dsp:style>
+        <a:lnRef idx="2">
+          <a:scrgbClr r="0" g="0" b="0"/>
+        </a:lnRef>
+        <a:fillRef idx="1">
+          <a:scrgbClr r="0" g="0" b="0"/>
+        </a:fillRef>
+        <a:effectRef idx="0">
+          <a:scrgbClr r="0" g="0" b="0"/>
+        </a:effectRef>
+        <a:fontRef idx="minor">
+          <a:schemeClr val="lt1"/>
+        </a:fontRef>
+      </dsp:style>
+      <dsp:txBody>
+        <a:bodyPr spcFirstLastPara="0" vert="horz" wrap="square" lIns="8890" tIns="8890" rIns="8890" bIns="8890" numCol="1" spcCol="1270" anchor="ctr" anchorCtr="0">
+          <a:noAutofit/>
+        </a:bodyPr>
+        <a:lstStyle/>
+        <a:p>
+          <a:pPr marL="0" lvl="0" indent="0" algn="ctr" defTabSz="622300">
+            <a:lnSpc>
+              <a:spcPct val="90000"/>
+            </a:lnSpc>
+            <a:spcBef>
+              <a:spcPct val="0"/>
+            </a:spcBef>
+            <a:spcAft>
+              <a:spcPct val="35000"/>
+            </a:spcAft>
+            <a:buNone/>
+          </a:pPr>
+          <a:r>
+            <a:rPr lang="en-US" altLang="zh-CN" sz="1400" kern="1200" dirty="0"/>
+            <a:t>Include:</a:t>
+          </a:r>
+        </a:p>
+        <a:p>
+          <a:pPr marL="0" lvl="0" indent="0" algn="ctr" defTabSz="622300">
+            <a:lnSpc>
+              <a:spcPct val="90000"/>
+            </a:lnSpc>
+            <a:spcBef>
+              <a:spcPct val="0"/>
+            </a:spcBef>
+            <a:spcAft>
+              <a:spcPct val="35000"/>
+            </a:spcAft>
+            <a:buNone/>
+          </a:pPr>
+          <a:r>
+            <a:rPr lang="en-US" altLang="zh-CN" sz="1400" kern="1200" dirty="0"/>
+            <a:t>MongoDB</a:t>
+          </a:r>
+        </a:p>
+        <a:p>
+          <a:pPr marL="0" lvl="0" indent="0" algn="ctr" defTabSz="622300">
+            <a:lnSpc>
+              <a:spcPct val="90000"/>
+            </a:lnSpc>
+            <a:spcBef>
+              <a:spcPct val="0"/>
+            </a:spcBef>
+            <a:spcAft>
+              <a:spcPct val="35000"/>
+            </a:spcAft>
+            <a:buNone/>
+          </a:pPr>
+          <a:r>
+            <a:rPr lang="en-US" altLang="zh-CN" sz="1400" kern="1200" dirty="0"/>
+            <a:t>Chatbot</a:t>
+          </a:r>
+          <a:endParaRPr lang="zh-CN" altLang="en-US" sz="1400" kern="1200" dirty="0"/>
+        </a:p>
+      </dsp:txBody>
+      <dsp:txXfrm>
+        <a:off x="4222074" y="0"/>
+        <a:ext cx="1447459" cy="752372"/>
+      </dsp:txXfrm>
+    </dsp:sp>
+  </dsp:spTree>
+</dsp:drawing>
+</file>
+
+<file path=ppt/diagrams/layout1.xml><?xml version="1.0" encoding="utf-8"?>
+<dgm:layoutDef xmlns:dgm="http://schemas.openxmlformats.org/drawingml/2006/diagram" xmlns:a="http://schemas.openxmlformats.org/drawingml/2006/main" uniqueId="urn:microsoft.com/office/officeart/2005/8/layout/orgChart1">
+  <dgm:title val=""/>
+  <dgm:desc val=""/>
+  <dgm:catLst>
+    <dgm:cat type="hierarchy" pri="1000"/>
+    <dgm:cat type="convert" pri="6000"/>
+  </dgm:catLst>
+  <dgm:sampData>
+    <dgm:dataModel>
+      <dgm:ptLst>
+        <dgm:pt modelId="0" type="doc"/>
+        <dgm:pt modelId="1">
+          <dgm:prSet phldr="1"/>
+        </dgm:pt>
+        <dgm:pt modelId="2" type="asst">
+          <dgm:prSet phldr="1"/>
+        </dgm:pt>
+        <dgm:pt modelId="3">
+          <dgm:prSet phldr="1"/>
+        </dgm:pt>
+        <dgm:pt modelId="4">
+          <dgm:prSet phldr="1"/>
+        </dgm:pt>
+        <dgm:pt modelId="5">
+          <dgm:prSet phldr="1"/>
+        </dgm:pt>
+      </dgm:ptLst>
+      <dgm:cxnLst>
+        <dgm:cxn modelId="5" srcId="0" destId="1" srcOrd="0" destOrd="0"/>
+        <dgm:cxn modelId="6" srcId="1" destId="2" srcOrd="0" destOrd="0"/>
+        <dgm:cxn modelId="7" srcId="1" destId="3" srcOrd="1" destOrd="0"/>
+        <dgm:cxn modelId="8" srcId="1" destId="4" srcOrd="2" destOrd="0"/>
+        <dgm:cxn modelId="9" srcId="1" destId="5" srcOrd="3" destOrd="0"/>
+      </dgm:cxnLst>
+      <dgm:bg/>
+      <dgm:whole/>
+    </dgm:dataModel>
+  </dgm:sampData>
+  <dgm:styleData>
+    <dgm:dataModel>
+      <dgm:ptLst>
+        <dgm:pt modelId="0" type="doc"/>
+        <dgm:pt modelId="1"/>
+        <dgm:pt modelId="12"/>
+        <dgm:pt modelId="13"/>
+      </dgm:ptLst>
+      <dgm:cxnLst>
+        <dgm:cxn modelId="2" srcId="0" destId="1" srcOrd="0" destOrd="0"/>
+        <dgm:cxn modelId="16" srcId="1" destId="12" srcOrd="1" destOrd="0"/>
+        <dgm:cxn modelId="17" srcId="1" destId="13" srcOrd="2" destOrd="0"/>
+      </dgm:cxnLst>
+      <dgm:bg/>
+      <dgm:whole/>
+    </dgm:dataModel>
+  </dgm:styleData>
+  <dgm:clrData>
+    <dgm:dataModel>
+      <dgm:ptLst>
+        <dgm:pt modelId="0" type="doc"/>
+        <dgm:pt modelId="1"/>
+        <dgm:pt modelId="11" type="asst"/>
+        <dgm:pt modelId="12"/>
+        <dgm:pt modelId="13"/>
+        <dgm:pt modelId="14"/>
+      </dgm:ptLst>
+      <dgm:cxnLst>
+        <dgm:cxn modelId="2" srcId="0" destId="1" srcOrd="0" destOrd="0"/>
+        <dgm:cxn modelId="15" srcId="1" destId="11" srcOrd="0" destOrd="0"/>
+        <dgm:cxn modelId="16" srcId="1" destId="12" srcOrd="1" destOrd="0"/>
+        <dgm:cxn modelId="17" srcId="1" destId="13" srcOrd="2" destOrd="0"/>
+        <dgm:cxn modelId="18" srcId="1" destId="14" srcOrd="2" destOrd="0"/>
+      </dgm:cxnLst>
+      <dgm:bg/>
+      <dgm:whole/>
+    </dgm:dataModel>
+  </dgm:clrData>
+  <dgm:layoutNode name="hierChild1">
+    <dgm:varLst>
+      <dgm:orgChart val="1"/>
+      <dgm:chPref val="1"/>
+      <dgm:dir/>
+      <dgm:animOne val="branch"/>
+      <dgm:animLvl val="lvl"/>
+      <dgm:resizeHandles/>
+    </dgm:varLst>
+    <dgm:choose name="Name0">
+      <dgm:if name="Name1" func="var" arg="dir" op="equ" val="norm">
+        <dgm:alg type="hierChild">
+          <dgm:param type="linDir" val="fromL"/>
+        </dgm:alg>
+      </dgm:if>
+      <dgm:else name="Name2">
+        <dgm:alg type="hierChild">
+          <dgm:param type="linDir" val="fromR"/>
+        </dgm:alg>
+      </dgm:else>
+    </dgm:choose>
+    <dgm:shape xmlns:r="http://schemas.openxmlformats.org/officeDocument/2006/relationships" r:blip="">
+      <dgm:adjLst/>
+    </dgm:shape>
+    <dgm:presOf/>
+    <dgm:constrLst>
+      <dgm:constr type="w" for="des" forName="rootComposite1" refType="w" fact="10"/>
+      <dgm:constr type="h" for="des" forName="rootComposite1" refType="w" refFor="des" refForName="rootComposite1" fact="0.5"/>
+      <dgm:constr type="w" for="des" forName="rootComposite" refType="w" fact="10"/>
+      <dgm:constr type="h" for="des" forName="rootComposite" refType="w" refFor="des" refForName="rootComposite1" fact="0.5"/>
+      <dgm:constr type="w" for="des" forName="rootComposite3" refType="w" fact="10"/>
+      <dgm:constr type="h" for="des" forName="rootComposite3" refType="w" refFor="des" refForName="rootComposite1" fact="0.5"/>
+      <dgm:constr type="primFontSz" for="des" ptType="node" op="equ"/>
+      <dgm:constr type="sp" for="des" op="equ"/>
+      <dgm:constr type="sp" for="des" forName="hierRoot1" refType="w" refFor="des" refForName="rootComposite1" fact="0.21"/>
+      <dgm:constr type="sp" for="des" forName="hierRoot2" refType="sp" refFor="des" refForName="hierRoot1"/>
+      <dgm:constr type="sp" for="des" forName="hierRoot3" refType="sp" refFor="des" refForName="hierRoot1"/>
+      <dgm:constr type="sibSp" refType="w" refFor="des" refForName="rootComposite1" fact="0.21"/>
+      <dgm:constr type="sibSp" for="des" forName="hierChild2" refType="sibSp"/>
+      <dgm:constr type="sibSp" for="des" forName="hierChild3" refType="sibSp"/>
+      <dgm:constr type="sibSp" for="des" forName="hierChild4" refType="sibSp"/>
+      <dgm:constr type="sibSp" for="des" forName="hierChild5" refType="sibSp"/>
+      <dgm:constr type="sibSp" for="des" forName="hierChild6" refType="sibSp"/>
+      <dgm:constr type="sibSp" for="des" forName="hierChild7" refType="sibSp"/>
+      <dgm:constr type="secSibSp" refType="w" refFor="des" refForName="rootComposite1" fact="0.21"/>
+      <dgm:constr type="secSibSp" for="des" forName="hierChild2" refType="secSibSp"/>
+      <dgm:constr type="secSibSp" for="des" forName="hierChild3" refType="secSibSp"/>
+      <dgm:constr type="secSibSp" for="des" forName="hierChild4" refType="secSibSp"/>
+      <dgm:constr type="secSibSp" for="des" forName="hierChild5" refType="secSibSp"/>
+      <dgm:constr type="secSibSp" for="des" forName="hierChild6" refType="secSibSp"/>
+      <dgm:constr type="secSibSp" for="des" forName="hierChild7" refType="secSibSp"/>
+    </dgm:constrLst>
+    <dgm:ruleLst/>
+    <dgm:forEach name="Name3" axis="ch">
+      <dgm:forEach name="Name4" axis="self" ptType="node">
+        <dgm:layoutNode name="hierRoot1">
+          <dgm:varLst>
+            <dgm:hierBranch val="init"/>
+          </dgm:varLst>
+          <dgm:choose name="Name5">
+            <dgm:if name="Name6" func="var" arg="hierBranch" op="equ" val="l">
+              <dgm:choose name="Name7">
+                <dgm:if name="Name8" axis="ch" ptType="asst" func="cnt" op="gte" val="1">
+                  <dgm:alg type="hierRoot">
+                    <dgm:param type="hierAlign" val="tR"/>
+                  </dgm:alg>
+                  <dgm:constrLst>
+                    <dgm:constr type="alignOff" val="0.65"/>
+                  </dgm:constrLst>
+                </dgm:if>
+                <dgm:else name="Name9">
+                  <dgm:alg type="hierRoot">
+                    <dgm:param type="hierAlign" val="tR"/>
+                  </dgm:alg>
+                  <dgm:constrLst>
+                    <dgm:constr type="alignOff" val="0.25"/>
+                  </dgm:constrLst>
+                </dgm:else>
+              </dgm:choose>
+            </dgm:if>
+            <dgm:if name="Name10" func="var" arg="hierBranch" op="equ" val="r">
+              <dgm:choose name="Name11">
+                <dgm:if name="Name12" axis="ch" ptType="asst" func="cnt" op="gte" val="1">
+                  <dgm:alg type="hierRoot">
+                    <dgm:param type="hierAlign" val="tL"/>
+                  </dgm:alg>
+                  <dgm:constrLst>
+                    <dgm:constr type="alignOff" val="0.65"/>
+                  </dgm:constrLst>
+                </dgm:if>
+                <dgm:else name="Name13">
+                  <dgm:alg type="hierRoot">
+                    <dgm:param type="hierAlign" val="tL"/>
+                  </dgm:alg>
+                  <dgm:constrLst>
+                    <dgm:constr type="alignOff" val="0.25"/>
+                  </dgm:constrLst>
+                </dgm:else>
+              </dgm:choose>
+            </dgm:if>
+            <dgm:if name="Name14" func="var" arg="hierBranch" op="equ" val="hang">
+              <dgm:alg type="hierRoot"/>
+              <dgm:constrLst>
+                <dgm:constr type="alignOff" val="0.65"/>
+              </dgm:constrLst>
+            </dgm:if>
+            <dgm:else name="Name15">
+              <dgm:alg type="hierRoot"/>
+              <dgm:constrLst>
+                <dgm:constr type="alignOff"/>
+                <dgm:constr type="bendDist" for="des" ptType="parTrans" refType="sp" fact="0.5"/>
+              </dgm:constrLst>
+            </dgm:else>
+          </dgm:choose>
+          <dgm:shape xmlns:r="http://schemas.openxmlformats.org/officeDocument/2006/relationships" r:blip="">
+            <dgm:adjLst/>
+          </dgm:shape>
+          <dgm:presOf/>
+          <dgm:ruleLst/>
+          <dgm:layoutNode name="rootComposite1">
+            <dgm:alg type="composite"/>
+            <dgm:shape xmlns:r="http://schemas.openxmlformats.org/officeDocument/2006/relationships" r:blip="">
+              <dgm:adjLst/>
+            </dgm:shape>
+            <dgm:presOf axis="self" ptType="node" cnt="1"/>
+            <dgm:choose name="Name16">
+              <dgm:if name="Name17" func="var" arg="hierBranch" op="equ" val="init">
+                <dgm:constrLst>
+                  <dgm:constr type="l" for="ch" forName="rootText1"/>
+                  <dgm:constr type="t" for="ch" forName="rootText1"/>
+                  <dgm:constr type="w" for="ch" forName="rootText1" refType="w"/>
+                  <dgm:constr type="h" for="ch" forName="rootText1" refType="h"/>
+                  <dgm:constr type="l" for="ch" forName="rootConnector1"/>
+                  <dgm:constr type="t" for="ch" forName="rootConnector1"/>
+                  <dgm:constr type="w" for="ch" forName="rootConnector1" refType="w" refFor="ch" refForName="rootText1" fact="0.2"/>
+                  <dgm:constr type="h" for="ch" forName="rootConnector1" refType="h" refFor="ch" refForName="rootText1"/>
+                </dgm:constrLst>
+              </dgm:if>
+              <dgm:if name="Name18" func="var" arg="hierBranch" op="equ" val="l">
+                <dgm:constrLst>
+                  <dgm:constr type="l" for="ch" forName="rootText1"/>
+                  <dgm:constr type="t" for="ch" forName="rootText1"/>
+                  <dgm:constr type="w" for="ch" forName="rootText1" refType="w"/>
+                  <dgm:constr type="h" for="ch" forName="rootText1" refType="h"/>
+                  <dgm:constr type="r" for="ch" forName="rootConnector1" refType="w"/>
+                  <dgm:constr type="t" for="ch" forName="rootConnector1"/>
+                  <dgm:constr type="w" for="ch" forName="rootConnector1" refType="w" refFor="ch" refForName="rootText1" fact="0.2"/>
+                  <dgm:constr type="h" for="ch" forName="rootConnector1" refType="h" refFor="ch" refForName="rootText1"/>
+                </dgm:constrLst>
+              </dgm:if>
+              <dgm:if name="Name19" func="var" arg="hierBranch" op="equ" val="r">
+                <dgm:constrLst>
+                  <dgm:constr type="l" for="ch" forName="rootText1"/>
+                  <dgm:constr type="t" for="ch" forName="rootText1"/>
+                  <dgm:constr type="w" for="ch" forName="rootText1" refType="w"/>
+                  <dgm:constr type="h" for="ch" forName="rootText1" refType="h"/>
+                  <dgm:constr type="l" for="ch" forName="rootConnector1"/>
+                  <dgm:constr type="t" for="ch" forName="rootConnector1"/>
+                  <dgm:constr type="w" for="ch" forName="rootConnector1" refType="w" refFor="ch" refForName="rootText1" fact="0.2"/>
+                  <dgm:constr type="h" for="ch" forName="rootConnector1" refType="h" refFor="ch" refForName="rootText1"/>
+                </dgm:constrLst>
+              </dgm:if>
+              <dgm:else name="Name20">
+                <dgm:constrLst>
+                  <dgm:constr type="l" for="ch" forName="rootText1"/>
+                  <dgm:constr type="t" for="ch" forName="rootText1"/>
+                  <dgm:constr type="w" for="ch" forName="rootText1" refType="w"/>
+                  <dgm:constr type="h" for="ch" forName="rootText1" refType="h"/>
+                  <dgm:constr type="r" for="ch" forName="rootConnector1" refType="w"/>
+                  <dgm:constr type="t" for="ch" forName="rootConnector1"/>
+                  <dgm:constr type="w" for="ch" forName="rootConnector1" refType="w" refFor="ch" refForName="rootText1" fact="0.2"/>
+                  <dgm:constr type="h" for="ch" forName="rootConnector1" refType="h" refFor="ch" refForName="rootText1"/>
+                </dgm:constrLst>
+              </dgm:else>
+            </dgm:choose>
+            <dgm:ruleLst/>
+            <dgm:layoutNode name="rootText1" styleLbl="node0">
+              <dgm:varLst>
+                <dgm:chPref val="3"/>
+              </dgm:varLst>
+              <dgm:alg type="tx"/>
+              <dgm:shape xmlns:r="http://schemas.openxmlformats.org/officeDocument/2006/relationships" type="rect" r:blip="">
+                <dgm:adjLst/>
+              </dgm:shape>
+              <dgm:presOf axis="self" ptType="node" cnt="1"/>
+              <dgm:constrLst>
+                <dgm:constr type="primFontSz" val="65"/>
+                <dgm:constr type="lMarg" refType="primFontSz" fact="0.05"/>
+                <dgm:constr type="rMarg" refType="primFontSz" fact="0.05"/>
+                <dgm:constr type="tMarg" refType="primFontSz" fact="0.05"/>
+                <dgm:constr type="bMarg" refType="primFontSz" fact="0.05"/>
+              </dgm:constrLst>
+              <dgm:ruleLst>
+                <dgm:rule type="primFontSz" val="5" fact="NaN" max="NaN"/>
+              </dgm:ruleLst>
+            </dgm:layoutNode>
+            <dgm:layoutNode name="rootConnector1" moveWith="rootText1">
+              <dgm:alg type="sp"/>
+              <dgm:shape xmlns:r="http://schemas.openxmlformats.org/officeDocument/2006/relationships" type="rect" r:blip="" hideGeom="1">
+                <dgm:adjLst/>
+              </dgm:shape>
+              <dgm:presOf axis="self" ptType="node" cnt="1"/>
+              <dgm:constrLst/>
+              <dgm:ruleLst/>
+            </dgm:layoutNode>
+          </dgm:layoutNode>
+          <dgm:layoutNode name="hierChild2">
+            <dgm:choose name="Name21">
+              <dgm:if name="Name22" func="var" arg="hierBranch" op="equ" val="l">
+                <dgm:alg type="hierChild">
+                  <dgm:param type="chAlign" val="r"/>
+                  <dgm:param type="linDir" val="fromT"/>
+                </dgm:alg>
+              </dgm:if>
+              <dgm:if name="Name23" func="var" arg="hierBranch" op="equ" val="r">
+                <dgm:alg type="hierChild">
+                  <dgm:param type="chAlign" val="l"/>
+                  <dgm:param type="linDir" val="fromT"/>
+                </dgm:alg>
+              </dgm:if>
+              <dgm:if name="Name24" func="var" arg="hierBranch" op="equ" val="hang">
+                <dgm:choose name="Name25">
+                  <dgm:if name="Name26" func="var" arg="dir" op="equ" val="norm">
+                    <dgm:alg type="hierChild">
+                      <dgm:param type="chAlign" val="l"/>
+                      <dgm:param type="linDir" val="fromL"/>
+                      <dgm:param type="secChAlign" val="t"/>
+                      <dgm:param type="secLinDir" val="fromT"/>
+                    </dgm:alg>
+                  </dgm:if>
+                  <dgm:else name="Name27">
+                    <dgm:alg type="hierChild">
+                      <dgm:param type="chAlign" val="l"/>
+                      <dgm:param type="linDir" val="fromR"/>
+                      <dgm:param type="secChAlign" val="t"/>
+                      <dgm:param type="secLinDir" val="fromT"/>
+                    </dgm:alg>
+                  </dgm:else>
+                </dgm:choose>
+              </dgm:if>
+              <dgm:else name="Name28">
+                <dgm:choose name="Name29">
+                  <dgm:if name="Name30" func="var" arg="dir" op="equ" val="norm">
+                    <dgm:alg type="hierChild"/>
+                  </dgm:if>
+                  <dgm:else name="Name31">
+                    <dgm:alg type="hierChild">
+                      <dgm:param type="linDir" val="fromR"/>
+                    </dgm:alg>
+                  </dgm:else>
+                </dgm:choose>
+              </dgm:else>
+            </dgm:choose>
+            <dgm:shape xmlns:r="http://schemas.openxmlformats.org/officeDocument/2006/relationships" r:blip="">
+              <dgm:adjLst/>
+            </dgm:shape>
+            <dgm:presOf/>
+            <dgm:constrLst/>
+            <dgm:ruleLst/>
+            <dgm:forEach name="rep2a" axis="ch" ptType="nonAsst">
+              <dgm:forEach name="Name32" axis="precedSib" ptType="parTrans" st="-1" cnt="1">
+                <dgm:choose name="Name33">
+                  <dgm:if name="Name34" func="var" arg="hierBranch" op="equ" val="std">
+                    <dgm:layoutNode name="Name35">
+                      <dgm:alg type="conn">
+                        <dgm:param type="connRout" val="bend"/>
+                        <dgm:param type="dim" val="1D"/>
+                        <dgm:param type="endSty" val="noArr"/>
+                        <dgm:param type="begPts" val="bCtr"/>
+                        <dgm:param type="endPts" val="tCtr"/>
+                        <dgm:param type="bendPt" val="end"/>
+                      </dgm:alg>
+                      <dgm:shape xmlns:r="http://schemas.openxmlformats.org/officeDocument/2006/relationships" type="conn" r:blip="" zOrderOff="-99999">
+                        <dgm:adjLst/>
+                      </dgm:shape>
+                      <dgm:presOf axis="self"/>
+                      <dgm:constrLst>
+                        <dgm:constr type="begPad"/>
+                        <dgm:constr type="endPad"/>
+                      </dgm:constrLst>
+                      <dgm:ruleLst/>
+                    </dgm:layoutNode>
+                  </dgm:if>
+                  <dgm:if name="Name36" func="var" arg="hierBranch" op="equ" val="init">
+                    <dgm:layoutNode name="Name37">
+                      <dgm:choose name="Name38">
+                        <dgm:if name="Name39" axis="self" func="depth" op="lte" val="2">
+                          <dgm:alg type="conn">
+                            <dgm:param type="connRout" val="bend"/>
+                            <dgm:param type="dim" val="1D"/>
+                            <dgm:param type="endSty" val="noArr"/>
+                            <dgm:param type="begPts" val="bCtr"/>
+                            <dgm:param type="endPts" val="tCtr"/>
+                            <dgm:param type="bendPt" val="end"/>
+                          </dgm:alg>
+                        </dgm:if>
+                        <dgm:else name="Name40">
+                          <dgm:choose name="Name41">
+                            <dgm:if name="Name42" axis="par des" func="maxDepth" op="lte" val="1">
+                              <dgm:choose name="Name43">
+                                <dgm:if name="Name44" axis="par ch" ptType="node asst" func="cnt" op="gte" val="1">
+                                  <dgm:alg type="conn">
+                                    <dgm:param type="connRout" val="bend"/>
+                                    <dgm:param type="dim" val="1D"/>
+                                    <dgm:param type="endSty" val="noArr"/>
+                                    <dgm:param type="begPts" val="bCtr"/>
+                                    <dgm:param type="endPts" val="midL midR"/>
+                                  </dgm:alg>
+                                </dgm:if>
+                                <dgm:else name="Name45">
+                                  <dgm:alg type="conn">
+                                    <dgm:param type="connRout" val="bend"/>
+                                    <dgm:param type="dim" val="1D"/>
+                                    <dgm:param type="endSty" val="noArr"/>
+                                    <dgm:param type="begPts" val="bCtr"/>
+                                    <dgm:param type="endPts" val="midL midR"/>
+                                    <dgm:param type="srcNode" val="rootConnector"/>
+                                  </dgm:alg>
+                                </dgm:else>
+                              </dgm:choose>
+                            </dgm:if>
+                            <dgm:else name="Name46">
+                              <dgm:alg type="conn">
+                                <dgm:param type="connRout" val="bend"/>
+                                <dgm:param type="dim" val="1D"/>
+                                <dgm:param type="endSty" val="noArr"/>
+                                <dgm:param type="begPts" val="bCtr"/>
+                                <dgm:param type="endPts" val="tCtr"/>
+                                <dgm:param type="bendPt" val="end"/>
+                              </dgm:alg>
+                            </dgm:else>
+                          </dgm:choose>
+                        </dgm:else>
+                      </dgm:choose>
+                      <dgm:shape xmlns:r="http://schemas.openxmlformats.org/officeDocument/2006/relationships" type="conn" r:blip="" zOrderOff="-99999">
+                        <dgm:adjLst/>
+                      </dgm:shape>
+                      <dgm:presOf axis="self"/>
+                      <dgm:constrLst>
+                        <dgm:constr type="begPad"/>
+                        <dgm:constr type="endPad"/>
+                      </dgm:constrLst>
+                      <dgm:ruleLst/>
+                    </dgm:layoutNode>
+                  </dgm:if>
+                  <dgm:if name="Name47" func="var" arg="hierBranch" op="equ" val="hang">
+                    <dgm:layoutNode name="Name48">
+                      <dgm:alg type="conn">
+                        <dgm:param type="connRout" val="bend"/>
+                        <dgm:param type="dim" val="1D"/>
+                        <dgm:param type="endSty" val="noArr"/>
+                        <dgm:param type="begPts" val="bCtr"/>
+                        <dgm:param type="endPts" val="midL midR"/>
+                      </dgm:alg>
+                      <dgm:shape xmlns:r="http://schemas.openxmlformats.org/officeDocument/2006/relationships" type="conn" r:blip="" zOrderOff="-99999">
+                        <dgm:adjLst/>
+                      </dgm:shape>
+                      <dgm:presOf axis="self"/>
+                      <dgm:constrLst>
+                        <dgm:constr type="begPad"/>
+                        <dgm:constr type="endPad"/>
+                      </dgm:constrLst>
+                      <dgm:ruleLst/>
+                    </dgm:layoutNode>
+                  </dgm:if>
+                  <dgm:else name="Name49">
+                    <dgm:layoutNode name="Name50">
+                      <dgm:choose name="Name51">
+                        <dgm:if name="Name52" axis="self" func="depth" op="lte" val="2">
+                          <dgm:choose name="Name53">
+                            <dgm:if name="Name54" axis="par ch" ptType="node asst" func="cnt" op="gte" val="1">
+                              <dgm:alg type="conn">
+                                <dgm:param type="connRout" val="bend"/>
+                                <dgm:param type="dim" val="1D"/>
+                                <dgm:param type="endSty" val="noArr"/>
+                                <dgm:param type="begPts" val="bCtr"/>
+                                <dgm:param type="endPts" val="midL midR"/>
+                              </dgm:alg>
+                            </dgm:if>
+                            <dgm:else name="Name55">
+                              <dgm:alg type="conn">
+                                <dgm:param type="connRout" val="bend"/>
+                                <dgm:param type="dim" val="1D"/>
+                                <dgm:param type="endSty" val="noArr"/>
+                                <dgm:param type="begPts" val="bCtr"/>
+                                <dgm:param type="endPts" val="midL midR"/>
+                                <dgm:param type="srcNode" val="rootConnector1"/>
+                              </dgm:alg>
+                            </dgm:else>
+                          </dgm:choose>
+                        </dgm:if>
+                        <dgm:else name="Name56">
+                          <dgm:choose name="Name57">
+                            <dgm:if name="Name58" axis="par ch" ptType="node asst" func="cnt" op="gte" val="1">
+                              <dgm:alg type="conn">
+                                <dgm:param type="connRout" val="bend"/>
+                                <dgm:param type="dim" val="1D"/>
+                                <dgm:param type="endSty" val="noArr"/>
+                                <dgm:param type="begPts" val="bCtr"/>
+                                <dgm:param type="endPts" val="midL midR"/>
+                              </dgm:alg>
+                            </dgm:if>
+                            <dgm:else name="Name59">
+                              <dgm:alg type="conn">
+                                <dgm:param type="connRout" val="bend"/>
+                                <dgm:param type="dim" val="1D"/>
+                                <dgm:param type="endSty" val="noArr"/>
+                                <dgm:param type="begPts" val="bCtr"/>
+                                <dgm:param type="endPts" val="midL midR"/>
+                                <dgm:param type="srcNode" val="rootConnector"/>
+                              </dgm:alg>
+                            </dgm:else>
+                          </dgm:choose>
+                        </dgm:else>
+                      </dgm:choose>
+                      <dgm:shape xmlns:r="http://schemas.openxmlformats.org/officeDocument/2006/relationships" type="conn" r:blip="" zOrderOff="-99999">
+                        <dgm:adjLst/>
+                      </dgm:shape>
+                      <dgm:presOf axis="self"/>
+                      <dgm:constrLst>
+                        <dgm:constr type="begPad"/>
+                        <dgm:constr type="endPad"/>
+                      </dgm:constrLst>
+                      <dgm:ruleLst/>
+                    </dgm:layoutNode>
+                  </dgm:else>
+                </dgm:choose>
+              </dgm:forEach>
+              <dgm:layoutNode name="hierRoot2">
+                <dgm:varLst>
+                  <dgm:hierBranch val="init"/>
+                </dgm:varLst>
+                <dgm:choose name="Name60">
+                  <dgm:if name="Name61" func="var" arg="hierBranch" op="equ" val="l">
+                    <dgm:choose name="Name62">
+                      <dgm:if name="Name63" axis="ch" ptType="asst" func="cnt" op="gte" val="1">
+                        <dgm:alg type="hierRoot">
+                          <dgm:param type="hierAlign" val="tR"/>
+                        </dgm:alg>
+                        <dgm:shape xmlns:r="http://schemas.openxmlformats.org/officeDocument/2006/relationships" r:blip="">
+                          <dgm:adjLst/>
+                        </dgm:shape>
+                        <dgm:presOf/>
+                        <dgm:constrLst>
+                          <dgm:constr type="alignOff" val="0.65"/>
+                        </dgm:constrLst>
+                      </dgm:if>
+                      <dgm:else name="Name64">
+                        <dgm:alg type="hierRoot">
+                          <dgm:param type="hierAlign" val="tR"/>
+                        </dgm:alg>
+                        <dgm:shape xmlns:r="http://schemas.openxmlformats.org/officeDocument/2006/relationships" r:blip="">
+                          <dgm:adjLst/>
+                        </dgm:shape>
+                        <dgm:presOf/>
+                        <dgm:constrLst>
+                          <dgm:constr type="alignOff" val="0.25"/>
+                        </dgm:constrLst>
+                      </dgm:else>
+                    </dgm:choose>
+                  </dgm:if>
+                  <dgm:if name="Name65" func="var" arg="hierBranch" op="equ" val="r">
+                    <dgm:choose name="Name66">
+                      <dgm:if name="Name67" axis="ch" ptType="asst" func="cnt" op="gte" val="1">
+                        <dgm:alg type="hierRoot">
+                          <dgm:param type="hierAlign" val="tL"/>
+                        </dgm:alg>
+                        <dgm:shape xmlns:r="http://schemas.openxmlformats.org/officeDocument/2006/relationships" r:blip="">
+                          <dgm:adjLst/>
+                        </dgm:shape>
+                        <dgm:presOf/>
+                        <dgm:constrLst>
+                          <dgm:constr type="alignOff" val="0.65"/>
+                        </dgm:constrLst>
+                      </dgm:if>
+                      <dgm:else name="Name68">
+                        <dgm:alg type="hierRoot">
+                          <dgm:param type="hierAlign" val="tL"/>
+                        </dgm:alg>
+                        <dgm:shape xmlns:r="http://schemas.openxmlformats.org/officeDocument/2006/relationships" r:blip="">
+                          <dgm:adjLst/>
+                        </dgm:shape>
+                        <dgm:presOf/>
+                        <dgm:constrLst>
+                          <dgm:constr type="alignOff" val="0.25"/>
+                        </dgm:constrLst>
+                      </dgm:else>
+                    </dgm:choose>
+                  </dgm:if>
+                  <dgm:if name="Name69" func="var" arg="hierBranch" op="equ" val="std">
+                    <dgm:alg type="hierRoot"/>
+                    <dgm:shape xmlns:r="http://schemas.openxmlformats.org/officeDocument/2006/relationships" r:blip="">
+                      <dgm:adjLst/>
+                    </dgm:shape>
+                    <dgm:presOf/>
+                    <dgm:constrLst>
+                      <dgm:constr type="alignOff"/>
+                      <dgm:constr type="bendDist" for="des" ptType="parTrans" refType="sp" fact="0.5"/>
+                    </dgm:constrLst>
+                  </dgm:if>
+                  <dgm:if name="Name70" func="var" arg="hierBranch" op="equ" val="init">
+                    <dgm:choose name="Name71">
+                      <dgm:if name="Name72" axis="des" func="maxDepth" op="lte" val="1">
+                        <dgm:choose name="Name73">
+                          <dgm:if name="Name74" axis="ch" ptType="asst" func="cnt" op="gte" val="1">
+                            <dgm:alg type="hierRoot">
+                              <dgm:param type="hierAlign" val="tL"/>
+                            </dgm:alg>
+                            <dgm:shape xmlns:r="http://schemas.openxmlformats.org/officeDocument/2006/relationships" r:blip="">
+                              <dgm:adjLst/>
+                            </dgm:shape>
+                            <dgm:presOf/>
+                            <dgm:constrLst>
+                              <dgm:constr type="alignOff" val="0.65"/>
+                            </dgm:constrLst>
+                          </dgm:if>
+                          <dgm:else name="Name75">
+                            <dgm:alg type="hierRoot">
+                              <dgm:param type="hierAlign" val="tL"/>
+                            </dgm:alg>
+                            <dgm:shape xmlns:r="http://schemas.openxmlformats.org/officeDocument/2006/relationships" r:blip="">
+                              <dgm:adjLst/>
+                            </dgm:shape>
+                            <dgm:presOf/>
+                            <dgm:constrLst>
+                              <dgm:constr type="alignOff" val="0.25"/>
+                            </dgm:constrLst>
+                          </dgm:else>
+                        </dgm:choose>
+                      </dgm:if>
+                      <dgm:else name="Name76">
+                        <dgm:alg type="hierRoot"/>
+                        <dgm:shape xmlns:r="http://schemas.openxmlformats.org/officeDocument/2006/relationships" r:blip="">
+                          <dgm:adjLst/>
+                        </dgm:shape>
+                        <dgm:presOf/>
+                        <dgm:constrLst>
+                          <dgm:constr type="alignOff"/>
+                          <dgm:constr type="bendDist" for="des" ptType="parTrans" refType="sp" fact="0.5"/>
+                        </dgm:constrLst>
+                      </dgm:else>
+                    </dgm:choose>
+                  </dgm:if>
+                  <dgm:else name="Name77">
+                    <dgm:alg type="hierRoot"/>
+                    <dgm:shape xmlns:r="http://schemas.openxmlformats.org/officeDocument/2006/relationships" r:blip="">
+                      <dgm:adjLst/>
+                    </dgm:shape>
+                    <dgm:presOf/>
+                    <dgm:constrLst>
+                      <dgm:constr type="alignOff" val="0.65"/>
+                    </dgm:constrLst>
+                  </dgm:else>
+                </dgm:choose>
+                <dgm:ruleLst/>
+                <dgm:layoutNode name="rootComposite">
+                  <dgm:alg type="composite"/>
+                  <dgm:shape xmlns:r="http://schemas.openxmlformats.org/officeDocument/2006/relationships" r:blip="">
+                    <dgm:adjLst/>
+                  </dgm:shape>
+                  <dgm:presOf axis="self" ptType="node" cnt="1"/>
+                  <dgm:choose name="Name78">
+                    <dgm:if name="Name79" func="var" arg="hierBranch" op="equ" val="init">
+                      <dgm:constrLst>
+                        <dgm:constr type="l" for="ch" forName="rootText"/>
+                        <dgm:constr type="t" for="ch" forName="rootText"/>
+                        <dgm:constr type="w" for="ch" forName="rootText" refType="w"/>
+                        <dgm:constr type="h" for="ch" forName="rootText" refType="h"/>
+                        <dgm:constr type="l" for="ch" forName="rootConnector"/>
+                        <dgm:constr type="t" for="ch" forName="rootConnector"/>
+                        <dgm:constr type="w" for="ch" forName="rootConnector" refType="w" refFor="ch" refForName="rootText" fact="0.2"/>
+                        <dgm:constr type="h" for="ch" forName="rootConnector" refType="h" refFor="ch" refForName="rootText"/>
+                      </dgm:constrLst>
+                    </dgm:if>
+                    <dgm:if name="Name80" func="var" arg="hierBranch" op="equ" val="l">
+                      <dgm:constrLst>
+                        <dgm:constr type="l" for="ch" forName="rootText"/>
+                        <dgm:constr type="t" for="ch" forName="rootText"/>
+                        <dgm:constr type="w" for="ch" forName="rootText" refType="w"/>
+                        <dgm:constr type="h" for="ch" forName="rootText" refType="h"/>
+                        <dgm:constr type="r" for="ch" forName="rootConnector" refType="w"/>
+                        <dgm:constr type="t" for="ch" forName="rootConnector"/>
+                        <dgm:constr type="w" for="ch" forName="rootConnector" refType="w" refFor="ch" refForName="rootText" fact="0.2"/>
+                        <dgm:constr type="h" for="ch" forName="rootConnector" refType="h" refFor="ch" refForName="rootText"/>
+                      </dgm:constrLst>
+                    </dgm:if>
+                    <dgm:if name="Name81" func="var" arg="hierBranch" op="equ" val="r">
+                      <dgm:constrLst>
+                        <dgm:constr type="l" for="ch" forName="rootText"/>
+                        <dgm:constr type="t" for="ch" forName="rootText"/>
+                        <dgm:constr type="w" for="ch" forName="rootText" refType="w"/>
+                        <dgm:constr type="h" for="ch" forName="rootText" refType="h"/>
+                        <dgm:constr type="l" for="ch" forName="rootConnector"/>
+                        <dgm:constr type="t" for="ch" forName="rootConnector"/>
+                        <dgm:constr type="w" for="ch" forName="rootConnector" refType="w" refFor="ch" refForName="rootText" fact="0.2"/>
+                        <dgm:constr type="h" for="ch" forName="rootConnector" refType="h" refFor="ch" refForName="rootText"/>
+                      </dgm:constrLst>
+                    </dgm:if>
+                    <dgm:else name="Name82">
+                      <dgm:constrLst>
+                        <dgm:constr type="l" for="ch" forName="rootText"/>
+                        <dgm:constr type="t" for="ch" forName="rootText"/>
+                        <dgm:constr type="w" for="ch" forName="rootText" refType="w"/>
+                        <dgm:constr type="h" for="ch" forName="rootText" refType="h"/>
+                        <dgm:constr type="r" for="ch" forName="rootConnector" refType="w"/>
+                        <dgm:constr type="t" for="ch" forName="rootConnector"/>
+                        <dgm:constr type="w" for="ch" forName="rootConnector" refType="w" refFor="ch" refForName="rootText" fact="0.2"/>
+                        <dgm:constr type="h" for="ch" forName="rootConnector" refType="h" refFor="ch" refForName="rootText"/>
+                      </dgm:constrLst>
+                    </dgm:else>
+                  </dgm:choose>
+                  <dgm:ruleLst/>
+                  <dgm:layoutNode name="rootText">
+                    <dgm:varLst>
+                      <dgm:chPref val="3"/>
+                    </dgm:varLst>
+                    <dgm:alg type="tx"/>
+                    <dgm:shape xmlns:r="http://schemas.openxmlformats.org/officeDocument/2006/relationships" type="rect" r:blip="">
+                      <dgm:adjLst/>
+                    </dgm:shape>
+                    <dgm:presOf axis="self" ptType="node" cnt="1"/>
+                    <dgm:constrLst>
+                      <dgm:constr type="primFontSz" val="65"/>
+                      <dgm:constr type="lMarg" refType="primFontSz" fact="0.05"/>
+                      <dgm:constr type="rMarg" refType="primFontSz" fact="0.05"/>
+                      <dgm:constr type="tMarg" refType="primFontSz" fact="0.05"/>
+                      <dgm:constr type="bMarg" refType="primFontSz" fact="0.05"/>
+                    </dgm:constrLst>
+                    <dgm:ruleLst>
+                      <dgm:rule type="primFontSz" val="5" fact="NaN" max="NaN"/>
+                    </dgm:ruleLst>
+                  </dgm:layoutNode>
+                  <dgm:layoutNode name="rootConnector" moveWith="rootText">
+                    <dgm:alg type="sp"/>
+                    <dgm:shape xmlns:r="http://schemas.openxmlformats.org/officeDocument/2006/relationships" type="rect" r:blip="" hideGeom="1">
+                      <dgm:adjLst/>
+                    </dgm:shape>
+                    <dgm:presOf axis="self" ptType="node" cnt="1"/>
+                    <dgm:constrLst/>
+                    <dgm:ruleLst/>
+                  </dgm:layoutNode>
+                </dgm:layoutNode>
+                <dgm:layoutNode name="hierChild4">
+                  <dgm:choose name="Name83">
+                    <dgm:if name="Name84" func="var" arg="hierBranch" op="equ" val="l">
+                      <dgm:alg type="hierChild">
+                        <dgm:param type="chAlign" val="r"/>
+                        <dgm:param type="linDir" val="fromT"/>
+                      </dgm:alg>
+                    </dgm:if>
+                    <dgm:if name="Name85" func="var" arg="hierBranch" op="equ" val="r">
+                      <dgm:alg type="hierChild">
+                        <dgm:param type="chAlign" val="l"/>
+                        <dgm:param type="linDir" val="fromT"/>
+                      </dgm:alg>
+                    </dgm:if>
+                    <dgm:if name="Name86" func="var" arg="hierBranch" op="equ" val="hang">
+                      <dgm:choose name="Name87">
+                        <dgm:if name="Name88" func="var" arg="dir" op="equ" val="norm">
+                          <dgm:alg type="hierChild">
+                            <dgm:param type="chAlign" val="l"/>
+                            <dgm:param type="linDir" val="fromL"/>
+                            <dgm:param type="secChAlign" val="t"/>
+                            <dgm:param type="secLinDir" val="fromT"/>
+                          </dgm:alg>
+                        </dgm:if>
+                        <dgm:else name="Name89">
+                          <dgm:alg type="hierChild">
+                            <dgm:param type="chAlign" val="l"/>
+                            <dgm:param type="linDir" val="fromR"/>
+                            <dgm:param type="secChAlign" val="t"/>
+                            <dgm:param type="secLinDir" val="fromT"/>
+                          </dgm:alg>
+                        </dgm:else>
+                      </dgm:choose>
+                    </dgm:if>
+                    <dgm:if name="Name90" func="var" arg="hierBranch" op="equ" val="std">
+                      <dgm:choose name="Name91">
+                        <dgm:if name="Name92" func="var" arg="dir" op="equ" val="norm">
+                          <dgm:alg type="hierChild"/>
+                        </dgm:if>
+                        <dgm:else name="Name93">
+                          <dgm:alg type="hierChild">
+                            <dgm:param type="linDir" val="fromR"/>
+                          </dgm:alg>
+                        </dgm:else>
+                      </dgm:choose>
+                    </dgm:if>
+                    <dgm:if name="Name94" func="var" arg="hierBranch" op="equ" val="init">
+                      <dgm:choose name="Name95">
+                        <dgm:if name="Name96" axis="des" func="maxDepth" op="lte" val="1">
+                          <dgm:alg type="hierChild">
+                            <dgm:param type="chAlign" val="l"/>
+                            <dgm:param type="linDir" val="fromT"/>
+                          </dgm:alg>
+                        </dgm:if>
+                        <dgm:else name="Name97">
+                          <dgm:choose name="Name98">
+                            <dgm:if name="Name99" func="var" arg="dir" op="equ" val="norm">
+                              <dgm:alg type="hierChild"/>
+                            </dgm:if>
+                            <dgm:else name="Name100">
+                              <dgm:alg type="hierChild">
+                                <dgm:param type="linDir" val="fromR"/>
+                              </dgm:alg>
+                            </dgm:else>
+                          </dgm:choose>
+                        </dgm:else>
+                      </dgm:choose>
+                    </dgm:if>
+                    <dgm:else name="Name101"/>
+                  </dgm:choose>
+                  <dgm:shape xmlns:r="http://schemas.openxmlformats.org/officeDocument/2006/relationships" r:blip="">
+                    <dgm:adjLst/>
+                  </dgm:shape>
+                  <dgm:presOf/>
+                  <dgm:constrLst/>
+                  <dgm:ruleLst/>
+                  <dgm:forEach name="Name102" ref="rep2a"/>
+                </dgm:layoutNode>
+                <dgm:layoutNode name="hierChild5">
+                  <dgm:choose name="Name103">
+                    <dgm:if name="Name104" func="var" arg="dir" op="equ" val="norm">
+                      <dgm:alg type="hierChild">
+                        <dgm:param type="chAlign" val="l"/>
+                        <dgm:param type="linDir" val="fromL"/>
+                        <dgm:param type="secChAlign" val="t"/>
+                        <dgm:param type="secLinDir" val="fromT"/>
+                      </dgm:alg>
+                    </dgm:if>
+                    <dgm:else name="Name105">
+                      <dgm:alg type="hierChild">
+                        <dgm:param type="chAlign" val="l"/>
+                        <dgm:param type="linDir" val="fromR"/>
+                        <dgm:param type="secChAlign" val="t"/>
+                        <dgm:param type="secLinDir" val="fromT"/>
+                      </dgm:alg>
+                    </dgm:else>
+                  </dgm:choose>
+                  <dgm:shape xmlns:r="http://schemas.openxmlformats.org/officeDocument/2006/relationships" r:blip="">
+                    <dgm:adjLst/>
+                  </dgm:shape>
+                  <dgm:presOf/>
+                  <dgm:constrLst/>
+                  <dgm:ruleLst/>
+                  <dgm:forEach name="Name106" ref="rep2b"/>
+                </dgm:layoutNode>
+              </dgm:layoutNode>
+            </dgm:forEach>
+          </dgm:layoutNode>
+          <dgm:layoutNode name="hierChild3">
+            <dgm:choose name="Name107">
+              <dgm:if name="Name108" func="var" arg="dir" op="equ" val="norm">
+                <dgm:alg type="hierChild">
+                  <dgm:param type="chAlign" val="l"/>
+                  <dgm:param type="linDir" val="fromL"/>
+                  <dgm:param type="secChAlign" val="t"/>
+                  <dgm:param type="secLinDir" val="fromT"/>
+                </dgm:alg>
+              </dgm:if>
+              <dgm:else name="Name109">
+                <dgm:alg type="hierChild">
+                  <dgm:param type="chAlign" val="l"/>
+                  <dgm:param type="linDir" val="fromR"/>
+                  <dgm:param type="secChAlign" val="t"/>
+                  <dgm:param type="secLinDir" val="fromT"/>
+                </dgm:alg>
+              </dgm:else>
+            </dgm:choose>
+            <dgm:shape xmlns:r="http://schemas.openxmlformats.org/officeDocument/2006/relationships" r:blip="">
+              <dgm:adjLst/>
+            </dgm:shape>
+            <dgm:presOf/>
+            <dgm:constrLst/>
+            <dgm:ruleLst/>
+            <dgm:forEach name="rep2b" axis="ch" ptType="asst">
+              <dgm:forEach name="Name110" axis="precedSib" ptType="parTrans" st="-1" cnt="1">
+                <dgm:layoutNode name="Name111">
+                  <dgm:alg type="conn">
+                    <dgm:param type="connRout" val="bend"/>
+                    <dgm:param type="dim" val="1D"/>
+                    <dgm:param type="endSty" val="noArr"/>
+                    <dgm:param type="begPts" val="bCtr"/>
+                    <dgm:param type="endPts" val="midL midR"/>
+                  </dgm:alg>
+                  <dgm:shape xmlns:r="http://schemas.openxmlformats.org/officeDocument/2006/relationships" type="conn" r:blip="" zOrderOff="-99999">
+                    <dgm:adjLst/>
+                  </dgm:shape>
+                  <dgm:presOf axis="self"/>
+                  <dgm:constrLst>
+                    <dgm:constr type="begPad"/>
+                    <dgm:constr type="endPad"/>
+                  </dgm:constrLst>
+                  <dgm:ruleLst/>
+                </dgm:layoutNode>
+              </dgm:forEach>
+              <dgm:layoutNode name="hierRoot3">
+                <dgm:varLst>
+                  <dgm:hierBranch val="init"/>
+                </dgm:varLst>
+                <dgm:choose name="Name112">
+                  <dgm:if name="Name113" func="var" arg="hierBranch" op="equ" val="l">
+                    <dgm:alg type="hierRoot">
+                      <dgm:param type="hierAlign" val="tR"/>
+                    </dgm:alg>
+                    <dgm:shape xmlns:r="http://schemas.openxmlformats.org/officeDocument/2006/relationships" r:blip="">
+                      <dgm:adjLst/>
+                    </dgm:shape>
+                    <dgm:presOf/>
+                    <dgm:constrLst>
+                      <dgm:constr type="alignOff" val="0.65"/>
+                    </dgm:constrLst>
+                  </dgm:if>
+                  <dgm:if name="Name114" func="var" arg="hierBranch" op="equ" val="r">
+                    <dgm:alg type="hierRoot">
+                      <dgm:param type="hierAlign" val="tL"/>
+                    </dgm:alg>
+                    <dgm:shape xmlns:r="http://schemas.openxmlformats.org/officeDocument/2006/relationships" r:blip="">
+                      <dgm:adjLst/>
+                    </dgm:shape>
+                    <dgm:presOf/>
+                    <dgm:constrLst>
+                      <dgm:constr type="alignOff" val="0.65"/>
+                    </dgm:constrLst>
+                  </dgm:if>
+                  <dgm:if name="Name115" func="var" arg="hierBranch" op="equ" val="hang">
+                    <dgm:alg type="hierRoot"/>
+                    <dgm:shape xmlns:r="http://schemas.openxmlformats.org/officeDocument/2006/relationships" r:blip="">
+                      <dgm:adjLst/>
+                    </dgm:shape>
+                    <dgm:presOf/>
+                    <dgm:constrLst>
+                      <dgm:constr type="alignOff" val="0.65"/>
+                    </dgm:constrLst>
+                  </dgm:if>
+                  <dgm:if name="Name116" func="var" arg="hierBranch" op="equ" val="std">
+                    <dgm:alg type="hierRoot"/>
+                    <dgm:shape xmlns:r="http://schemas.openxmlformats.org/officeDocument/2006/relationships" r:blip="">
+                      <dgm:adjLst/>
+                    </dgm:shape>
+                    <dgm:presOf/>
+                    <dgm:constrLst>
+                      <dgm:constr type="alignOff"/>
+                      <dgm:constr type="bendDist" for="des" ptType="parTrans" refType="sp" fact="0.5"/>
+                    </dgm:constrLst>
+                  </dgm:if>
+                  <dgm:if name="Name117" func="var" arg="hierBranch" op="equ" val="init">
+                    <dgm:choose name="Name118">
+                      <dgm:if name="Name119" axis="des" func="maxDepth" op="lte" val="1">
+                        <dgm:alg type="hierRoot">
+                          <dgm:param type="hierAlign" val="tL"/>
+                        </dgm:alg>
+                        <dgm:shape xmlns:r="http://schemas.openxmlformats.org/officeDocument/2006/relationships" r:blip="">
+                          <dgm:adjLst/>
+                        </dgm:shape>
+                        <dgm:presOf/>
+                        <dgm:constrLst>
+                          <dgm:constr type="alignOff" val="0.65"/>
+                        </dgm:constrLst>
+                      </dgm:if>
+                      <dgm:else name="Name120">
+                        <dgm:alg type="hierRoot"/>
+                        <dgm:shape xmlns:r="http://schemas.openxmlformats.org/officeDocument/2006/relationships" r:blip="">
+                          <dgm:adjLst/>
+                        </dgm:shape>
+                        <dgm:presOf/>
+                        <dgm:constrLst>
+                          <dgm:constr type="alignOff"/>
+                          <dgm:constr type="bendDist" for="des" ptType="parTrans" refType="sp" fact="0.5"/>
+                        </dgm:constrLst>
+                      </dgm:else>
+                    </dgm:choose>
+                  </dgm:if>
+                  <dgm:else name="Name121"/>
+                </dgm:choose>
+                <dgm:ruleLst/>
+                <dgm:layoutNode name="rootComposite3">
+                  <dgm:alg type="composite"/>
+                  <dgm:shape xmlns:r="http://schemas.openxmlformats.org/officeDocument/2006/relationships" r:blip="">
+                    <dgm:adjLst/>
+                  </dgm:shape>
+                  <dgm:presOf axis="self" ptType="node" cnt="1"/>
+                  <dgm:choose name="Name122">
+                    <dgm:if name="Name123" func="var" arg="hierBranch" op="equ" val="init">
+                      <dgm:constrLst>
+                        <dgm:constr type="l" for="ch" forName="rootText3"/>
+                        <dgm:constr type="t" for="ch" forName="rootText3"/>
+                        <dgm:constr type="w" for="ch" forName="rootText3" refType="w"/>
+                        <dgm:constr type="h" for="ch" forName="rootText3" refType="h"/>
+                        <dgm:constr type="l" for="ch" forName="rootConnector3"/>
+                        <dgm:constr type="t" for="ch" forName="rootConnector3"/>
+                        <dgm:constr type="w" for="ch" forName="rootConnector3" refType="w" refFor="ch" refForName="rootText3" fact="0.2"/>
+                        <dgm:constr type="h" for="ch" forName="rootConnector3" refType="h" refFor="ch" refForName="rootText3"/>
+                      </dgm:constrLst>
+                    </dgm:if>
+                    <dgm:if name="Name124" func="var" arg="hierBranch" op="equ" val="l">
+                      <dgm:constrLst>
+                        <dgm:constr type="l" for="ch" forName="rootText3"/>
+                        <dgm:constr type="t" for="ch" forName="rootText3"/>
+                        <dgm:constr type="w" for="ch" forName="rootText3" refType="w"/>
+                        <dgm:constr type="h" for="ch" forName="rootText3" refType="h"/>
+                        <dgm:constr type="r" for="ch" forName="rootConnector3" refType="w"/>
+                        <dgm:constr type="t" for="ch" forName="rootConnector3"/>
+                        <dgm:constr type="w" for="ch" forName="rootConnector3" refType="w" refFor="ch" refForName="rootText3" fact="0.2"/>
+                        <dgm:constr type="h" for="ch" forName="rootConnector3" refType="h" refFor="ch" refForName="rootText3"/>
+                      </dgm:constrLst>
+                    </dgm:if>
+                    <dgm:if name="Name125" func="var" arg="hierBranch" op="equ" val="r">
+                      <dgm:constrLst>
+                        <dgm:constr type="l" for="ch" forName="rootText3"/>
+                        <dgm:constr type="t" for="ch" forName="rootText3"/>
+                        <dgm:constr type="w" for="ch" forName="rootText3" refType="w"/>
+                        <dgm:constr type="h" for="ch" forName="rootText3" refType="h"/>
+                        <dgm:constr type="l" for="ch" forName="rootConnector3"/>
+                        <dgm:constr type="t" for="ch" forName="rootConnector3"/>
+                        <dgm:constr type="w" for="ch" forName="rootConnector3" refType="w" refFor="ch" refForName="rootText3" fact="0.2"/>
+                        <dgm:constr type="h" for="ch" forName="rootConnector3" refType="h" refFor="ch" refForName="rootText3"/>
+                      </dgm:constrLst>
+                    </dgm:if>
+                    <dgm:else name="Name126">
+                      <dgm:constrLst>
+                        <dgm:constr type="l" for="ch" forName="rootText3"/>
+                        <dgm:constr type="t" for="ch" forName="rootText3"/>
+                        <dgm:constr type="w" for="ch" forName="rootText3" refType="w"/>
+                        <dgm:constr type="h" for="ch" forName="rootText3" refType="h"/>
+                        <dgm:constr type="r" for="ch" forName="rootConnector3" refType="w"/>
+                        <dgm:constr type="t" for="ch" forName="rootConnector3"/>
+                        <dgm:constr type="w" for="ch" forName="rootConnector3" refType="w" refFor="ch" refForName="rootText3" fact="0.2"/>
+                        <dgm:constr type="h" for="ch" forName="rootConnector3" refType="h" refFor="ch" refForName="rootText3"/>
+                      </dgm:constrLst>
+                    </dgm:else>
+                  </dgm:choose>
+                  <dgm:ruleLst/>
+                  <dgm:layoutNode name="rootText3">
+                    <dgm:varLst>
+                      <dgm:chPref val="3"/>
+                    </dgm:varLst>
+                    <dgm:alg type="tx"/>
+                    <dgm:shape xmlns:r="http://schemas.openxmlformats.org/officeDocument/2006/relationships" type="rect" r:blip="">
+                      <dgm:adjLst/>
+                    </dgm:shape>
+                    <dgm:presOf axis="self" ptType="node" cnt="1"/>
+                    <dgm:constrLst>
+                      <dgm:constr type="primFontSz" val="65"/>
+                      <dgm:constr type="lMarg" refType="primFontSz" fact="0.05"/>
+                      <dgm:constr type="rMarg" refType="primFontSz" fact="0.05"/>
+                      <dgm:constr type="tMarg" refType="primFontSz" fact="0.05"/>
+                      <dgm:constr type="bMarg" refType="primFontSz" fact="0.05"/>
+                    </dgm:constrLst>
+                    <dgm:ruleLst>
+                      <dgm:rule type="primFontSz" val="5" fact="NaN" max="NaN"/>
+                    </dgm:ruleLst>
+                  </dgm:layoutNode>
+                  <dgm:layoutNode name="rootConnector3" moveWith="rootText1">
+                    <dgm:alg type="sp"/>
+                    <dgm:shape xmlns:r="http://schemas.openxmlformats.org/officeDocument/2006/relationships" type="rect" r:blip="" hideGeom="1">
+                      <dgm:adjLst/>
+                    </dgm:shape>
+                    <dgm:presOf axis="self" ptType="node" cnt="1"/>
+                    <dgm:constrLst/>
+                    <dgm:ruleLst/>
+                  </dgm:layoutNode>
+                </dgm:layoutNode>
+                <dgm:layoutNode name="hierChild6">
+                  <dgm:choose name="Name127">
+                    <dgm:if name="Name128" func="var" arg="hierBranch" op="equ" val="l">
+                      <dgm:alg type="hierChild">
+                        <dgm:param type="chAlign" val="r"/>
+                        <dgm:param type="linDir" val="fromT"/>
+                      </dgm:alg>
+                    </dgm:if>
+                    <dgm:if name="Name129" func="var" arg="hierBranch" op="equ" val="r">
+                      <dgm:alg type="hierChild">
+                        <dgm:param type="chAlign" val="l"/>
+                        <dgm:param type="linDir" val="fromT"/>
+                      </dgm:alg>
+                    </dgm:if>
+                    <dgm:if name="Name130" func="var" arg="hierBranch" op="equ" val="hang">
+                      <dgm:choose name="Name131">
+                        <dgm:if name="Name132" func="var" arg="dir" op="equ" val="norm">
+                          <dgm:alg type="hierChild">
+                            <dgm:param type="chAlign" val="l"/>
+                            <dgm:param type="linDir" val="fromL"/>
+                            <dgm:param type="secChAlign" val="t"/>
+                            <dgm:param type="secLinDir" val="fromT"/>
+                          </dgm:alg>
+                        </dgm:if>
+                        <dgm:else name="Name133">
+                          <dgm:alg type="hierChild">
+                            <dgm:param type="chAlign" val="l"/>
+                            <dgm:param type="linDir" val="fromR"/>
+                            <dgm:param type="secChAlign" val="t"/>
+                            <dgm:param type="secLinDir" val="fromT"/>
+                          </dgm:alg>
+                        </dgm:else>
+                      </dgm:choose>
+                    </dgm:if>
+                    <dgm:if name="Name134" func="var" arg="hierBranch" op="equ" val="std">
+                      <dgm:choose name="Name135">
+                        <dgm:if name="Name136" func="var" arg="dir" op="equ" val="norm">
+                          <dgm:alg type="hierChild"/>
+                        </dgm:if>
+                        <dgm:else name="Name137">
+                          <dgm:alg type="hierChild">
+                            <dgm:param type="linDir" val="fromR"/>
+                          </dgm:alg>
+                        </dgm:else>
+                      </dgm:choose>
+                    </dgm:if>
+                    <dgm:if name="Name138" func="var" arg="hierBranch" op="equ" val="init">
+                      <dgm:choose name="Name139">
+                        <dgm:if name="Name140" axis="des" func="maxDepth" op="lte" val="1">
+                          <dgm:alg type="hierChild">
+                            <dgm:param type="chAlign" val="l"/>
+                            <dgm:param type="linDir" val="fromT"/>
+                          </dgm:alg>
+                        </dgm:if>
+                        <dgm:else name="Name141">
+                          <dgm:alg type="hierChild"/>
+                        </dgm:else>
+                      </dgm:choose>
+                    </dgm:if>
+                    <dgm:else name="Name142"/>
+                  </dgm:choose>
+                  <dgm:shape xmlns:r="http://schemas.openxmlformats.org/officeDocument/2006/relationships" r:blip="">
+                    <dgm:adjLst/>
+                  </dgm:shape>
+                  <dgm:presOf/>
+                  <dgm:constrLst/>
+                  <dgm:ruleLst/>
+                  <dgm:forEach name="Name143" ref="rep2a"/>
+                </dgm:layoutNode>
+                <dgm:layoutNode name="hierChild7">
+                  <dgm:choose name="Name144">
+                    <dgm:if name="Name145" func="var" arg="dir" op="equ" val="norm">
+                      <dgm:alg type="hierChild">
+                        <dgm:param type="chAlign" val="l"/>
+                        <dgm:param type="linDir" val="fromL"/>
+                        <dgm:param type="secChAlign" val="t"/>
+                        <dgm:param type="secLinDir" val="fromT"/>
+                      </dgm:alg>
+                    </dgm:if>
+                    <dgm:else name="Name146">
+                      <dgm:alg type="hierChild">
+                        <dgm:param type="chAlign" val="l"/>
+                        <dgm:param type="linDir" val="fromR"/>
+                        <dgm:param type="secChAlign" val="t"/>
+                        <dgm:param type="secLinDir" val="fromT"/>
+                      </dgm:alg>
+                    </dgm:else>
+                  </dgm:choose>
+                  <dgm:shape xmlns:r="http://schemas.openxmlformats.org/officeDocument/2006/relationships" r:blip="">
+                    <dgm:adjLst/>
+                  </dgm:shape>
+                  <dgm:presOf/>
+                  <dgm:constrLst/>
+                  <dgm:ruleLst/>
+                  <dgm:forEach name="Name147" ref="rep2b"/>
+                </dgm:layoutNode>
+              </dgm:layoutNode>
+            </dgm:forEach>
+          </dgm:layoutNode>
+        </dgm:layoutNode>
+      </dgm:forEach>
+    </dgm:forEach>
+  </dgm:layoutNode>
+</dgm:layoutDef>
+</file>
+
+<file path=ppt/diagrams/quickStyle1.xml><?xml version="1.0" encoding="utf-8"?>
+<dgm:styleDef xmlns:dgm="http://schemas.openxmlformats.org/drawingml/2006/diagram" xmlns:a="http://schemas.openxmlformats.org/drawingml/2006/main" uniqueId="urn:microsoft.com/office/officeart/2005/8/quickstyle/simple1">
+  <dgm:title val=""/>
+  <dgm:desc val=""/>
+  <dgm:catLst>
+    <dgm:cat type="simple" pri="10100"/>
+  </dgm:catLst>
+  <dgm:scene3d>
+    <a:camera prst="orthographicFront"/>
+    <a:lightRig rig="threePt" dir="t"/>
+  </dgm:scene3d>
+  <dgm:styleLbl name="node0">
+    <dgm:scene3d>
+      <a:camera prst="orthographicFront"/>
+      <a:lightRig rig="threePt" dir="t"/>
+    </dgm:scene3d>
+    <dgm:sp3d/>
+    <dgm:txPr/>
+    <dgm:style>
+      <a:lnRef idx="2">
+        <a:scrgbClr r="0" g="0" b="0"/>
+      </a:lnRef>
+      <a:fillRef idx="1">
+        <a:scrgbClr r="0" g="0" b="0"/>
+      </a:fillRef>
+      <a:effectRef idx="0">
+        <a:scrgbClr r="0" g="0" b="0"/>
+      </a:effectRef>
+      <a:fontRef idx="minor">
+        <a:schemeClr val="lt1"/>
+      </a:fontRef>
+    </dgm:style>
+  </dgm:styleLbl>
+  <dgm:styleLbl name="lnNode1">
+    <dgm:scene3d>
+      <a:camera prst="orthographicFront"/>
+      <a:lightRig rig="threePt" dir="t"/>
+    </dgm:scene3d>
+    <dgm:sp3d/>
+    <dgm:txPr/>
+    <dgm:style>
+      <a:lnRef idx="2">
+        <a:scrgbClr r="0" g="0" b="0"/>
+      </a:lnRef>
+      <a:fillRef idx="1">
+        <a:scrgbClr r="0" g="0" b="0"/>
+      </a:fillRef>
+      <a:effectRef idx="0">
+        <a:scrgbClr r="0" g="0" b="0"/>
+      </a:effectRef>
+      <a:fontRef idx="minor">
+        <a:schemeClr val="lt1"/>
+      </a:fontRef>
+    </dgm:style>
+  </dgm:styleLbl>
+  <dgm:styleLbl name="vennNode1">
+    <dgm:scene3d>
+      <a:camera prst="orthographicFront"/>
+      <a:lightRig rig="threePt" dir="t"/>
+    </dgm:scene3d>
+    <dgm:sp3d/>
+    <dgm:txPr/>
+    <dgm:style>
+      <a:lnRef idx="2">
+        <a:scrgbClr r="0" g="0" b="0"/>
+      </a:lnRef>
+      <a:fillRef idx="1">
+        <a:scrgbClr r="0" g="0" b="0"/>
+      </a:fillRef>
+      <a:effectRef idx="0">
+        <a:scrgbClr r="0" g="0" b="0"/>
+      </a:effectRef>
+      <a:fontRef idx="minor">
+        <a:schemeClr val="tx1"/>
+      </a:fontRef>
+    </dgm:style>
+  </dgm:styleLbl>
+  <dgm:styleLbl name="alignNode1">
+    <dgm:scene3d>
+      <a:camera prst="orthographicFront"/>
+      <a:lightRig rig="threePt" dir="t"/>
+    </dgm:scene3d>
+    <dgm:sp3d/>
+    <dgm:txPr/>
+    <dgm:style>
+      <a:lnRef idx="2">
+        <a:scrgbClr r="0" g="0" b="0"/>
+      </a:lnRef>
+      <a:fillRef idx="1">
+        <a:scrgbClr r="0" g="0" b="0"/>
+      </a:fillRef>
+      <a:effectRef idx="0">
+        <a:scrgbClr r="0" g="0" b="0"/>
+      </a:effectRef>
+      <a:fontRef idx="minor">
+        <a:schemeClr val="lt1"/>
+      </a:fontRef>
+    </dgm:style>
+  </dgm:styleLbl>
+  <dgm:styleLbl name="node1">
+    <dgm:scene3d>
+      <a:camera prst="orthographicFront"/>
+      <a:lightRig rig="threePt" dir="t"/>
+    </dgm:scene3d>
+    <dgm:sp3d/>
+    <dgm:txPr/>
+    <dgm:style>
+      <a:lnRef idx="2">
+        <a:scrgbClr r="0" g="0" b="0"/>
+      </a:lnRef>
+      <a:fillRef idx="1">
+        <a:scrgbClr r="0" g="0" b="0"/>
+      </a:fillRef>
+      <a:effectRef idx="0">
+        <a:scrgbClr r="0" g="0" b="0"/>
+      </a:effectRef>
+      <a:fontRef idx="minor">
+        <a:schemeClr val="lt1"/>
+      </a:fontRef>
+    </dgm:style>
+  </dgm:styleLbl>
+  <dgm:styleLbl name="node2">
+    <dgm:scene3d>
+      <a:camera prst="orthographicFront"/>
+      <a:lightRig rig="threePt" dir="t"/>
+    </dgm:scene3d>
+    <dgm:sp3d/>
+    <dgm:txPr/>
+    <dgm:style>
+      <a:lnRef idx="2">
+        <a:scrgbClr r="0" g="0" b="0"/>
+      </a:lnRef>
+      <a:fillRef idx="1">
+        <a:scrgbClr r="0" g="0" b="0"/>
+      </a:fillRef>
+      <a:effectRef idx="0">
+        <a:scrgbClr r="0" g="0" b="0"/>
+      </a:effectRef>
+      <a:fontRef idx="minor">
+        <a:schemeClr val="lt1"/>
+      </a:fontRef>
+    </dgm:style>
+  </dgm:styleLbl>
+  <dgm:styleLbl name="node3">
+    <dgm:scene3d>
+      <a:camera prst="orthographicFront"/>
+      <a:lightRig rig="threePt" dir="t"/>
+    </dgm:scene3d>
+    <dgm:sp3d/>
+    <dgm:txPr/>
+    <dgm:style>
+      <a:lnRef idx="2">
+        <a:scrgbClr r="0" g="0" b="0"/>
+      </a:lnRef>
+      <a:fillRef idx="1">
+        <a:scrgbClr r="0" g="0" b="0"/>
+      </a:fillRef>
+      <a:effectRef idx="0">
+        <a:scrgbClr r="0" g="0" b="0"/>
+      </a:effectRef>
+      <a:fontRef idx="minor">
+        <a:schemeClr val="lt1"/>
+      </a:fontRef>
+    </dgm:style>
+  </dgm:styleLbl>
+  <dgm:styleLbl name="node4">
+    <dgm:scene3d>
+      <a:camera prst="orthographicFront"/>
+      <a:lightRig rig="threePt" dir="t"/>
+    </dgm:scene3d>
+    <dgm:sp3d/>
+    <dgm:txPr/>
+    <dgm:style>
+      <a:lnRef idx="2">
+        <a:scrgbClr r="0" g="0" b="0"/>
+      </a:lnRef>
+      <a:fillRef idx="1">
+        <a:scrgbClr r="0" g="0" b="0"/>
+      </a:fillRef>
+      <a:effectRef idx="0">
+        <a:scrgbClr r="0" g="0" b="0"/>
+      </a:effectRef>
+      <a:fontRef idx="minor">
+        <a:schemeClr val="lt1"/>
+      </a:fontRef>
+    </dgm:style>
+  </dgm:styleLbl>
+  <dgm:styleLbl name="fgImgPlace1">
+    <dgm:scene3d>
+      <a:camera prst="orthographicFront"/>
+      <a:lightRig rig="threePt" dir="t"/>
+    </dgm:scene3d>
+    <dgm:sp3d/>
+    <dgm:txPr/>
+    <dgm:style>
+      <a:lnRef idx="2">
+        <a:scrgbClr r="0" g="0" b="0"/>
+      </a:lnRef>
+      <a:fillRef idx="1">
+        <a:scrgbClr r="0" g="0" b="0"/>
+      </a:fillRef>
+      <a:effectRef idx="0">
+        <a:scrgbClr r="0" g="0" b="0"/>
+      </a:effectRef>
+      <a:fontRef idx="minor"/>
+    </dgm:style>
+  </dgm:styleLbl>
+  <dgm:styleLbl name="alignImgPlace1">
+    <dgm:scene3d>
+      <a:camera prst="orthographicFront"/>
+      <a:lightRig rig="threePt" dir="t"/>
+    </dgm:scene3d>
+    <dgm:sp3d/>
+    <dgm:txPr/>
+    <dgm:style>
+      <a:lnRef idx="2">
+        <a:scrgbClr r="0" g="0" b="0"/>
+      </a:lnRef>
+      <a:fillRef idx="1">
+        <a:scrgbClr r="0" g="0" b="0"/>
+      </a:fillRef>
+      <a:effectRef idx="0">
+        <a:scrgbClr r="0" g="0" b="0"/>
+      </a:effectRef>
+      <a:fontRef idx="minor"/>
+    </dgm:style>
+  </dgm:styleLbl>
+  <dgm:styleLbl name="bgImgPlace1">
+    <dgm:scene3d>
+      <a:camera prst="orthographicFront"/>
+      <a:lightRig rig="threePt" dir="t"/>
+    </dgm:scene3d>
+    <dgm:sp3d/>
+    <dgm:txPr/>
+    <dgm:style>
+      <a:lnRef idx="2">
+        <a:scrgbClr r="0" g="0" b="0"/>
+      </a:lnRef>
+      <a:fillRef idx="1">
+        <a:scrgbClr r="0" g="0" b="0"/>
+      </a:fillRef>
+      <a:effectRef idx="0">
+        <a:scrgbClr r="0" g="0" b="0"/>
+      </a:effectRef>
+      <a:fontRef idx="minor"/>
+    </dgm:style>
+  </dgm:styleLbl>
+  <dgm:styleLbl name="sibTrans2D1">
+    <dgm:scene3d>
+      <a:camera prst="orthographicFront"/>
+      <a:lightRig rig="threePt" dir="t"/>
+    </dgm:scene3d>
+    <dgm:sp3d/>
+    <dgm:txPr/>
+    <dgm:style>
+      <a:lnRef idx="0">
+        <a:scrgbClr r="0" g="0" b="0"/>
+      </a:lnRef>
+      <a:fillRef idx="1">
+        <a:scrgbClr r="0" g="0" b="0"/>
+      </a:fillRef>
+      <a:effectRef idx="0">
+        <a:scrgbClr r="0" g="0" b="0"/>
+      </a:effectRef>
+      <a:fontRef idx="minor">
+        <a:schemeClr val="lt1"/>
+      </a:fontRef>
+    </dgm:style>
+  </dgm:styleLbl>
+  <dgm:styleLbl name="fgSibTrans2D1">
+    <dgm:scene3d>
+      <a:camera prst="orthographicFront"/>
+      <a:lightRig rig="threePt" dir="t"/>
+    </dgm:scene3d>
+    <dgm:sp3d/>
+    <dgm:txPr/>
+    <dgm:style>
+      <a:lnRef idx="0">
+        <a:scrgbClr r="0" g="0" b="0"/>
+      </a:lnRef>
+      <a:fillRef idx="1">
+        <a:scrgbClr r="0" g="0" b="0"/>
+      </a:fillRef>
+      <a:effectRef idx="0">
+        <a:scrgbClr r="0" g="0" b="0"/>
+      </a:effectRef>
+      <a:fontRef idx="minor">
+        <a:schemeClr val="lt1"/>
+      </a:fontRef>
+    </dgm:style>
+  </dgm:styleLbl>
+  <dgm:styleLbl name="bgSibTrans2D1">
+    <dgm:scene3d>
+      <a:camera prst="orthographicFront"/>
+      <a:lightRig rig="threePt" dir="t"/>
+    </dgm:scene3d>
+    <dgm:sp3d/>
+    <dgm:txPr/>
+    <dgm:style>
+      <a:lnRef idx="0">
+        <a:scrgbClr r="0" g="0" b="0"/>
+      </a:lnRef>
+      <a:fillRef idx="1">
+        <a:scrgbClr r="0" g="0" b="0"/>
+      </a:fillRef>
+      <a:effectRef idx="0">
+        <a:scrgbClr r="0" g="0" b="0"/>
+      </a:effectRef>
+      <a:fontRef idx="minor">
+        <a:schemeClr val="lt1"/>
+      </a:fontRef>
+    </dgm:style>
+  </dgm:styleLbl>
+  <dgm:styleLbl name="sibTrans1D1">
+    <dgm:scene3d>
+      <a:camera prst="orthographicFront"/>
+      <a:lightRig rig="threePt" dir="t"/>
+    </dgm:scene3d>
+    <dgm:sp3d/>
+    <dgm:txPr/>
+    <dgm:style>
+      <a:lnRef idx="1">
+        <a:scrgbClr r="0" g="0" b="0"/>
+      </a:lnRef>
+      <a:fillRef idx="0">
+        <a:scrgbClr r="0" g="0" b="0"/>
+      </a:fillRef>
+      <a:effectRef idx="0">
+        <a:scrgbClr r="0" g="0" b="0"/>
+      </a:effectRef>
+      <a:fontRef idx="minor"/>
+    </dgm:style>
+  </dgm:styleLbl>
+  <dgm:styleLbl name="callout">
+    <dgm:scene3d>
+      <a:camera prst="orthographicFront"/>
+      <a:lightRig rig="threePt" dir="t"/>
+    </dgm:scene3d>
+    <dgm:sp3d/>
+    <dgm:txPr/>
+    <dgm:style>
+      <a:lnRef idx="2">
+        <a:scrgbClr r="0" g="0" b="0"/>
+      </a:lnRef>
+      <a:fillRef idx="1">
+        <a:scrgbClr r="0" g="0" b="0"/>
+      </a:fillRef>
+      <a:effectRef idx="0">
+        <a:scrgbClr r="0" g="0" b="0"/>
+      </a:effectRef>
+      <a:fontRef idx="minor"/>
+    </dgm:style>
+  </dgm:styleLbl>
+  <dgm:styleLbl name="asst0">
+    <dgm:scene3d>
+      <a:camera prst="orthographicFront"/>
+      <a:lightRig rig="threePt" dir="t"/>
+    </dgm:scene3d>
+    <dgm:sp3d/>
+    <dgm:txPr/>
+    <dgm:style>
+      <a:lnRef idx="2">
+        <a:scrgbClr r="0" g="0" b="0"/>
+      </a:lnRef>
+      <a:fillRef idx="1">
+        <a:scrgbClr r="0" g="0" b="0"/>
+      </a:fillRef>
+      <a:effectRef idx="0">
+        <a:scrgbClr r="0" g="0" b="0"/>
+      </a:effectRef>
+      <a:fontRef idx="minor">
+        <a:schemeClr val="lt1"/>
+      </a:fontRef>
+    </dgm:style>
+  </dgm:styleLbl>
+  <dgm:styleLbl name="asst1">
+    <dgm:scene3d>
+      <a:camera prst="orthographicFront"/>
+      <a:lightRig rig="threePt" dir="t"/>
+    </dgm:scene3d>
+    <dgm:sp3d/>
+    <dgm:txPr/>
+    <dgm:style>
+      <a:lnRef idx="2">
+        <a:scrgbClr r="0" g="0" b="0"/>
+      </a:lnRef>
+      <a:fillRef idx="1">
+        <a:scrgbClr r="0" g="0" b="0"/>
+      </a:fillRef>
+      <a:effectRef idx="0">
+        <a:scrgbClr r="0" g="0" b="0"/>
+      </a:effectRef>
+      <a:fontRef idx="minor">
+        <a:schemeClr val="lt1"/>
+      </a:fontRef>
+    </dgm:style>
+  </dgm:styleLbl>
+  <dgm:styleLbl name="asst2">
+    <dgm:scene3d>
+      <a:camera prst="orthographicFront"/>
+      <a:lightRig rig="threePt" dir="t"/>
+    </dgm:scene3d>
+    <dgm:sp3d/>
+    <dgm:txPr/>
+    <dgm:style>
+      <a:lnRef idx="2">
+        <a:scrgbClr r="0" g="0" b="0"/>
+      </a:lnRef>
+      <a:fillRef idx="1">
+        <a:scrgbClr r="0" g="0" b="0"/>
+      </a:fillRef>
+      <a:effectRef idx="0">
+        <a:scrgbClr r="0" g="0" b="0"/>
+      </a:effectRef>
+      <a:fontRef idx="minor">
+        <a:schemeClr val="lt1"/>
+      </a:fontRef>
+    </dgm:style>
+  </dgm:styleLbl>
+  <dgm:styleLbl name="asst3">
+    <dgm:scene3d>
+      <a:camera prst="orthographicFront"/>
+      <a:lightRig rig="threePt" dir="t"/>
+    </dgm:scene3d>
+    <dgm:sp3d/>
+    <dgm:txPr/>
+    <dgm:style>
+      <a:lnRef idx="2">
+        <a:scrgbClr r="0" g="0" b="0"/>
+      </a:lnRef>
+      <a:fillRef idx="1">
+        <a:scrgbClr r="0" g="0" b="0"/>
+      </a:fillRef>
+      <a:effectRef idx="0">
+        <a:scrgbClr r="0" g="0" b="0"/>
+      </a:effectRef>
+      <a:fontRef idx="minor">
+        <a:schemeClr val="lt1"/>
+      </a:fontRef>
+    </dgm:style>
+  </dgm:styleLbl>
+  <dgm:styleLbl name="asst4">
+    <dgm:scene3d>
+      <a:camera prst="orthographicFront"/>
+      <a:lightRig rig="threePt" dir="t"/>
+    </dgm:scene3d>
+    <dgm:sp3d/>
+    <dgm:txPr/>
+    <dgm:style>
+      <a:lnRef idx="2">
+        <a:scrgbClr r="0" g="0" b="0"/>
+      </a:lnRef>
+      <a:fillRef idx="1">
+        <a:scrgbClr r="0" g="0" b="0"/>
+      </a:fillRef>
+      <a:effectRef idx="0">
+        <a:scrgbClr r="0" g="0" b="0"/>
+      </a:effectRef>
+      <a:fontRef idx="minor">
+        <a:schemeClr val="lt1"/>
+      </a:fontRef>
+    </dgm:style>
+  </dgm:styleLbl>
+  <dgm:styleLbl name="parChTrans2D1">
+    <dgm:scene3d>
+      <a:camera prst="orthographicFront"/>
+      <a:lightRig rig="threePt" dir="t"/>
+    </dgm:scene3d>
+    <dgm:sp3d/>
+    <dgm:txPr/>
+    <dgm:style>
+      <a:lnRef idx="2">
+        <a:scrgbClr r="0" g="0" b="0"/>
+      </a:lnRef>
+      <a:fillRef idx="1">
+        <a:scrgbClr r="0" g="0" b="0"/>
+      </a:fillRef>
+      <a:effectRef idx="0">
+        <a:scrgbClr r="0" g="0" b="0"/>
+      </a:effectRef>
+      <a:fontRef idx="minor">
+        <a:schemeClr val="lt1"/>
+      </a:fontRef>
+    </dgm:style>
+  </dgm:styleLbl>
+  <dgm:styleLbl name="parChTrans2D2">
+    <dgm:scene3d>
+      <a:camera prst="orthographicFront"/>
+      <a:lightRig rig="threePt" dir="t"/>
+    </dgm:scene3d>
+    <dgm:sp3d/>
+    <dgm:txPr/>
+    <dgm:style>
+      <a:lnRef idx="2">
+        <a:scrgbClr r="0" g="0" b="0"/>
+      </a:lnRef>
+      <a:fillRef idx="1">
+        <a:scrgbClr r="0" g="0" b="0"/>
+      </a:fillRef>
+      <a:effectRef idx="0">
+        <a:scrgbClr r="0" g="0" b="0"/>
+      </a:effectRef>
+      <a:fontRef idx="minor">
+        <a:schemeClr val="lt1"/>
+      </a:fontRef>
+    </dgm:style>
+  </dgm:styleLbl>
+  <dgm:styleLbl name="parChTrans2D3">
+    <dgm:scene3d>
+      <a:camera prst="orthographicFront"/>
+      <a:lightRig rig="threePt" dir="t"/>
+    </dgm:scene3d>
+    <dgm:sp3d/>
+    <dgm:txPr/>
+    <dgm:style>
+      <a:lnRef idx="2">
+        <a:scrgbClr r="0" g="0" b="0"/>
+      </a:lnRef>
+      <a:fillRef idx="1">
+        <a:scrgbClr r="0" g="0" b="0"/>
+      </a:fillRef>
+      <a:effectRef idx="0">
+        <a:scrgbClr r="0" g="0" b="0"/>
+      </a:effectRef>
+      <a:fontRef idx="minor">
+        <a:schemeClr val="lt1"/>
+      </a:fontRef>
+    </dgm:style>
+  </dgm:styleLbl>
+  <dgm:styleLbl name="parChTrans2D4">
+    <dgm:scene3d>
+      <a:camera prst="orthographicFront"/>
+      <a:lightRig rig="threePt" dir="t"/>
+    </dgm:scene3d>
+    <dgm:sp3d/>
+    <dgm:txPr/>
+    <dgm:style>
+      <a:lnRef idx="2">
+        <a:scrgbClr r="0" g="0" b="0"/>
+      </a:lnRef>
+      <a:fillRef idx="1">
+        <a:scrgbClr r="0" g="0" b="0"/>
+      </a:fillRef>
+      <a:effectRef idx="0">
+        <a:scrgbClr r="0" g="0" b="0"/>
+      </a:effectRef>
+      <a:fontRef idx="minor">
+        <a:schemeClr val="lt1"/>
+      </a:fontRef>
+    </dgm:style>
+  </dgm:styleLbl>
+  <dgm:styleLbl name="parChTrans1D1">
+    <dgm:scene3d>
+      <a:camera prst="orthographicFront"/>
+      <a:lightRig rig="threePt" dir="t"/>
+    </dgm:scene3d>
+    <dgm:sp3d/>
+    <dgm:txPr/>
+    <dgm:style>
+      <a:lnRef idx="2">
+        <a:scrgbClr r="0" g="0" b="0"/>
+      </a:lnRef>
+      <a:fillRef idx="0">
+        <a:scrgbClr r="0" g="0" b="0"/>
+      </a:fillRef>
+      <a:effectRef idx="0">
+        <a:scrgbClr r="0" g="0" b="0"/>
+      </a:effectRef>
+      <a:fontRef idx="minor"/>
+    </dgm:style>
+  </dgm:styleLbl>
+  <dgm:styleLbl name="parChTrans1D2">
+    <dgm:scene3d>
+      <a:camera prst="orthographicFront"/>
+      <a:lightRig rig="threePt" dir="t"/>
+    </dgm:scene3d>
+    <dgm:sp3d/>
+    <dgm:txPr/>
+    <dgm:style>
+      <a:lnRef idx="2">
+        <a:scrgbClr r="0" g="0" b="0"/>
+      </a:lnRef>
+      <a:fillRef idx="0">
+        <a:scrgbClr r="0" g="0" b="0"/>
+      </a:fillRef>
+      <a:effectRef idx="0">
+        <a:scrgbClr r="0" g="0" b="0"/>
+      </a:effectRef>
+      <a:fontRef idx="minor"/>
+    </dgm:style>
+  </dgm:styleLbl>
+  <dgm:styleLbl name="parChTrans1D3">
+    <dgm:scene3d>
+      <a:camera prst="orthographicFront"/>
+      <a:lightRig rig="threePt" dir="t"/>
+    </dgm:scene3d>
+    <dgm:sp3d/>
+    <dgm:txPr/>
+    <dgm:style>
+      <a:lnRef idx="2">
+        <a:scrgbClr r="0" g="0" b="0"/>
+      </a:lnRef>
+      <a:fillRef idx="0">
+        <a:scrgbClr r="0" g="0" b="0"/>
+      </a:fillRef>
+      <a:effectRef idx="0">
+        <a:scrgbClr r="0" g="0" b="0"/>
+      </a:effectRef>
+      <a:fontRef idx="minor"/>
+    </dgm:style>
+  </dgm:styleLbl>
+  <dgm:styleLbl name="parChTrans1D4">
+    <dgm:scene3d>
+      <a:camera prst="orthographicFront"/>
+      <a:lightRig rig="threePt" dir="t"/>
+    </dgm:scene3d>
+    <dgm:sp3d/>
+    <dgm:txPr/>
+    <dgm:style>
+      <a:lnRef idx="2">
+        <a:scrgbClr r="0" g="0" b="0"/>
+      </a:lnRef>
+      <a:fillRef idx="0">
+        <a:scrgbClr r="0" g="0" b="0"/>
+      </a:fillRef>
+      <a:effectRef idx="0">
+        <a:scrgbClr r="0" g="0" b="0"/>
+      </a:effectRef>
+      <a:fontRef idx="minor"/>
+    </dgm:style>
+  </dgm:styleLbl>
+  <dgm:styleLbl name="fgAcc1">
+    <dgm:scene3d>
+      <a:camera prst="orthographicFront"/>
+      <a:lightRig rig="threePt" dir="t"/>
+    </dgm:scene3d>
+    <dgm:sp3d/>
+    <dgm:txPr/>
+    <dgm:style>
+      <a:lnRef idx="2">
+        <a:scrgbClr r="0" g="0" b="0"/>
+      </a:lnRef>
+      <a:fillRef idx="1">
+        <a:scrgbClr r="0" g="0" b="0"/>
+      </a:fillRef>
+      <a:effectRef idx="0">
+        <a:scrgbClr r="0" g="0" b="0"/>
+      </a:effectRef>
+      <a:fontRef idx="minor"/>
+    </dgm:style>
+  </dgm:styleLbl>
+  <dgm:styleLbl name="conFgAcc1">
+    <dgm:scene3d>
+      <a:camera prst="orthographicFront"/>
+      <a:lightRig rig="threePt" dir="t"/>
+    </dgm:scene3d>
+    <dgm:sp3d/>
+    <dgm:txPr/>
+    <dgm:style>
+      <a:lnRef idx="2">
+        <a:scrgbClr r="0" g="0" b="0"/>
+      </a:lnRef>
+      <a:fillRef idx="1">
+        <a:scrgbClr r="0" g="0" b="0"/>
+      </a:fillRef>
+      <a:effectRef idx="0">
+        <a:scrgbClr r="0" g="0" b="0"/>
+      </a:effectRef>
+      <a:fontRef idx="minor"/>
+    </dgm:style>
+  </dgm:styleLbl>
+  <dgm:styleLbl name="alignAcc1">
+    <dgm:scene3d>
+      <a:camera prst="orthographicFront"/>
+      <a:lightRig rig="threePt" dir="t"/>
+    </dgm:scene3d>
+    <dgm:sp3d/>
+    <dgm:txPr/>
+    <dgm:style>
+      <a:lnRef idx="2">
+        <a:scrgbClr r="0" g="0" b="0"/>
+      </a:lnRef>
+      <a:fillRef idx="1">
+        <a:scrgbClr r="0" g="0" b="0"/>
+      </a:fillRef>
+      <a:effectRef idx="0">
+        <a:scrgbClr r="0" g="0" b="0"/>
+      </a:effectRef>
+      <a:fontRef idx="minor"/>
+    </dgm:style>
+  </dgm:styleLbl>
+  <dgm:styleLbl name="trAlignAcc1">
+    <dgm:scene3d>
+      <a:camera prst="orthographicFront"/>
+      <a:lightRig rig="threePt" dir="t"/>
+    </dgm:scene3d>
+    <dgm:sp3d/>
+    <dgm:txPr/>
+    <dgm:style>
+      <a:lnRef idx="1">
+        <a:scrgbClr r="0" g="0" b="0"/>
+      </a:lnRef>
+      <a:fillRef idx="1">
+        <a:scrgbClr r="0" g="0" b="0"/>
+      </a:fillRef>
+      <a:effectRef idx="0">
+        <a:scrgbClr r="0" g="0" b="0"/>
+      </a:effectRef>
+      <a:fontRef idx="minor"/>
+    </dgm:style>
+  </dgm:styleLbl>
+  <dgm:styleLbl name="bgAcc1">
+    <dgm:scene3d>
+      <a:camera prst="orthographicFront"/>
+      <a:lightRig rig="threePt" dir="t"/>
+    </dgm:scene3d>
+    <dgm:sp3d/>
+    <dgm:txPr/>
+    <dgm:style>
+      <a:lnRef idx="2">
+        <a:scrgbClr r="0" g="0" b="0"/>
+      </a:lnRef>
+      <a:fillRef idx="1">
+        <a:scrgbClr r="0" g="0" b="0"/>
+      </a:fillRef>
+      <a:effectRef idx="0">
+        <a:scrgbClr r="0" g="0" b="0"/>
+      </a:effectRef>
+      <a:fontRef idx="minor"/>
+    </dgm:style>
+  </dgm:styleLbl>
+  <dgm:styleLbl name="solidFgAcc1">
+    <dgm:scene3d>
+      <a:camera prst="orthographicFront"/>
+      <a:lightRig rig="threePt" dir="t"/>
+    </dgm:scene3d>
+    <dgm:sp3d/>
+    <dgm:txPr/>
+    <dgm:style>
+      <a:lnRef idx="2">
+        <a:scrgbClr r="0" g="0" b="0"/>
+      </a:lnRef>
+      <a:fillRef idx="1">
+        <a:scrgbClr r="0" g="0" b="0"/>
+      </a:fillRef>
+      <a:effectRef idx="0">
+        <a:scrgbClr r="0" g="0" b="0"/>
+      </a:effectRef>
+      <a:fontRef idx="minor"/>
+    </dgm:style>
+  </dgm:styleLbl>
+  <dgm:styleLbl name="solidAlignAcc1">
+    <dgm:scene3d>
+      <a:camera prst="orthographicFront"/>
+      <a:lightRig rig="threePt" dir="t"/>
+    </dgm:scene3d>
+    <dgm:sp3d/>
+    <dgm:txPr/>
+    <dgm:style>
+      <a:lnRef idx="2">
+        <a:scrgbClr r="0" g="0" b="0"/>
+      </a:lnRef>
+      <a:fillRef idx="1">
+        <a:scrgbClr r="0" g="0" b="0"/>
+      </a:fillRef>
+      <a:effectRef idx="0">
+        <a:scrgbClr r="0" g="0" b="0"/>
+      </a:effectRef>
+      <a:fontRef idx="minor"/>
+    </dgm:style>
+  </dgm:styleLbl>
+  <dgm:styleLbl name="solidBgAcc1">
+    <dgm:scene3d>
+      <a:camera prst="orthographicFront"/>
+      <a:lightRig rig="threePt" dir="t"/>
+    </dgm:scene3d>
+    <dgm:sp3d/>
+    <dgm:txPr/>
+    <dgm:style>
+      <a:lnRef idx="2">
+        <a:scrgbClr r="0" g="0" b="0"/>
+      </a:lnRef>
+      <a:fillRef idx="1">
+        <a:scrgbClr r="0" g="0" b="0"/>
+      </a:fillRef>
+      <a:effectRef idx="0">
+        <a:scrgbClr r="0" g="0" b="0"/>
+      </a:effectRef>
+      <a:fontRef idx="minor"/>
+    </dgm:style>
+  </dgm:styleLbl>
+  <dgm:styleLbl name="fgAccFollowNode1">
+    <dgm:scene3d>
+      <a:camera prst="orthographicFront"/>
+      <a:lightRig rig="threePt" dir="t"/>
+    </dgm:scene3d>
+    <dgm:sp3d/>
+    <dgm:txPr/>
+    <dgm:style>
+      <a:lnRef idx="2">
+        <a:scrgbClr r="0" g="0" b="0"/>
+      </a:lnRef>
+      <a:fillRef idx="1">
+        <a:scrgbClr r="0" g="0" b="0"/>
+      </a:fillRef>
+      <a:effectRef idx="0">
+        <a:scrgbClr r="0" g="0" b="0"/>
+      </a:effectRef>
+      <a:fontRef idx="minor"/>
+    </dgm:style>
+  </dgm:styleLbl>
+  <dgm:styleLbl name="alignAccFollowNode1">
+    <dgm:scene3d>
+      <a:camera prst="orthographicFront"/>
+      <a:lightRig rig="threePt" dir="t"/>
+    </dgm:scene3d>
+    <dgm:sp3d/>
+    <dgm:txPr/>
+    <dgm:style>
+      <a:lnRef idx="2">
+        <a:scrgbClr r="0" g="0" b="0"/>
+      </a:lnRef>
+      <a:fillRef idx="1">
+        <a:scrgbClr r="0" g="0" b="0"/>
+      </a:fillRef>
+      <a:effectRef idx="0">
+        <a:scrgbClr r="0" g="0" b="0"/>
+      </a:effectRef>
+      <a:fontRef idx="minor"/>
+    </dgm:style>
+  </dgm:styleLbl>
+  <dgm:styleLbl name="bgAccFollowNode1">
+    <dgm:scene3d>
+      <a:camera prst="orthographicFront"/>
+      <a:lightRig rig="threePt" dir="t"/>
+    </dgm:scene3d>
+    <dgm:sp3d/>
+    <dgm:txPr/>
+    <dgm:style>
+      <a:lnRef idx="2">
+        <a:scrgbClr r="0" g="0" b="0"/>
+      </a:lnRef>
+      <a:fillRef idx="1">
+        <a:scrgbClr r="0" g="0" b="0"/>
+      </a:fillRef>
+      <a:effectRef idx="0">
+        <a:scrgbClr r="0" g="0" b="0"/>
+      </a:effectRef>
+      <a:fontRef idx="minor"/>
+    </dgm:style>
+  </dgm:styleLbl>
+  <dgm:styleLbl name="fgAcc0">
+    <dgm:scene3d>
+      <a:camera prst="orthographicFront"/>
+      <a:lightRig rig="threePt" dir="t"/>
+    </dgm:scene3d>
+    <dgm:sp3d/>
+    <dgm:txPr/>
+    <dgm:style>
+      <a:lnRef idx="2">
+        <a:scrgbClr r="0" g="0" b="0"/>
+      </a:lnRef>
+      <a:fillRef idx="1">
+        <a:scrgbClr r="0" g="0" b="0"/>
+      </a:fillRef>
+      <a:effectRef idx="0">
+        <a:scrgbClr r="0" g="0" b="0"/>
+      </a:effectRef>
+      <a:fontRef idx="minor"/>
+    </dgm:style>
+  </dgm:styleLbl>
+  <dgm:styleLbl name="fgAcc2">
+    <dgm:scene3d>
+      <a:camera prst="orthographicFront"/>
+      <a:lightRig rig="threePt" dir="t"/>
+    </dgm:scene3d>
+    <dgm:sp3d/>
+    <dgm:txPr/>
+    <dgm:style>
+      <a:lnRef idx="2">
+        <a:scrgbClr r="0" g="0" b="0"/>
+      </a:lnRef>
+      <a:fillRef idx="1">
+        <a:scrgbClr r="0" g="0" b="0"/>
+      </a:fillRef>
+      <a:effectRef idx="0">
+        <a:scrgbClr r="0" g="0" b="0"/>
+      </a:effectRef>
+      <a:fontRef idx="minor"/>
+    </dgm:style>
+  </dgm:styleLbl>
+  <dgm:styleLbl name="fgAcc3">
+    <dgm:scene3d>
+      <a:camera prst="orthographicFront"/>
+      <a:lightRig rig="threePt" dir="t"/>
+    </dgm:scene3d>
+    <dgm:sp3d/>
+    <dgm:txPr/>
+    <dgm:style>
+      <a:lnRef idx="2">
+        <a:scrgbClr r="0" g="0" b="0"/>
+      </a:lnRef>
+      <a:fillRef idx="1">
+        <a:scrgbClr r="0" g="0" b="0"/>
+      </a:fillRef>
+      <a:effectRef idx="0">
+        <a:scrgbClr r="0" g="0" b="0"/>
+      </a:effectRef>
+      <a:fontRef idx="minor"/>
+    </dgm:style>
+  </dgm:styleLbl>
+  <dgm:styleLbl name="fgAcc4">
+    <dgm:scene3d>
+      <a:camera prst="orthographicFront"/>
+      <a:lightRig rig="threePt" dir="t"/>
+    </dgm:scene3d>
+    <dgm:sp3d/>
+    <dgm:txPr/>
+    <dgm:style>
+      <a:lnRef idx="2">
+        <a:scrgbClr r="0" g="0" b="0"/>
+      </a:lnRef>
+      <a:fillRef idx="1">
+        <a:scrgbClr r="0" g="0" b="0"/>
+      </a:fillRef>
+      <a:effectRef idx="0">
+        <a:scrgbClr r="0" g="0" b="0"/>
+      </a:effectRef>
+      <a:fontRef idx="minor"/>
+    </dgm:style>
+  </dgm:styleLbl>
+  <dgm:styleLbl name="bgShp">
+    <dgm:scene3d>
+      <a:camera prst="orthographicFront"/>
+      <a:lightRig rig="threePt" dir="t"/>
+    </dgm:scene3d>
+    <dgm:sp3d/>
+    <dgm:txPr/>
+    <dgm:style>
+      <a:lnRef idx="0">
+        <a:scrgbClr r="0" g="0" b="0"/>
+      </a:lnRef>
+      <a:fillRef idx="1">
+        <a:scrgbClr r="0" g="0" b="0"/>
+      </a:fillRef>
+      <a:effectRef idx="0">
+        <a:scrgbClr r="0" g="0" b="0"/>
+      </a:effectRef>
+      <a:fontRef idx="minor"/>
+    </dgm:style>
+  </dgm:styleLbl>
+  <dgm:styleLbl name="dkBgShp">
+    <dgm:scene3d>
+      <a:camera prst="orthographicFront"/>
+      <a:lightRig rig="threePt" dir="t"/>
+    </dgm:scene3d>
+    <dgm:sp3d/>
+    <dgm:txPr/>
+    <dgm:style>
+      <a:lnRef idx="0">
+        <a:scrgbClr r="0" g="0" b="0"/>
+      </a:lnRef>
+      <a:fillRef idx="1">
+        <a:scrgbClr r="0" g="0" b="0"/>
+      </a:fillRef>
+      <a:effectRef idx="0">
+        <a:scrgbClr r="0" g="0" b="0"/>
+      </a:effectRef>
+      <a:fontRef idx="minor"/>
+    </dgm:style>
+  </dgm:styleLbl>
+  <dgm:styleLbl name="trBgShp">
+    <dgm:scene3d>
+      <a:camera prst="orthographicFront"/>
+      <a:lightRig rig="threePt" dir="t"/>
+    </dgm:scene3d>
+    <dgm:sp3d/>
+    <dgm:txPr/>
+    <dgm:style>
+      <a:lnRef idx="0">
+        <a:scrgbClr r="0" g="0" b="0"/>
+      </a:lnRef>
+      <a:fillRef idx="1">
+        <a:scrgbClr r="0" g="0" b="0"/>
+      </a:fillRef>
+      <a:effectRef idx="0">
+        <a:scrgbClr r="0" g="0" b="0"/>
+      </a:effectRef>
+      <a:fontRef idx="minor"/>
+    </dgm:style>
+  </dgm:styleLbl>
+  <dgm:styleLbl name="fgShp">
+    <dgm:scene3d>
+      <a:camera prst="orthographicFront"/>
+      <a:lightRig rig="threePt" dir="t"/>
+    </dgm:scene3d>
+    <dgm:sp3d/>
+    <dgm:txPr/>
+    <dgm:style>
+      <a:lnRef idx="2">
+        <a:scrgbClr r="0" g="0" b="0"/>
+      </a:lnRef>
+      <a:fillRef idx="1">
+        <a:scrgbClr r="0" g="0" b="0"/>
+      </a:fillRef>
+      <a:effectRef idx="0">
+        <a:scrgbClr r="0" g="0" b="0"/>
+      </a:effectRef>
+      <a:fontRef idx="minor"/>
+    </dgm:style>
+  </dgm:styleLbl>
+  <dgm:styleLbl name="revTx">
+    <dgm:scene3d>
+      <a:camera prst="orthographicFront"/>
+      <a:lightRig rig="threePt" dir="t"/>
+    </dgm:scene3d>
+    <dgm:sp3d/>
+    <dgm:txPr/>
+    <dgm:style>
+      <a:lnRef idx="0">
+        <a:scrgbClr r="0" g="0" b="0"/>
+      </a:lnRef>
+      <a:fillRef idx="0">
+        <a:scrgbClr r="0" g="0" b="0"/>
+      </a:fillRef>
+      <a:effectRef idx="0">
+        <a:scrgbClr r="0" g="0" b="0"/>
+      </a:effectRef>
+      <a:fontRef idx="minor"/>
+    </dgm:style>
+  </dgm:styleLbl>
+</dgm:styleDef>
+</file>
+
 <file path=ppt/notesMasters/notesMaster1.xml><?xml version="1.0" encoding="utf-8"?>
 <p:notesMaster xmlns:a="http://schemas.openxmlformats.org/drawingml/2006/main" xmlns:r="http://schemas.openxmlformats.org/officeDocument/2006/relationships" xmlns:p="http://schemas.openxmlformats.org/presentationml/2006/main">
   <p:cSld>
@@ -352,7 +5311,7 @@
           <a:p>
             <a:fld id="{B7268E1E-0E44-426D-905E-8AD9B19D2182}" type="datetimeFigureOut">
               <a:rPr lang="cs-CZ" smtClean="0"/>
-              <a:t>08.04.2026</a:t>
+              <a:t>14.04.2026</a:t>
             </a:fld>
             <a:endParaRPr lang="cs-CZ"/>
           </a:p>
@@ -1870,7 +6829,13 @@
   <p:cSld>
     <p:spTree>
       <p:nvGrpSpPr>
-        <p:cNvPr id="1" name=""/>
+        <p:cNvPr id="1" name="">
+          <a:extLst>
+            <a:ext uri="{FF2B5EF4-FFF2-40B4-BE49-F238E27FC236}">
+              <a16:creationId xmlns:a16="http://schemas.microsoft.com/office/drawing/2014/main" id="{3DCBD85B-1BF0-57D0-8632-A041A343FE1C}"/>
+            </a:ext>
+          </a:extLst>
+        </p:cNvPr>
         <p:cNvGrpSpPr/>
         <p:nvPr/>
       </p:nvGrpSpPr>
@@ -1884,7 +6849,13 @@
       </p:grpSpPr>
       <p:sp>
         <p:nvSpPr>
-          <p:cNvPr id="2" name="Header Placeholder 1"/>
+          <p:cNvPr id="2" name="Header Placeholder 1">
+            <a:extLst>
+              <a:ext uri="{FF2B5EF4-FFF2-40B4-BE49-F238E27FC236}">
+                <a16:creationId xmlns:a16="http://schemas.microsoft.com/office/drawing/2014/main" id="{5E37BF6A-B21C-FD5B-AE30-1522A46064E0}"/>
+              </a:ext>
+            </a:extLst>
+          </p:cNvPr>
           <p:cNvSpPr>
             <a:spLocks noGrp="1"/>
           </p:cNvSpPr>
@@ -1915,7 +6886,13 @@
       </p:sp>
       <p:sp>
         <p:nvSpPr>
-          <p:cNvPr id="3" name="Date Placeholder 2"/>
+          <p:cNvPr id="3" name="Date Placeholder 2">
+            <a:extLst>
+              <a:ext uri="{FF2B5EF4-FFF2-40B4-BE49-F238E27FC236}">
+                <a16:creationId xmlns:a16="http://schemas.microsoft.com/office/drawing/2014/main" id="{86FEF8D1-B033-11BB-99DC-016E669BDA3E}"/>
+              </a:ext>
+            </a:extLst>
+          </p:cNvPr>
           <p:cNvSpPr>
             <a:spLocks noGrp="1"/>
           </p:cNvSpPr>
@@ -1949,7 +6926,13 @@
       </p:sp>
       <p:sp>
         <p:nvSpPr>
-          <p:cNvPr id="4" name="Slide Image Placeholder 3"/>
+          <p:cNvPr id="4" name="Slide Image Placeholder 3">
+            <a:extLst>
+              <a:ext uri="{FF2B5EF4-FFF2-40B4-BE49-F238E27FC236}">
+                <a16:creationId xmlns:a16="http://schemas.microsoft.com/office/drawing/2014/main" id="{F599F11B-DCB6-74AB-1DAA-3E0D3353503B}"/>
+              </a:ext>
+            </a:extLst>
+          </p:cNvPr>
           <p:cNvSpPr>
             <a:spLocks noGrp="1" noRot="1" noChangeAspect="1"/>
           </p:cNvSpPr>
@@ -1982,7 +6965,13 @@
       </p:sp>
       <p:sp>
         <p:nvSpPr>
-          <p:cNvPr id="5" name="Notes Placeholder 4"/>
+          <p:cNvPr id="5" name="Notes Placeholder 4">
+            <a:extLst>
+              <a:ext uri="{FF2B5EF4-FFF2-40B4-BE49-F238E27FC236}">
+                <a16:creationId xmlns:a16="http://schemas.microsoft.com/office/drawing/2014/main" id="{8B73E24F-2620-CFF3-D074-17B1D09C8C12}"/>
+              </a:ext>
+            </a:extLst>
+          </p:cNvPr>
           <p:cNvSpPr>
             <a:spLocks noGrp="1"/>
           </p:cNvSpPr>
@@ -2025,7 +7014,13 @@
       </p:sp>
       <p:sp>
         <p:nvSpPr>
-          <p:cNvPr id="6" name="Footer Placeholder 5"/>
+          <p:cNvPr id="6" name="Footer Placeholder 5">
+            <a:extLst>
+              <a:ext uri="{FF2B5EF4-FFF2-40B4-BE49-F238E27FC236}">
+                <a16:creationId xmlns:a16="http://schemas.microsoft.com/office/drawing/2014/main" id="{24FA9614-8D57-AF26-AF7A-DDB2C1E989EA}"/>
+              </a:ext>
+            </a:extLst>
+          </p:cNvPr>
           <p:cNvSpPr>
             <a:spLocks noGrp="1"/>
           </p:cNvSpPr>
@@ -2056,7 +7051,13 @@
       </p:sp>
       <p:sp>
         <p:nvSpPr>
-          <p:cNvPr id="7" name="Slide Number Placeholder 6"/>
+          <p:cNvPr id="7" name="Slide Number Placeholder 6">
+            <a:extLst>
+              <a:ext uri="{FF2B5EF4-FFF2-40B4-BE49-F238E27FC236}">
+                <a16:creationId xmlns:a16="http://schemas.microsoft.com/office/drawing/2014/main" id="{1F2000B6-0170-3B31-CC6E-8455258D57CA}"/>
+              </a:ext>
+            </a:extLst>
+          </p:cNvPr>
           <p:cNvSpPr>
             <a:spLocks noGrp="1"/>
           </p:cNvSpPr>
@@ -2089,6 +7090,11 @@
         </p:txBody>
       </p:sp>
     </p:spTree>
+    <p:extLst>
+      <p:ext uri="{BB962C8B-B14F-4D97-AF65-F5344CB8AC3E}">
+        <p14:creationId xmlns:p14="http://schemas.microsoft.com/office/powerpoint/2010/main" val="787382072"/>
+      </p:ext>
+    </p:extLst>
   </p:cSld>
   <p:clrMapOvr>
     <a:masterClrMapping/>
@@ -18242,7 +23248,7 @@
         </p:nvSpPr>
         <p:spPr>
           <a:xfrm>
-            <a:off x="0" y="0"/>
+            <a:off x="0" y="23368"/>
             <a:ext cx="12192000" cy="6858000"/>
           </a:xfrm>
           <a:prstGeom prst="roundRect">
@@ -18265,10 +23271,13 @@
           <a:bodyPr vert="horz" wrap="square" lIns="63500" tIns="63500" rIns="63500" bIns="63500" rtlCol="0" anchor="ctr"/>
           <a:lstStyle/>
           <a:p>
-            <a:pPr algn="ctr">
+            <a:pPr>
+              <a:lnSpc>
+                <a:spcPct val="125000"/>
+              </a:lnSpc>
               <a:defRPr/>
             </a:pPr>
-            <a:endParaRPr/>
+            <a:endParaRPr lang="en-US" altLang="zh-CN" sz="1050" dirty="0"/>
           </a:p>
         </p:txBody>
       </p:sp>
@@ -18357,16 +23366,15 @@
               <a:defRPr/>
             </a:pPr>
             <a:r>
-              <a:rPr lang="en-US" sz="1600" b="1" i="0" u="none" strike="noStrike" dirty="0">
+              <a:rPr lang="en-US" sz="1600" b="1" dirty="0">
                 <a:solidFill>
                   <a:srgbClr val="FFFFFF"/>
                 </a:solidFill>
                 <a:latin typeface="Poppins"/>
-                <a:ea typeface="Poppins"/>
                 <a:cs typeface="Poppins"/>
                 <a:sym typeface="Poppins"/>
               </a:rPr>
-              <a:t>Modular &amp; Scalable Infrastructure</a:t>
+              <a:t>All Backend &amp; Frontend Container in Single Host</a:t>
             </a:r>
             <a:endParaRPr lang="en-US" sz="1100" dirty="0"/>
           </a:p>
@@ -18488,7 +23496,7 @@
                 <a:cs typeface="Poppins"/>
                 <a:sym typeface="Poppins"/>
               </a:rPr>
-              <a:t>Telegram Frontend</a:t>
+              <a:t>Frontend for Telegram </a:t>
             </a:r>
             <a:endParaRPr lang="en-US" sz="1100" dirty="0"/>
           </a:p>
@@ -18508,7 +23516,7 @@
                 <a:cs typeface="Poppins"/>
                 <a:sym typeface="Poppins"/>
               </a:rPr>
-              <a:t>Users talk to the bot through Telegram.</a:t>
+              <a:t>Which Communicate with Telegram API and Backend containers.</a:t>
             </a:r>
           </a:p>
         </p:txBody>
@@ -18629,7 +23637,7 @@
                 <a:cs typeface="Poppins"/>
                 <a:sym typeface="Poppins"/>
               </a:rPr>
-              <a:t>MongoDB Persistence</a:t>
+              <a:t>MongoDB</a:t>
             </a:r>
             <a:endParaRPr lang="en-US" sz="1100" dirty="0"/>
           </a:p>
@@ -18640,6 +23648,18 @@
               </a:lnSpc>
             </a:pPr>
             <a:r>
+              <a:rPr lang="en-US" sz="1300" dirty="0">
+                <a:solidFill>
+                  <a:srgbClr val="4B5563"/>
+                </a:solidFill>
+                <a:latin typeface="Poppins"/>
+                <a:ea typeface="Poppins"/>
+                <a:cs typeface="Poppins"/>
+                <a:sym typeface="Poppins"/>
+              </a:rPr>
+              <a:t>That can s</a:t>
+            </a:r>
+            <a:r>
               <a:rPr lang="en-US" sz="1300" b="0" i="0" u="none" strike="noStrike" dirty="0">
                 <a:solidFill>
                   <a:srgbClr val="4B5563"/>
@@ -18649,7 +23669,7 @@
                 <a:cs typeface="Poppins"/>
                 <a:sym typeface="Poppins"/>
               </a:rPr>
-              <a:t>The Telegram bot stores chat records in MongoDB.</a:t>
+              <a:t>tore chat records from frontend.</a:t>
             </a:r>
           </a:p>
         </p:txBody>
@@ -18663,7 +23683,7 @@
         <p:spPr>
           <a:xfrm>
             <a:off x="6223000" y="3429000"/>
-            <a:ext cx="5207000" cy="762000"/>
+            <a:ext cx="5207000" cy="1778000"/>
           </a:xfrm>
           <a:prstGeom prst="roundRect">
             <a:avLst>
@@ -18737,8 +23757,8 @@
         </p:nvSpPr>
         <p:spPr>
           <a:xfrm>
-            <a:off x="7048500" y="3492500"/>
-            <a:ext cx="4254500" cy="635000"/>
+            <a:off x="7048500" y="3799717"/>
+            <a:ext cx="4254500" cy="1354558"/>
           </a:xfrm>
           <a:prstGeom prst="rect">
             <a:avLst/>
@@ -18770,12 +23790,12 @@
                 <a:cs typeface="Poppins"/>
                 <a:sym typeface="Poppins"/>
               </a:rPr>
-              <a:t>Backend Routing</a:t>
+              <a:t>Multiple Backend</a:t>
             </a:r>
             <a:endParaRPr lang="en-US" sz="1100" dirty="0"/>
           </a:p>
           <a:p>
-            <a:pPr indent="0" algn="l">
+            <a:pPr>
               <a:lnSpc>
                 <a:spcPct val="125000"/>
               </a:lnSpc>
@@ -18790,137 +23810,20 @@
                 <a:cs typeface="Poppins"/>
                 <a:sym typeface="Poppins"/>
               </a:rPr>
-              <a:t>The bot sends each request to one backend container.</a:t>
+              <a:t>Each </a:t>
             </a:r>
-          </a:p>
-        </p:txBody>
-      </p:sp>
-      <p:sp>
-        <p:nvSpPr>
-          <p:cNvPr id="16" name="AutoShape 16"/>
-          <p:cNvSpPr/>
-          <p:nvPr/>
-        </p:nvSpPr>
-        <p:spPr>
-          <a:xfrm>
-            <a:off x="6223000" y="4318000"/>
-            <a:ext cx="5207000" cy="762000"/>
-          </a:xfrm>
-          <a:prstGeom prst="roundRect">
-            <a:avLst>
-              <a:gd name="adj" fmla="val 16666"/>
-            </a:avLst>
-          </a:prstGeom>
-          <a:solidFill>
-            <a:srgbClr val="F0FDF4">
-              <a:alpha val="100000"/>
-            </a:srgbClr>
-          </a:solidFill>
-          <a:ln w="12700" cap="flat" cmpd="sng">
-            <a:solidFill>
-              <a:srgbClr val="10B981">
-                <a:alpha val="20000"/>
-              </a:srgbClr>
-            </a:solidFill>
-            <a:prstDash val="solid"/>
-            <a:round/>
-          </a:ln>
-        </p:spPr>
-        <p:txBody>
-          <a:bodyPr vert="horz" wrap="square" lIns="63500" tIns="63500" rIns="63500" bIns="63500" rtlCol="0" anchor="ctr"/>
-          <a:lstStyle/>
-          <a:p>
-            <a:pPr algn="ctr">
-              <a:defRPr/>
-            </a:pPr>
-            <a:endParaRPr/>
-          </a:p>
-        </p:txBody>
-      </p:sp>
-      <p:pic>
-        <p:nvPicPr>
-          <p:cNvPr id="17" name="Picture 17"/>
-          <p:cNvPicPr>
-            <a:picLocks noChangeAspect="1"/>
-          </p:cNvPicPr>
-          <p:nvPr/>
-        </p:nvPicPr>
-        <p:blipFill>
-          <a:blip>
-            <a:extLst>
-              <a:ext uri="{28A0092B-C50C-407E-A947-70E740481C1C}">
-                <a14:useLocalDpi xmlns:a14="http://schemas.microsoft.com/office/drawing/2010/main" val="0"/>
-              </a:ext>
-              <a:ext uri="{96DAC541-7B7A-43D3-8B79-37D633B846F1}">
-                <asvg:svgBlip xmlns:asvg="http://schemas.microsoft.com/office/drawing/2016/SVG/main" r:embed="rId7"/>
-              </a:ext>
-            </a:extLst>
-          </a:blip>
-          <a:stretch>
-            <a:fillRect/>
-          </a:stretch>
-        </p:blipFill>
-        <p:spPr>
-          <a:xfrm>
-            <a:off x="6413500" y="4445000"/>
-            <a:ext cx="508000" cy="508000"/>
-          </a:xfrm>
-          <a:prstGeom prst="rect">
-            <a:avLst/>
-          </a:prstGeom>
-        </p:spPr>
-      </p:pic>
-      <p:sp>
-        <p:nvSpPr>
-          <p:cNvPr id="18" name="AutoShape 18"/>
-          <p:cNvSpPr/>
-          <p:nvPr/>
-        </p:nvSpPr>
-        <p:spPr>
-          <a:xfrm>
-            <a:off x="7048500" y="4381500"/>
-            <a:ext cx="4254500" cy="635000"/>
-          </a:xfrm>
-          <a:prstGeom prst="rect">
-            <a:avLst/>
-          </a:prstGeom>
-          <a:noFill/>
-          <a:ln w="12700" cap="flat" cmpd="sng">
-            <a:noFill/>
-            <a:prstDash val="solid"/>
-            <a:round/>
-          </a:ln>
-        </p:spPr>
-        <p:txBody>
-          <a:bodyPr vert="horz" wrap="square" lIns="0" tIns="0" rIns="0" bIns="0" rtlCol="0" anchor="ctr" anchorCtr="0"/>
-          <a:lstStyle/>
-          <a:p>
-            <a:pPr indent="0" algn="l">
-              <a:lnSpc>
-                <a:spcPct val="125000"/>
-              </a:lnSpc>
-              <a:defRPr/>
-            </a:pPr>
             <a:r>
-              <a:rPr lang="en-US" sz="1500" b="1" i="0" u="none" strike="noStrike" dirty="0">
+              <a:rPr lang="en-US" sz="1300" dirty="0">
                 <a:solidFill>
-                  <a:srgbClr val="1F2937"/>
+                  <a:srgbClr val="4B5563"/>
                 </a:solidFill>
                 <a:latin typeface="Poppins"/>
                 <a:ea typeface="Poppins"/>
                 <a:cs typeface="Poppins"/>
                 <a:sym typeface="Poppins"/>
               </a:rPr>
-              <a:t>Flexible Configuration</a:t>
+              <a:t>individual </a:t>
             </a:r>
-            <a:endParaRPr lang="en-US" sz="1100" dirty="0"/>
-          </a:p>
-          <a:p>
-            <a:pPr indent="0" algn="l">
-              <a:lnSpc>
-                <a:spcPct val="125000"/>
-              </a:lnSpc>
-            </a:pPr>
             <a:r>
               <a:rPr lang="en-US" sz="1300" b="0" i="0" u="none" strike="noStrike" dirty="0">
                 <a:solidFill>
@@ -18931,139 +23834,29 @@
                 <a:cs typeface="Poppins"/>
                 <a:sym typeface="Poppins"/>
               </a:rPr>
-              <a:t>Different backends can use different models, providers, and API settings.</a:t>
+              <a:t>backend container</a:t>
             </a:r>
-          </a:p>
-        </p:txBody>
-      </p:sp>
-      <p:sp>
-        <p:nvSpPr>
-          <p:cNvPr id="19" name="AutoShape 19"/>
-          <p:cNvSpPr/>
-          <p:nvPr/>
-        </p:nvSpPr>
-        <p:spPr>
-          <a:xfrm>
-            <a:off x="6223000" y="5207000"/>
-            <a:ext cx="5207000" cy="762000"/>
-          </a:xfrm>
-          <a:prstGeom prst="roundRect">
-            <a:avLst>
-              <a:gd name="adj" fmla="val 16666"/>
-            </a:avLst>
-          </a:prstGeom>
-          <a:solidFill>
-            <a:srgbClr val="F0FDF4">
-              <a:alpha val="100000"/>
-            </a:srgbClr>
-          </a:solidFill>
-          <a:ln w="12700" cap="flat" cmpd="sng">
-            <a:solidFill>
-              <a:srgbClr val="10B981">
-                <a:alpha val="20000"/>
-              </a:srgbClr>
-            </a:solidFill>
-            <a:prstDash val="solid"/>
-            <a:round/>
-          </a:ln>
-        </p:spPr>
-        <p:txBody>
-          <a:bodyPr vert="horz" wrap="square" lIns="63500" tIns="63500" rIns="63500" bIns="63500" rtlCol="0" anchor="ctr"/>
-          <a:lstStyle/>
-          <a:p>
-            <a:pPr algn="ctr">
-              <a:defRPr/>
-            </a:pPr>
-            <a:endParaRPr/>
-          </a:p>
-        </p:txBody>
-      </p:sp>
-      <p:pic>
-        <p:nvPicPr>
-          <p:cNvPr id="20" name="Picture 20"/>
-          <p:cNvPicPr>
-            <a:picLocks noChangeAspect="1"/>
-          </p:cNvPicPr>
-          <p:nvPr/>
-        </p:nvPicPr>
-        <p:blipFill>
-          <a:blip>
-            <a:extLst>
-              <a:ext uri="{28A0092B-C50C-407E-A947-70E740481C1C}">
-                <a14:useLocalDpi xmlns:a14="http://schemas.microsoft.com/office/drawing/2010/main" val="0"/>
-              </a:ext>
-              <a:ext uri="{96DAC541-7B7A-43D3-8B79-37D633B846F1}">
-                <asvg:svgBlip xmlns:asvg="http://schemas.microsoft.com/office/drawing/2016/SVG/main" r:embed="rId8"/>
-              </a:ext>
-            </a:extLst>
-          </a:blip>
-          <a:stretch>
-            <a:fillRect/>
-          </a:stretch>
-        </p:blipFill>
-        <p:spPr>
-          <a:xfrm>
-            <a:off x="6413500" y="5334000"/>
-            <a:ext cx="508000" cy="508000"/>
-          </a:xfrm>
-          <a:prstGeom prst="rect">
-            <a:avLst/>
-          </a:prstGeom>
-        </p:spPr>
-      </p:pic>
-      <p:sp>
-        <p:nvSpPr>
-          <p:cNvPr id="21" name="AutoShape 21"/>
-          <p:cNvSpPr/>
-          <p:nvPr/>
-        </p:nvSpPr>
-        <p:spPr>
-          <a:xfrm>
-            <a:off x="7048500" y="5270500"/>
-            <a:ext cx="4254500" cy="635000"/>
-          </a:xfrm>
-          <a:prstGeom prst="rect">
-            <a:avLst/>
-          </a:prstGeom>
-          <a:noFill/>
-          <a:ln w="12700" cap="flat" cmpd="sng">
-            <a:noFill/>
-            <a:prstDash val="solid"/>
-            <a:round/>
-          </a:ln>
-        </p:spPr>
-        <p:txBody>
-          <a:bodyPr vert="horz" wrap="square" lIns="0" tIns="0" rIns="0" bIns="0" rtlCol="0" anchor="ctr" anchorCtr="0"/>
-          <a:lstStyle/>
-          <a:p>
-            <a:pPr indent="0" algn="l">
-              <a:lnSpc>
-                <a:spcPct val="125000"/>
-              </a:lnSpc>
-              <a:defRPr/>
-            </a:pPr>
             <a:r>
-              <a:rPr lang="en-US" sz="1500" b="1" i="0" u="none" strike="noStrike" dirty="0">
+              <a:rPr lang="en-US" sz="1300" dirty="0">
                 <a:solidFill>
-                  <a:srgbClr val="1F2937"/>
+                  <a:srgbClr val="4B5563"/>
                 </a:solidFill>
                 <a:latin typeface="Poppins"/>
                 <a:ea typeface="Poppins"/>
                 <a:cs typeface="Poppins"/>
                 <a:sym typeface="Poppins"/>
               </a:rPr>
-              <a:t>Modular Scalability</a:t>
+              <a:t> can use different models, API settings.</a:t>
             </a:r>
-            <a:endParaRPr lang="en-US" sz="1100" dirty="0"/>
           </a:p>
           <a:p>
-            <a:pPr indent="0" algn="l">
+            <a:pPr>
               <a:lnSpc>
                 <a:spcPct val="125000"/>
               </a:lnSpc>
             </a:pPr>
             <a:r>
-              <a:rPr lang="en-US" sz="1300" b="0" i="0" u="none" strike="noStrike" dirty="0">
+              <a:rPr lang="en-US" sz="1300" dirty="0">
                 <a:solidFill>
                   <a:srgbClr val="4B5563"/>
                 </a:solidFill>
@@ -19075,6 +23868,38 @@
               <a:t>This modular design makes extension and replacement easier.</a:t>
             </a:r>
           </a:p>
+          <a:p>
+            <a:pPr>
+              <a:lnSpc>
+                <a:spcPct val="125000"/>
+              </a:lnSpc>
+            </a:pPr>
+            <a:endParaRPr lang="en-US" sz="1300" dirty="0">
+              <a:solidFill>
+                <a:srgbClr val="4B5563"/>
+              </a:solidFill>
+              <a:latin typeface="Poppins"/>
+              <a:ea typeface="Poppins"/>
+              <a:cs typeface="Poppins"/>
+              <a:sym typeface="Poppins"/>
+            </a:endParaRPr>
+          </a:p>
+          <a:p>
+            <a:pPr indent="0" algn="l">
+              <a:lnSpc>
+                <a:spcPct val="125000"/>
+              </a:lnSpc>
+            </a:pPr>
+            <a:endParaRPr lang="en-US" sz="1300" b="0" i="0" u="none" strike="noStrike" dirty="0">
+              <a:solidFill>
+                <a:srgbClr val="4B5563"/>
+              </a:solidFill>
+              <a:latin typeface="Poppins"/>
+              <a:ea typeface="Poppins"/>
+              <a:cs typeface="Poppins"/>
+              <a:sym typeface="Poppins"/>
+            </a:endParaRPr>
+          </a:p>
         </p:txBody>
       </p:sp>
       <p:sp>
@@ -19115,44 +23940,34 @@
           </a:p>
         </p:txBody>
       </p:sp>
-      <p:pic>
-        <p:nvPicPr>
-          <p:cNvPr id="24" name="图片 23">
+      <p:graphicFrame>
+        <p:nvGraphicFramePr>
+          <p:cNvPr id="5" name="图示 4">
             <a:extLst>
               <a:ext uri="{FF2B5EF4-FFF2-40B4-BE49-F238E27FC236}">
-                <a16:creationId xmlns:a16="http://schemas.microsoft.com/office/drawing/2014/main" id="{E933267F-6D3D-8257-9D72-556215CBB7D6}"/>
+                <a16:creationId xmlns:a16="http://schemas.microsoft.com/office/drawing/2014/main" id="{913A95B1-752E-3279-7804-B1EAC163205F}"/>
               </a:ext>
             </a:extLst>
           </p:cNvPr>
-          <p:cNvPicPr>
-            <a:picLocks noChangeAspect="1"/>
-          </p:cNvPicPr>
-          <p:nvPr/>
-        </p:nvPicPr>
-        <p:blipFill>
-          <a:blip r:embed="rId9"/>
-          <a:stretch>
-            <a:fillRect/>
-          </a:stretch>
-        </p:blipFill>
-        <p:spPr>
-          <a:xfrm>
-            <a:off x="762000" y="1651000"/>
-            <a:ext cx="5080000" cy="3893900"/>
-          </a:xfrm>
-          <a:prstGeom prst="rect">
-            <a:avLst/>
-          </a:prstGeom>
-          <a:effectLst>
-            <a:outerShdw blurRad="50800" dist="38100" dir="2700000" algn="tl" rotWithShape="0">
-              <a:prstClr val="black">
-                <a:alpha val="40000"/>
-              </a:prstClr>
-            </a:outerShdw>
-            <a:softEdge rad="31750"/>
-          </a:effectLst>
-        </p:spPr>
-      </p:pic>
+          <p:cNvGraphicFramePr/>
+          <p:nvPr>
+            <p:extLst>
+              <p:ext uri="{D42A27DB-BD31-4B8C-83A1-F6EECF244321}">
+                <p14:modId xmlns:p14="http://schemas.microsoft.com/office/powerpoint/2010/main" val="1462221660"/>
+              </p:ext>
+            </p:extLst>
+          </p:nvPr>
+        </p:nvGraphicFramePr>
+        <p:xfrm>
+          <a:off x="458216" y="1331682"/>
+          <a:ext cx="5669534" cy="4708992"/>
+        </p:xfrm>
+        <a:graphic>
+          <a:graphicData uri="http://schemas.openxmlformats.org/drawingml/2006/diagram">
+            <dgm:relIds xmlns:dgm="http://schemas.openxmlformats.org/drawingml/2006/diagram" xmlns:r="http://schemas.openxmlformats.org/officeDocument/2006/relationships" r:dm="rId7" r:lo="rId8" r:qs="rId9" r:cs="rId10"/>
+          </a:graphicData>
+        </a:graphic>
+      </p:graphicFrame>
     </p:spTree>
   </p:cSld>
   <p:clrMapOvr>
@@ -19164,19 +23979,15 @@
 <file path=ppt/slides/slide5.xml><?xml version="1.0" encoding="utf-8"?>
 <p:sld xmlns:a="http://schemas.openxmlformats.org/drawingml/2006/main" xmlns:r="http://schemas.openxmlformats.org/officeDocument/2006/relationships" xmlns:p="http://schemas.openxmlformats.org/presentationml/2006/main">
   <p:cSld>
-    <p:bg>
-      <p:bgPr>
-        <a:solidFill>
-          <a:srgbClr val="F3F4F6">
-            <a:alpha val="100000"/>
-          </a:srgbClr>
-        </a:solidFill>
-        <a:effectLst/>
-      </p:bgPr>
-    </p:bg>
     <p:spTree>
       <p:nvGrpSpPr>
-        <p:cNvPr id="1" name=""/>
+        <p:cNvPr id="1" name="">
+          <a:extLst>
+            <a:ext uri="{FF2B5EF4-FFF2-40B4-BE49-F238E27FC236}">
+              <a16:creationId xmlns:a16="http://schemas.microsoft.com/office/drawing/2014/main" id="{8E17E658-3299-FD6F-F27E-0A0AD987D090}"/>
+            </a:ext>
+          </a:extLst>
+        </p:cNvPr>
         <p:cNvGrpSpPr/>
         <p:nvPr/>
       </p:nvGrpSpPr>
@@ -19190,7 +24001,13 @@
       </p:grpSpPr>
       <p:pic>
         <p:nvPicPr>
-          <p:cNvPr id="2" name="Picture 2"/>
+          <p:cNvPr id="2" name="Picture 2">
+            <a:extLst>
+              <a:ext uri="{FF2B5EF4-FFF2-40B4-BE49-F238E27FC236}">
+                <a16:creationId xmlns:a16="http://schemas.microsoft.com/office/drawing/2014/main" id="{9143D939-1378-A366-5CA4-444EF6FAB9E1}"/>
+              </a:ext>
+            </a:extLst>
+          </p:cNvPr>
           <p:cNvPicPr>
             <a:picLocks noChangeAspect="1"/>
           </p:cNvPicPr>
@@ -19221,7 +24038,13 @@
       </p:pic>
       <p:sp>
         <p:nvSpPr>
-          <p:cNvPr id="3" name="AutoShape 3"/>
+          <p:cNvPr id="3" name="AutoShape 3">
+            <a:extLst>
+              <a:ext uri="{FF2B5EF4-FFF2-40B4-BE49-F238E27FC236}">
+                <a16:creationId xmlns:a16="http://schemas.microsoft.com/office/drawing/2014/main" id="{B9731E97-2588-F97D-818A-4C4516E04504}"/>
+              </a:ext>
+            </a:extLst>
+          </p:cNvPr>
           <p:cNvSpPr/>
           <p:nvPr/>
         </p:nvSpPr>
@@ -19253,13 +24076,19 @@
             <a:pPr algn="ctr">
               <a:defRPr/>
             </a:pPr>
-            <a:endParaRPr/>
+            <a:endParaRPr dirty="0"/>
           </a:p>
         </p:txBody>
       </p:sp>
       <p:sp>
         <p:nvSpPr>
-          <p:cNvPr id="4" name="AutoShape 4"/>
+          <p:cNvPr id="4" name="AutoShape 4">
+            <a:extLst>
+              <a:ext uri="{FF2B5EF4-FFF2-40B4-BE49-F238E27FC236}">
+                <a16:creationId xmlns:a16="http://schemas.microsoft.com/office/drawing/2014/main" id="{06307949-6CBB-36FC-70EF-F47D20312475}"/>
+              </a:ext>
+            </a:extLst>
+          </p:cNvPr>
           <p:cNvSpPr/>
           <p:nvPr/>
         </p:nvSpPr>
@@ -19304,1203 +24133,780 @@
           </a:p>
         </p:txBody>
       </p:sp>
-      <p:sp>
-        <p:nvSpPr>
-          <p:cNvPr id="5" name="AutoShape 5"/>
-          <p:cNvSpPr/>
+      <p:grpSp>
+        <p:nvGrpSpPr>
+          <p:cNvPr id="38" name="组合 37">
+            <a:extLst>
+              <a:ext uri="{FF2B5EF4-FFF2-40B4-BE49-F238E27FC236}">
+                <a16:creationId xmlns:a16="http://schemas.microsoft.com/office/drawing/2014/main" id="{F779ADA4-B0C5-98EF-1A4B-449A3605B7A4}"/>
+              </a:ext>
+            </a:extLst>
+          </p:cNvPr>
+          <p:cNvGrpSpPr/>
           <p:nvPr/>
-        </p:nvSpPr>
-        <p:spPr>
-          <a:xfrm>
-            <a:off x="371061" y="1651000"/>
-            <a:ext cx="4137439" cy="3556000"/>
-          </a:xfrm>
-          <a:prstGeom prst="roundRect">
-            <a:avLst>
-              <a:gd name="adj" fmla="val 7142"/>
-            </a:avLst>
-          </a:prstGeom>
-          <a:solidFill>
-            <a:srgbClr val="FFFFFF">
-              <a:alpha val="100000"/>
-            </a:srgbClr>
-          </a:solidFill>
-          <a:ln w="25400" cap="flat" cmpd="sng">
-            <a:noFill/>
-            <a:prstDash val="solid"/>
-            <a:round/>
-          </a:ln>
-          <a:effectLst>
-            <a:outerShdw blurRad="254000" dist="127000" dir="2700000" algn="tl" rotWithShape="0">
-              <a:srgbClr val="000000">
-                <a:alpha val="10000"/>
-              </a:srgbClr>
-            </a:outerShdw>
-          </a:effectLst>
-        </p:spPr>
-        <p:txBody>
-          <a:bodyPr vert="horz" wrap="square" lIns="63500" tIns="63500" rIns="63500" bIns="63500" rtlCol="0" anchor="ctr"/>
-          <a:lstStyle/>
-          <a:p>
-            <a:pPr algn="ctr">
-              <a:defRPr/>
-            </a:pPr>
-            <a:endParaRPr/>
-          </a:p>
-        </p:txBody>
-      </p:sp>
-      <p:sp>
-        <p:nvSpPr>
-          <p:cNvPr id="7" name="AutoShape 7"/>
-          <p:cNvSpPr/>
-          <p:nvPr/>
-        </p:nvSpPr>
-        <p:spPr>
-          <a:xfrm>
-            <a:off x="762000" y="5334000"/>
-            <a:ext cx="3556000" cy="508000"/>
-          </a:xfrm>
-          <a:prstGeom prst="rect">
-            <a:avLst/>
-          </a:prstGeom>
-          <a:noFill/>
-          <a:ln w="12700" cap="flat" cmpd="sng">
-            <a:noFill/>
-            <a:prstDash val="solid"/>
-            <a:round/>
-          </a:ln>
-        </p:spPr>
-        <p:txBody>
-          <a:bodyPr vert="horz" wrap="square" lIns="0" tIns="0" rIns="0" bIns="0" rtlCol="0" anchor="ctr" anchorCtr="0"/>
-          <a:lstStyle/>
-          <a:p>
-            <a:pPr indent="0" algn="ctr">
-              <a:lnSpc>
-                <a:spcPct val="125000"/>
-              </a:lnSpc>
-              <a:defRPr/>
-            </a:pPr>
-            <a:r>
-              <a:rPr lang="en-US" sz="1600" b="1" i="0" u="none" strike="noStrike">
-                <a:solidFill>
-                  <a:srgbClr val="10B981"/>
-                </a:solidFill>
-                <a:latin typeface="Poppins"/>
-                <a:ea typeface="Poppins"/>
-                <a:cs typeface="Poppins"/>
-                <a:sym typeface="Poppins"/>
-              </a:rPr>
-              <a:t>Intuitive Chat Interface</a:t>
-            </a:r>
-            <a:endParaRPr lang="en-US" sz="1100"/>
-          </a:p>
-        </p:txBody>
-      </p:sp>
-      <p:sp>
-        <p:nvSpPr>
-          <p:cNvPr id="8" name="AutoShape 8"/>
-          <p:cNvSpPr/>
-          <p:nvPr/>
-        </p:nvSpPr>
-        <p:spPr>
-          <a:xfrm>
-            <a:off x="4699000" y="1651000"/>
-            <a:ext cx="6731000" cy="825500"/>
-          </a:xfrm>
-          <a:prstGeom prst="roundRect">
-            <a:avLst>
-              <a:gd name="adj" fmla="val 15384"/>
-            </a:avLst>
-          </a:prstGeom>
-          <a:solidFill>
-            <a:srgbClr val="F9FAFB">
-              <a:alpha val="100000"/>
-            </a:srgbClr>
-          </a:solidFill>
-          <a:ln w="12700" cap="flat" cmpd="sng">
+        </p:nvGrpSpPr>
+        <p:grpSpPr>
+          <a:xfrm>
+            <a:off x="5080000" y="3208774"/>
+            <a:ext cx="6746427" cy="2125226"/>
+            <a:chOff x="6407176" y="1253264"/>
+            <a:chExt cx="6746427" cy="2125226"/>
+          </a:xfrm>
+        </p:grpSpPr>
+        <p:sp>
+          <p:nvSpPr>
+            <p:cNvPr id="13" name="AutoShape 13">
+              <a:extLst>
+                <a:ext uri="{FF2B5EF4-FFF2-40B4-BE49-F238E27FC236}">
+                  <a16:creationId xmlns:a16="http://schemas.microsoft.com/office/drawing/2014/main" id="{51808EDB-7BD5-CB18-D5DE-2907007181C1}"/>
+                </a:ext>
+              </a:extLst>
+            </p:cNvPr>
+            <p:cNvSpPr/>
+            <p:nvPr/>
+          </p:nvSpPr>
+          <p:spPr>
+            <a:xfrm>
+              <a:off x="6422603" y="1572253"/>
+              <a:ext cx="6731000" cy="1739900"/>
+            </a:xfrm>
+            <a:prstGeom prst="roundRect">
+              <a:avLst>
+                <a:gd name="adj" fmla="val 15384"/>
+              </a:avLst>
+            </a:prstGeom>
             <a:solidFill>
-              <a:srgbClr val="E5E7EB">
+              <a:srgbClr val="F9FAFB">
                 <a:alpha val="100000"/>
               </a:srgbClr>
             </a:solidFill>
-            <a:prstDash val="solid"/>
-            <a:round/>
-          </a:ln>
-        </p:spPr>
-        <p:txBody>
-          <a:bodyPr vert="horz" wrap="square" lIns="63500" tIns="63500" rIns="63500" bIns="63500" rtlCol="0" anchor="ctr"/>
-          <a:lstStyle/>
-          <a:p>
-            <a:pPr algn="ctr">
-              <a:defRPr/>
-            </a:pPr>
-            <a:endParaRPr/>
-          </a:p>
-        </p:txBody>
-      </p:sp>
-      <p:sp>
-        <p:nvSpPr>
-          <p:cNvPr id="9" name="AutoShape 9"/>
-          <p:cNvSpPr/>
-          <p:nvPr/>
-        </p:nvSpPr>
-        <p:spPr>
-          <a:xfrm>
-            <a:off x="4699000" y="1651000"/>
-            <a:ext cx="76200" cy="825500"/>
-          </a:xfrm>
-          <a:prstGeom prst="roundRect">
-            <a:avLst>
-              <a:gd name="adj" fmla="val 0"/>
-            </a:avLst>
-          </a:prstGeom>
-          <a:solidFill>
-            <a:srgbClr val="10B981">
-              <a:alpha val="100000"/>
-            </a:srgbClr>
-          </a:solidFill>
-          <a:ln w="25400" cap="flat" cmpd="sng">
+            <a:ln w="12700" cap="flat" cmpd="sng">
+              <a:solidFill>
+                <a:srgbClr val="E5E7EB">
+                  <a:alpha val="100000"/>
+                </a:srgbClr>
+              </a:solidFill>
+              <a:prstDash val="solid"/>
+              <a:round/>
+            </a:ln>
+          </p:spPr>
+          <p:txBody>
+            <a:bodyPr vert="horz" wrap="square" lIns="63500" tIns="63500" rIns="63500" bIns="63500" rtlCol="0" anchor="ctr"/>
+            <a:lstStyle/>
+            <a:p>
+              <a:pPr algn="ctr">
+                <a:defRPr/>
+              </a:pPr>
+              <a:endParaRPr/>
+            </a:p>
+          </p:txBody>
+        </p:sp>
+        <p:sp>
+          <p:nvSpPr>
+            <p:cNvPr id="14" name="AutoShape 14">
+              <a:extLst>
+                <a:ext uri="{FF2B5EF4-FFF2-40B4-BE49-F238E27FC236}">
+                  <a16:creationId xmlns:a16="http://schemas.microsoft.com/office/drawing/2014/main" id="{2DE1C159-5C88-B4BE-968B-47F801D667B2}"/>
+                </a:ext>
+              </a:extLst>
+            </p:cNvPr>
+            <p:cNvSpPr/>
+            <p:nvPr/>
+          </p:nvSpPr>
+          <p:spPr>
+            <a:xfrm>
+              <a:off x="6407176" y="1591915"/>
+              <a:ext cx="91627" cy="1720237"/>
+            </a:xfrm>
+            <a:prstGeom prst="roundRect">
+              <a:avLst>
+                <a:gd name="adj" fmla="val 0"/>
+              </a:avLst>
+            </a:prstGeom>
+            <a:solidFill>
+              <a:srgbClr val="10B981">
+                <a:alpha val="100000"/>
+              </a:srgbClr>
+            </a:solidFill>
+            <a:ln w="25400" cap="flat" cmpd="sng">
+              <a:noFill/>
+              <a:prstDash val="solid"/>
+              <a:round/>
+            </a:ln>
+          </p:spPr>
+          <p:txBody>
+            <a:bodyPr vert="horz" wrap="square" lIns="63500" tIns="63500" rIns="63500" bIns="63500" rtlCol="0" anchor="ctr"/>
+            <a:lstStyle/>
+            <a:p>
+              <a:pPr algn="ctr">
+                <a:defRPr/>
+              </a:pPr>
+              <a:endParaRPr/>
+            </a:p>
+          </p:txBody>
+        </p:sp>
+        <p:sp>
+          <p:nvSpPr>
+            <p:cNvPr id="15" name="AutoShape 15">
+              <a:extLst>
+                <a:ext uri="{FF2B5EF4-FFF2-40B4-BE49-F238E27FC236}">
+                  <a16:creationId xmlns:a16="http://schemas.microsoft.com/office/drawing/2014/main" id="{8D50CDAC-A645-0B37-B6F7-79E07AC12569}"/>
+                </a:ext>
+              </a:extLst>
+            </p:cNvPr>
+            <p:cNvSpPr/>
+            <p:nvPr/>
+          </p:nvSpPr>
+          <p:spPr>
+            <a:xfrm>
+              <a:off x="6724843" y="2194553"/>
+              <a:ext cx="508000" cy="508000"/>
+            </a:xfrm>
+            <a:prstGeom prst="ellipse">
+              <a:avLst/>
+            </a:prstGeom>
+            <a:solidFill>
+              <a:srgbClr val="D1FAE5">
+                <a:alpha val="100000"/>
+              </a:srgbClr>
+            </a:solidFill>
+            <a:ln w="25400" cap="flat" cmpd="sng">
+              <a:noFill/>
+              <a:prstDash val="solid"/>
+              <a:round/>
+            </a:ln>
+          </p:spPr>
+          <p:txBody>
+            <a:bodyPr vert="horz" wrap="square" lIns="63500" tIns="63500" rIns="63500" bIns="63500" rtlCol="0" anchor="ctr"/>
+            <a:lstStyle/>
+            <a:p>
+              <a:pPr algn="ctr">
+                <a:defRPr/>
+              </a:pPr>
+              <a:endParaRPr/>
+            </a:p>
+          </p:txBody>
+        </p:sp>
+        <p:pic>
+          <p:nvPicPr>
+            <p:cNvPr id="16" name="Picture 16">
+              <a:extLst>
+                <a:ext uri="{FF2B5EF4-FFF2-40B4-BE49-F238E27FC236}">
+                  <a16:creationId xmlns:a16="http://schemas.microsoft.com/office/drawing/2014/main" id="{BCDF790E-AA83-C18B-5DB9-BC528B2F0697}"/>
+                </a:ext>
+              </a:extLst>
+            </p:cNvPr>
+            <p:cNvPicPr>
+              <a:picLocks noChangeAspect="1"/>
+            </p:cNvPicPr>
+            <p:nvPr/>
+          </p:nvPicPr>
+          <p:blipFill>
+            <a:blip>
+              <a:extLst>
+                <a:ext uri="{28A0092B-C50C-407E-A947-70E740481C1C}">
+                  <a14:useLocalDpi xmlns:a14="http://schemas.microsoft.com/office/drawing/2010/main" val="0"/>
+                </a:ext>
+                <a:ext uri="{96DAC541-7B7A-43D3-8B79-37D633B846F1}">
+                  <asvg:svgBlip xmlns:asvg="http://schemas.microsoft.com/office/drawing/2016/SVG/main" r:embed="rId4"/>
+                </a:ext>
+              </a:extLst>
+            </a:blip>
+            <a:stretch>
+              <a:fillRect/>
+            </a:stretch>
+          </p:blipFill>
+          <p:spPr>
+            <a:xfrm>
+              <a:off x="6826443" y="2296153"/>
+              <a:ext cx="304800" cy="304800"/>
+            </a:xfrm>
+            <a:prstGeom prst="rect">
+              <a:avLst/>
+            </a:prstGeom>
+          </p:spPr>
+        </p:pic>
+        <p:sp>
+          <p:nvSpPr>
+            <p:cNvPr id="17" name="AutoShape 17">
+              <a:extLst>
+                <a:ext uri="{FF2B5EF4-FFF2-40B4-BE49-F238E27FC236}">
+                  <a16:creationId xmlns:a16="http://schemas.microsoft.com/office/drawing/2014/main" id="{5E5C46B1-FD41-8DE1-E88B-D4C9D84AA9B7}"/>
+                </a:ext>
+              </a:extLst>
+            </p:cNvPr>
+            <p:cNvSpPr/>
+            <p:nvPr/>
+          </p:nvSpPr>
+          <p:spPr>
+            <a:xfrm>
+              <a:off x="7458883" y="1702090"/>
+              <a:ext cx="5524500" cy="1676400"/>
+            </a:xfrm>
+            <a:prstGeom prst="rect">
+              <a:avLst/>
+            </a:prstGeom>
             <a:noFill/>
-            <a:prstDash val="solid"/>
-            <a:round/>
-          </a:ln>
-        </p:spPr>
-        <p:txBody>
-          <a:bodyPr vert="horz" wrap="square" lIns="63500" tIns="63500" rIns="63500" bIns="63500" rtlCol="0" anchor="ctr"/>
-          <a:lstStyle/>
-          <a:p>
-            <a:pPr algn="ctr">
-              <a:defRPr/>
-            </a:pPr>
-            <a:endParaRPr/>
-          </a:p>
-        </p:txBody>
-      </p:sp>
-      <p:sp>
-        <p:nvSpPr>
-          <p:cNvPr id="10" name="AutoShape 10"/>
-          <p:cNvSpPr/>
-          <p:nvPr/>
-        </p:nvSpPr>
-        <p:spPr>
-          <a:xfrm>
-            <a:off x="5016500" y="1803400"/>
-            <a:ext cx="508000" cy="508000"/>
-          </a:xfrm>
-          <a:prstGeom prst="ellipse">
-            <a:avLst/>
-          </a:prstGeom>
-          <a:solidFill>
-            <a:srgbClr val="D1FAE5">
-              <a:alpha val="100000"/>
-            </a:srgbClr>
-          </a:solidFill>
-          <a:ln w="25400" cap="flat" cmpd="sng">
-            <a:noFill/>
-            <a:prstDash val="solid"/>
-            <a:round/>
-          </a:ln>
-        </p:spPr>
-        <p:txBody>
-          <a:bodyPr vert="horz" wrap="square" lIns="63500" tIns="63500" rIns="63500" bIns="63500" rtlCol="0" anchor="ctr"/>
-          <a:lstStyle/>
-          <a:p>
-            <a:pPr algn="ctr">
-              <a:defRPr/>
-            </a:pPr>
-            <a:endParaRPr/>
-          </a:p>
-        </p:txBody>
-      </p:sp>
-      <p:pic>
-        <p:nvPicPr>
-          <p:cNvPr id="11" name="Picture 11"/>
-          <p:cNvPicPr>
-            <a:picLocks noChangeAspect="1"/>
-          </p:cNvPicPr>
-          <p:nvPr/>
-        </p:nvPicPr>
-        <p:blipFill>
-          <a:blip>
-            <a:extLst>
-              <a:ext uri="{28A0092B-C50C-407E-A947-70E740481C1C}">
-                <a14:useLocalDpi xmlns:a14="http://schemas.microsoft.com/office/drawing/2010/main" val="0"/>
-              </a:ext>
-              <a:ext uri="{96DAC541-7B7A-43D3-8B79-37D633B846F1}">
-                <asvg:svgBlip xmlns:asvg="http://schemas.microsoft.com/office/drawing/2016/SVG/main" r:embed="rId4"/>
-              </a:ext>
-            </a:extLst>
-          </a:blip>
-          <a:stretch>
-            <a:fillRect/>
-          </a:stretch>
-        </p:blipFill>
-        <p:spPr>
-          <a:xfrm>
-            <a:off x="5118100" y="1905000"/>
-            <a:ext cx="304800" cy="304800"/>
-          </a:xfrm>
-          <a:prstGeom prst="rect">
-            <a:avLst/>
-          </a:prstGeom>
-        </p:spPr>
-      </p:pic>
-      <p:sp>
-        <p:nvSpPr>
-          <p:cNvPr id="12" name="AutoShape 12"/>
-          <p:cNvSpPr/>
-          <p:nvPr/>
-        </p:nvSpPr>
-        <p:spPr>
-          <a:xfrm>
-            <a:off x="5715000" y="1714500"/>
-            <a:ext cx="5524500" cy="698500"/>
-          </a:xfrm>
-          <a:prstGeom prst="rect">
-            <a:avLst/>
-          </a:prstGeom>
-          <a:noFill/>
-          <a:ln w="12700" cap="flat" cmpd="sng">
-            <a:noFill/>
-            <a:prstDash val="solid"/>
-            <a:round/>
-          </a:ln>
-        </p:spPr>
-        <p:txBody>
-          <a:bodyPr vert="horz" wrap="square" lIns="0" tIns="0" rIns="0" bIns="0" rtlCol="0" anchor="ctr" anchorCtr="0"/>
-          <a:lstStyle/>
-          <a:p>
-            <a:pPr indent="0" algn="l">
-              <a:lnSpc>
-                <a:spcPct val="125000"/>
-              </a:lnSpc>
-              <a:defRPr/>
-            </a:pPr>
-            <a:r>
-              <a:rPr lang="en-US" sz="1600" b="1" i="0" u="none" strike="noStrike" dirty="0">
-                <a:solidFill>
-                  <a:srgbClr val="1F2937"/>
-                </a:solidFill>
-                <a:latin typeface="Poppins"/>
-                <a:ea typeface="Poppins"/>
-                <a:cs typeface="Poppins"/>
-                <a:sym typeface="Poppins"/>
-              </a:rPr>
-              <a:t>Natural Conversation Start</a:t>
-            </a:r>
-            <a:endParaRPr lang="en-US" sz="1100" dirty="0"/>
-          </a:p>
-          <a:p>
-            <a:pPr indent="0" algn="l">
-              <a:lnSpc>
-                <a:spcPct val="125000"/>
-              </a:lnSpc>
-            </a:pPr>
-            <a:r>
-              <a:rPr lang="en-US" sz="1300" b="0" i="0" u="none" strike="noStrike" dirty="0">
+            <a:ln w="12700" cap="flat" cmpd="sng">
+              <a:noFill/>
+              <a:prstDash val="solid"/>
+              <a:round/>
+            </a:ln>
+          </p:spPr>
+          <p:txBody>
+            <a:bodyPr vert="horz" wrap="square" lIns="0" tIns="0" rIns="0" bIns="0" rtlCol="0" anchor="ctr" anchorCtr="0"/>
+            <a:lstStyle/>
+            <a:p>
+              <a:pPr>
+                <a:lnSpc>
+                  <a:spcPct val="125000"/>
+                </a:lnSpc>
+                <a:defRPr/>
+              </a:pPr>
+              <a:r>
+                <a:rPr lang="en-US" altLang="zh-CN" sz="1600" b="1" dirty="0">
+                  <a:solidFill>
+                    <a:srgbClr val="1F2937"/>
+                  </a:solidFill>
+                  <a:latin typeface="Poppins"/>
+                  <a:ea typeface="Poppins"/>
+                  <a:cs typeface="Poppins"/>
+                  <a:sym typeface="Poppins"/>
+                </a:rPr>
+                <a:t>Backend Selection:</a:t>
+              </a:r>
+            </a:p>
+            <a:p>
+              <a:pPr>
+                <a:lnSpc>
+                  <a:spcPct val="125000"/>
+                </a:lnSpc>
+                <a:defRPr/>
+              </a:pPr>
+              <a:r>
+                <a:rPr lang="en-US" altLang="zh-CN" sz="1300" dirty="0">
+                  <a:solidFill>
+                    <a:srgbClr val="6B7280"/>
+                  </a:solidFill>
+                  <a:latin typeface="Poppins"/>
+                  <a:cs typeface="Poppins"/>
+                  <a:sym typeface="Poppins"/>
+                </a:rPr>
+                <a:t>In telegram chatbot, we can use </a:t>
+              </a:r>
+              <a:r>
+                <a:rPr lang="en-US" altLang="zh-CN" sz="1300" dirty="0" err="1">
+                  <a:solidFill>
+                    <a:srgbClr val="6B7280"/>
+                  </a:solidFill>
+                  <a:latin typeface="Poppins"/>
+                  <a:cs typeface="Poppins"/>
+                  <a:sym typeface="Poppins"/>
+                </a:rPr>
+                <a:t>setllm</a:t>
+              </a:r>
+              <a:r>
+                <a:rPr lang="en-US" altLang="zh-CN" sz="1300" dirty="0">
+                  <a:solidFill>
+                    <a:srgbClr val="6B7280"/>
+                  </a:solidFill>
+                  <a:latin typeface="Poppins"/>
+                  <a:cs typeface="Poppins"/>
+                  <a:sym typeface="Poppins"/>
+                </a:rPr>
+                <a:t> to select different backend server.</a:t>
+              </a:r>
+            </a:p>
+            <a:p>
+              <a:pPr>
+                <a:lnSpc>
+                  <a:spcPct val="125000"/>
+                </a:lnSpc>
+                <a:defRPr/>
+              </a:pPr>
+              <a:r>
+                <a:rPr lang="en-US" altLang="zh-CN" sz="1300" dirty="0">
+                  <a:solidFill>
+                    <a:srgbClr val="6B7280"/>
+                  </a:solidFill>
+                  <a:latin typeface="Poppins"/>
+                  <a:ea typeface="Poppins"/>
+                  <a:cs typeface="Poppins"/>
+                  <a:sym typeface="Poppins"/>
+                </a:rPr>
+                <a:t>Frontend Server will check backend health when user send </a:t>
+              </a:r>
+              <a:r>
+                <a:rPr lang="en-US" altLang="zh-CN" sz="1300" dirty="0" err="1">
+                  <a:solidFill>
+                    <a:srgbClr val="6B7280"/>
+                  </a:solidFill>
+                  <a:latin typeface="Poppins"/>
+                  <a:ea typeface="Poppins"/>
+                  <a:cs typeface="Poppins"/>
+                  <a:sym typeface="Poppins"/>
+                </a:rPr>
+                <a:t>setllm</a:t>
+              </a:r>
+              <a:r>
+                <a:rPr lang="en-US" altLang="zh-CN" sz="1300" dirty="0">
+                  <a:solidFill>
+                    <a:srgbClr val="6B7280"/>
+                  </a:solidFill>
+                  <a:latin typeface="Poppins"/>
+                  <a:ea typeface="Poppins"/>
+                  <a:cs typeface="Poppins"/>
+                  <a:sym typeface="Poppins"/>
+                </a:rPr>
+                <a:t> command.</a:t>
+              </a:r>
+            </a:p>
+            <a:p>
+              <a:pPr>
+                <a:lnSpc>
+                  <a:spcPct val="125000"/>
+                </a:lnSpc>
+                <a:defRPr/>
+              </a:pPr>
+              <a:r>
+                <a:rPr lang="en-US" altLang="zh-CN" sz="1300" dirty="0">
+                  <a:solidFill>
+                    <a:srgbClr val="6B7280"/>
+                  </a:solidFill>
+                  <a:latin typeface="Poppins"/>
+                  <a:ea typeface="Poppins"/>
+                  <a:cs typeface="Poppins"/>
+                  <a:sym typeface="Poppins"/>
+                </a:rPr>
+                <a:t>If frontend server fail to check the health of it, it will reject the </a:t>
+              </a:r>
+              <a:r>
+                <a:rPr lang="en-US" altLang="zh-CN" sz="1300" dirty="0" err="1">
+                  <a:solidFill>
+                    <a:srgbClr val="6B7280"/>
+                  </a:solidFill>
+                  <a:latin typeface="Poppins"/>
+                  <a:ea typeface="Poppins"/>
+                  <a:cs typeface="Poppins"/>
+                  <a:sym typeface="Poppins"/>
+                </a:rPr>
+                <a:t>setllm</a:t>
+              </a:r>
+              <a:r>
+                <a:rPr lang="en-US" altLang="zh-CN" sz="1300" dirty="0">
+                  <a:solidFill>
+                    <a:srgbClr val="6B7280"/>
+                  </a:solidFill>
+                  <a:latin typeface="Poppins"/>
+                  <a:ea typeface="Poppins"/>
+                  <a:cs typeface="Poppins"/>
+                  <a:sym typeface="Poppins"/>
+                </a:rPr>
+                <a:t> command.</a:t>
+              </a:r>
+            </a:p>
+            <a:p>
+              <a:pPr>
+                <a:lnSpc>
+                  <a:spcPct val="125000"/>
+                </a:lnSpc>
+                <a:defRPr/>
+              </a:pPr>
+              <a:endParaRPr lang="en-US" altLang="zh-CN" sz="1300" dirty="0">
                 <a:solidFill>
                   <a:srgbClr val="6B7280"/>
                 </a:solidFill>
                 <a:latin typeface="Poppins"/>
-                <a:ea typeface="Poppins"/>
                 <a:cs typeface="Poppins"/>
                 <a:sym typeface="Poppins"/>
-              </a:rPr>
-              <a:t>Users can start the bot and send normal text questions.</a:t>
-            </a:r>
-          </a:p>
-        </p:txBody>
-      </p:sp>
-      <p:sp>
-        <p:nvSpPr>
-          <p:cNvPr id="13" name="AutoShape 13"/>
-          <p:cNvSpPr/>
+              </a:endParaRPr>
+            </a:p>
+          </p:txBody>
+        </p:sp>
+        <p:sp>
+          <p:nvSpPr>
+            <p:cNvPr id="36" name="文本框 35">
+              <a:extLst>
+                <a:ext uri="{FF2B5EF4-FFF2-40B4-BE49-F238E27FC236}">
+                  <a16:creationId xmlns:a16="http://schemas.microsoft.com/office/drawing/2014/main" id="{B11BC4E9-97AA-A71B-CDBD-EB472FBDF7B0}"/>
+                </a:ext>
+              </a:extLst>
+            </p:cNvPr>
+            <p:cNvSpPr txBox="1"/>
+            <p:nvPr/>
+          </p:nvSpPr>
+          <p:spPr>
+            <a:xfrm>
+              <a:off x="6460703" y="1253264"/>
+              <a:ext cx="6097348" cy="307777"/>
+            </a:xfrm>
+            <a:prstGeom prst="rect">
+              <a:avLst/>
+            </a:prstGeom>
+            <a:noFill/>
+          </p:spPr>
+          <p:txBody>
+            <a:bodyPr wrap="square">
+              <a:spAutoFit/>
+            </a:bodyPr>
+            <a:lstStyle/>
+            <a:p>
+              <a:r>
+                <a:rPr lang="en-US" altLang="zh-CN" sz="1400" b="1" dirty="0">
+                  <a:solidFill>
+                    <a:srgbClr val="1F2937"/>
+                  </a:solidFill>
+                  <a:latin typeface="Poppins"/>
+                  <a:ea typeface="Poppins"/>
+                  <a:cs typeface="Poppins"/>
+                  <a:sym typeface="Poppins"/>
+                </a:rPr>
+                <a:t>In a Frontend Server:</a:t>
+              </a:r>
+              <a:endParaRPr lang="zh-CN" altLang="en-US" dirty="0"/>
+            </a:p>
+          </p:txBody>
+        </p:sp>
+      </p:grpSp>
+      <p:grpSp>
+        <p:nvGrpSpPr>
+          <p:cNvPr id="39" name="组合 38">
+            <a:extLst>
+              <a:ext uri="{FF2B5EF4-FFF2-40B4-BE49-F238E27FC236}">
+                <a16:creationId xmlns:a16="http://schemas.microsoft.com/office/drawing/2014/main" id="{E1EF1CBD-6023-173F-4294-0D67AE43C7E3}"/>
+              </a:ext>
+            </a:extLst>
+          </p:cNvPr>
+          <p:cNvGrpSpPr/>
           <p:nvPr/>
-        </p:nvSpPr>
-        <p:spPr>
-          <a:xfrm>
-            <a:off x="4699000" y="2603500"/>
-            <a:ext cx="6731000" cy="825500"/>
-          </a:xfrm>
-          <a:prstGeom prst="roundRect">
-            <a:avLst>
-              <a:gd name="adj" fmla="val 15384"/>
-            </a:avLst>
-          </a:prstGeom>
-          <a:solidFill>
-            <a:srgbClr val="F9FAFB">
-              <a:alpha val="100000"/>
-            </a:srgbClr>
-          </a:solidFill>
-          <a:ln w="12700" cap="flat" cmpd="sng">
+        </p:nvGrpSpPr>
+        <p:grpSpPr>
+          <a:xfrm>
+            <a:off x="5003274" y="1461613"/>
+            <a:ext cx="6795172" cy="1296890"/>
+            <a:chOff x="4634828" y="4191000"/>
+            <a:chExt cx="6795172" cy="1296890"/>
+          </a:xfrm>
+        </p:grpSpPr>
+        <p:sp>
+          <p:nvSpPr>
+            <p:cNvPr id="23" name="AutoShape 23">
+              <a:extLst>
+                <a:ext uri="{FF2B5EF4-FFF2-40B4-BE49-F238E27FC236}">
+                  <a16:creationId xmlns:a16="http://schemas.microsoft.com/office/drawing/2014/main" id="{06375BA4-E5D7-BA95-DF04-2B78D66F6B8F}"/>
+                </a:ext>
+              </a:extLst>
+            </p:cNvPr>
+            <p:cNvSpPr/>
+            <p:nvPr/>
+          </p:nvSpPr>
+          <p:spPr>
+            <a:xfrm>
+              <a:off x="4699000" y="4508500"/>
+              <a:ext cx="6731000" cy="979390"/>
+            </a:xfrm>
+            <a:prstGeom prst="roundRect">
+              <a:avLst>
+                <a:gd name="adj" fmla="val 15384"/>
+              </a:avLst>
+            </a:prstGeom>
             <a:solidFill>
-              <a:srgbClr val="E5E7EB">
+              <a:srgbClr val="F9FAFB">
                 <a:alpha val="100000"/>
               </a:srgbClr>
             </a:solidFill>
-            <a:prstDash val="solid"/>
-            <a:round/>
-          </a:ln>
-        </p:spPr>
-        <p:txBody>
-          <a:bodyPr vert="horz" wrap="square" lIns="63500" tIns="63500" rIns="63500" bIns="63500" rtlCol="0" anchor="ctr"/>
-          <a:lstStyle/>
-          <a:p>
-            <a:pPr algn="ctr">
-              <a:defRPr/>
-            </a:pPr>
-            <a:endParaRPr/>
-          </a:p>
-        </p:txBody>
-      </p:sp>
-      <p:sp>
-        <p:nvSpPr>
-          <p:cNvPr id="14" name="AutoShape 14"/>
-          <p:cNvSpPr/>
-          <p:nvPr/>
-        </p:nvSpPr>
-        <p:spPr>
-          <a:xfrm>
-            <a:off x="4699000" y="2603500"/>
-            <a:ext cx="76200" cy="825500"/>
-          </a:xfrm>
-          <a:prstGeom prst="roundRect">
-            <a:avLst>
-              <a:gd name="adj" fmla="val 0"/>
-            </a:avLst>
-          </a:prstGeom>
-          <a:solidFill>
-            <a:srgbClr val="10B981">
-              <a:alpha val="100000"/>
-            </a:srgbClr>
-          </a:solidFill>
-          <a:ln w="25400" cap="flat" cmpd="sng">
-            <a:noFill/>
-            <a:prstDash val="solid"/>
-            <a:round/>
-          </a:ln>
-        </p:spPr>
-        <p:txBody>
-          <a:bodyPr vert="horz" wrap="square" lIns="63500" tIns="63500" rIns="63500" bIns="63500" rtlCol="0" anchor="ctr"/>
-          <a:lstStyle/>
-          <a:p>
-            <a:pPr algn="ctr">
-              <a:defRPr/>
-            </a:pPr>
-            <a:endParaRPr/>
-          </a:p>
-        </p:txBody>
-      </p:sp>
-      <p:sp>
-        <p:nvSpPr>
-          <p:cNvPr id="15" name="AutoShape 15"/>
-          <p:cNvSpPr/>
-          <p:nvPr/>
-        </p:nvSpPr>
-        <p:spPr>
-          <a:xfrm>
-            <a:off x="5016500" y="2755900"/>
-            <a:ext cx="508000" cy="508000"/>
-          </a:xfrm>
-          <a:prstGeom prst="ellipse">
-            <a:avLst/>
-          </a:prstGeom>
-          <a:solidFill>
-            <a:srgbClr val="D1FAE5">
-              <a:alpha val="100000"/>
-            </a:srgbClr>
-          </a:solidFill>
-          <a:ln w="25400" cap="flat" cmpd="sng">
-            <a:noFill/>
-            <a:prstDash val="solid"/>
-            <a:round/>
-          </a:ln>
-        </p:spPr>
-        <p:txBody>
-          <a:bodyPr vert="horz" wrap="square" lIns="63500" tIns="63500" rIns="63500" bIns="63500" rtlCol="0" anchor="ctr"/>
-          <a:lstStyle/>
-          <a:p>
-            <a:pPr algn="ctr">
-              <a:defRPr/>
-            </a:pPr>
-            <a:endParaRPr/>
-          </a:p>
-        </p:txBody>
-      </p:sp>
-      <p:pic>
-        <p:nvPicPr>
-          <p:cNvPr id="16" name="Picture 16"/>
-          <p:cNvPicPr>
-            <a:picLocks noChangeAspect="1"/>
-          </p:cNvPicPr>
-          <p:nvPr/>
-        </p:nvPicPr>
-        <p:blipFill>
-          <a:blip>
-            <a:extLst>
-              <a:ext uri="{28A0092B-C50C-407E-A947-70E740481C1C}">
-                <a14:useLocalDpi xmlns:a14="http://schemas.microsoft.com/office/drawing/2010/main" val="0"/>
-              </a:ext>
-              <a:ext uri="{96DAC541-7B7A-43D3-8B79-37D633B846F1}">
-                <asvg:svgBlip xmlns:asvg="http://schemas.microsoft.com/office/drawing/2016/SVG/main" r:embed="rId5"/>
-              </a:ext>
-            </a:extLst>
-          </a:blip>
-          <a:stretch>
-            <a:fillRect/>
-          </a:stretch>
-        </p:blipFill>
-        <p:spPr>
-          <a:xfrm>
-            <a:off x="5118100" y="2857500"/>
-            <a:ext cx="304800" cy="304800"/>
-          </a:xfrm>
-          <a:prstGeom prst="rect">
-            <a:avLst/>
-          </a:prstGeom>
-        </p:spPr>
-      </p:pic>
-      <p:sp>
-        <p:nvSpPr>
-          <p:cNvPr id="17" name="AutoShape 17"/>
-          <p:cNvSpPr/>
-          <p:nvPr/>
-        </p:nvSpPr>
-        <p:spPr>
-          <a:xfrm>
-            <a:off x="5715000" y="2667000"/>
-            <a:ext cx="5524500" cy="698500"/>
-          </a:xfrm>
-          <a:prstGeom prst="rect">
-            <a:avLst/>
-          </a:prstGeom>
-          <a:noFill/>
-          <a:ln w="12700" cap="flat" cmpd="sng">
-            <a:noFill/>
-            <a:prstDash val="solid"/>
-            <a:round/>
-          </a:ln>
-        </p:spPr>
-        <p:txBody>
-          <a:bodyPr vert="horz" wrap="square" lIns="0" tIns="0" rIns="0" bIns="0" rtlCol="0" anchor="ctr" anchorCtr="0"/>
-          <a:lstStyle/>
-          <a:p>
-            <a:pPr indent="0" algn="l">
-              <a:lnSpc>
-                <a:spcPct val="125000"/>
-              </a:lnSpc>
-              <a:defRPr/>
-            </a:pPr>
-            <a:r>
-              <a:rPr lang="en-US" sz="1600" b="1" i="0" u="none" strike="noStrike">
-                <a:solidFill>
-                  <a:srgbClr val="1F2937"/>
-                </a:solidFill>
-                <a:latin typeface="Poppins"/>
-                <a:ea typeface="Poppins"/>
-                <a:cs typeface="Poppins"/>
-                <a:sym typeface="Poppins"/>
-              </a:rPr>
-              <a:t>Backend Selection (/setllm)</a:t>
-            </a:r>
-            <a:endParaRPr lang="en-US" sz="1100"/>
-          </a:p>
-          <a:p>
-            <a:pPr indent="0" algn="l">
-              <a:lnSpc>
-                <a:spcPct val="125000"/>
-              </a:lnSpc>
-            </a:pPr>
-            <a:r>
-              <a:rPr lang="en-US" sz="1300" b="0" i="0" u="none" strike="noStrike">
-                <a:solidFill>
-                  <a:srgbClr val="6B7280"/>
-                </a:solidFill>
-                <a:latin typeface="Poppins"/>
-                <a:ea typeface="Poppins"/>
-                <a:cs typeface="Poppins"/>
-                <a:sym typeface="Poppins"/>
-              </a:rPr>
-              <a:t>Command "/setllm x" allows users to choose their preferred LLM backend.</a:t>
-            </a:r>
-          </a:p>
-        </p:txBody>
-      </p:sp>
-      <p:sp>
-        <p:nvSpPr>
-          <p:cNvPr id="18" name="AutoShape 18"/>
-          <p:cNvSpPr/>
-          <p:nvPr/>
-        </p:nvSpPr>
-        <p:spPr>
-          <a:xfrm>
-            <a:off x="4699000" y="3556000"/>
-            <a:ext cx="6731000" cy="825500"/>
-          </a:xfrm>
-          <a:prstGeom prst="roundRect">
-            <a:avLst>
-              <a:gd name="adj" fmla="val 15384"/>
-            </a:avLst>
-          </a:prstGeom>
-          <a:solidFill>
-            <a:srgbClr val="F9FAFB">
-              <a:alpha val="100000"/>
-            </a:srgbClr>
-          </a:solidFill>
-          <a:ln w="12700" cap="flat" cmpd="sng">
+            <a:ln w="12700" cap="flat" cmpd="sng">
+              <a:solidFill>
+                <a:srgbClr val="E5E7EB">
+                  <a:alpha val="100000"/>
+                </a:srgbClr>
+              </a:solidFill>
+              <a:prstDash val="solid"/>
+              <a:round/>
+            </a:ln>
+          </p:spPr>
+          <p:txBody>
+            <a:bodyPr vert="horz" wrap="square" lIns="63500" tIns="63500" rIns="63500" bIns="63500" rtlCol="0" anchor="ctr"/>
+            <a:lstStyle/>
+            <a:p>
+              <a:pPr algn="ctr">
+                <a:defRPr/>
+              </a:pPr>
+              <a:endParaRPr/>
+            </a:p>
+          </p:txBody>
+        </p:sp>
+        <p:sp>
+          <p:nvSpPr>
+            <p:cNvPr id="24" name="AutoShape 24">
+              <a:extLst>
+                <a:ext uri="{FF2B5EF4-FFF2-40B4-BE49-F238E27FC236}">
+                  <a16:creationId xmlns:a16="http://schemas.microsoft.com/office/drawing/2014/main" id="{7C2FCE60-1ECF-0FD3-7ECB-1D15B87EC4CF}"/>
+                </a:ext>
+              </a:extLst>
+            </p:cNvPr>
+            <p:cNvSpPr/>
+            <p:nvPr/>
+          </p:nvSpPr>
+          <p:spPr>
+            <a:xfrm>
+              <a:off x="4699000" y="4508500"/>
+              <a:ext cx="76200" cy="979389"/>
+            </a:xfrm>
+            <a:prstGeom prst="roundRect">
+              <a:avLst>
+                <a:gd name="adj" fmla="val 0"/>
+              </a:avLst>
+            </a:prstGeom>
             <a:solidFill>
-              <a:srgbClr val="E5E7EB">
+              <a:srgbClr val="10B981">
                 <a:alpha val="100000"/>
               </a:srgbClr>
             </a:solidFill>
-            <a:prstDash val="solid"/>
-            <a:round/>
-          </a:ln>
-        </p:spPr>
-        <p:txBody>
-          <a:bodyPr vert="horz" wrap="square" lIns="63500" tIns="63500" rIns="63500" bIns="63500" rtlCol="0" anchor="ctr"/>
-          <a:lstStyle/>
-          <a:p>
-            <a:pPr algn="ctr">
-              <a:defRPr/>
-            </a:pPr>
-            <a:endParaRPr/>
-          </a:p>
-        </p:txBody>
-      </p:sp>
-      <p:sp>
-        <p:nvSpPr>
-          <p:cNvPr id="19" name="AutoShape 19"/>
-          <p:cNvSpPr/>
-          <p:nvPr/>
-        </p:nvSpPr>
-        <p:spPr>
-          <a:xfrm>
-            <a:off x="4699000" y="3556000"/>
-            <a:ext cx="76200" cy="825500"/>
-          </a:xfrm>
-          <a:prstGeom prst="roundRect">
-            <a:avLst>
-              <a:gd name="adj" fmla="val 0"/>
-            </a:avLst>
-          </a:prstGeom>
-          <a:solidFill>
-            <a:srgbClr val="10B981">
-              <a:alpha val="100000"/>
-            </a:srgbClr>
-          </a:solidFill>
-          <a:ln w="25400" cap="flat" cmpd="sng">
-            <a:noFill/>
-            <a:prstDash val="solid"/>
-            <a:round/>
-          </a:ln>
-        </p:spPr>
-        <p:txBody>
-          <a:bodyPr vert="horz" wrap="square" lIns="63500" tIns="63500" rIns="63500" bIns="63500" rtlCol="0" anchor="ctr"/>
-          <a:lstStyle/>
-          <a:p>
-            <a:pPr algn="ctr">
-              <a:defRPr/>
-            </a:pPr>
-            <a:endParaRPr/>
-          </a:p>
-        </p:txBody>
-      </p:sp>
-      <p:sp>
-        <p:nvSpPr>
-          <p:cNvPr id="20" name="AutoShape 20"/>
-          <p:cNvSpPr/>
-          <p:nvPr/>
-        </p:nvSpPr>
-        <p:spPr>
-          <a:xfrm>
-            <a:off x="5016500" y="3708400"/>
-            <a:ext cx="508000" cy="508000"/>
-          </a:xfrm>
-          <a:prstGeom prst="ellipse">
-            <a:avLst/>
-          </a:prstGeom>
-          <a:solidFill>
-            <a:srgbClr val="D1FAE5">
-              <a:alpha val="100000"/>
-            </a:srgbClr>
-          </a:solidFill>
-          <a:ln w="25400" cap="flat" cmpd="sng">
-            <a:noFill/>
-            <a:prstDash val="solid"/>
-            <a:round/>
-          </a:ln>
-        </p:spPr>
-        <p:txBody>
-          <a:bodyPr vert="horz" wrap="square" lIns="63500" tIns="63500" rIns="63500" bIns="63500" rtlCol="0" anchor="ctr"/>
-          <a:lstStyle/>
-          <a:p>
-            <a:pPr algn="ctr">
-              <a:defRPr/>
-            </a:pPr>
-            <a:endParaRPr/>
-          </a:p>
-        </p:txBody>
-      </p:sp>
-      <p:pic>
-        <p:nvPicPr>
-          <p:cNvPr id="21" name="Picture 21"/>
-          <p:cNvPicPr>
-            <a:picLocks noChangeAspect="1"/>
-          </p:cNvPicPr>
-          <p:nvPr/>
-        </p:nvPicPr>
-        <p:blipFill>
-          <a:blip>
-            <a:extLst>
-              <a:ext uri="{28A0092B-C50C-407E-A947-70E740481C1C}">
-                <a14:useLocalDpi xmlns:a14="http://schemas.microsoft.com/office/drawing/2010/main" val="0"/>
-              </a:ext>
-              <a:ext uri="{96DAC541-7B7A-43D3-8B79-37D633B846F1}">
-                <asvg:svgBlip xmlns:asvg="http://schemas.microsoft.com/office/drawing/2016/SVG/main" r:embed="rId6"/>
-              </a:ext>
-            </a:extLst>
-          </a:blip>
-          <a:stretch>
-            <a:fillRect/>
-          </a:stretch>
-        </p:blipFill>
-        <p:spPr>
-          <a:xfrm>
-            <a:off x="5118100" y="3810000"/>
-            <a:ext cx="304800" cy="304800"/>
-          </a:xfrm>
-          <a:prstGeom prst="rect">
-            <a:avLst/>
-          </a:prstGeom>
-        </p:spPr>
-      </p:pic>
-      <p:sp>
-        <p:nvSpPr>
-          <p:cNvPr id="22" name="AutoShape 22"/>
-          <p:cNvSpPr/>
-          <p:nvPr/>
-        </p:nvSpPr>
-        <p:spPr>
-          <a:xfrm>
-            <a:off x="5715000" y="3619500"/>
-            <a:ext cx="5524500" cy="698500"/>
-          </a:xfrm>
-          <a:prstGeom prst="rect">
-            <a:avLst/>
-          </a:prstGeom>
-          <a:noFill/>
-          <a:ln w="12700" cap="flat" cmpd="sng">
-            <a:noFill/>
-            <a:prstDash val="solid"/>
-            <a:round/>
-          </a:ln>
-        </p:spPr>
-        <p:txBody>
-          <a:bodyPr vert="horz" wrap="square" lIns="0" tIns="0" rIns="0" bIns="0" rtlCol="0" anchor="ctr" anchorCtr="0"/>
-          <a:lstStyle/>
-          <a:p>
-            <a:pPr indent="0" algn="l">
-              <a:lnSpc>
-                <a:spcPct val="125000"/>
-              </a:lnSpc>
-              <a:defRPr/>
-            </a:pPr>
-            <a:r>
-              <a:rPr lang="en-US" sz="1600" b="1" i="0" u="none" strike="noStrike" dirty="0">
-                <a:solidFill>
-                  <a:srgbClr val="1F2937"/>
-                </a:solidFill>
-                <a:latin typeface="Poppins"/>
-                <a:ea typeface="Poppins"/>
-                <a:cs typeface="Poppins"/>
-                <a:sym typeface="Poppins"/>
-              </a:rPr>
-              <a:t>Automated Health Check</a:t>
-            </a:r>
-            <a:endParaRPr lang="en-US" sz="1100" dirty="0"/>
-          </a:p>
-          <a:p>
-            <a:pPr indent="0" algn="l">
-              <a:lnSpc>
-                <a:spcPct val="125000"/>
-              </a:lnSpc>
-            </a:pPr>
-            <a:r>
-              <a:rPr lang="en-US" sz="1300" b="0" i="0" u="none" strike="noStrike" dirty="0">
-                <a:solidFill>
-                  <a:srgbClr val="6B7280"/>
-                </a:solidFill>
-                <a:latin typeface="Poppins"/>
-                <a:ea typeface="Poppins"/>
-                <a:cs typeface="Poppins"/>
-                <a:sym typeface="Poppins"/>
-              </a:rPr>
-              <a:t>The bot checks backend health when command `/</a:t>
-            </a:r>
-            <a:r>
-              <a:rPr lang="en-US" sz="1300" b="0" i="0" u="none" strike="noStrike" dirty="0" err="1">
-                <a:solidFill>
-                  <a:srgbClr val="6B7280"/>
-                </a:solidFill>
-                <a:latin typeface="Poppins"/>
-                <a:ea typeface="Poppins"/>
-                <a:cs typeface="Poppins"/>
-                <a:sym typeface="Poppins"/>
-              </a:rPr>
-              <a:t>setllm</a:t>
-            </a:r>
-            <a:r>
-              <a:rPr lang="en-US" sz="1300" b="0" i="0" u="none" strike="noStrike" dirty="0">
-                <a:solidFill>
-                  <a:srgbClr val="6B7280"/>
-                </a:solidFill>
-                <a:latin typeface="Poppins"/>
-                <a:ea typeface="Poppins"/>
-                <a:cs typeface="Poppins"/>
-                <a:sym typeface="Poppins"/>
-              </a:rPr>
-              <a:t>` is used.</a:t>
-            </a:r>
-          </a:p>
-        </p:txBody>
-      </p:sp>
-      <p:sp>
-        <p:nvSpPr>
-          <p:cNvPr id="23" name="AutoShape 23"/>
-          <p:cNvSpPr/>
-          <p:nvPr/>
-        </p:nvSpPr>
-        <p:spPr>
-          <a:xfrm>
-            <a:off x="4699000" y="4508500"/>
-            <a:ext cx="6731000" cy="825500"/>
-          </a:xfrm>
-          <a:prstGeom prst="roundRect">
-            <a:avLst>
-              <a:gd name="adj" fmla="val 15384"/>
-            </a:avLst>
-          </a:prstGeom>
-          <a:solidFill>
-            <a:srgbClr val="F9FAFB">
-              <a:alpha val="100000"/>
-            </a:srgbClr>
-          </a:solidFill>
-          <a:ln w="12700" cap="flat" cmpd="sng">
+            <a:ln w="25400" cap="flat" cmpd="sng">
+              <a:noFill/>
+              <a:prstDash val="solid"/>
+              <a:round/>
+            </a:ln>
+          </p:spPr>
+          <p:txBody>
+            <a:bodyPr vert="horz" wrap="square" lIns="63500" tIns="63500" rIns="63500" bIns="63500" rtlCol="0" anchor="ctr"/>
+            <a:lstStyle/>
+            <a:p>
+              <a:pPr algn="ctr">
+                <a:defRPr/>
+              </a:pPr>
+              <a:endParaRPr/>
+            </a:p>
+          </p:txBody>
+        </p:sp>
+        <p:sp>
+          <p:nvSpPr>
+            <p:cNvPr id="25" name="AutoShape 25">
+              <a:extLst>
+                <a:ext uri="{FF2B5EF4-FFF2-40B4-BE49-F238E27FC236}">
+                  <a16:creationId xmlns:a16="http://schemas.microsoft.com/office/drawing/2014/main" id="{D1ECFA3F-5EC4-FF22-7DC0-CAB9525F7D31}"/>
+                </a:ext>
+              </a:extLst>
+            </p:cNvPr>
+            <p:cNvSpPr/>
+            <p:nvPr/>
+          </p:nvSpPr>
+          <p:spPr>
+            <a:xfrm>
+              <a:off x="5016500" y="4660900"/>
+              <a:ext cx="508000" cy="508000"/>
+            </a:xfrm>
+            <a:prstGeom prst="ellipse">
+              <a:avLst/>
+            </a:prstGeom>
             <a:solidFill>
-              <a:srgbClr val="E5E7EB">
+              <a:srgbClr val="D1FAE5">
                 <a:alpha val="100000"/>
               </a:srgbClr>
             </a:solidFill>
-            <a:prstDash val="solid"/>
-            <a:round/>
-          </a:ln>
-        </p:spPr>
-        <p:txBody>
-          <a:bodyPr vert="horz" wrap="square" lIns="63500" tIns="63500" rIns="63500" bIns="63500" rtlCol="0" anchor="ctr"/>
-          <a:lstStyle/>
-          <a:p>
-            <a:pPr algn="ctr">
-              <a:defRPr/>
-            </a:pPr>
-            <a:endParaRPr/>
-          </a:p>
-        </p:txBody>
-      </p:sp>
-      <p:sp>
-        <p:nvSpPr>
-          <p:cNvPr id="24" name="AutoShape 24"/>
-          <p:cNvSpPr/>
-          <p:nvPr/>
-        </p:nvSpPr>
-        <p:spPr>
-          <a:xfrm>
-            <a:off x="4699000" y="4508500"/>
-            <a:ext cx="76200" cy="825500"/>
-          </a:xfrm>
-          <a:prstGeom prst="roundRect">
-            <a:avLst>
-              <a:gd name="adj" fmla="val 0"/>
-            </a:avLst>
-          </a:prstGeom>
-          <a:solidFill>
-            <a:srgbClr val="10B981">
-              <a:alpha val="100000"/>
-            </a:srgbClr>
-          </a:solidFill>
-          <a:ln w="25400" cap="flat" cmpd="sng">
+            <a:ln w="25400" cap="flat" cmpd="sng">
+              <a:noFill/>
+              <a:prstDash val="solid"/>
+              <a:round/>
+            </a:ln>
+          </p:spPr>
+          <p:txBody>
+            <a:bodyPr vert="horz" wrap="square" lIns="63500" tIns="63500" rIns="63500" bIns="63500" rtlCol="0" anchor="ctr"/>
+            <a:lstStyle/>
+            <a:p>
+              <a:pPr algn="ctr">
+                <a:defRPr/>
+              </a:pPr>
+              <a:endParaRPr/>
+            </a:p>
+          </p:txBody>
+        </p:sp>
+        <p:pic>
+          <p:nvPicPr>
+            <p:cNvPr id="26" name="Picture 26">
+              <a:extLst>
+                <a:ext uri="{FF2B5EF4-FFF2-40B4-BE49-F238E27FC236}">
+                  <a16:creationId xmlns:a16="http://schemas.microsoft.com/office/drawing/2014/main" id="{180A518F-7077-DFFC-71C7-CB3C091CCACE}"/>
+                </a:ext>
+              </a:extLst>
+            </p:cNvPr>
+            <p:cNvPicPr>
+              <a:picLocks noChangeAspect="1"/>
+            </p:cNvPicPr>
+            <p:nvPr/>
+          </p:nvPicPr>
+          <p:blipFill>
+            <a:blip>
+              <a:extLst>
+                <a:ext uri="{28A0092B-C50C-407E-A947-70E740481C1C}">
+                  <a14:useLocalDpi xmlns:a14="http://schemas.microsoft.com/office/drawing/2010/main" val="0"/>
+                </a:ext>
+                <a:ext uri="{96DAC541-7B7A-43D3-8B79-37D633B846F1}">
+                  <asvg:svgBlip xmlns:asvg="http://schemas.microsoft.com/office/drawing/2016/SVG/main" r:embed="rId5"/>
+                </a:ext>
+              </a:extLst>
+            </a:blip>
+            <a:stretch>
+              <a:fillRect/>
+            </a:stretch>
+          </p:blipFill>
+          <p:spPr>
+            <a:xfrm>
+              <a:off x="5118100" y="4762500"/>
+              <a:ext cx="304800" cy="304800"/>
+            </a:xfrm>
+            <a:prstGeom prst="rect">
+              <a:avLst/>
+            </a:prstGeom>
+          </p:spPr>
+        </p:pic>
+        <p:sp>
+          <p:nvSpPr>
+            <p:cNvPr id="27" name="AutoShape 27">
+              <a:extLst>
+                <a:ext uri="{FF2B5EF4-FFF2-40B4-BE49-F238E27FC236}">
+                  <a16:creationId xmlns:a16="http://schemas.microsoft.com/office/drawing/2014/main" id="{EE4DB24A-51FB-11B8-31EC-3C0E7FE28882}"/>
+                </a:ext>
+              </a:extLst>
+            </p:cNvPr>
+            <p:cNvSpPr/>
+            <p:nvPr/>
+          </p:nvSpPr>
+          <p:spPr>
+            <a:xfrm>
+              <a:off x="5735280" y="4616169"/>
+              <a:ext cx="5524500" cy="717831"/>
+            </a:xfrm>
+            <a:prstGeom prst="rect">
+              <a:avLst/>
+            </a:prstGeom>
             <a:noFill/>
-            <a:prstDash val="solid"/>
-            <a:round/>
-          </a:ln>
-        </p:spPr>
-        <p:txBody>
-          <a:bodyPr vert="horz" wrap="square" lIns="63500" tIns="63500" rIns="63500" bIns="63500" rtlCol="0" anchor="ctr"/>
-          <a:lstStyle/>
-          <a:p>
-            <a:pPr algn="ctr">
-              <a:defRPr/>
-            </a:pPr>
-            <a:endParaRPr/>
-          </a:p>
-        </p:txBody>
-      </p:sp>
-      <p:sp>
-        <p:nvSpPr>
-          <p:cNvPr id="25" name="AutoShape 25"/>
-          <p:cNvSpPr/>
-          <p:nvPr/>
-        </p:nvSpPr>
-        <p:spPr>
-          <a:xfrm>
-            <a:off x="5016500" y="4660900"/>
-            <a:ext cx="508000" cy="508000"/>
-          </a:xfrm>
-          <a:prstGeom prst="ellipse">
-            <a:avLst/>
-          </a:prstGeom>
-          <a:solidFill>
-            <a:srgbClr val="D1FAE5">
-              <a:alpha val="100000"/>
-            </a:srgbClr>
-          </a:solidFill>
-          <a:ln w="25400" cap="flat" cmpd="sng">
+            <a:ln w="12700" cap="flat" cmpd="sng">
+              <a:noFill/>
+              <a:prstDash val="solid"/>
+              <a:round/>
+            </a:ln>
+          </p:spPr>
+          <p:txBody>
+            <a:bodyPr vert="horz" wrap="square" lIns="0" tIns="0" rIns="0" bIns="0" rtlCol="0" anchor="ctr" anchorCtr="0"/>
+            <a:lstStyle/>
+            <a:p>
+              <a:pPr indent="0" algn="l">
+                <a:lnSpc>
+                  <a:spcPct val="125000"/>
+                </a:lnSpc>
+                <a:defRPr/>
+              </a:pPr>
+              <a:r>
+                <a:rPr lang="en-US" sz="1600" b="1" i="0" u="none" strike="noStrike" dirty="0">
+                  <a:solidFill>
+                    <a:srgbClr val="1F2937"/>
+                  </a:solidFill>
+                  <a:latin typeface="Poppins"/>
+                  <a:ea typeface="Poppins"/>
+                  <a:cs typeface="Poppins"/>
+                  <a:sym typeface="Poppins"/>
+                </a:rPr>
+                <a:t>Status &amp; Failover Info (/health)</a:t>
+              </a:r>
+            </a:p>
+            <a:p>
+              <a:pPr indent="0" algn="l">
+                <a:lnSpc>
+                  <a:spcPct val="125000"/>
+                </a:lnSpc>
+              </a:pPr>
+              <a:r>
+                <a:rPr lang="en-US" sz="1300" b="0" i="0" u="none" strike="noStrike" dirty="0">
+                  <a:solidFill>
+                    <a:srgbClr val="6B7280"/>
+                  </a:solidFill>
+                  <a:latin typeface="Poppins"/>
+                  <a:ea typeface="Poppins"/>
+                  <a:cs typeface="Poppins"/>
+                  <a:sym typeface="Poppins"/>
+                </a:rPr>
+                <a:t>When we create a new backend server, it will create a page “/hea</a:t>
+              </a:r>
+              <a:r>
+                <a:rPr lang="en-US" sz="1300" dirty="0">
+                  <a:solidFill>
+                    <a:srgbClr val="6B7280"/>
+                  </a:solidFill>
+                  <a:latin typeface="Poppins"/>
+                  <a:ea typeface="Poppins"/>
+                  <a:cs typeface="Poppins"/>
+                  <a:sym typeface="Poppins"/>
+                </a:rPr>
+                <a:t>th</a:t>
+              </a:r>
+              <a:r>
+                <a:rPr lang="en-US" sz="1300" b="0" i="0" u="none" strike="noStrike" dirty="0">
+                  <a:solidFill>
+                    <a:srgbClr val="6B7280"/>
+                  </a:solidFill>
+                  <a:latin typeface="Poppins"/>
+                  <a:ea typeface="Poppins"/>
+                  <a:cs typeface="Poppins"/>
+                  <a:sym typeface="Poppins"/>
+                </a:rPr>
+                <a:t>” which is an API for frontend server to check the status of it.</a:t>
+              </a:r>
+            </a:p>
+          </p:txBody>
+        </p:sp>
+        <p:sp>
+          <p:nvSpPr>
+            <p:cNvPr id="37" name="文本框 36">
+              <a:extLst>
+                <a:ext uri="{FF2B5EF4-FFF2-40B4-BE49-F238E27FC236}">
+                  <a16:creationId xmlns:a16="http://schemas.microsoft.com/office/drawing/2014/main" id="{D5DEEA2B-3E3C-820E-64BB-BB2B5EE14EF7}"/>
+                </a:ext>
+              </a:extLst>
+            </p:cNvPr>
+            <p:cNvSpPr txBox="1"/>
+            <p:nvPr/>
+          </p:nvSpPr>
+          <p:spPr>
+            <a:xfrm>
+              <a:off x="4634828" y="4191000"/>
+              <a:ext cx="6097348" cy="307777"/>
+            </a:xfrm>
+            <a:prstGeom prst="rect">
+              <a:avLst/>
+            </a:prstGeom>
             <a:noFill/>
-            <a:prstDash val="solid"/>
-            <a:round/>
-          </a:ln>
-        </p:spPr>
-        <p:txBody>
-          <a:bodyPr vert="horz" wrap="square" lIns="63500" tIns="63500" rIns="63500" bIns="63500" rtlCol="0" anchor="ctr"/>
-          <a:lstStyle/>
-          <a:p>
-            <a:pPr algn="ctr">
-              <a:defRPr/>
-            </a:pPr>
-            <a:endParaRPr/>
-          </a:p>
-        </p:txBody>
-      </p:sp>
+          </p:spPr>
+          <p:txBody>
+            <a:bodyPr wrap="square">
+              <a:spAutoFit/>
+            </a:bodyPr>
+            <a:lstStyle/>
+            <a:p>
+              <a:r>
+                <a:rPr lang="en-US" altLang="zh-CN" sz="1400" b="1" dirty="0">
+                  <a:solidFill>
+                    <a:srgbClr val="1F2937"/>
+                  </a:solidFill>
+                  <a:latin typeface="Poppins"/>
+                  <a:ea typeface="Poppins"/>
+                  <a:cs typeface="Poppins"/>
+                  <a:sym typeface="Poppins"/>
+                </a:rPr>
+                <a:t>In a Backend Server:</a:t>
+              </a:r>
+              <a:endParaRPr lang="zh-CN" altLang="en-US" dirty="0"/>
+            </a:p>
+          </p:txBody>
+        </p:sp>
+      </p:grpSp>
       <p:pic>
         <p:nvPicPr>
-          <p:cNvPr id="26" name="Picture 26"/>
-          <p:cNvPicPr>
-            <a:picLocks noChangeAspect="1"/>
-          </p:cNvPicPr>
-          <p:nvPr/>
-        </p:nvPicPr>
-        <p:blipFill>
-          <a:blip>
-            <a:extLst>
-              <a:ext uri="{28A0092B-C50C-407E-A947-70E740481C1C}">
-                <a14:useLocalDpi xmlns:a14="http://schemas.microsoft.com/office/drawing/2010/main" val="0"/>
-              </a:ext>
-              <a:ext uri="{96DAC541-7B7A-43D3-8B79-37D633B846F1}">
-                <asvg:svgBlip xmlns:asvg="http://schemas.microsoft.com/office/drawing/2016/SVG/main" r:embed="rId7"/>
-              </a:ext>
-            </a:extLst>
-          </a:blip>
-          <a:stretch>
-            <a:fillRect/>
-          </a:stretch>
-        </p:blipFill>
-        <p:spPr>
-          <a:xfrm>
-            <a:off x="5118100" y="4762500"/>
-            <a:ext cx="304800" cy="304800"/>
-          </a:xfrm>
-          <a:prstGeom prst="rect">
-            <a:avLst/>
-          </a:prstGeom>
-        </p:spPr>
-      </p:pic>
-      <p:sp>
-        <p:nvSpPr>
-          <p:cNvPr id="27" name="AutoShape 27"/>
-          <p:cNvSpPr/>
-          <p:nvPr/>
-        </p:nvSpPr>
-        <p:spPr>
-          <a:xfrm>
-            <a:off x="5715000" y="4572000"/>
-            <a:ext cx="5524500" cy="698500"/>
-          </a:xfrm>
-          <a:prstGeom prst="rect">
-            <a:avLst/>
-          </a:prstGeom>
-          <a:noFill/>
-          <a:ln w="12700" cap="flat" cmpd="sng">
-            <a:noFill/>
-            <a:prstDash val="solid"/>
-            <a:round/>
-          </a:ln>
-        </p:spPr>
-        <p:txBody>
-          <a:bodyPr vert="horz" wrap="square" lIns="0" tIns="0" rIns="0" bIns="0" rtlCol="0" anchor="ctr" anchorCtr="0"/>
-          <a:lstStyle/>
-          <a:p>
-            <a:pPr indent="0" algn="l">
-              <a:lnSpc>
-                <a:spcPct val="125000"/>
-              </a:lnSpc>
-              <a:defRPr/>
-            </a:pPr>
-            <a:r>
-              <a:rPr lang="en-US" sz="1600" b="1" i="0" u="none" strike="noStrike" dirty="0">
-                <a:solidFill>
-                  <a:srgbClr val="1F2937"/>
-                </a:solidFill>
-                <a:latin typeface="Poppins"/>
-                <a:ea typeface="Poppins"/>
-                <a:cs typeface="Poppins"/>
-                <a:sym typeface="Poppins"/>
-              </a:rPr>
-              <a:t>Status &amp; Failover Info (/health)</a:t>
-            </a:r>
-            <a:endParaRPr lang="en-US" sz="1100" dirty="0"/>
-          </a:p>
-          <a:p>
-            <a:pPr indent="0" algn="l">
-              <a:lnSpc>
-                <a:spcPct val="125000"/>
-              </a:lnSpc>
-            </a:pPr>
-            <a:r>
-              <a:rPr lang="en-US" sz="1300" b="0" i="0" u="none" strike="noStrike" dirty="0">
-                <a:solidFill>
-                  <a:srgbClr val="6B7280"/>
-                </a:solidFill>
-                <a:latin typeface="Poppins"/>
-                <a:ea typeface="Poppins"/>
-                <a:cs typeface="Poppins"/>
-                <a:sym typeface="Poppins"/>
-              </a:rPr>
-              <a:t>Command `/health` displays the current backend setting and failover rule.</a:t>
-            </a:r>
-          </a:p>
-        </p:txBody>
-      </p:sp>
-      <p:sp>
-        <p:nvSpPr>
-          <p:cNvPr id="28" name="AutoShape 28"/>
-          <p:cNvSpPr/>
-          <p:nvPr/>
-        </p:nvSpPr>
-        <p:spPr>
-          <a:xfrm>
-            <a:off x="4699000" y="5461000"/>
-            <a:ext cx="6731000" cy="825500"/>
-          </a:xfrm>
-          <a:prstGeom prst="roundRect">
-            <a:avLst>
-              <a:gd name="adj" fmla="val 15384"/>
-            </a:avLst>
-          </a:prstGeom>
-          <a:solidFill>
-            <a:srgbClr val="F9FAFB">
-              <a:alpha val="100000"/>
-            </a:srgbClr>
-          </a:solidFill>
-          <a:ln w="12700" cap="flat" cmpd="sng">
-            <a:solidFill>
-              <a:srgbClr val="E5E7EB">
-                <a:alpha val="100000"/>
-              </a:srgbClr>
-            </a:solidFill>
-            <a:prstDash val="solid"/>
-            <a:round/>
-          </a:ln>
-        </p:spPr>
-        <p:txBody>
-          <a:bodyPr vert="horz" wrap="square" lIns="63500" tIns="63500" rIns="63500" bIns="63500" rtlCol="0" anchor="ctr"/>
-          <a:lstStyle/>
-          <a:p>
-            <a:pPr algn="ctr">
-              <a:defRPr/>
-            </a:pPr>
-            <a:endParaRPr/>
-          </a:p>
-        </p:txBody>
-      </p:sp>
-      <p:sp>
-        <p:nvSpPr>
-          <p:cNvPr id="29" name="AutoShape 29"/>
-          <p:cNvSpPr/>
-          <p:nvPr/>
-        </p:nvSpPr>
-        <p:spPr>
-          <a:xfrm>
-            <a:off x="4699000" y="5461000"/>
-            <a:ext cx="76200" cy="825500"/>
-          </a:xfrm>
-          <a:prstGeom prst="roundRect">
-            <a:avLst>
-              <a:gd name="adj" fmla="val 0"/>
-            </a:avLst>
-          </a:prstGeom>
-          <a:solidFill>
-            <a:srgbClr val="10B981">
-              <a:alpha val="100000"/>
-            </a:srgbClr>
-          </a:solidFill>
-          <a:ln w="25400" cap="flat" cmpd="sng">
-            <a:noFill/>
-            <a:prstDash val="solid"/>
-            <a:round/>
-          </a:ln>
-        </p:spPr>
-        <p:txBody>
-          <a:bodyPr vert="horz" wrap="square" lIns="63500" tIns="63500" rIns="63500" bIns="63500" rtlCol="0" anchor="ctr"/>
-          <a:lstStyle/>
-          <a:p>
-            <a:pPr algn="ctr">
-              <a:defRPr/>
-            </a:pPr>
-            <a:endParaRPr/>
-          </a:p>
-        </p:txBody>
-      </p:sp>
-      <p:sp>
-        <p:nvSpPr>
-          <p:cNvPr id="30" name="AutoShape 30"/>
-          <p:cNvSpPr/>
-          <p:nvPr/>
-        </p:nvSpPr>
-        <p:spPr>
-          <a:xfrm>
-            <a:off x="5016500" y="5613400"/>
-            <a:ext cx="508000" cy="508000"/>
-          </a:xfrm>
-          <a:prstGeom prst="ellipse">
-            <a:avLst/>
-          </a:prstGeom>
-          <a:solidFill>
-            <a:srgbClr val="D1FAE5">
-              <a:alpha val="100000"/>
-            </a:srgbClr>
-          </a:solidFill>
-          <a:ln w="25400" cap="flat" cmpd="sng">
-            <a:noFill/>
-            <a:prstDash val="solid"/>
-            <a:round/>
-          </a:ln>
-        </p:spPr>
-        <p:txBody>
-          <a:bodyPr vert="horz" wrap="square" lIns="63500" tIns="63500" rIns="63500" bIns="63500" rtlCol="0" anchor="ctr"/>
-          <a:lstStyle/>
-          <a:p>
-            <a:pPr algn="ctr">
-              <a:defRPr/>
-            </a:pPr>
-            <a:endParaRPr/>
-          </a:p>
-        </p:txBody>
-      </p:sp>
-      <p:pic>
-        <p:nvPicPr>
-          <p:cNvPr id="31" name="Picture 31"/>
-          <p:cNvPicPr>
-            <a:picLocks noChangeAspect="1"/>
-          </p:cNvPicPr>
-          <p:nvPr/>
-        </p:nvPicPr>
-        <p:blipFill>
-          <a:blip>
-            <a:extLst>
-              <a:ext uri="{28A0092B-C50C-407E-A947-70E740481C1C}">
-                <a14:useLocalDpi xmlns:a14="http://schemas.microsoft.com/office/drawing/2010/main" val="0"/>
-              </a:ext>
-              <a:ext uri="{96DAC541-7B7A-43D3-8B79-37D633B846F1}">
-                <asvg:svgBlip xmlns:asvg="http://schemas.microsoft.com/office/drawing/2016/SVG/main" r:embed="rId8"/>
-              </a:ext>
-            </a:extLst>
-          </a:blip>
-          <a:stretch>
-            <a:fillRect/>
-          </a:stretch>
-        </p:blipFill>
-        <p:spPr>
-          <a:xfrm>
-            <a:off x="5118100" y="5715000"/>
-            <a:ext cx="304800" cy="304800"/>
-          </a:xfrm>
-          <a:prstGeom prst="rect">
-            <a:avLst/>
-          </a:prstGeom>
-        </p:spPr>
-      </p:pic>
-      <p:sp>
-        <p:nvSpPr>
-          <p:cNvPr id="32" name="AutoShape 32"/>
-          <p:cNvSpPr/>
-          <p:nvPr/>
-        </p:nvSpPr>
-        <p:spPr>
-          <a:xfrm>
-            <a:off x="5715000" y="5524500"/>
-            <a:ext cx="5524500" cy="698500"/>
-          </a:xfrm>
-          <a:prstGeom prst="rect">
-            <a:avLst/>
-          </a:prstGeom>
-          <a:noFill/>
-          <a:ln w="12700" cap="flat" cmpd="sng">
-            <a:noFill/>
-            <a:prstDash val="solid"/>
-            <a:round/>
-          </a:ln>
-        </p:spPr>
-        <p:txBody>
-          <a:bodyPr vert="horz" wrap="square" lIns="0" tIns="0" rIns="0" bIns="0" rtlCol="0" anchor="ctr" anchorCtr="0"/>
-          <a:lstStyle/>
-          <a:p>
-            <a:pPr indent="0" algn="l">
-              <a:lnSpc>
-                <a:spcPct val="125000"/>
-              </a:lnSpc>
-              <a:defRPr/>
-            </a:pPr>
-            <a:r>
-              <a:rPr lang="en-US" sz="1600" b="1" i="0" u="none" strike="noStrike" dirty="0">
-                <a:solidFill>
-                  <a:srgbClr val="1F2937"/>
-                </a:solidFill>
-                <a:latin typeface="Poppins"/>
-                <a:ea typeface="Poppins"/>
-                <a:cs typeface="Poppins"/>
-                <a:sym typeface="Poppins"/>
-              </a:rPr>
-              <a:t>Comprehensive Query Logging</a:t>
-            </a:r>
-            <a:endParaRPr lang="en-US" sz="1100" dirty="0"/>
-          </a:p>
-          <a:p>
-            <a:pPr indent="0" algn="l">
-              <a:lnSpc>
-                <a:spcPct val="125000"/>
-              </a:lnSpc>
-            </a:pPr>
-            <a:r>
-              <a:rPr lang="en-US" sz="1300" b="0" i="0" u="none" strike="noStrike" dirty="0">
-                <a:solidFill>
-                  <a:srgbClr val="6B7280"/>
-                </a:solidFill>
-                <a:latin typeface="Poppins"/>
-                <a:ea typeface="Poppins"/>
-                <a:cs typeface="Poppins"/>
-                <a:sym typeface="Poppins"/>
-              </a:rPr>
-              <a:t>Each question is logged before the final result is returned.</a:t>
-            </a:r>
-          </a:p>
-        </p:txBody>
-      </p:sp>
-      <p:pic>
-        <p:nvPicPr>
-          <p:cNvPr id="34" name="图片 33">
+          <p:cNvPr id="49" name="图片 48">
             <a:extLst>
               <a:ext uri="{FF2B5EF4-FFF2-40B4-BE49-F238E27FC236}">
-                <a16:creationId xmlns:a16="http://schemas.microsoft.com/office/drawing/2014/main" id="{DC80E9EC-A7C4-3042-757D-5ED1B8A98DA1}"/>
+                <a16:creationId xmlns:a16="http://schemas.microsoft.com/office/drawing/2014/main" id="{E1753505-E33A-86AF-CD38-49FB0A0F62F3}"/>
               </a:ext>
             </a:extLst>
           </p:cNvPr>
@@ -20510,387 +24916,31 @@
           <p:nvPr/>
         </p:nvPicPr>
         <p:blipFill>
-          <a:blip r:embed="rId9"/>
+          <a:blip r:embed="rId6"/>
           <a:stretch>
             <a:fillRect/>
           </a:stretch>
         </p:blipFill>
         <p:spPr>
           <a:xfrm>
-            <a:off x="396160" y="2372360"/>
-            <a:ext cx="4096913" cy="2110489"/>
+            <a:off x="448808" y="1461613"/>
+            <a:ext cx="4225084" cy="4358508"/>
           </a:xfrm>
           <a:prstGeom prst="rect">
             <a:avLst/>
           </a:prstGeom>
-          <a:effectLst>
-            <a:softEdge rad="12700"/>
-          </a:effectLst>
-        </p:spPr>
-      </p:pic>
-      <p:pic>
-        <p:nvPicPr>
-          <p:cNvPr id="33" name="图片 32">
-            <a:extLst>
-              <a:ext uri="{FF2B5EF4-FFF2-40B4-BE49-F238E27FC236}">
-                <a16:creationId xmlns:a16="http://schemas.microsoft.com/office/drawing/2014/main" id="{6AA7A975-394C-1B97-146E-F81EC2A15F65}"/>
-              </a:ext>
-            </a:extLst>
-          </p:cNvPr>
-          <p:cNvPicPr>
-            <a:picLocks noChangeAspect="1"/>
-          </p:cNvPicPr>
-          <p:nvPr/>
-        </p:nvPicPr>
-        <p:blipFill>
-          <a:blip r:embed="rId10"/>
-          <a:stretch>
-            <a:fillRect/>
-          </a:stretch>
-        </p:blipFill>
-        <p:spPr>
-          <a:xfrm>
-            <a:off x="390064" y="2063750"/>
-            <a:ext cx="4109103" cy="2761173"/>
-          </a:xfrm>
-          <a:prstGeom prst="rect">
-            <a:avLst/>
-          </a:prstGeom>
-          <a:effectLst>
-            <a:softEdge rad="12700"/>
-          </a:effectLst>
-        </p:spPr>
-      </p:pic>
-      <p:pic>
-        <p:nvPicPr>
-          <p:cNvPr id="35" name="图片 34">
-            <a:extLst>
-              <a:ext uri="{FF2B5EF4-FFF2-40B4-BE49-F238E27FC236}">
-                <a16:creationId xmlns:a16="http://schemas.microsoft.com/office/drawing/2014/main" id="{A0A7B79C-246C-ED2A-D053-9F0560546019}"/>
-              </a:ext>
-            </a:extLst>
-          </p:cNvPr>
-          <p:cNvPicPr>
-            <a:picLocks noChangeAspect="1"/>
-          </p:cNvPicPr>
-          <p:nvPr/>
-        </p:nvPicPr>
-        <p:blipFill>
-          <a:blip r:embed="rId11"/>
-          <a:stretch>
-            <a:fillRect/>
-          </a:stretch>
-        </p:blipFill>
-        <p:spPr>
-          <a:xfrm>
-            <a:off x="411719" y="2696049"/>
-            <a:ext cx="4056121" cy="1702754"/>
-          </a:xfrm>
-          <a:prstGeom prst="rect">
-            <a:avLst/>
-          </a:prstGeom>
         </p:spPr>
       </p:pic>
     </p:spTree>
+    <p:extLst>
+      <p:ext uri="{BB962C8B-B14F-4D97-AF65-F5344CB8AC3E}">
+        <p14:creationId xmlns:p14="http://schemas.microsoft.com/office/powerpoint/2010/main" val="352606672"/>
+      </p:ext>
+    </p:extLst>
   </p:cSld>
   <p:clrMapOvr>
     <a:masterClrMapping/>
   </p:clrMapOvr>
-  <p:timing>
-    <p:tnLst>
-      <p:par>
-        <p:cTn id="1" dur="indefinite" restart="never" nodeType="tmRoot">
-          <p:childTnLst>
-            <p:seq concurrent="1" nextAc="seek">
-              <p:cTn id="2" dur="indefinite" nodeType="mainSeq">
-                <p:childTnLst>
-                  <p:par>
-                    <p:cTn id="3" fill="hold">
-                      <p:stCondLst>
-                        <p:cond delay="indefinite"/>
-                      </p:stCondLst>
-                      <p:childTnLst>
-                        <p:par>
-                          <p:cTn id="4" fill="hold">
-                            <p:stCondLst>
-                              <p:cond delay="0"/>
-                            </p:stCondLst>
-                            <p:childTnLst>
-                              <p:par>
-                                <p:cTn id="5" presetID="10" presetClass="entr" presetSubtype="0" fill="hold" nodeType="clickEffect">
-                                  <p:stCondLst>
-                                    <p:cond delay="0"/>
-                                  </p:stCondLst>
-                                  <p:childTnLst>
-                                    <p:set>
-                                      <p:cBhvr>
-                                        <p:cTn id="6" dur="1" fill="hold">
-                                          <p:stCondLst>
-                                            <p:cond delay="0"/>
-                                          </p:stCondLst>
-                                        </p:cTn>
-                                        <p:tgtEl>
-                                          <p:spTgt spid="34"/>
-                                        </p:tgtEl>
-                                        <p:attrNameLst>
-                                          <p:attrName>style.visibility</p:attrName>
-                                        </p:attrNameLst>
-                                      </p:cBhvr>
-                                      <p:to>
-                                        <p:strVal val="visible"/>
-                                      </p:to>
-                                    </p:set>
-                                    <p:animEffect transition="in" filter="fade">
-                                      <p:cBhvr>
-                                        <p:cTn id="7" dur="500"/>
-                                        <p:tgtEl>
-                                          <p:spTgt spid="34"/>
-                                        </p:tgtEl>
-                                      </p:cBhvr>
-                                    </p:animEffect>
-                                  </p:childTnLst>
-                                </p:cTn>
-                              </p:par>
-                            </p:childTnLst>
-                          </p:cTn>
-                        </p:par>
-                      </p:childTnLst>
-                    </p:cTn>
-                  </p:par>
-                  <p:par>
-                    <p:cTn id="8" fill="hold">
-                      <p:stCondLst>
-                        <p:cond delay="indefinite"/>
-                      </p:stCondLst>
-                      <p:childTnLst>
-                        <p:par>
-                          <p:cTn id="9" fill="hold">
-                            <p:stCondLst>
-                              <p:cond delay="0"/>
-                            </p:stCondLst>
-                            <p:childTnLst>
-                              <p:par>
-                                <p:cTn id="10" presetID="10" presetClass="exit" presetSubtype="0" fill="hold" nodeType="clickEffect">
-                                  <p:stCondLst>
-                                    <p:cond delay="0"/>
-                                  </p:stCondLst>
-                                  <p:childTnLst>
-                                    <p:animEffect transition="out" filter="fade">
-                                      <p:cBhvr>
-                                        <p:cTn id="11" dur="500"/>
-                                        <p:tgtEl>
-                                          <p:spTgt spid="34"/>
-                                        </p:tgtEl>
-                                      </p:cBhvr>
-                                    </p:animEffect>
-                                    <p:set>
-                                      <p:cBhvr>
-                                        <p:cTn id="12" dur="1" fill="hold">
-                                          <p:stCondLst>
-                                            <p:cond delay="499"/>
-                                          </p:stCondLst>
-                                        </p:cTn>
-                                        <p:tgtEl>
-                                          <p:spTgt spid="34"/>
-                                        </p:tgtEl>
-                                        <p:attrNameLst>
-                                          <p:attrName>style.visibility</p:attrName>
-                                        </p:attrNameLst>
-                                      </p:cBhvr>
-                                      <p:to>
-                                        <p:strVal val="hidden"/>
-                                      </p:to>
-                                    </p:set>
-                                  </p:childTnLst>
-                                </p:cTn>
-                              </p:par>
-                            </p:childTnLst>
-                          </p:cTn>
-                        </p:par>
-                      </p:childTnLst>
-                    </p:cTn>
-                  </p:par>
-                  <p:par>
-                    <p:cTn id="13" fill="hold">
-                      <p:stCondLst>
-                        <p:cond delay="indefinite"/>
-                      </p:stCondLst>
-                      <p:childTnLst>
-                        <p:par>
-                          <p:cTn id="14" fill="hold">
-                            <p:stCondLst>
-                              <p:cond delay="0"/>
-                            </p:stCondLst>
-                            <p:childTnLst>
-                              <p:par>
-                                <p:cTn id="15" presetID="10" presetClass="entr" presetSubtype="0" fill="hold" nodeType="clickEffect">
-                                  <p:stCondLst>
-                                    <p:cond delay="0"/>
-                                  </p:stCondLst>
-                                  <p:childTnLst>
-                                    <p:set>
-                                      <p:cBhvr>
-                                        <p:cTn id="16" dur="1" fill="hold">
-                                          <p:stCondLst>
-                                            <p:cond delay="0"/>
-                                          </p:stCondLst>
-                                        </p:cTn>
-                                        <p:tgtEl>
-                                          <p:spTgt spid="33"/>
-                                        </p:tgtEl>
-                                        <p:attrNameLst>
-                                          <p:attrName>style.visibility</p:attrName>
-                                        </p:attrNameLst>
-                                      </p:cBhvr>
-                                      <p:to>
-                                        <p:strVal val="visible"/>
-                                      </p:to>
-                                    </p:set>
-                                    <p:animEffect transition="in" filter="fade">
-                                      <p:cBhvr>
-                                        <p:cTn id="17" dur="500"/>
-                                        <p:tgtEl>
-                                          <p:spTgt spid="33"/>
-                                        </p:tgtEl>
-                                      </p:cBhvr>
-                                    </p:animEffect>
-                                  </p:childTnLst>
-                                </p:cTn>
-                              </p:par>
-                            </p:childTnLst>
-                          </p:cTn>
-                        </p:par>
-                      </p:childTnLst>
-                    </p:cTn>
-                  </p:par>
-                  <p:par>
-                    <p:cTn id="18" fill="hold">
-                      <p:stCondLst>
-                        <p:cond delay="indefinite"/>
-                      </p:stCondLst>
-                      <p:childTnLst>
-                        <p:par>
-                          <p:cTn id="19" fill="hold">
-                            <p:stCondLst>
-                              <p:cond delay="0"/>
-                            </p:stCondLst>
-                            <p:childTnLst>
-                              <p:par>
-                                <p:cTn id="20" presetID="10" presetClass="exit" presetSubtype="0" fill="hold" nodeType="clickEffect">
-                                  <p:stCondLst>
-                                    <p:cond delay="0"/>
-                                  </p:stCondLst>
-                                  <p:childTnLst>
-                                    <p:animEffect transition="out" filter="fade">
-                                      <p:cBhvr>
-                                        <p:cTn id="21" dur="500"/>
-                                        <p:tgtEl>
-                                          <p:spTgt spid="33"/>
-                                        </p:tgtEl>
-                                      </p:cBhvr>
-                                    </p:animEffect>
-                                    <p:set>
-                                      <p:cBhvr>
-                                        <p:cTn id="22" dur="1" fill="hold">
-                                          <p:stCondLst>
-                                            <p:cond delay="499"/>
-                                          </p:stCondLst>
-                                        </p:cTn>
-                                        <p:tgtEl>
-                                          <p:spTgt spid="33"/>
-                                        </p:tgtEl>
-                                        <p:attrNameLst>
-                                          <p:attrName>style.visibility</p:attrName>
-                                        </p:attrNameLst>
-                                      </p:cBhvr>
-                                      <p:to>
-                                        <p:strVal val="hidden"/>
-                                      </p:to>
-                                    </p:set>
-                                  </p:childTnLst>
-                                </p:cTn>
-                              </p:par>
-                            </p:childTnLst>
-                          </p:cTn>
-                        </p:par>
-                      </p:childTnLst>
-                    </p:cTn>
-                  </p:par>
-                  <p:par>
-                    <p:cTn id="23" fill="hold">
-                      <p:stCondLst>
-                        <p:cond delay="indefinite"/>
-                      </p:stCondLst>
-                      <p:childTnLst>
-                        <p:par>
-                          <p:cTn id="24" fill="hold">
-                            <p:stCondLst>
-                              <p:cond delay="0"/>
-                            </p:stCondLst>
-                            <p:childTnLst>
-                              <p:par>
-                                <p:cTn id="25" presetID="10" presetClass="entr" presetSubtype="0" fill="hold" nodeType="clickEffect">
-                                  <p:stCondLst>
-                                    <p:cond delay="0"/>
-                                  </p:stCondLst>
-                                  <p:childTnLst>
-                                    <p:set>
-                                      <p:cBhvr>
-                                        <p:cTn id="26" dur="1" fill="hold">
-                                          <p:stCondLst>
-                                            <p:cond delay="0"/>
-                                          </p:stCondLst>
-                                        </p:cTn>
-                                        <p:tgtEl>
-                                          <p:spTgt spid="35"/>
-                                        </p:tgtEl>
-                                        <p:attrNameLst>
-                                          <p:attrName>style.visibility</p:attrName>
-                                        </p:attrNameLst>
-                                      </p:cBhvr>
-                                      <p:to>
-                                        <p:strVal val="visible"/>
-                                      </p:to>
-                                    </p:set>
-                                    <p:animEffect transition="in" filter="fade">
-                                      <p:cBhvr>
-                                        <p:cTn id="27" dur="500"/>
-                                        <p:tgtEl>
-                                          <p:spTgt spid="35"/>
-                                        </p:tgtEl>
-                                      </p:cBhvr>
-                                    </p:animEffect>
-                                  </p:childTnLst>
-                                </p:cTn>
-                              </p:par>
-                            </p:childTnLst>
-                          </p:cTn>
-                        </p:par>
-                      </p:childTnLst>
-                    </p:cTn>
-                  </p:par>
-                </p:childTnLst>
-              </p:cTn>
-              <p:prevCondLst>
-                <p:cond evt="onPrev" delay="0">
-                  <p:tgtEl>
-                    <p:sldTgt/>
-                  </p:tgtEl>
-                </p:cond>
-              </p:prevCondLst>
-              <p:nextCondLst>
-                <p:cond evt="onNext" delay="0">
-                  <p:tgtEl>
-                    <p:sldTgt/>
-                  </p:tgtEl>
-                </p:cond>
-              </p:nextCondLst>
-            </p:seq>
-          </p:childTnLst>
-        </p:cTn>
-      </p:par>
-    </p:tnLst>
-  </p:timing>
 </p:sld>
 </file>
 
@@ -21022,7 +25072,7 @@
               <a:defRPr/>
             </a:pPr>
             <a:r>
-              <a:rPr lang="en-US" sz="3200" b="1" i="0" u="none" strike="noStrike">
+              <a:rPr lang="en-US" sz="3200" b="1" i="0" u="none" strike="noStrike" dirty="0">
                 <a:solidFill>
                   <a:srgbClr val="1F2937"/>
                 </a:solidFill>
@@ -21033,705 +25083,387 @@
               </a:rPr>
               <a:t>Reliability and Scalability</a:t>
             </a:r>
-            <a:endParaRPr lang="en-US" sz="1100"/>
+            <a:endParaRPr lang="en-US" sz="1100" dirty="0"/>
           </a:p>
         </p:txBody>
       </p:sp>
-      <p:sp>
-        <p:nvSpPr>
-          <p:cNvPr id="7" name="AutoShape 7"/>
-          <p:cNvSpPr/>
-          <p:nvPr/>
-        </p:nvSpPr>
-        <p:spPr>
-          <a:xfrm>
-            <a:off x="6477000" y="1651000"/>
-            <a:ext cx="609600" cy="609600"/>
-          </a:xfrm>
-          <a:prstGeom prst="ellipse">
-            <a:avLst/>
-          </a:prstGeom>
-          <a:solidFill>
-            <a:srgbClr val="10B981">
-              <a:alpha val="10000"/>
-            </a:srgbClr>
-          </a:solidFill>
-          <a:ln w="25400" cap="flat" cmpd="sng">
-            <a:noFill/>
-            <a:prstDash val="solid"/>
-            <a:round/>
-          </a:ln>
-        </p:spPr>
-        <p:txBody>
-          <a:bodyPr vert="horz" wrap="square" lIns="63500" tIns="63500" rIns="63500" bIns="63500" rtlCol="0" anchor="ctr"/>
-          <a:lstStyle/>
-          <a:p>
-            <a:pPr algn="ctr">
-              <a:defRPr/>
-            </a:pPr>
-            <a:endParaRPr/>
-          </a:p>
-        </p:txBody>
-      </p:sp>
-      <p:pic>
-        <p:nvPicPr>
-          <p:cNvPr id="8" name="Picture 8"/>
-          <p:cNvPicPr>
-            <a:picLocks noChangeAspect="1"/>
-          </p:cNvPicPr>
-          <p:nvPr/>
-        </p:nvPicPr>
-        <p:blipFill>
-          <a:blip>
+      <p:grpSp>
+        <p:nvGrpSpPr>
+          <p:cNvPr id="24" name="组合 23">
             <a:extLst>
-              <a:ext uri="{28A0092B-C50C-407E-A947-70E740481C1C}">
-                <a14:useLocalDpi xmlns:a14="http://schemas.microsoft.com/office/drawing/2010/main" val="0"/>
-              </a:ext>
-              <a:ext uri="{96DAC541-7B7A-43D3-8B79-37D633B846F1}">
-                <asvg:svgBlip xmlns:asvg="http://schemas.microsoft.com/office/drawing/2016/SVG/main" r:embed="rId4"/>
+              <a:ext uri="{FF2B5EF4-FFF2-40B4-BE49-F238E27FC236}">
+                <a16:creationId xmlns:a16="http://schemas.microsoft.com/office/drawing/2014/main" id="{56D57621-9224-9A2B-60D2-D05201620C4B}"/>
               </a:ext>
             </a:extLst>
-          </a:blip>
-          <a:stretch>
-            <a:fillRect/>
-          </a:stretch>
-        </p:blipFill>
-        <p:spPr>
-          <a:xfrm>
-            <a:off x="6629400" y="1803400"/>
-            <a:ext cx="304800" cy="304800"/>
-          </a:xfrm>
-          <a:prstGeom prst="rect">
-            <a:avLst/>
-          </a:prstGeom>
-        </p:spPr>
-      </p:pic>
-      <p:sp>
-        <p:nvSpPr>
-          <p:cNvPr id="9" name="AutoShape 9"/>
-          <p:cNvSpPr/>
+          </p:cNvPr>
+          <p:cNvGrpSpPr/>
           <p:nvPr/>
-        </p:nvSpPr>
-        <p:spPr>
-          <a:xfrm>
-            <a:off x="7239000" y="1651000"/>
-            <a:ext cx="4191000" cy="609600"/>
-          </a:xfrm>
-          <a:prstGeom prst="rect">
-            <a:avLst/>
-          </a:prstGeom>
-          <a:noFill/>
-          <a:ln w="12700" cap="flat" cmpd="sng">
+        </p:nvGrpSpPr>
+        <p:grpSpPr>
+          <a:xfrm>
+            <a:off x="530627" y="4907596"/>
+            <a:ext cx="5631383" cy="1500049"/>
+            <a:chOff x="6477000" y="2155965"/>
+            <a:chExt cx="5631383" cy="1500049"/>
+          </a:xfrm>
+        </p:grpSpPr>
+        <p:sp>
+          <p:nvSpPr>
+            <p:cNvPr id="7" name="AutoShape 7"/>
+            <p:cNvSpPr/>
+            <p:nvPr/>
+          </p:nvSpPr>
+          <p:spPr>
+            <a:xfrm>
+              <a:off x="6477000" y="2225535"/>
+              <a:ext cx="609600" cy="609600"/>
+            </a:xfrm>
+            <a:prstGeom prst="ellipse">
+              <a:avLst/>
+            </a:prstGeom>
+            <a:solidFill>
+              <a:srgbClr val="10B981">
+                <a:alpha val="10000"/>
+              </a:srgbClr>
+            </a:solidFill>
+            <a:ln w="25400" cap="flat" cmpd="sng">
+              <a:noFill/>
+              <a:prstDash val="solid"/>
+              <a:round/>
+            </a:ln>
+          </p:spPr>
+          <p:txBody>
+            <a:bodyPr vert="horz" wrap="square" lIns="63500" tIns="63500" rIns="63500" bIns="63500" rtlCol="0" anchor="ctr"/>
+            <a:lstStyle/>
+            <a:p>
+              <a:pPr algn="ctr">
+                <a:defRPr/>
+              </a:pPr>
+              <a:endParaRPr/>
+            </a:p>
+          </p:txBody>
+        </p:sp>
+        <p:pic>
+          <p:nvPicPr>
+            <p:cNvPr id="8" name="Picture 8"/>
+            <p:cNvPicPr>
+              <a:picLocks noChangeAspect="1"/>
+            </p:cNvPicPr>
+            <p:nvPr/>
+          </p:nvPicPr>
+          <p:blipFill>
+            <a:blip>
+              <a:extLst>
+                <a:ext uri="{28A0092B-C50C-407E-A947-70E740481C1C}">
+                  <a14:useLocalDpi xmlns:a14="http://schemas.microsoft.com/office/drawing/2010/main" val="0"/>
+                </a:ext>
+                <a:ext uri="{96DAC541-7B7A-43D3-8B79-37D633B846F1}">
+                  <asvg:svgBlip xmlns:asvg="http://schemas.microsoft.com/office/drawing/2016/SVG/main" r:embed="rId4"/>
+                </a:ext>
+              </a:extLst>
+            </a:blip>
+            <a:stretch>
+              <a:fillRect/>
+            </a:stretch>
+          </p:blipFill>
+          <p:spPr>
+            <a:xfrm>
+              <a:off x="6629400" y="2377935"/>
+              <a:ext cx="304800" cy="304800"/>
+            </a:xfrm>
+            <a:prstGeom prst="rect">
+              <a:avLst/>
+            </a:prstGeom>
+          </p:spPr>
+        </p:pic>
+        <p:sp>
+          <p:nvSpPr>
+            <p:cNvPr id="15" name="AutoShape 15"/>
+            <p:cNvSpPr/>
+            <p:nvPr/>
+          </p:nvSpPr>
+          <p:spPr>
+            <a:xfrm>
+              <a:off x="7170217" y="2155965"/>
+              <a:ext cx="4938166" cy="1500049"/>
+            </a:xfrm>
+            <a:prstGeom prst="rect">
+              <a:avLst/>
+            </a:prstGeom>
             <a:noFill/>
-            <a:prstDash val="solid"/>
-            <a:round/>
-          </a:ln>
-        </p:spPr>
-        <p:txBody>
-          <a:bodyPr vert="horz" wrap="square" lIns="0" tIns="0" rIns="0" bIns="0" rtlCol="0" anchor="ctr" anchorCtr="0"/>
-          <a:lstStyle/>
-          <a:p>
-            <a:pPr indent="0" algn="l">
-              <a:lnSpc>
-                <a:spcPct val="125000"/>
-              </a:lnSpc>
-              <a:defRPr/>
-            </a:pPr>
-            <a:r>
-              <a:rPr lang="en-US" sz="1500" b="1" i="0" u="none" strike="noStrike" dirty="0">
-                <a:solidFill>
-                  <a:srgbClr val="1F2937"/>
-                </a:solidFill>
-                <a:latin typeface="Noto Sans SC"/>
-                <a:ea typeface="Noto Sans SC"/>
-                <a:cs typeface="Noto Sans SC"/>
-                <a:sym typeface="Noto Sans SC"/>
-              </a:rPr>
-              <a:t>Preferred backend startup</a:t>
-            </a:r>
-            <a:br>
-              <a:rPr lang="en-US" sz="1600" b="0" i="0" u="none" strike="noStrike" dirty="0">
-                <a:solidFill>
-                  <a:srgbClr val="1F2329"/>
-                </a:solidFill>
-                <a:latin typeface="Noto Sans SC"/>
-                <a:ea typeface="Noto Sans SC"/>
-                <a:cs typeface="Noto Sans SC"/>
-                <a:sym typeface="Noto Sans SC"/>
-              </a:rPr>
-            </a:br>
-            <a:r>
-              <a:rPr lang="en-US" sz="1300" b="0" i="0" u="none" strike="noStrike" dirty="0">
+            <a:ln w="12700" cap="flat" cmpd="sng">
+              <a:noFill/>
+              <a:prstDash val="solid"/>
+              <a:round/>
+            </a:ln>
+          </p:spPr>
+          <p:txBody>
+            <a:bodyPr vert="horz" wrap="square" lIns="0" tIns="0" rIns="0" bIns="0" rtlCol="0" anchor="ctr" anchorCtr="0"/>
+            <a:lstStyle/>
+            <a:p>
+              <a:pPr indent="0" algn="l">
+                <a:lnSpc>
+                  <a:spcPct val="125000"/>
+                </a:lnSpc>
+                <a:defRPr/>
+              </a:pPr>
+              <a:r>
+                <a:rPr lang="en-US" sz="1500" b="1" i="0" u="none" strike="noStrike" dirty="0">
+                  <a:solidFill>
+                    <a:srgbClr val="1F2937"/>
+                  </a:solidFill>
+                  <a:latin typeface="Noto Sans SC"/>
+                  <a:ea typeface="Noto Sans SC"/>
+                  <a:cs typeface="Noto Sans SC"/>
+                  <a:sym typeface="Noto Sans SC"/>
+                </a:rPr>
+                <a:t>High availability of services</a:t>
+              </a:r>
+              <a:r>
+                <a:rPr lang="en-US" sz="1600" dirty="0">
+                  <a:solidFill>
+                    <a:srgbClr val="1F2329"/>
+                  </a:solidFill>
+                  <a:latin typeface="Noto Sans SC"/>
+                  <a:ea typeface="Noto Sans SC"/>
+                  <a:cs typeface="Noto Sans SC"/>
+                  <a:sym typeface="Noto Sans SC"/>
+                </a:rPr>
+                <a:t>:</a:t>
+              </a:r>
+            </a:p>
+            <a:p>
+              <a:pPr indent="0" algn="l">
+                <a:lnSpc>
+                  <a:spcPct val="125000"/>
+                </a:lnSpc>
+                <a:defRPr/>
+              </a:pPr>
+              <a:r>
+                <a:rPr lang="en-US" sz="1300" dirty="0">
+                  <a:solidFill>
+                    <a:srgbClr val="6B7280"/>
+                  </a:solidFill>
+                  <a:latin typeface="Noto Sans SC"/>
+                  <a:ea typeface="Noto Sans SC"/>
+                  <a:sym typeface="Noto Sans SC"/>
+                </a:rPr>
+                <a:t>The chatbot will still available when there's</a:t>
+              </a:r>
+              <a:r>
+                <a:rPr lang="en-US" altLang="zh-CN" sz="1300" dirty="0">
+                  <a:solidFill>
+                    <a:srgbClr val="6B7280"/>
+                  </a:solidFill>
+                  <a:latin typeface="Noto Sans SC"/>
+                  <a:ea typeface="Noto Sans SC"/>
+                  <a:sym typeface="Noto Sans SC"/>
+                </a:rPr>
+                <a:t> only one backend server online, When backend fail to communicate with GenAI Server, it tries the next backend ID until reach the max number we set in Frontend server.</a:t>
+              </a:r>
+              <a:endParaRPr lang="en-US" sz="1300" dirty="0">
                 <a:solidFill>
                   <a:srgbClr val="6B7280"/>
                 </a:solidFill>
                 <a:latin typeface="Noto Sans SC"/>
                 <a:ea typeface="Noto Sans SC"/>
-                <a:cs typeface="Noto Sans SC"/>
-                <a:sym typeface="Noto Sans SC"/>
-              </a:rPr>
-              <a:t>The bot starts from the user's preferred backend.</a:t>
-            </a:r>
-            <a:endParaRPr lang="en-US" sz="1100" dirty="0"/>
-          </a:p>
-        </p:txBody>
-      </p:sp>
-      <p:sp>
-        <p:nvSpPr>
-          <p:cNvPr id="10" name="AutoShape 10"/>
-          <p:cNvSpPr/>
-          <p:nvPr/>
-        </p:nvSpPr>
-        <p:spPr>
-          <a:xfrm>
-            <a:off x="6477000" y="2476500"/>
-            <a:ext cx="609600" cy="609600"/>
-          </a:xfrm>
-          <a:prstGeom prst="ellipse">
-            <a:avLst/>
-          </a:prstGeom>
-          <a:solidFill>
-            <a:srgbClr val="10B981">
-              <a:alpha val="10000"/>
-            </a:srgbClr>
-          </a:solidFill>
-          <a:ln w="25400" cap="flat" cmpd="sng">
-            <a:noFill/>
-            <a:prstDash val="solid"/>
-            <a:round/>
-          </a:ln>
-        </p:spPr>
-        <p:txBody>
-          <a:bodyPr vert="horz" wrap="square" lIns="63500" tIns="63500" rIns="63500" bIns="63500" rtlCol="0" anchor="ctr"/>
-          <a:lstStyle/>
-          <a:p>
-            <a:pPr algn="ctr">
-              <a:defRPr/>
-            </a:pPr>
-            <a:endParaRPr/>
-          </a:p>
-        </p:txBody>
-      </p:sp>
-      <p:pic>
-        <p:nvPicPr>
-          <p:cNvPr id="11" name="Picture 11"/>
-          <p:cNvPicPr>
-            <a:picLocks noChangeAspect="1"/>
-          </p:cNvPicPr>
-          <p:nvPr/>
-        </p:nvPicPr>
-        <p:blipFill>
-          <a:blip>
+              </a:endParaRPr>
+            </a:p>
+          </p:txBody>
+        </p:sp>
+      </p:grpSp>
+      <p:grpSp>
+        <p:nvGrpSpPr>
+          <p:cNvPr id="32" name="组合 31">
             <a:extLst>
-              <a:ext uri="{28A0092B-C50C-407E-A947-70E740481C1C}">
-                <a14:useLocalDpi xmlns:a14="http://schemas.microsoft.com/office/drawing/2010/main" val="0"/>
-              </a:ext>
-              <a:ext uri="{96DAC541-7B7A-43D3-8B79-37D633B846F1}">
-                <asvg:svgBlip xmlns:asvg="http://schemas.microsoft.com/office/drawing/2016/SVG/main" r:embed="rId5"/>
+              <a:ext uri="{FF2B5EF4-FFF2-40B4-BE49-F238E27FC236}">
+                <a16:creationId xmlns:a16="http://schemas.microsoft.com/office/drawing/2014/main" id="{2D7E4768-65AD-08CA-AE27-7A07FF734FC3}"/>
               </a:ext>
             </a:extLst>
-          </a:blip>
-          <a:stretch>
-            <a:fillRect/>
-          </a:stretch>
-        </p:blipFill>
-        <p:spPr>
-          <a:xfrm>
-            <a:off x="6629400" y="2628900"/>
-            <a:ext cx="304800" cy="304800"/>
-          </a:xfrm>
-          <a:prstGeom prst="rect">
-            <a:avLst/>
-          </a:prstGeom>
-        </p:spPr>
-      </p:pic>
-      <p:sp>
-        <p:nvSpPr>
-          <p:cNvPr id="12" name="AutoShape 12"/>
-          <p:cNvSpPr/>
+          </p:cNvPr>
+          <p:cNvGrpSpPr/>
           <p:nvPr/>
-        </p:nvSpPr>
-        <p:spPr>
-          <a:xfrm>
-            <a:off x="7239000" y="2476500"/>
-            <a:ext cx="4191000" cy="609600"/>
-          </a:xfrm>
-          <a:prstGeom prst="rect">
-            <a:avLst/>
-          </a:prstGeom>
-          <a:noFill/>
-          <a:ln w="12700" cap="flat" cmpd="sng">
+        </p:nvGrpSpPr>
+        <p:grpSpPr>
+          <a:xfrm>
+            <a:off x="6477000" y="4758119"/>
+            <a:ext cx="4953000" cy="1715510"/>
+            <a:chOff x="6477000" y="4702035"/>
+            <a:chExt cx="4953000" cy="1715510"/>
+          </a:xfrm>
+        </p:grpSpPr>
+        <p:sp>
+          <p:nvSpPr>
+            <p:cNvPr id="16" name="AutoShape 16"/>
+            <p:cNvSpPr/>
+            <p:nvPr/>
+          </p:nvSpPr>
+          <p:spPr>
+            <a:xfrm>
+              <a:off x="6477000" y="4702035"/>
+              <a:ext cx="609600" cy="609600"/>
+            </a:xfrm>
+            <a:prstGeom prst="ellipse">
+              <a:avLst/>
+            </a:prstGeom>
+            <a:solidFill>
+              <a:srgbClr val="10B981">
+                <a:alpha val="10000"/>
+              </a:srgbClr>
+            </a:solidFill>
+            <a:ln w="25400" cap="flat" cmpd="sng">
+              <a:noFill/>
+              <a:prstDash val="solid"/>
+              <a:round/>
+            </a:ln>
+          </p:spPr>
+          <p:txBody>
+            <a:bodyPr vert="horz" wrap="square" lIns="63500" tIns="63500" rIns="63500" bIns="63500" rtlCol="0" anchor="ctr"/>
+            <a:lstStyle/>
+            <a:p>
+              <a:pPr algn="ctr">
+                <a:defRPr/>
+              </a:pPr>
+              <a:endParaRPr/>
+            </a:p>
+          </p:txBody>
+        </p:sp>
+        <p:pic>
+          <p:nvPicPr>
+            <p:cNvPr id="17" name="Picture 17"/>
+            <p:cNvPicPr>
+              <a:picLocks noChangeAspect="1"/>
+            </p:cNvPicPr>
+            <p:nvPr/>
+          </p:nvPicPr>
+          <p:blipFill>
+            <a:blip>
+              <a:extLst>
+                <a:ext uri="{28A0092B-C50C-407E-A947-70E740481C1C}">
+                  <a14:useLocalDpi xmlns:a14="http://schemas.microsoft.com/office/drawing/2010/main" val="0"/>
+                </a:ext>
+                <a:ext uri="{96DAC541-7B7A-43D3-8B79-37D633B846F1}">
+                  <asvg:svgBlip xmlns:asvg="http://schemas.microsoft.com/office/drawing/2016/SVG/main" r:embed="rId5"/>
+                </a:ext>
+              </a:extLst>
+            </a:blip>
+            <a:stretch>
+              <a:fillRect/>
+            </a:stretch>
+          </p:blipFill>
+          <p:spPr>
+            <a:xfrm>
+              <a:off x="6629400" y="4854435"/>
+              <a:ext cx="304800" cy="304800"/>
+            </a:xfrm>
+            <a:prstGeom prst="rect">
+              <a:avLst/>
+            </a:prstGeom>
+          </p:spPr>
+        </p:pic>
+        <p:sp>
+          <p:nvSpPr>
+            <p:cNvPr id="18" name="AutoShape 18"/>
+            <p:cNvSpPr/>
+            <p:nvPr/>
+          </p:nvSpPr>
+          <p:spPr>
+            <a:xfrm>
+              <a:off x="7239000" y="4702035"/>
+              <a:ext cx="4191000" cy="1715510"/>
+            </a:xfrm>
+            <a:prstGeom prst="rect">
+              <a:avLst/>
+            </a:prstGeom>
             <a:noFill/>
-            <a:prstDash val="solid"/>
-            <a:round/>
-          </a:ln>
-        </p:spPr>
-        <p:txBody>
-          <a:bodyPr vert="horz" wrap="square" lIns="0" tIns="0" rIns="0" bIns="0" rtlCol="0" anchor="ctr" anchorCtr="0"/>
-          <a:lstStyle/>
-          <a:p>
-            <a:pPr indent="0" algn="l">
-              <a:lnSpc>
-                <a:spcPct val="125000"/>
-              </a:lnSpc>
-              <a:defRPr/>
-            </a:pPr>
-            <a:r>
-              <a:rPr lang="en-US" sz="1500" b="1" i="0" u="none" strike="noStrike" dirty="0">
-                <a:solidFill>
-                  <a:srgbClr val="1F2937"/>
-                </a:solidFill>
-                <a:latin typeface="Noto Sans SC"/>
-                <a:ea typeface="Noto Sans SC"/>
-                <a:cs typeface="Noto Sans SC"/>
-                <a:sym typeface="Noto Sans SC"/>
-              </a:rPr>
-              <a:t>Automatic fault switching</a:t>
-            </a:r>
-            <a:br>
-              <a:rPr lang="en-US" sz="1600" b="0" i="0" u="none" strike="noStrike" dirty="0">
-                <a:solidFill>
-                  <a:srgbClr val="1F2329"/>
-                </a:solidFill>
-                <a:latin typeface="Noto Sans SC"/>
-                <a:ea typeface="Noto Sans SC"/>
-                <a:cs typeface="Noto Sans SC"/>
-                <a:sym typeface="Noto Sans SC"/>
-              </a:rPr>
-            </a:br>
-            <a:r>
-              <a:rPr lang="en-US" sz="1300" b="0" i="0" u="none" strike="noStrike" dirty="0">
-                <a:solidFill>
-                  <a:srgbClr val="6B7280"/>
-                </a:solidFill>
-                <a:latin typeface="Noto Sans SC"/>
-                <a:ea typeface="Noto Sans SC"/>
-                <a:cs typeface="Noto Sans SC"/>
-                <a:sym typeface="Noto Sans SC"/>
-              </a:rPr>
-              <a:t>If one backend fails, it tries the next backend ID automatically.</a:t>
-            </a:r>
-            <a:endParaRPr lang="en-US" sz="1100" dirty="0"/>
-          </a:p>
-        </p:txBody>
-      </p:sp>
-      <p:sp>
-        <p:nvSpPr>
-          <p:cNvPr id="13" name="AutoShape 13"/>
-          <p:cNvSpPr/>
-          <p:nvPr/>
-        </p:nvSpPr>
-        <p:spPr>
-          <a:xfrm>
-            <a:off x="6477000" y="3302000"/>
-            <a:ext cx="609600" cy="609600"/>
-          </a:xfrm>
-          <a:prstGeom prst="ellipse">
-            <a:avLst/>
-          </a:prstGeom>
-          <a:solidFill>
-            <a:srgbClr val="10B981">
-              <a:alpha val="10000"/>
-            </a:srgbClr>
-          </a:solidFill>
-          <a:ln w="25400" cap="flat" cmpd="sng">
-            <a:noFill/>
-            <a:prstDash val="solid"/>
-            <a:round/>
-          </a:ln>
-        </p:spPr>
-        <p:txBody>
-          <a:bodyPr vert="horz" wrap="square" lIns="63500" tIns="63500" rIns="63500" bIns="63500" rtlCol="0" anchor="ctr"/>
-          <a:lstStyle/>
-          <a:p>
-            <a:pPr algn="ctr">
-              <a:defRPr/>
-            </a:pPr>
-            <a:endParaRPr/>
-          </a:p>
-        </p:txBody>
-      </p:sp>
-      <p:pic>
-        <p:nvPicPr>
-          <p:cNvPr id="14" name="Picture 14"/>
-          <p:cNvPicPr>
-            <a:picLocks noChangeAspect="1"/>
-          </p:cNvPicPr>
-          <p:nvPr/>
-        </p:nvPicPr>
-        <p:blipFill>
-          <a:blip>
-            <a:extLst>
-              <a:ext uri="{28A0092B-C50C-407E-A947-70E740481C1C}">
-                <a14:useLocalDpi xmlns:a14="http://schemas.microsoft.com/office/drawing/2010/main" val="0"/>
-              </a:ext>
-              <a:ext uri="{96DAC541-7B7A-43D3-8B79-37D633B846F1}">
-                <asvg:svgBlip xmlns:asvg="http://schemas.microsoft.com/office/drawing/2016/SVG/main" r:embed="rId6"/>
-              </a:ext>
-            </a:extLst>
-          </a:blip>
-          <a:stretch>
-            <a:fillRect/>
-          </a:stretch>
-        </p:blipFill>
-        <p:spPr>
-          <a:xfrm>
-            <a:off x="6629400" y="3454400"/>
-            <a:ext cx="304800" cy="304800"/>
-          </a:xfrm>
-          <a:prstGeom prst="rect">
-            <a:avLst/>
-          </a:prstGeom>
-        </p:spPr>
-      </p:pic>
-      <p:sp>
-        <p:nvSpPr>
-          <p:cNvPr id="15" name="AutoShape 15"/>
-          <p:cNvSpPr/>
-          <p:nvPr/>
-        </p:nvSpPr>
-        <p:spPr>
-          <a:xfrm>
-            <a:off x="7239000" y="3302000"/>
-            <a:ext cx="4191000" cy="609600"/>
-          </a:xfrm>
-          <a:prstGeom prst="rect">
-            <a:avLst/>
-          </a:prstGeom>
-          <a:noFill/>
-          <a:ln w="12700" cap="flat" cmpd="sng">
-            <a:noFill/>
-            <a:prstDash val="solid"/>
-            <a:round/>
-          </a:ln>
-        </p:spPr>
-        <p:txBody>
-          <a:bodyPr vert="horz" wrap="square" lIns="0" tIns="0" rIns="0" bIns="0" rtlCol="0" anchor="ctr" anchorCtr="0"/>
-          <a:lstStyle/>
-          <a:p>
-            <a:pPr indent="0" algn="l">
-              <a:lnSpc>
-                <a:spcPct val="125000"/>
-              </a:lnSpc>
-              <a:defRPr/>
-            </a:pPr>
-            <a:r>
-              <a:rPr lang="en-US" sz="1500" b="1" i="0" u="none" strike="noStrike" dirty="0">
-                <a:solidFill>
-                  <a:srgbClr val="1F2937"/>
-                </a:solidFill>
-                <a:latin typeface="Noto Sans SC"/>
-                <a:ea typeface="Noto Sans SC"/>
-                <a:cs typeface="Noto Sans SC"/>
-                <a:sym typeface="Noto Sans SC"/>
-              </a:rPr>
-              <a:t>High availability of services</a:t>
-            </a:r>
-            <a:br>
-              <a:rPr lang="en-US" sz="1600" b="0" i="0" u="none" strike="noStrike" dirty="0">
-                <a:solidFill>
-                  <a:srgbClr val="1F2329"/>
-                </a:solidFill>
-                <a:latin typeface="Noto Sans SC"/>
-                <a:ea typeface="Noto Sans SC"/>
-                <a:cs typeface="Noto Sans SC"/>
-                <a:sym typeface="Noto Sans SC"/>
-              </a:rPr>
-            </a:br>
-            <a:r>
-              <a:rPr lang="en-US" sz="1300" b="0" i="0" u="none" strike="noStrike" dirty="0">
-                <a:solidFill>
-                  <a:srgbClr val="6B7280"/>
-                </a:solidFill>
-                <a:latin typeface="Noto Sans SC"/>
-                <a:ea typeface="Noto Sans SC"/>
-                <a:cs typeface="Noto Sans SC"/>
-                <a:sym typeface="Noto Sans SC"/>
-              </a:rPr>
-              <a:t>The service can still answer when one backend is unavailable.</a:t>
-            </a:r>
-            <a:endParaRPr lang="en-US" sz="1100" dirty="0"/>
-          </a:p>
-        </p:txBody>
-      </p:sp>
-      <p:sp>
-        <p:nvSpPr>
-          <p:cNvPr id="16" name="AutoShape 16"/>
-          <p:cNvSpPr/>
-          <p:nvPr/>
-        </p:nvSpPr>
-        <p:spPr>
-          <a:xfrm>
-            <a:off x="6477000" y="4127500"/>
-            <a:ext cx="609600" cy="609600"/>
-          </a:xfrm>
-          <a:prstGeom prst="ellipse">
-            <a:avLst/>
-          </a:prstGeom>
-          <a:solidFill>
-            <a:srgbClr val="10B981">
-              <a:alpha val="10000"/>
-            </a:srgbClr>
-          </a:solidFill>
-          <a:ln w="25400" cap="flat" cmpd="sng">
-            <a:noFill/>
-            <a:prstDash val="solid"/>
-            <a:round/>
-          </a:ln>
-        </p:spPr>
-        <p:txBody>
-          <a:bodyPr vert="horz" wrap="square" lIns="63500" tIns="63500" rIns="63500" bIns="63500" rtlCol="0" anchor="ctr"/>
-          <a:lstStyle/>
-          <a:p>
-            <a:pPr algn="ctr">
-              <a:defRPr/>
-            </a:pPr>
-            <a:endParaRPr/>
-          </a:p>
-        </p:txBody>
-      </p:sp>
-      <p:pic>
-        <p:nvPicPr>
-          <p:cNvPr id="17" name="Picture 17"/>
-          <p:cNvPicPr>
-            <a:picLocks noChangeAspect="1"/>
-          </p:cNvPicPr>
-          <p:nvPr/>
-        </p:nvPicPr>
-        <p:blipFill>
-          <a:blip>
-            <a:extLst>
-              <a:ext uri="{28A0092B-C50C-407E-A947-70E740481C1C}">
-                <a14:useLocalDpi xmlns:a14="http://schemas.microsoft.com/office/drawing/2010/main" val="0"/>
-              </a:ext>
-              <a:ext uri="{96DAC541-7B7A-43D3-8B79-37D633B846F1}">
-                <asvg:svgBlip xmlns:asvg="http://schemas.microsoft.com/office/drawing/2016/SVG/main" r:embed="rId7"/>
-              </a:ext>
-            </a:extLst>
-          </a:blip>
-          <a:stretch>
-            <a:fillRect/>
-          </a:stretch>
-        </p:blipFill>
-        <p:spPr>
-          <a:xfrm>
-            <a:off x="6629400" y="4279900"/>
-            <a:ext cx="304800" cy="304800"/>
-          </a:xfrm>
-          <a:prstGeom prst="rect">
-            <a:avLst/>
-          </a:prstGeom>
-        </p:spPr>
-      </p:pic>
-      <p:sp>
-        <p:nvSpPr>
-          <p:cNvPr id="18" name="AutoShape 18"/>
-          <p:cNvSpPr/>
-          <p:nvPr/>
-        </p:nvSpPr>
-        <p:spPr>
-          <a:xfrm>
-            <a:off x="7239000" y="4127500"/>
-            <a:ext cx="4191000" cy="609600"/>
-          </a:xfrm>
-          <a:prstGeom prst="rect">
-            <a:avLst/>
-          </a:prstGeom>
-          <a:noFill/>
-          <a:ln w="12700" cap="flat" cmpd="sng">
-            <a:noFill/>
-            <a:prstDash val="solid"/>
-            <a:round/>
-          </a:ln>
-        </p:spPr>
-        <p:txBody>
-          <a:bodyPr vert="horz" wrap="square" lIns="0" tIns="0" rIns="0" bIns="0" rtlCol="0" anchor="ctr" anchorCtr="0"/>
-          <a:lstStyle/>
-          <a:p>
-            <a:pPr indent="0" algn="l">
-              <a:lnSpc>
-                <a:spcPct val="125000"/>
-              </a:lnSpc>
-              <a:defRPr/>
-            </a:pPr>
-            <a:r>
-              <a:rPr lang="en-US" sz="1500" b="1" i="0" u="none" strike="noStrike" dirty="0">
-                <a:solidFill>
-                  <a:srgbClr val="1F2937"/>
-                </a:solidFill>
-                <a:latin typeface="Noto Sans SC"/>
-                <a:ea typeface="Noto Sans SC"/>
-                <a:cs typeface="Noto Sans SC"/>
-                <a:sym typeface="Noto Sans SC"/>
-              </a:rPr>
-              <a:t>Elastic scalability</a:t>
-            </a:r>
-            <a:br>
-              <a:rPr lang="en-US" sz="1600" b="0" i="0" u="none" strike="noStrike" dirty="0">
-                <a:solidFill>
-                  <a:srgbClr val="1F2329"/>
-                </a:solidFill>
-                <a:latin typeface="Noto Sans SC"/>
-                <a:ea typeface="Noto Sans SC"/>
-                <a:cs typeface="Noto Sans SC"/>
-                <a:sym typeface="Noto Sans SC"/>
-              </a:rPr>
-            </a:br>
-            <a:r>
-              <a:rPr lang="en-US" sz="1300" b="0" i="0" u="none" strike="noStrike" dirty="0">
-                <a:solidFill>
-                  <a:srgbClr val="6B7280"/>
-                </a:solidFill>
-                <a:latin typeface="Noto Sans SC"/>
-                <a:ea typeface="Noto Sans SC"/>
-                <a:cs typeface="Noto Sans SC"/>
-                <a:sym typeface="Noto Sans SC"/>
-              </a:rPr>
-              <a:t>New backend containers can be added without changing the bot logic.</a:t>
-            </a:r>
-            <a:endParaRPr lang="en-US" sz="1100" dirty="0"/>
-          </a:p>
-        </p:txBody>
-      </p:sp>
-      <p:sp>
-        <p:nvSpPr>
-          <p:cNvPr id="19" name="AutoShape 19"/>
-          <p:cNvSpPr/>
-          <p:nvPr/>
-        </p:nvSpPr>
-        <p:spPr>
-          <a:xfrm>
-            <a:off x="6477000" y="4953000"/>
-            <a:ext cx="609600" cy="609600"/>
-          </a:xfrm>
-          <a:prstGeom prst="ellipse">
-            <a:avLst/>
-          </a:prstGeom>
-          <a:solidFill>
-            <a:srgbClr val="10B981">
-              <a:alpha val="10000"/>
-            </a:srgbClr>
-          </a:solidFill>
-          <a:ln w="25400" cap="flat" cmpd="sng">
-            <a:noFill/>
-            <a:prstDash val="solid"/>
-            <a:round/>
-          </a:ln>
-        </p:spPr>
-        <p:txBody>
-          <a:bodyPr vert="horz" wrap="square" lIns="63500" tIns="63500" rIns="63500" bIns="63500" rtlCol="0" anchor="ctr"/>
-          <a:lstStyle/>
-          <a:p>
-            <a:pPr algn="ctr">
-              <a:defRPr/>
-            </a:pPr>
-            <a:endParaRPr/>
-          </a:p>
-        </p:txBody>
-      </p:sp>
-      <p:pic>
-        <p:nvPicPr>
-          <p:cNvPr id="20" name="Picture 20"/>
-          <p:cNvPicPr>
-            <a:picLocks noChangeAspect="1"/>
-          </p:cNvPicPr>
-          <p:nvPr/>
-        </p:nvPicPr>
-        <p:blipFill>
-          <a:blip>
-            <a:extLst>
-              <a:ext uri="{28A0092B-C50C-407E-A947-70E740481C1C}">
-                <a14:useLocalDpi xmlns:a14="http://schemas.microsoft.com/office/drawing/2010/main" val="0"/>
-              </a:ext>
-              <a:ext uri="{96DAC541-7B7A-43D3-8B79-37D633B846F1}">
-                <asvg:svgBlip xmlns:asvg="http://schemas.microsoft.com/office/drawing/2016/SVG/main" r:embed="rId8"/>
-              </a:ext>
-            </a:extLst>
-          </a:blip>
-          <a:stretch>
-            <a:fillRect/>
-          </a:stretch>
-        </p:blipFill>
-        <p:spPr>
-          <a:xfrm>
-            <a:off x="6629400" y="5105400"/>
-            <a:ext cx="304800" cy="304800"/>
-          </a:xfrm>
-          <a:prstGeom prst="rect">
-            <a:avLst/>
-          </a:prstGeom>
-        </p:spPr>
-      </p:pic>
-      <p:sp>
-        <p:nvSpPr>
-          <p:cNvPr id="21" name="AutoShape 21"/>
-          <p:cNvSpPr/>
-          <p:nvPr/>
-        </p:nvSpPr>
-        <p:spPr>
-          <a:xfrm>
-            <a:off x="7239000" y="4953000"/>
-            <a:ext cx="4191000" cy="609600"/>
-          </a:xfrm>
-          <a:prstGeom prst="rect">
-            <a:avLst/>
-          </a:prstGeom>
-          <a:noFill/>
-          <a:ln w="12700" cap="flat" cmpd="sng">
-            <a:noFill/>
-            <a:prstDash val="solid"/>
-            <a:round/>
-          </a:ln>
-        </p:spPr>
-        <p:txBody>
-          <a:bodyPr vert="horz" wrap="square" lIns="0" tIns="0" rIns="0" bIns="0" rtlCol="0" anchor="ctr" anchorCtr="0"/>
-          <a:lstStyle/>
-          <a:p>
-            <a:pPr indent="0" algn="l">
-              <a:lnSpc>
-                <a:spcPct val="125000"/>
-              </a:lnSpc>
-              <a:defRPr/>
-            </a:pPr>
-            <a:r>
-              <a:rPr lang="en-US" sz="1500" b="1" i="0" u="none" strike="noStrike" dirty="0">
-                <a:solidFill>
-                  <a:srgbClr val="1F2937"/>
-                </a:solidFill>
-                <a:latin typeface="Noto Sans SC"/>
-                <a:ea typeface="Noto Sans SC"/>
-                <a:cs typeface="Noto Sans SC"/>
-                <a:sym typeface="Noto Sans SC"/>
-              </a:rPr>
-              <a:t>Cloud Reliability Architecture</a:t>
-            </a:r>
-            <a:br>
-              <a:rPr lang="en-US" sz="1600" b="0" i="0" u="none" strike="noStrike" dirty="0">
-                <a:solidFill>
-                  <a:srgbClr val="1F2329"/>
-                </a:solidFill>
-                <a:latin typeface="Noto Sans SC"/>
-                <a:ea typeface="Noto Sans SC"/>
-                <a:cs typeface="Noto Sans SC"/>
-                <a:sym typeface="Noto Sans SC"/>
-              </a:rPr>
-            </a:br>
-            <a:r>
-              <a:rPr lang="en-US" sz="1300" b="0" i="0" u="none" strike="noStrike" dirty="0">
-                <a:solidFill>
-                  <a:srgbClr val="6B7280"/>
-                </a:solidFill>
-                <a:latin typeface="Noto Sans SC"/>
-                <a:ea typeface="Noto Sans SC"/>
-                <a:cs typeface="Noto Sans SC"/>
-                <a:sym typeface="Noto Sans SC"/>
-              </a:rPr>
-              <a:t>This gives a simple but effective cloud reliability design.</a:t>
-            </a:r>
-            <a:endParaRPr lang="en-US" sz="1100" dirty="0"/>
-          </a:p>
-        </p:txBody>
-      </p:sp>
+            <a:ln w="12700" cap="flat" cmpd="sng">
+              <a:noFill/>
+              <a:prstDash val="solid"/>
+              <a:round/>
+            </a:ln>
+          </p:spPr>
+          <p:txBody>
+            <a:bodyPr vert="horz" wrap="square" lIns="0" tIns="0" rIns="0" bIns="0" rtlCol="0" anchor="ctr" anchorCtr="0"/>
+            <a:lstStyle/>
+            <a:p>
+              <a:pPr indent="0" algn="l">
+                <a:lnSpc>
+                  <a:spcPct val="125000"/>
+                </a:lnSpc>
+                <a:defRPr/>
+              </a:pPr>
+              <a:r>
+                <a:rPr lang="en-US" sz="1500" b="1" dirty="0">
+                  <a:solidFill>
+                    <a:srgbClr val="1F2937"/>
+                  </a:solidFill>
+                  <a:latin typeface="Noto Sans SC"/>
+                  <a:ea typeface="Noto Sans SC"/>
+                  <a:cs typeface="Noto Sans SC"/>
+                  <a:sym typeface="Noto Sans SC"/>
+                </a:rPr>
+                <a:t>S</a:t>
+              </a:r>
+              <a:r>
+                <a:rPr lang="en-US" sz="1500" b="1" i="0" u="none" strike="noStrike" dirty="0">
+                  <a:solidFill>
+                    <a:srgbClr val="1F2937"/>
+                  </a:solidFill>
+                  <a:latin typeface="Noto Sans SC"/>
+                  <a:ea typeface="Noto Sans SC"/>
+                  <a:cs typeface="Noto Sans SC"/>
+                  <a:sym typeface="Noto Sans SC"/>
+                </a:rPr>
+                <a:t>calability</a:t>
+              </a:r>
+              <a:br>
+                <a:rPr lang="en-US" sz="1600" b="0" i="0" u="none" strike="noStrike" dirty="0">
+                  <a:solidFill>
+                    <a:srgbClr val="1F2329"/>
+                  </a:solidFill>
+                  <a:latin typeface="Noto Sans SC"/>
+                  <a:ea typeface="Noto Sans SC"/>
+                  <a:cs typeface="Noto Sans SC"/>
+                  <a:sym typeface="Noto Sans SC"/>
+                </a:rPr>
+              </a:br>
+              <a:r>
+                <a:rPr lang="en-US" sz="1300" dirty="0">
+                  <a:solidFill>
+                    <a:srgbClr val="6B7280"/>
+                  </a:solidFill>
+                  <a:latin typeface="Noto Sans SC"/>
+                  <a:ea typeface="Noto Sans SC"/>
+                  <a:cs typeface="Noto Sans SC"/>
+                  <a:sym typeface="Noto Sans SC"/>
+                </a:rPr>
+                <a:t>If we want to create new backend server, we just simply use an unused backend id and then create, the frontend server should be able to use the new backend without restart.</a:t>
+              </a:r>
+            </a:p>
+            <a:p>
+              <a:pPr indent="0" algn="l">
+                <a:lnSpc>
+                  <a:spcPct val="125000"/>
+                </a:lnSpc>
+                <a:defRPr/>
+              </a:pPr>
+              <a:r>
+                <a:rPr lang="en-US" sz="1300" dirty="0">
+                  <a:solidFill>
+                    <a:srgbClr val="6B7280"/>
+                  </a:solidFill>
+                  <a:latin typeface="Noto Sans SC"/>
+                  <a:ea typeface="Noto Sans SC"/>
+                  <a:cs typeface="Noto Sans SC"/>
+                  <a:sym typeface="Noto Sans SC"/>
+                </a:rPr>
+                <a:t>if we want to fix the problem backend server, just replace the problem backend server by using the same ID.</a:t>
+              </a:r>
+              <a:endParaRPr lang="en-US" sz="1100" dirty="0"/>
+            </a:p>
+          </p:txBody>
+        </p:sp>
+      </p:grpSp>
       <p:sp>
         <p:nvSpPr>
           <p:cNvPr id="22" name="AutoShape 22"/>
@@ -21785,16 +25517,16 @@
           <p:nvPr/>
         </p:nvPicPr>
         <p:blipFill>
-          <a:blip r:embed="rId9"/>
-          <a:srcRect l="212" r="1"/>
+          <a:blip r:embed="rId6"/>
+          <a:srcRect l="19182" r="1"/>
           <a:stretch>
             <a:fillRect/>
           </a:stretch>
         </p:blipFill>
         <p:spPr>
           <a:xfrm>
-            <a:off x="76200" y="3055178"/>
-            <a:ext cx="6324600" cy="991356"/>
+            <a:off x="1315946" y="1373733"/>
+            <a:ext cx="4060744" cy="785911"/>
           </a:xfrm>
           <a:prstGeom prst="rect">
             <a:avLst/>
@@ -21806,6 +25538,123 @@
               </a:prstClr>
             </a:outerShdw>
           </a:effectLst>
+        </p:spPr>
+      </p:pic>
+      <p:pic>
+        <p:nvPicPr>
+          <p:cNvPr id="5" name="图片 4">
+            <a:extLst>
+              <a:ext uri="{FF2B5EF4-FFF2-40B4-BE49-F238E27FC236}">
+                <a16:creationId xmlns:a16="http://schemas.microsoft.com/office/drawing/2014/main" id="{D91B3EB8-84E0-38C6-6F45-A8BE5D182C9A}"/>
+              </a:ext>
+            </a:extLst>
+          </p:cNvPr>
+          <p:cNvPicPr>
+            <a:picLocks noChangeAspect="1"/>
+          </p:cNvPicPr>
+          <p:nvPr/>
+        </p:nvPicPr>
+        <p:blipFill>
+          <a:blip r:embed="rId7"/>
+          <a:stretch>
+            <a:fillRect/>
+          </a:stretch>
+        </p:blipFill>
+        <p:spPr>
+          <a:xfrm>
+            <a:off x="1315946" y="2290917"/>
+            <a:ext cx="4060745" cy="1758703"/>
+          </a:xfrm>
+          <a:prstGeom prst="rect">
+            <a:avLst/>
+          </a:prstGeom>
+        </p:spPr>
+      </p:pic>
+      <p:sp>
+        <p:nvSpPr>
+          <p:cNvPr id="23" name="AutoShape 9">
+            <a:extLst>
+              <a:ext uri="{FF2B5EF4-FFF2-40B4-BE49-F238E27FC236}">
+                <a16:creationId xmlns:a16="http://schemas.microsoft.com/office/drawing/2014/main" id="{4EDB2C14-3E9D-BF68-9ADE-F894383A5A38}"/>
+              </a:ext>
+            </a:extLst>
+          </p:cNvPr>
+          <p:cNvSpPr/>
+          <p:nvPr/>
+        </p:nvSpPr>
+        <p:spPr>
+          <a:xfrm>
+            <a:off x="835427" y="3737962"/>
+            <a:ext cx="5168639" cy="1002401"/>
+          </a:xfrm>
+          <a:prstGeom prst="rect">
+            <a:avLst/>
+          </a:prstGeom>
+          <a:noFill/>
+          <a:ln w="12700" cap="flat" cmpd="sng">
+            <a:noFill/>
+            <a:prstDash val="solid"/>
+            <a:round/>
+          </a:ln>
+        </p:spPr>
+        <p:txBody>
+          <a:bodyPr vert="horz" wrap="square" lIns="0" tIns="0" rIns="0" bIns="0" rtlCol="0" anchor="ctr" anchorCtr="0"/>
+          <a:lstStyle/>
+          <a:p>
+            <a:pPr indent="0" algn="l">
+              <a:lnSpc>
+                <a:spcPct val="125000"/>
+              </a:lnSpc>
+              <a:defRPr/>
+            </a:pPr>
+            <a:r>
+              <a:rPr lang="en-US" sz="1500" b="1" i="0" u="none" strike="noStrike" dirty="0">
+                <a:solidFill>
+                  <a:srgbClr val="FF0000"/>
+                </a:solidFill>
+                <a:latin typeface="Noto Sans SC"/>
+                <a:ea typeface="Noto Sans SC"/>
+                <a:cs typeface="Noto Sans SC"/>
+                <a:sym typeface="Noto Sans SC"/>
+              </a:rPr>
+              <a:t>Backend 4: a problem backend was created for testing</a:t>
+            </a:r>
+            <a:endParaRPr lang="en-US" sz="1100" dirty="0">
+              <a:solidFill>
+                <a:srgbClr val="FF0000"/>
+              </a:solidFill>
+            </a:endParaRPr>
+          </a:p>
+        </p:txBody>
+      </p:sp>
+      <p:pic>
+        <p:nvPicPr>
+          <p:cNvPr id="31" name="图片 30">
+            <a:extLst>
+              <a:ext uri="{FF2B5EF4-FFF2-40B4-BE49-F238E27FC236}">
+                <a16:creationId xmlns:a16="http://schemas.microsoft.com/office/drawing/2014/main" id="{63611241-4FF7-9D90-7300-11D40A97C825}"/>
+              </a:ext>
+            </a:extLst>
+          </p:cNvPr>
+          <p:cNvPicPr>
+            <a:picLocks noChangeAspect="1"/>
+          </p:cNvPicPr>
+          <p:nvPr/>
+        </p:nvPicPr>
+        <p:blipFill>
+          <a:blip r:embed="rId8"/>
+          <a:stretch>
+            <a:fillRect/>
+          </a:stretch>
+        </p:blipFill>
+        <p:spPr>
+          <a:xfrm>
+            <a:off x="8050844" y="71360"/>
+            <a:ext cx="2567311" cy="4439114"/>
+          </a:xfrm>
+          <a:prstGeom prst="rect">
+            <a:avLst/>
+          </a:prstGeom>
         </p:spPr>
       </p:pic>
     </p:spTree>
